--- a/docs/Inventory_Rescue_AI_Builder_Cup.pptx
+++ b/docs/Inventory_Rescue_AI_Builder_Cup.pptx
@@ -19,6 +19,7 @@
     <p:sldId id="265" r:id="rId15"/>
     <p:sldId id="266" r:id="rId16"/>
     <p:sldId id="267" r:id="rId17"/>
+    <p:sldId id="270" r:id="rId20"/>
     <p:sldId id="268" r:id="rId18"/>
     <p:sldId id="269" r:id="rId19"/>
     <p:sldId id="271" r:id="rId21"/>
@@ -293,7 +294,7 @@
                 <a:cs typeface="Google Sans Flex"/>
                 <a:sym typeface="Google Sans Flex"/>
               </a:rPr>
-              <a:t>Simulated 30-day total loss (₹ thousand, lower is better)</a:t>
+              <a:t>Simulated 30-day loss at a ₹10 lakh budget (₹ lakh, lower is better)</a:t>
             </a:r>
           </a:p>
         </c:rich>
@@ -315,65 +316,41 @@
               <c:strCache>
                 <c:ptCount val="1"/>
                 <c:pt idx="0">
-                  <c:v>Rule baseline</c:v>
+                  <c:v>Static reorder rule</c:v>
                 </c:pt>
               </c:strCache>
             </c:strRef>
           </c:tx>
           <c:spPr>
             <a:solidFill>
-              <a:srgbClr val="9AA0A6"/>
+              <a:srgbClr val="BDC1C6"/>
             </a:solidFill>
           </c:spPr>
           <c:cat>
             <c:strRef>
-              <c:f>Sheet1!$A$2:$A$7</c:f>
+              <c:f>Sheet1!$A$2:$A$3</c:f>
               <c:strCache>
-                <c:ptCount val="6"/>
+                <c:ptCount val="2"/>
                 <c:pt idx="0">
-                  <c:v>Base (₹50k)</c:v>
+                  <c:v>Actual simulated month</c:v>
                 </c:pt>
                 <c:pt idx="1">
-                  <c:v>Demand −20%</c:v>
-                </c:pt>
-                <c:pt idx="2">
-                  <c:v>+5-day delay</c:v>
-                </c:pt>
-                <c:pt idx="3">
-                  <c:v>SUP-04 +7 d</c:v>
-                </c:pt>
-                <c:pt idx="4">
-                  <c:v>SKU-019 ×2</c:v>
-                </c:pt>
-                <c:pt idx="5">
-                  <c:v>Budget ₹30k</c:v>
+                  <c:v>Mean of 120 simulated futures</c:v>
                 </c:pt>
               </c:strCache>
             </c:strRef>
           </c:cat>
           <c:val>
             <c:numRef>
-              <c:f>Sheet1!$B$2:$B$7</c:f>
+              <c:f>Sheet1!$B$2:$B$3</c:f>
               <c:numCache>
                 <c:formatCode>General</c:formatCode>
-                <c:ptCount val="6"/>
+                <c:ptCount val="2"/>
                 <c:pt idx="0">
-                  <c:v>140.3</c:v>
+                  <c:v>30.59</c:v>
                 </c:pt>
                 <c:pt idx="1">
-                  <c:v>95.9</c:v>
-                </c:pt>
-                <c:pt idx="2">
-                  <c:v>152.4</c:v>
-                </c:pt>
-                <c:pt idx="3">
-                  <c:v>150.7</c:v>
-                </c:pt>
-                <c:pt idx="4">
-                  <c:v>224.4</c:v>
-                </c:pt>
-                <c:pt idx="5">
-                  <c:v>153.1</c:v>
+                  <c:v>31.91</c:v>
                 </c:pt>
               </c:numCache>
             </c:numRef>
@@ -388,7 +365,56 @@
               <c:strCache>
                 <c:ptCount val="1"/>
                 <c:pt idx="0">
-                  <c:v>Recommended plan</c:v>
+                  <c:v>Tuned reorder rule</c:v>
+                </c:pt>
+              </c:strCache>
+            </c:strRef>
+          </c:tx>
+          <c:spPr>
+            <a:solidFill>
+              <a:srgbClr val="9AA0A6"/>
+            </a:solidFill>
+          </c:spPr>
+          <c:cat>
+            <c:strRef>
+              <c:f>Sheet1!$A$2:$A$3</c:f>
+              <c:strCache>
+                <c:ptCount val="2"/>
+                <c:pt idx="0">
+                  <c:v>Actual simulated month</c:v>
+                </c:pt>
+                <c:pt idx="1">
+                  <c:v>Mean of 120 simulated futures</c:v>
+                </c:pt>
+              </c:strCache>
+            </c:strRef>
+          </c:cat>
+          <c:val>
+            <c:numRef>
+              <c:f>Sheet1!$C$2:$C$3</c:f>
+              <c:numCache>
+                <c:formatCode>General</c:formatCode>
+                <c:ptCount val="2"/>
+                <c:pt idx="0">
+                  <c:v>28.15</c:v>
+                </c:pt>
+                <c:pt idx="1">
+                  <c:v>29.98</c:v>
+                </c:pt>
+              </c:numCache>
+            </c:numRef>
+          </c:val>
+        </c:ser>
+        <c:ser>
+          <c:idx val="2"/>
+          <c:order val="2"/>
+          <c:tx>
+            <c:strRef>
+              <c:f>Sheet1!$D$1</c:f>
+              <c:strCache>
+                <c:ptCount val="1"/>
+                <c:pt idx="0">
+                  <c:v>Inventory Rescue plan</c:v>
                 </c:pt>
               </c:strCache>
             </c:strRef>
@@ -400,66 +426,42 @@
           </c:spPr>
           <c:cat>
             <c:strRef>
-              <c:f>Sheet1!$A$2:$A$7</c:f>
+              <c:f>Sheet1!$A$2:$A$3</c:f>
               <c:strCache>
-                <c:ptCount val="6"/>
+                <c:ptCount val="2"/>
                 <c:pt idx="0">
-                  <c:v>Base (₹50k)</c:v>
+                  <c:v>Actual simulated month</c:v>
                 </c:pt>
                 <c:pt idx="1">
-                  <c:v>Demand −20%</c:v>
-                </c:pt>
-                <c:pt idx="2">
-                  <c:v>+5-day delay</c:v>
-                </c:pt>
-                <c:pt idx="3">
-                  <c:v>SUP-04 +7 d</c:v>
-                </c:pt>
-                <c:pt idx="4">
-                  <c:v>SKU-019 ×2</c:v>
-                </c:pt>
-                <c:pt idx="5">
-                  <c:v>Budget ₹30k</c:v>
+                  <c:v>Mean of 120 simulated futures</c:v>
                 </c:pt>
               </c:strCache>
             </c:strRef>
           </c:cat>
           <c:val>
             <c:numRef>
-              <c:f>Sheet1!$C$2:$C$7</c:f>
+              <c:f>Sheet1!$D$2:$D$3</c:f>
               <c:numCache>
                 <c:formatCode>General</c:formatCode>
-                <c:ptCount val="6"/>
+                <c:ptCount val="2"/>
                 <c:pt idx="0">
-                  <c:v>108.0</c:v>
+                  <c:v>26.44</c:v>
                 </c:pt>
                 <c:pt idx="1">
-                  <c:v>65.0</c:v>
-                </c:pt>
-                <c:pt idx="2">
-                  <c:v>131.5</c:v>
-                </c:pt>
-                <c:pt idx="3">
-                  <c:v>118.3</c:v>
-                </c:pt>
-                <c:pt idx="4">
-                  <c:v>192.1</c:v>
-                </c:pt>
-                <c:pt idx="5">
-                  <c:v>134.8</c:v>
+                  <c:v>28.03</c:v>
                 </c:pt>
               </c:numCache>
             </c:numRef>
           </c:val>
         </c:ser>
         <c:dLbls>
-          <c:numFmt formatCode="0" sourceLinked="0"/>
+          <c:numFmt formatCode="0.00" sourceLinked="0"/>
           <c:txPr>
             <a:bodyPr/>
             <a:lstStyle/>
             <a:p>
               <a:pPr>
-                <a:defRPr sz="700">
+                <a:defRPr sz="800">
                   <a:latin typeface="Google Sans Flex"/>
                 </a:defRPr>
               </a:pPr>
@@ -474,7 +476,7 @@
           <c:showBubbleSize val="0"/>
           <c:showLeaderLines val="1"/>
         </c:dLbls>
-        <c:gapWidth val="60"/>
+        <c:gapWidth val="80"/>
         <c:overlap val="-5"/>
         <c:axId val="-2068027336"/>
         <c:axId val="-2113994440"/>
@@ -494,7 +496,7 @@
           <a:lstStyle/>
           <a:p>
             <a:pPr>
-              <a:defRPr sz="750">
+              <a:defRPr sz="850">
                 <a:latin typeface="Google Sans Flex"/>
               </a:defRPr>
             </a:pPr>
@@ -510,7 +512,8 @@
       <c:valAx>
         <c:axId val="-2113994440"/>
         <c:scaling>
-          <c:max val="250.0"/>
+          <c:max val="36.0"/>
+          <c:min val="0.0"/>
         </c:scaling>
         <c:delete val="0"/>
         <c:axPos val="l"/>
@@ -1548,6 +1551,105 @@
       <p:sp>
         <p:nvSpPr>
           <p:cNvPr id="154" name="Google Shape;154;g3fb085bff3c_0_61:notes"/>
+          <p:cNvSpPr txBox="1"/>
+          <p:nvPr>
+            <p:ph idx="1" type="body"/>
+          </p:nvPr>
+        </p:nvSpPr>
+        <p:spPr>
+          <a:xfrm>
+            <a:off x="685800" y="4343400"/>
+            <a:ext cx="5486400" cy="4114800"/>
+          </a:xfrm>
+          <a:prstGeom prst="rect">
+            <a:avLst/>
+          </a:prstGeom>
+        </p:spPr>
+        <p:txBody>
+          <a:bodyPr anchorCtr="0" anchor="t" bIns="91425" lIns="91425" spcFirstLastPara="1" rIns="91425" wrap="square" tIns="91425">
+            <a:noAutofit/>
+          </a:bodyPr>
+          <a:lstStyle/>
+          <a:p>
+            <a:pPr indent="0" lvl="0" marL="0" rtl="0" algn="l">
+              <a:spcBef>
+                <a:spcPts val="0"/>
+              </a:spcBef>
+              <a:spcAft>
+                <a:spcPts val="0"/>
+              </a:spcAft>
+              <a:buNone/>
+            </a:pPr>
+            <a:r>
+              <a:t/>
+            </a:r>
+            <a:endParaRPr/>
+          </a:p>
+        </p:txBody>
+      </p:sp>
+    </p:spTree>
+  </p:cSld>
+  <p:clrMapOvr>
+    <a:masterClrMapping/>
+  </p:clrMapOvr>
+</p:notes>
+</file>
+
+<file path=ppt/notesSlides/notesSlide15.xml><?xml version="1.0" encoding="utf-8"?>
+<p:notes xmlns:a="http://schemas.openxmlformats.org/drawingml/2006/main" xmlns:r="http://schemas.openxmlformats.org/officeDocument/2006/relationships" xmlns:mc="http://schemas.openxmlformats.org/markup-compatibility/2006" xmlns:mv="urn:schemas-microsoft-com:mac:vml" xmlns:p="http://schemas.openxmlformats.org/presentationml/2006/main" xmlns:c="http://schemas.openxmlformats.org/drawingml/2006/chart" xmlns:dgm="http://schemas.openxmlformats.org/drawingml/2006/diagram" xmlns:o="urn:schemas-microsoft-com:office:office" xmlns:v="urn:schemas-microsoft-com:vml" xmlns:pvml="urn:schemas-microsoft-com:office:powerpoint" xmlns:com="http://schemas.openxmlformats.org/drawingml/2006/compatibility" xmlns:p14="http://schemas.microsoft.com/office/powerpoint/2010/main" xmlns:p15="http://schemas.microsoft.com/office/powerpoint/2012/main" xmlns:ahyp="http://schemas.microsoft.com/office/drawing/2018/hyperlinkcolor" showMasterPhAnim="0" showMasterSp="0">
+  <p:cSld>
+    <p:spTree>
+      <p:nvGrpSpPr>
+        <p:cNvPr id="160" name="Shape 160"/>
+        <p:cNvGrpSpPr/>
+        <p:nvPr/>
+      </p:nvGrpSpPr>
+      <p:grpSpPr>
+        <a:xfrm>
+          <a:off x="0" y="0"/>
+          <a:ext cx="0" cy="0"/>
+          <a:chOff x="0" y="0"/>
+          <a:chExt cx="0" cy="0"/>
+        </a:xfrm>
+      </p:grpSpPr>
+      <p:sp>
+        <p:nvSpPr>
+          <p:cNvPr id="161" name="Google Shape;161;g3fb085bff3c_0_107:notes"/>
+          <p:cNvSpPr/>
+          <p:nvPr>
+            <p:ph idx="2" type="sldImg"/>
+          </p:nvPr>
+        </p:nvSpPr>
+        <p:spPr>
+          <a:xfrm>
+            <a:off x="381300" y="685800"/>
+            <a:ext cx="6096000" cy="3429000"/>
+          </a:xfrm>
+          <a:custGeom>
+            <a:rect b="b" l="l" r="r" t="t"/>
+            <a:pathLst>
+              <a:path extrusionOk="0" h="120000" w="120000">
+                <a:moveTo>
+                  <a:pt x="0" y="0"/>
+                </a:moveTo>
+                <a:lnTo>
+                  <a:pt x="120000" y="0"/>
+                </a:lnTo>
+                <a:lnTo>
+                  <a:pt x="120000" y="120000"/>
+                </a:lnTo>
+                <a:lnTo>
+                  <a:pt x="0" y="120000"/>
+                </a:lnTo>
+                <a:close/>
+              </a:path>
+            </a:pathLst>
+          </a:custGeom>
+        </p:spPr>
+      </p:sp>
+      <p:sp>
+        <p:nvSpPr>
+          <p:cNvPr id="162" name="Google Shape;162;g3fb085bff3c_0_107:notes"/>
           <p:cNvSpPr txBox="1"/>
           <p:nvPr>
             <p:ph idx="1" type="body"/>
@@ -7231,7 +7333,7 @@
                 <a:cs typeface="Google Sans Flex"/>
                 <a:sym typeface="Google Sans Flex"/>
               </a:rPr>
-              <a:t> Small food &amp; nutrition brands lose margin to stockouts and expired stock because supplier delays and demand spikes arrive as unstructured messages, and limited cash forces hard buy / expedite / discount trade-offs.</a:t>
+              <a:t> Growing food &amp; nutrition brands lose lakhs a month to stockouts and expired stock because supplier delays and demand spikes arrive as unstructured messages, and limited cash forces hard buy / expedite / discount trade-offs.</a:t>
             </a:r>
             <a:endParaRPr sz="1800">
               <a:latin typeface="Google Sans Flex"/>
@@ -7544,7 +7646,7 @@
         </p:nvGraphicFramePr>
         <p:xfrm>
           <a:off x="320040" y="1188720"/>
-          <a:ext cx="5394960" cy="3108960"/>
+          <a:ext cx="5394960" cy="2926080"/>
         </p:xfrm>
         <a:graphic>
           <a:graphicData uri="http://schemas.openxmlformats.org/drawingml/2006/table">
@@ -7556,7 +7658,7 @@
                 <a:gridCol w="4206240"/>
                 <a:gridCol w="1188720"/>
               </a:tblGrid>
-              <a:tr h="388620">
+              <a:tr h="418011">
                 <a:tc>
                   <a:txBody>
                     <a:bodyPr/>
@@ -7577,7 +7679,7 @@
                           <a:cs typeface="Google Sans Flex"/>
                           <a:sym typeface="Google Sans Flex"/>
                         </a:rPr>
-                        <a:t>Component (pilot: 1 brand, 30 SKUs)</a:t>
+                        <a:t>Component (one brand, as deploy.sh sets it up)</a:t>
                       </a:r>
                     </a:p>
                   </a:txBody>
@@ -7618,7 +7720,7 @@
                   </a:tcPr>
                 </a:tc>
               </a:tr>
-              <a:tr h="388620">
+              <a:tr h="418011">
                 <a:tc>
                   <a:txBody>
                     <a:bodyPr/>
@@ -7639,7 +7741,7 @@
                           <a:cs typeface="Google Sans Flex"/>
                           <a:sym typeface="Google Sans Flex"/>
                         </a:rPr>
-                        <a:t>Cloud Run: API + web, scale to zero</a:t>
+                        <a:t>Cloud Run: API + UI, 2 vCPU / 2 GiB, one always-on instance</a:t>
                       </a:r>
                     </a:p>
                   </a:txBody>
@@ -7669,7 +7771,7 @@
                           <a:cs typeface="Google Sans Flex"/>
                           <a:sym typeface="Google Sans Flex"/>
                         </a:rPr>
-                        <a:t>0 – 5</a:t>
+                        <a:t>90 – 105</a:t>
                       </a:r>
                     </a:p>
                   </a:txBody>
@@ -7680,7 +7782,7 @@
                   </a:tcPr>
                 </a:tc>
               </a:tr>
-              <a:tr h="388620">
+              <a:tr h="418011">
                 <a:tc>
                   <a:txBody>
                     <a:bodyPr/>
@@ -7701,7 +7803,7 @@
                           <a:cs typeface="Google Sans Flex"/>
                           <a:sym typeface="Google Sans Flex"/>
                         </a:rPr>
-                        <a:t>Cloud SQL for PostgreSQL: shared-core, 10 GB</a:t>
+                        <a:t>Cloud SQL for PostgreSQL 16: db-g1-small, 10 GB</a:t>
                       </a:r>
                     </a:p>
                   </a:txBody>
@@ -7731,7 +7833,7 @@
                           <a:cs typeface="Google Sans Flex"/>
                           <a:sym typeface="Google Sans Flex"/>
                         </a:rPr>
-                        <a:t>10 – 30</a:t>
+                        <a:t>25 – 40</a:t>
                       </a:r>
                     </a:p>
                   </a:txBody>
@@ -7742,7 +7844,7 @@
                   </a:tcPr>
                 </a:tc>
               </a:tr>
-              <a:tr h="388620">
+              <a:tr h="418011">
                 <a:tc>
                   <a:txBody>
                     <a:bodyPr/>
@@ -7763,7 +7865,7 @@
                           <a:cs typeface="Google Sans Flex"/>
                           <a:sym typeface="Google Sans Flex"/>
                         </a:rPr>
-                        <a:t>Gemini on Vertex AI: Flash-class, ~5M input + 0.5M output tokens</a:t>
+                        <a:t>Gemini 2.5 Flash on Vertex AI: ~10M input + 1M output tokens</a:t>
                       </a:r>
                     </a:p>
                   </a:txBody>
@@ -7793,7 +7895,7 @@
                           <a:cs typeface="Google Sans Flex"/>
                           <a:sym typeface="Google Sans Flex"/>
                         </a:rPr>
-                        <a:t>&lt; 5</a:t>
+                        <a:t>5 – 10</a:t>
                       </a:r>
                     </a:p>
                   </a:txBody>
@@ -7804,7 +7906,7 @@
                   </a:tcPr>
                 </a:tc>
               </a:tr>
-              <a:tr h="388620">
+              <a:tr h="418011">
                 <a:tc>
                   <a:txBody>
                     <a:bodyPr/>
@@ -7825,7 +7927,7 @@
                           <a:cs typeface="Google Sans Flex"/>
                           <a:sym typeface="Google Sans Flex"/>
                         </a:rPr>
-                        <a:t>Cloud Storage + Secret Manager</a:t>
+                        <a:t>Cloud Storage, Secret Manager, Artifact Registry, Cloud Build</a:t>
                       </a:r>
                     </a:p>
                   </a:txBody>
@@ -7855,7 +7957,7 @@
                           <a:cs typeface="Google Sans Flex"/>
                           <a:sym typeface="Google Sans Flex"/>
                         </a:rPr>
-                        <a:t>&lt; 1</a:t>
+                        <a:t>&lt; 3</a:t>
                       </a:r>
                     </a:p>
                   </a:txBody>
@@ -7866,131 +7968,7 @@
                   </a:tcPr>
                 </a:tc>
               </a:tr>
-              <a:tr h="388620">
-                <a:tc>
-                  <a:txBody>
-                    <a:bodyPr/>
-                    <a:lstStyle/>
-                    <a:p>
-                      <a:pPr>
-                        <a:spcAft>
-                          <a:spcPts val="200"/>
-                        </a:spcAft>
-                      </a:pPr>
-                      <a:r>
-                        <a:rPr sz="950" b="0" i="0">
-                          <a:solidFill>
-                            <a:srgbClr val="202124"/>
-                          </a:solidFill>
-                          <a:latin typeface="Google Sans Flex"/>
-                          <a:ea typeface="Google Sans Flex"/>
-                          <a:cs typeface="Google Sans Flex"/>
-                          <a:sym typeface="Google Sans Flex"/>
-                        </a:rPr>
-                        <a:t>BigQuery + Looker Studio (within free tiers)</a:t>
-                      </a:r>
-                    </a:p>
-                  </a:txBody>
-                  <a:tcPr anchor="ctr">
-                    <a:solidFill>
-                      <a:srgbClr val="FFFFFF"/>
-                    </a:solidFill>
-                  </a:tcPr>
-                </a:tc>
-                <a:tc>
-                  <a:txBody>
-                    <a:bodyPr/>
-                    <a:lstStyle/>
-                    <a:p>
-                      <a:pPr algn="r">
-                        <a:spcAft>
-                          <a:spcPts val="200"/>
-                        </a:spcAft>
-                      </a:pPr>
-                      <a:r>
-                        <a:rPr sz="950" b="0" i="0">
-                          <a:solidFill>
-                            <a:srgbClr val="202124"/>
-                          </a:solidFill>
-                          <a:latin typeface="Google Sans Flex"/>
-                          <a:ea typeface="Google Sans Flex"/>
-                          <a:cs typeface="Google Sans Flex"/>
-                          <a:sym typeface="Google Sans Flex"/>
-                        </a:rPr>
-                        <a:t>0 – 2</a:t>
-                      </a:r>
-                    </a:p>
-                  </a:txBody>
-                  <a:tcPr anchor="ctr">
-                    <a:solidFill>
-                      <a:srgbClr val="FFFFFF"/>
-                    </a:solidFill>
-                  </a:tcPr>
-                </a:tc>
-              </a:tr>
-              <a:tr h="388620">
-                <a:tc>
-                  <a:txBody>
-                    <a:bodyPr/>
-                    <a:lstStyle/>
-                    <a:p>
-                      <a:pPr>
-                        <a:spcAft>
-                          <a:spcPts val="200"/>
-                        </a:spcAft>
-                      </a:pPr>
-                      <a:r>
-                        <a:rPr sz="950" b="0" i="0">
-                          <a:solidFill>
-                            <a:srgbClr val="202124"/>
-                          </a:solidFill>
-                          <a:latin typeface="Google Sans Flex"/>
-                          <a:ea typeface="Google Sans Flex"/>
-                          <a:cs typeface="Google Sans Flex"/>
-                          <a:sym typeface="Google Sans Flex"/>
-                        </a:rPr>
-                        <a:t>Vertex AI Search (optional)</a:t>
-                      </a:r>
-                    </a:p>
-                  </a:txBody>
-                  <a:tcPr anchor="ctr">
-                    <a:solidFill>
-                      <a:srgbClr val="F1F3F4"/>
-                    </a:solidFill>
-                  </a:tcPr>
-                </a:tc>
-                <a:tc>
-                  <a:txBody>
-                    <a:bodyPr/>
-                    <a:lstStyle/>
-                    <a:p>
-                      <a:pPr algn="r">
-                        <a:spcAft>
-                          <a:spcPts val="200"/>
-                        </a:spcAft>
-                      </a:pPr>
-                      <a:r>
-                        <a:rPr sz="950" b="0" i="0">
-                          <a:solidFill>
-                            <a:srgbClr val="202124"/>
-                          </a:solidFill>
-                          <a:latin typeface="Google Sans Flex"/>
-                          <a:ea typeface="Google Sans Flex"/>
-                          <a:cs typeface="Google Sans Flex"/>
-                          <a:sym typeface="Google Sans Flex"/>
-                        </a:rPr>
-                        <a:t>0 – 10</a:t>
-                      </a:r>
-                    </a:p>
-                  </a:txBody>
-                  <a:tcPr anchor="ctr">
-                    <a:solidFill>
-                      <a:srgbClr val="F1F3F4"/>
-                    </a:solidFill>
-                  </a:tcPr>
-                </a:tc>
-              </a:tr>
-              <a:tr h="388620">
+              <a:tr h="418011">
                 <a:tc>
                   <a:txBody>
                     <a:bodyPr/>
@@ -8011,7 +7989,7 @@
                           <a:cs typeface="Google Sans Flex"/>
                           <a:sym typeface="Google Sans Flex"/>
                         </a:rPr>
-                        <a:t>Total running cost</a:t>
+                        <a:t>Total running cost, single tenant</a:t>
                       </a:r>
                     </a:p>
                   </a:txBody>
@@ -8041,7 +8019,69 @@
                           <a:cs typeface="Google Sans Flex"/>
                           <a:sym typeface="Google Sans Flex"/>
                         </a:rPr>
-                        <a:t>≈ 15 – 50</a:t>
+                        <a:t>≈ 120 – 160</a:t>
+                      </a:r>
+                    </a:p>
+                  </a:txBody>
+                  <a:tcPr anchor="ctr">
+                    <a:solidFill>
+                      <a:srgbClr val="E6F4EA"/>
+                    </a:solidFill>
+                  </a:tcPr>
+                </a:tc>
+              </a:tr>
+              <a:tr h="418014">
+                <a:tc>
+                  <a:txBody>
+                    <a:bodyPr/>
+                    <a:lstStyle/>
+                    <a:p>
+                      <a:pPr>
+                        <a:spcAft>
+                          <a:spcPts val="200"/>
+                        </a:spcAft>
+                      </a:pPr>
+                      <a:r>
+                        <a:rPr sz="950" b="1" i="0">
+                          <a:solidFill>
+                            <a:srgbClr val="202124"/>
+                          </a:solidFill>
+                          <a:latin typeface="Google Sans Flex"/>
+                          <a:ea typeface="Google Sans Flex"/>
+                          <a:cs typeface="Google Sans Flex"/>
+                          <a:sym typeface="Google Sans Flex"/>
+                        </a:rPr>
+                        <a:t>Lean pilot: 1 vCPU / 1 GiB, background jobs on Cloud Tasks, scale to zero</a:t>
+                      </a:r>
+                    </a:p>
+                  </a:txBody>
+                  <a:tcPr anchor="ctr">
+                    <a:solidFill>
+                      <a:srgbClr val="E6F4EA"/>
+                    </a:solidFill>
+                  </a:tcPr>
+                </a:tc>
+                <a:tc>
+                  <a:txBody>
+                    <a:bodyPr/>
+                    <a:lstStyle/>
+                    <a:p>
+                      <a:pPr algn="r">
+                        <a:spcAft>
+                          <a:spcPts val="200"/>
+                        </a:spcAft>
+                      </a:pPr>
+                      <a:r>
+                        <a:rPr sz="950" b="1" i="0">
+                          <a:solidFill>
+                            <a:srgbClr val="202124"/>
+                          </a:solidFill>
+                          <a:latin typeface="Google Sans Flex"/>
+                          <a:ea typeface="Google Sans Flex"/>
+                          <a:cs typeface="Google Sans Flex"/>
+                          <a:sym typeface="Google Sans Flex"/>
+                        </a:rPr>
+                        <a:t>≈ 35 – 55</a:t>
                       </a:r>
                     </a:p>
                   </a:txBody>
@@ -8064,8 +8104,8 @@
         </p:nvSpPr>
         <p:spPr>
           <a:xfrm>
-            <a:off x="320040" y="4389120"/>
-            <a:ext cx="5394960" cy="548640"/>
+            <a:off x="320040" y="4251960"/>
+            <a:ext cx="5394960" cy="640080"/>
           </a:xfrm>
           <a:prstGeom prst="rect">
             <a:avLst/>
@@ -8093,7 +8133,7 @@
                 <a:cs typeface="Google Sans Flex"/>
                 <a:sym typeface="Google Sans Flex"/>
               </a:rPr>
-              <a:t>Indicative list prices at time of writing; confirm with the Google Cloud Pricing Calculator. Excludes team effort. Per-brand cost falls further on a shared multi-tenant deployment.</a:t>
+              <a:t>Indicative list prices (asia-south1); confirm with the Google Cloud Pricing Calculator. Excludes team effort. Cost does not grow with revenue: a 300-SKU catalogue adds roughly US$ 50–90 of Gemini calls a month on the same servers. Smaller brands can share one multi-tenant deployment.</a:t>
             </a:r>
           </a:p>
         </p:txBody>
@@ -8275,7 +8315,7 @@
                 <a:cs typeface="Google Sans Flex"/>
                 <a:sym typeface="Google Sans Flex"/>
               </a:rPr>
-              <a:t>≈300 plans, 600 messages and 300 what-ifs a month.</a:t>
+              <a:t>≈300 plans, 600 messages and 1,000 assistant questions a month.</a:t>
             </a:r>
           </a:p>
           <a:p>
@@ -8457,7 +8497,7 @@
                 <a:cs typeface="Google Sans Flex"/>
                 <a:sym typeface="Google Sans Flex"/>
               </a:rPr>
-              <a:t>≈ ₹1.3k–4.4k a month to run (at ₹88 / US$).</a:t>
+              <a:t>Dedicated deployment ≈ ₹10.5k–14k a month (at ₹88 / US$).</a:t>
             </a:r>
           </a:p>
           <a:p>
@@ -8480,7 +8520,7 @@
                 <a:cs typeface="Google Sans Flex"/>
                 <a:sym typeface="Google Sans Flex"/>
               </a:rPr>
-              <a:t>₹32.3k simulated loss avoided per 30-day cycle on the demo dataset.</a:t>
+              <a:t>Simulated loss avoided for the demo brand (₹4.3 crore revenue a month): ₹1.7–4.1 lakh a month.</a:t>
             </a:r>
           </a:p>
           <a:p>
@@ -8503,7 +8543,7 @@
                 <a:cs typeface="Google Sans Flex"/>
                 <a:sym typeface="Google Sans Flex"/>
               </a:rPr>
-              <a:t>LLM spend scales with SKUs: roughly US$0.1 per SKU a month.</a:t>
+              <a:t>≈ 12–40× the running cost. At a twentieth of this size (≈ ₹2.6 crore a year) a dedicated instance only breaks even, so small brands should share one.</a:t>
             </a:r>
           </a:p>
         </p:txBody>
@@ -8685,7 +8725,7 @@
       </p:sp>
       <p:pic>
         <p:nvPicPr>
-          <p:cNvPr id="136" name="Picture 135" descr="crop_plan.png"/>
+          <p:cNvPr id="136" name="Picture 135" descr="crop_0_plan.png"/>
           <p:cNvPicPr>
             <a:picLocks noChangeAspect="1"/>
           </p:cNvPicPr>
@@ -8699,8 +8739,8 @@
         </p:blipFill>
         <p:spPr>
           <a:xfrm>
-            <a:off x="320040" y="1163193"/>
-            <a:ext cx="4160520" cy="1733550"/>
+            <a:off x="320040" y="1291414"/>
+            <a:ext cx="4160520" cy="1477107"/>
           </a:xfrm>
           <a:prstGeom prst="rect">
             <a:avLst/>
@@ -8749,14 +8789,14 @@
                 <a:cs typeface="Google Sans Flex"/>
                 <a:sym typeface="Google Sans Flex"/>
               </a:rPr>
-              <a:t>Recovery Plan: KPIs and the validated LLM explanation with cited records</a:t>
+              <a:t>Plan options: the same ₹10 lakh four ways, tested in calm and shocked futures</a:t>
             </a:r>
           </a:p>
         </p:txBody>
       </p:sp>
       <p:pic>
         <p:nvPicPr>
-          <p:cNvPr id="138" name="Picture 137" descr="crop_inbox.png"/>
+          <p:cNvPr id="138" name="Picture 137" descr="crop_1_assistant.png"/>
           <p:cNvPicPr>
             <a:picLocks noChangeAspect="1"/>
           </p:cNvPicPr>
@@ -8770,8 +8810,8 @@
         </p:blipFill>
         <p:spPr>
           <a:xfrm>
-            <a:off x="4663440" y="1260641"/>
-            <a:ext cx="4160520" cy="1538653"/>
+            <a:off x="4663440" y="1193875"/>
+            <a:ext cx="4160520" cy="1672185"/>
           </a:xfrm>
           <a:prstGeom prst="rect">
             <a:avLst/>
@@ -8820,14 +8860,14 @@
                 <a:cs typeface="Google Sans Flex"/>
                 <a:sym typeface="Google Sans Flex"/>
               </a:rPr>
-              <a:t>Signal Inbox: extracted events with verbatim evidence and confirm / reject</a:t>
+              <a:t>Planning assistant: “10 lakh vs 15 lakh?” answered from a planner tool; 34 values checked</a:t>
             </a:r>
           </a:p>
         </p:txBody>
       </p:sp>
       <p:pic>
         <p:nvPicPr>
-          <p:cNvPr id="140" name="Picture 139" descr="crop_sku.png"/>
+          <p:cNvPr id="140" name="Picture 139" descr="crop_2_signals.png"/>
           <p:cNvPicPr>
             <a:picLocks noChangeAspect="1"/>
           </p:cNvPicPr>
@@ -8841,8 +8881,8 @@
         </p:blipFill>
         <p:spPr>
           <a:xfrm>
-            <a:off x="320040" y="3065145"/>
-            <a:ext cx="4160520" cy="1733550"/>
+            <a:off x="320040" y="3516483"/>
+            <a:ext cx="4160520" cy="830873"/>
           </a:xfrm>
           <a:prstGeom prst="rect">
             <a:avLst/>
@@ -8891,14 +8931,14 @@
                 <a:cs typeface="Google Sans Flex"/>
                 <a:sym typeface="Google Sans Flex"/>
               </a:rPr>
-              <a:t>SKU Detail: history plus LLM forecast band reflecting the confirmed ×3 spike</a:t>
+              <a:t>Signal Inbox: extracted events with verbatim evidence, confirmed by the operator</a:t>
             </a:r>
           </a:p>
         </p:txBody>
       </p:sp>
       <p:pic>
         <p:nvPicPr>
-          <p:cNvPr id="142" name="Picture 141" descr="crop_scenario.png"/>
+          <p:cNvPr id="142" name="Picture 141" descr="crop_3_plan.png"/>
           <p:cNvPicPr>
             <a:picLocks noChangeAspect="1"/>
           </p:cNvPicPr>
@@ -8912,8 +8952,8 @@
         </p:blipFill>
         <p:spPr>
           <a:xfrm>
-            <a:off x="4663440" y="3065145"/>
-            <a:ext cx="4160520" cy="1733550"/>
+            <a:off x="4663440" y="3531870"/>
+            <a:ext cx="4160520" cy="800099"/>
           </a:xfrm>
           <a:prstGeom prst="rect">
             <a:avLst/>
@@ -8962,7 +9002,7 @@
                 <a:cs typeface="Google Sans Flex"/>
                 <a:sym typeface="Google Sans Flex"/>
               </a:rPr>
-              <a:t>Scenario &amp; Value: recommended plan vs rule baseline, loss breakdown</a:t>
+              <a:t>Robustness: 120 simulated futures vs reorder rules; weekly re-planning</a:t>
             </a:r>
           </a:p>
         </p:txBody>
@@ -9197,7 +9237,7 @@
                 <a:cs typeface="Google Sans Flex"/>
                 <a:sym typeface="Google Sans Flex"/>
               </a:rPr>
-              <a:t>Both plans start from the same stock and budget and face the same simulated “actual” demand path. Stress cases re-score the plan under shocks it was not told about.</a:t>
+              <a:t>Every policy starts from the same stock and budget and faces the same simulated demand and supplier delays. Fill rate 90.2% vs 88.6–88.8% for the rules; hero-SKU fill 80.3% vs 75.2%.</a:t>
             </a:r>
           </a:p>
           <a:p>
@@ -9228,7 +9268,7 @@
                 <a:cs typeface="Google Sans Flex"/>
                 <a:sym typeface="Google Sans Flex"/>
               </a:rPr>
-              <a:t> 80 automated tests pass · 30/30 seed forecasts passed LLM validation · re-plan in 5.5–7.4 s end-to-end.</a:t>
+              <a:t> 151 automated tests pass · 30 / 30 seed forecasts passed LLM validation · every LLM call logged with its status.</a:t>
             </a:r>
           </a:p>
         </p:txBody>
@@ -9364,7 +9404,7 @@
                 <a:cs typeface="Google Sans Flex"/>
                 <a:sym typeface="Google Sans Flex"/>
               </a:rPr>
-              <a:t>₹32.3k  ·  23% lower loss</a:t>
+              <a:t>₹3.9 lakh / ₹1.9 lakh a month lower loss</a:t>
             </a:r>
           </a:p>
           <a:p>
@@ -9383,7 +9423,7 @@
                 <a:cs typeface="Google Sans Flex"/>
                 <a:sym typeface="Google Sans Flex"/>
               </a:rPr>
-              <a:t>₹1,07,993 vs ₹1,40,329 for the rule baseline at a ₹50k budget</a:t>
+              <a:t>Mean vs static / tuned reorder rule; better in 120 of 120 futures</a:t>
             </a:r>
           </a:p>
         </p:txBody>
@@ -9519,7 +9559,7 @@
                 <a:cs typeface="Google Sans Flex"/>
                 <a:sym typeface="Google Sans Flex"/>
               </a:rPr>
-              <a:t>−78% expiry write-off</a:t>
+              <a:t>30% reserve: ₹0.8–1.0 lakh further gain</a:t>
             </a:r>
           </a:p>
           <a:p>
@@ -9538,7 +9578,7 @@
                 <a:cs typeface="Google Sans Flex"/>
                 <a:sym typeface="Google Sans Flex"/>
               </a:rPr>
-              <a:t>₹5,151 vs ₹23,930: markdowns clear lots before they expire</a:t>
+              <a:t>Re-planned at weekly reviews; better in 10 / 10 calm and 9 / 10 shocked futures</a:t>
             </a:r>
           </a:p>
         </p:txBody>
@@ -9674,7 +9714,7 @@
                 <a:cs typeface="Google Sans Flex"/>
                 <a:sym typeface="Google Sans Flex"/>
               </a:rPr>
-              <a:t>Beats baseline in 6 of 6 cases</a:t>
+              <a:t>Extraction F1 0.97 vs 0.65</a:t>
             </a:r>
           </a:p>
           <a:p>
@@ -9693,7 +9733,7 @@
                 <a:cs typeface="Google Sans Flex"/>
                 <a:sym typeface="Google Sans Flex"/>
               </a:rPr>
-              <a:t>Base, demand −20%, +5-day delay, SUP-04 +7 d, SKU-019 ×2, ₹30k budget</a:t>
+              <a:t>LLM + validators vs keyword rules, 40 labelled messages; plans from LLM signals keep 100% of the gold-signal gain</a:t>
             </a:r>
           </a:p>
         </p:txBody>
@@ -9763,7 +9803,7 @@
             </a:avLst>
           </a:prstGeom>
           <a:solidFill>
-            <a:srgbClr val="E37400"/>
+            <a:srgbClr val="1A73E8"/>
           </a:solidFill>
           <a:ln>
             <a:noFill/>
@@ -9822,14 +9862,14 @@
             <a:r>
               <a:rPr sz="1050" b="1" i="0">
                 <a:solidFill>
-                  <a:srgbClr val="E37400"/>
+                  <a:srgbClr val="1A73E8"/>
                 </a:solidFill>
                 <a:latin typeface="Google Sans Flex"/>
                 <a:ea typeface="Google Sans Flex"/>
                 <a:cs typeface="Google Sans Flex"/>
                 <a:sym typeface="Google Sans Flex"/>
               </a:rPr>
-              <a:t>Forecast WAPE 0.258 vs 0.259</a:t>
+              <a:t>Forecast WAPE 21.5% vs 23.0%</a:t>
             </a:r>
           </a:p>
           <a:p>
@@ -9848,7 +9888,7 @@
                 <a:cs typeface="Google Sans Flex"/>
                 <a:sym typeface="Google Sans Flex"/>
               </a:rPr>
-              <a:t>LLM vs seasonal-naive, 14-day hold-out, 10 SKUs: parity, reported honestly</a:t>
+              <a:t>Hybrid vs statistical, 1,050 points (21.9% vs 24.2% on 15 text-only series)</a:t>
             </a:r>
           </a:p>
         </p:txBody>
@@ -9984,7 +10024,7 @@
                 <a:cs typeface="Google Sans Flex"/>
                 <a:sym typeface="Google Sans Flex"/>
               </a:rPr>
-              <a:t>18 / 18 LLM outputs validated</a:t>
+              <a:t>Assistant: 6 / 6 answers number-checked</a:t>
             </a:r>
           </a:p>
           <a:p>
@@ -10003,7 +10043,7 @@
                 <a:cs typeface="Google Sans Flex"/>
                 <a:sym typeface="Google Sans Flex"/>
               </a:rPr>
-              <a:t>Median latency: extraction 1.3 s · scenario 1.4 s · forecast 2.6 s · explanation 6 s</a:t>
+              <a:t>5 on the first try, 1 after one repair; 4–8 s each (gpt-5.4-mini)</a:t>
             </a:r>
           </a:p>
         </p:txBody>
@@ -10383,7 +10423,30 @@
                 <a:cs typeface="Google Sans Flex"/>
                 <a:sym typeface="Google Sans Flex"/>
               </a:rPr>
-              <a:t>Shopify, Tally and Zoho integrations for stock and POs.</a:t>
+              <a:t>SAP, Unicommerce and Shopify connectors for stock and POs.</a:t>
+            </a:r>
+          </a:p>
+          <a:p>
+            <a:pPr marL="155448" indent="-137160">
+              <a:spcAft>
+                <a:spcPts val="300"/>
+              </a:spcAft>
+              <a:buClr>
+                <a:srgbClr val="1A73E8"/>
+              </a:buClr>
+              <a:buChar char="•"/>
+            </a:pPr>
+            <a:r>
+              <a:rPr sz="1100" b="0" i="0">
+                <a:solidFill>
+                  <a:srgbClr val="202124"/>
+                </a:solidFill>
+                <a:latin typeface="Google Sans Flex"/>
+                <a:ea typeface="Google Sans Flex"/>
+                <a:cs typeface="Google Sans Flex"/>
+                <a:sym typeface="Google Sans Flex"/>
+              </a:rPr>
+              <a:t>Plan for signal uncertainty: one misread day can move ₹1 lakh.</a:t>
             </a:r>
           </a:p>
           <a:p>
@@ -10407,29 +10470,6 @@
                 <a:sym typeface="Google Sans Flex"/>
               </a:rPr>
               <a:t>Learn event multipliers from realised outcomes.</a:t>
-            </a:r>
-          </a:p>
-          <a:p>
-            <a:pPr marL="155448" indent="-137160">
-              <a:spcAft>
-                <a:spcPts val="300"/>
-              </a:spcAft>
-              <a:buClr>
-                <a:srgbClr val="1A73E8"/>
-              </a:buClr>
-              <a:buChar char="•"/>
-            </a:pPr>
-            <a:r>
-              <a:rPr sz="1100" b="0" i="0">
-                <a:solidFill>
-                  <a:srgbClr val="202124"/>
-                </a:solidFill>
-                <a:latin typeface="Google Sans Flex"/>
-                <a:ea typeface="Google Sans Flex"/>
-                <a:cs typeface="Google Sans Flex"/>
-                <a:sym typeface="Google Sans Flex"/>
-              </a:rPr>
-              <a:t>Supplier terms advice (MOQ, payment terms, expedite).</a:t>
             </a:r>
           </a:p>
         </p:txBody>
@@ -10588,7 +10628,7 @@
                 <a:cs typeface="Google Sans Flex"/>
                 <a:sym typeface="Google Sans Flex"/>
               </a:rPr>
-              <a:t>Deploy API and web on Cloud Run with Cloud SQL and Secret Manager.</a:t>
+              <a:t>Go live on Cloud Run + Cloud SQL (scripted in deploy.sh).</a:t>
             </a:r>
           </a:p>
           <a:p>
@@ -10611,7 +10651,7 @@
                 <a:cs typeface="Google Sans Flex"/>
                 <a:sym typeface="Google Sans Flex"/>
               </a:rPr>
-              <a:t>Gemini on Vertex AI with structured output.</a:t>
+              <a:t>Run the same evaluations on Gemini; route each task to its best model.</a:t>
             </a:r>
           </a:p>
           <a:p>
@@ -10634,7 +10674,7 @@
                 <a:cs typeface="Google Sans Flex"/>
                 <a:sym typeface="Google Sans Flex"/>
               </a:rPr>
-              <a:t>BigQuery ML forecasts as a second benchmark.</a:t>
+              <a:t>Background jobs on Cloud Tasks; multi-tenant auth via Identity Platform.</a:t>
             </a:r>
           </a:p>
           <a:p>
@@ -10657,30 +10697,7 @@
                 <a:cs typeface="Google Sans Flex"/>
                 <a:sym typeface="Google Sans Flex"/>
               </a:rPr>
-              <a:t>Looker dashboards: realised vs simulated value.</a:t>
-            </a:r>
-          </a:p>
-          <a:p>
-            <a:pPr marL="155448" indent="-137160">
-              <a:spcAft>
-                <a:spcPts val="300"/>
-              </a:spcAft>
-              <a:buClr>
-                <a:srgbClr val="1E8E3E"/>
-              </a:buClr>
-              <a:buChar char="•"/>
-            </a:pPr>
-            <a:r>
-              <a:rPr sz="1100" b="0" i="0">
-                <a:solidFill>
-                  <a:srgbClr val="202124"/>
-                </a:solidFill>
-                <a:latin typeface="Google Sans Flex"/>
-                <a:ea typeface="Google Sans Flex"/>
-                <a:cs typeface="Google Sans Flex"/>
-                <a:sym typeface="Google Sans Flex"/>
-              </a:rPr>
-              <a:t>Multi-tenant auth via Identity Platform.</a:t>
+              <a:t>BigQuery ML forecasts as a second benchmark; Looker dashboards.</a:t>
             </a:r>
           </a:p>
         </p:txBody>
@@ -10839,7 +10856,7 @@
                 <a:cs typeface="Google Sans Flex"/>
                 <a:sym typeface="Google Sans Flex"/>
               </a:rPr>
-              <a:t>Interview 3–5 brand operators; pilot on their real data.</a:t>
+              <a:t>Pilot with 2–3 mid-size FMCG / D2C brands on their real data.</a:t>
             </a:r>
           </a:p>
           <a:p>
@@ -10885,7 +10902,7 @@
                 <a:cs typeface="Google Sans Flex"/>
                 <a:sym typeface="Google Sans Flex"/>
               </a:rPr>
-              <a:t>Start with food, nutrition and personal-care D2C brands in JAPAC.</a:t>
+              <a:t>Grow the gold set with real, operator-labelled messages.</a:t>
             </a:r>
           </a:p>
           <a:p>
@@ -10908,7 +10925,7 @@
                 <a:cs typeface="Google Sans Flex"/>
                 <a:sym typeface="Google Sans Flex"/>
               </a:rPr>
-              <a:t>Pricing hypothesis: monthly subscription per active SKU band.</a:t>
+              <a:t>Pricing: subscription per SKU band, well below the savings.</a:t>
             </a:r>
           </a:p>
         </p:txBody>
@@ -11305,14 +11322,14 @@
             <a:r>
               <a:rPr sz="1100" b="0" i="0">
                 <a:solidFill>
-                  <a:srgbClr val="D93025"/>
+                  <a:srgbClr val="1A73E8"/>
                 </a:solidFill>
                 <a:latin typeface="Google Sans Flex"/>
                 <a:ea typeface="Google Sans Flex"/>
                 <a:cs typeface="Google Sans Flex"/>
                 <a:sym typeface="Google Sans Flex"/>
               </a:rPr>
-              <a:t>[Add GitHub repository URL]</a:t>
+              <a:t>https://github.com/Xhahat/inventory-rescue</a:t>
             </a:r>
           </a:p>
         </p:txBody>
@@ -11623,6 +11640,2948 @@
                 <a:sym typeface="Google Sans Flex"/>
               </a:rPr>
               <a:t>[Add deployed URL]  ·  runs locally at http://localhost:5173 (see README)</a:t>
+            </a:r>
+          </a:p>
+        </p:txBody>
+      </p:sp>
+    </p:spTree>
+  </p:cSld>
+  <p:clrMapOvr>
+    <a:masterClrMapping/>
+  </p:clrMapOvr>
+</p:sld>
+</file>
+
+<file path=ppt/slides/slide15.xml><?xml version="1.0" encoding="utf-8"?>
+<p:sld xmlns:a="http://schemas.openxmlformats.org/drawingml/2006/main" xmlns:r="http://schemas.openxmlformats.org/officeDocument/2006/relationships" xmlns:mc="http://schemas.openxmlformats.org/markup-compatibility/2006" xmlns:mv="urn:schemas-microsoft-com:mac:vml" xmlns:p="http://schemas.openxmlformats.org/presentationml/2006/main" xmlns:c="http://schemas.openxmlformats.org/drawingml/2006/chart" xmlns:dgm="http://schemas.openxmlformats.org/drawingml/2006/diagram" xmlns:o="urn:schemas-microsoft-com:office:office" xmlns:v="urn:schemas-microsoft-com:vml" xmlns:pvml="urn:schemas-microsoft-com:office:powerpoint" xmlns:com="http://schemas.openxmlformats.org/drawingml/2006/compatibility" xmlns:p14="http://schemas.microsoft.com/office/powerpoint/2010/main" xmlns:p15="http://schemas.microsoft.com/office/powerpoint/2012/main" xmlns:ahyp="http://schemas.microsoft.com/office/drawing/2018/hyperlinkcolor">
+  <p:cSld>
+    <p:spTree>
+      <p:nvGrpSpPr>
+        <p:cNvPr id="163" name="Shape 163"/>
+        <p:cNvGrpSpPr/>
+        <p:nvPr/>
+      </p:nvGrpSpPr>
+      <p:grpSpPr>
+        <a:xfrm>
+          <a:off x="0" y="0"/>
+          <a:ext cx="0" cy="0"/>
+          <a:chOff x="0" y="0"/>
+          <a:chExt cx="0" cy="0"/>
+        </a:xfrm>
+      </p:grpSpPr>
+      <p:pic>
+        <p:nvPicPr>
+          <p:cNvPr id="164" name="Google Shape;164;p27" title="Frame 144.png"/>
+          <p:cNvPicPr preferRelativeResize="0"/>
+          <p:nvPr/>
+        </p:nvPicPr>
+        <p:blipFill rotWithShape="1">
+          <a:blip r:embed="rId3">
+            <a:alphaModFix/>
+          </a:blip>
+          <a:srcRect b="98001" l="0" r="0" t="0"/>
+          <a:stretch/>
+        </p:blipFill>
+        <p:spPr>
+          <a:xfrm>
+            <a:off x="0" y="5093562"/>
+            <a:ext cx="9144000" cy="54275"/>
+          </a:xfrm>
+          <a:prstGeom prst="rect">
+            <a:avLst/>
+          </a:prstGeom>
+          <a:noFill/>
+          <a:ln>
+            <a:noFill/>
+          </a:ln>
+        </p:spPr>
+      </p:pic>
+      <p:pic>
+        <p:nvPicPr>
+          <p:cNvPr id="165" name="Google Shape;165;p27" title="Group 427319979.png"/>
+          <p:cNvPicPr preferRelativeResize="0"/>
+          <p:nvPr/>
+        </p:nvPicPr>
+        <p:blipFill>
+          <a:blip r:embed="rId4">
+            <a:alphaModFix/>
+          </a:blip>
+          <a:stretch>
+            <a:fillRect/>
+          </a:stretch>
+        </p:blipFill>
+        <p:spPr>
+          <a:xfrm>
+            <a:off x="0" y="1"/>
+            <a:ext cx="9144000" cy="507359"/>
+          </a:xfrm>
+          <a:prstGeom prst="rect">
+            <a:avLst/>
+          </a:prstGeom>
+          <a:noFill/>
+          <a:ln>
+            <a:noFill/>
+          </a:ln>
+        </p:spPr>
+      </p:pic>
+      <p:sp>
+        <p:nvSpPr>
+          <p:cNvPr id="166" name="Google Shape;166;p27"/>
+          <p:cNvSpPr/>
+          <p:nvPr/>
+        </p:nvSpPr>
+        <p:spPr>
+          <a:xfrm>
+            <a:off x="-29250" y="5071875"/>
+            <a:ext cx="9173400" cy="97800"/>
+          </a:xfrm>
+          <a:prstGeom prst="rect">
+            <a:avLst/>
+          </a:prstGeom>
+          <a:solidFill>
+            <a:schemeClr val="dk1"/>
+          </a:solidFill>
+          <a:ln>
+            <a:noFill/>
+          </a:ln>
+        </p:spPr>
+        <p:txBody>
+          <a:bodyPr anchorCtr="0" anchor="ctr" bIns="91425" lIns="91425" spcFirstLastPara="1" rIns="91425" wrap="square" tIns="91425">
+            <a:noAutofit/>
+          </a:bodyPr>
+          <a:lstStyle/>
+          <a:p>
+            <a:pPr indent="0" lvl="0" marL="0" rtl="0" algn="ctr">
+              <a:spcBef>
+                <a:spcPts val="0"/>
+              </a:spcBef>
+              <a:spcAft>
+                <a:spcPts val="0"/>
+              </a:spcAft>
+              <a:buNone/>
+            </a:pPr>
+            <a:r>
+              <a:t/>
+            </a:r>
+            <a:endParaRPr/>
+          </a:p>
+        </p:txBody>
+      </p:sp>
+      <p:sp>
+        <p:nvSpPr>
+          <p:cNvPr id="143" name="Google Shape;143;p24"/>
+          <p:cNvSpPr txBox="1"/>
+          <p:nvPr/>
+        </p:nvSpPr>
+        <p:spPr>
+          <a:xfrm>
+            <a:off x="265350" y="663825"/>
+            <a:ext cx="8943000" cy="457200"/>
+          </a:xfrm>
+          <a:prstGeom prst="rect">
+            <a:avLst/>
+          </a:prstGeom>
+          <a:noFill/>
+          <a:ln>
+            <a:noFill/>
+          </a:ln>
+        </p:spPr>
+        <p:txBody>
+          <a:bodyPr anchorCtr="0" anchor="t" bIns="91425" lIns="91425" spcFirstLastPara="1" rIns="91425" wrap="square" tIns="91425">
+            <a:noAutofit/>
+          </a:bodyPr>
+          <a:lstStyle/>
+          <a:p>
+            <a:pPr indent="0" lvl="0" marL="0" rtl="0" algn="l">
+              <a:spcBef>
+                <a:spcPts val="0"/>
+              </a:spcBef>
+              <a:spcAft>
+                <a:spcPts val="0"/>
+              </a:spcAft>
+              <a:buNone/>
+            </a:pPr>
+            <a:r>
+              <a:rPr lang="en-GB" sz="1600">
+                <a:latin typeface="Google Sans Flex Medium"/>
+                <a:ea typeface="Google Sans Flex Medium"/>
+                <a:cs typeface="Google Sans Flex Medium"/>
+                <a:sym typeface="Google Sans Flex Medium"/>
+              </a:rPr>
+              <a:t>Which LLM? The same evaluations on 10 models</a:t>
+            </a:r>
+            <a:endParaRPr sz="1600">
+              <a:latin typeface="Google Sans Flex Medium"/>
+              <a:ea typeface="Google Sans Flex Medium"/>
+              <a:cs typeface="Google Sans Flex Medium"/>
+              <a:sym typeface="Google Sans Flex Medium"/>
+            </a:endParaRPr>
+          </a:p>
+        </p:txBody>
+      </p:sp>
+      <p:graphicFrame>
+        <p:nvGraphicFramePr>
+          <p:cNvPr id="167" name="Table 166"/>
+          <p:cNvGraphicFramePr>
+            <a:graphicFrameLocks noGrp="1"/>
+          </p:cNvGraphicFramePr>
+          <p:nvPr/>
+        </p:nvGraphicFramePr>
+        <p:xfrm>
+          <a:off x="320040" y="1143000"/>
+          <a:ext cx="8503920" cy="3017520"/>
+        </p:xfrm>
+        <a:graphic>
+          <a:graphicData uri="http://schemas.openxmlformats.org/drawingml/2006/table">
+            <a:tbl>
+              <a:tblPr firstRow="1" bandRow="1">
+                <a:tableStyleId>{5C22544A-7EE6-4342-B048-85BDC9FD1C3A}</a:tableStyleId>
+              </a:tblPr>
+              <a:tblGrid>
+                <a:gridCol w="1325880"/>
+                <a:gridCol w="868680"/>
+                <a:gridCol w="868680"/>
+                <a:gridCol w="868680"/>
+                <a:gridCol w="1234440"/>
+                <a:gridCol w="1234440"/>
+                <a:gridCol w="1143000"/>
+                <a:gridCol w="960120"/>
+              </a:tblGrid>
+              <a:tr h="274320">
+                <a:tc>
+                  <a:txBody>
+                    <a:bodyPr/>
+                    <a:lstStyle/>
+                    <a:p>
+                      <a:pPr>
+                        <a:spcAft>
+                          <a:spcPts val="200"/>
+                        </a:spcAft>
+                      </a:pPr>
+                      <a:r>
+                        <a:rPr sz="800" b="1" i="0">
+                          <a:solidFill>
+                            <a:srgbClr val="FFFFFF"/>
+                          </a:solidFill>
+                          <a:latin typeface="Google Sans Flex"/>
+                          <a:ea typeface="Google Sans Flex"/>
+                          <a:cs typeface="Google Sans Flex"/>
+                          <a:sym typeface="Google Sans Flex"/>
+                        </a:rPr>
+                        <a:t>Model</a:t>
+                      </a:r>
+                    </a:p>
+                  </a:txBody>
+                  <a:tcPr marL="45720" marR="45720" marT="18288" marB="18288" anchor="ctr">
+                    <a:solidFill>
+                      <a:srgbClr val="202124"/>
+                    </a:solidFill>
+                  </a:tcPr>
+                </a:tc>
+                <a:tc>
+                  <a:txBody>
+                    <a:bodyPr/>
+                    <a:lstStyle/>
+                    <a:p>
+                      <a:pPr algn="ctr">
+                        <a:spcAft>
+                          <a:spcPts val="200"/>
+                        </a:spcAft>
+                      </a:pPr>
+                      <a:r>
+                        <a:rPr sz="800" b="1" i="0">
+                          <a:solidFill>
+                            <a:srgbClr val="FFFFFF"/>
+                          </a:solidFill>
+                          <a:latin typeface="Google Sans Flex"/>
+                          <a:ea typeface="Google Sans Flex"/>
+                          <a:cs typeface="Google Sans Flex"/>
+                          <a:sym typeface="Google Sans Flex"/>
+                        </a:rPr>
+                        <a:t>Extraction F1</a:t>
+                      </a:r>
+                    </a:p>
+                  </a:txBody>
+                  <a:tcPr marL="45720" marR="45720" marT="18288" marB="18288" anchor="ctr">
+                    <a:solidFill>
+                      <a:srgbClr val="202124"/>
+                    </a:solidFill>
+                  </a:tcPr>
+                </a:tc>
+                <a:tc>
+                  <a:txBody>
+                    <a:bodyPr/>
+                    <a:lstStyle/>
+                    <a:p>
+                      <a:pPr algn="ctr">
+                        <a:spcAft>
+                          <a:spcPts val="200"/>
+                        </a:spcAft>
+                      </a:pPr>
+                      <a:r>
+                        <a:rPr sz="800" b="1" i="0">
+                          <a:solidFill>
+                            <a:srgbClr val="FFFFFF"/>
+                          </a:solidFill>
+                          <a:latin typeface="Google Sans Flex"/>
+                          <a:ea typeface="Google Sans Flex"/>
+                          <a:cs typeface="Google Sans Flex"/>
+                          <a:sym typeface="Google Sans Flex"/>
+                        </a:rPr>
+                        <a:t>Messages correct</a:t>
+                      </a:r>
+                    </a:p>
+                  </a:txBody>
+                  <a:tcPr marL="45720" marR="45720" marT="18288" marB="18288" anchor="ctr">
+                    <a:solidFill>
+                      <a:srgbClr val="202124"/>
+                    </a:solidFill>
+                  </a:tcPr>
+                </a:tc>
+                <a:tc>
+                  <a:txBody>
+                    <a:bodyPr/>
+                    <a:lstStyle/>
+                    <a:p>
+                      <a:pPr algn="ctr">
+                        <a:spcAft>
+                          <a:spcPts val="200"/>
+                        </a:spcAft>
+                      </a:pPr>
+                      <a:r>
+                        <a:rPr sz="800" b="1" i="0">
+                          <a:solidFill>
+                            <a:srgbClr val="FFFFFF"/>
+                          </a:solidFill>
+                          <a:latin typeface="Google Sans Flex"/>
+                          <a:ea typeface="Google Sans Flex"/>
+                          <a:cs typeface="Google Sans Flex"/>
+                          <a:sym typeface="Google Sans Flex"/>
+                        </a:rPr>
+                        <a:t>Signal value kept</a:t>
+                      </a:r>
+                    </a:p>
+                  </a:txBody>
+                  <a:tcPr marL="45720" marR="45720" marT="18288" marB="18288" anchor="ctr">
+                    <a:solidFill>
+                      <a:srgbClr val="202124"/>
+                    </a:solidFill>
+                  </a:tcPr>
+                </a:tc>
+                <a:tc>
+                  <a:txBody>
+                    <a:bodyPr/>
+                    <a:lstStyle/>
+                    <a:p>
+                      <a:pPr algn="ctr">
+                        <a:spcAft>
+                          <a:spcPts val="200"/>
+                        </a:spcAft>
+                      </a:pPr>
+                      <a:r>
+                        <a:rPr sz="800" b="1" i="0">
+                          <a:solidFill>
+                            <a:srgbClr val="FFFFFF"/>
+                          </a:solidFill>
+                          <a:latin typeface="Google Sans Flex"/>
+                          <a:ea typeface="Google Sans Flex"/>
+                          <a:cs typeface="Google Sans Flex"/>
+                          <a:sym typeface="Google Sans Flex"/>
+                        </a:rPr>
+                        <a:t>Forecast WAPE (statistical)</a:t>
+                      </a:r>
+                    </a:p>
+                  </a:txBody>
+                  <a:tcPr marL="45720" marR="45720" marT="18288" marB="18288" anchor="ctr">
+                    <a:solidFill>
+                      <a:srgbClr val="202124"/>
+                    </a:solidFill>
+                  </a:tcPr>
+                </a:tc>
+                <a:tc>
+                  <a:txBody>
+                    <a:bodyPr/>
+                    <a:lstStyle/>
+                    <a:p>
+                      <a:pPr algn="ctr">
+                        <a:spcAft>
+                          <a:spcPts val="200"/>
+                        </a:spcAft>
+                      </a:pPr>
+                      <a:r>
+                        <a:rPr sz="800" b="1" i="0">
+                          <a:solidFill>
+                            <a:srgbClr val="FFFFFF"/>
+                          </a:solidFill>
+                          <a:latin typeface="Google Sans Flex"/>
+                          <a:ea typeface="Google Sans Flex"/>
+                          <a:cs typeface="Google Sans Flex"/>
+                          <a:sym typeface="Google Sans Flex"/>
+                        </a:rPr>
+                        <a:t>Text-only WAPE (statistical)</a:t>
+                      </a:r>
+                    </a:p>
+                  </a:txBody>
+                  <a:tcPr marL="45720" marR="45720" marT="18288" marB="18288" anchor="ctr">
+                    <a:solidFill>
+                      <a:srgbClr val="202124"/>
+                    </a:solidFill>
+                  </a:tcPr>
+                </a:tc>
+                <a:tc>
+                  <a:txBody>
+                    <a:bodyPr/>
+                    <a:lstStyle/>
+                    <a:p>
+                      <a:pPr algn="ctr">
+                        <a:spcAft>
+                          <a:spcPts val="200"/>
+                        </a:spcAft>
+                      </a:pPr>
+                      <a:r>
+                        <a:rPr sz="800" b="1" i="0">
+                          <a:solidFill>
+                            <a:srgbClr val="FFFFFF"/>
+                          </a:solidFill>
+                          <a:latin typeface="Google Sans Flex"/>
+                          <a:ea typeface="Google Sans Flex"/>
+                          <a:cs typeface="Google Sans Flex"/>
+                          <a:sym typeface="Google Sans Flex"/>
+                        </a:rPr>
+                        <a:t>Assistant checked (first try)</a:t>
+                      </a:r>
+                    </a:p>
+                  </a:txBody>
+                  <a:tcPr marL="45720" marR="45720" marT="18288" marB="18288" anchor="ctr">
+                    <a:solidFill>
+                      <a:srgbClr val="202124"/>
+                    </a:solidFill>
+                  </a:tcPr>
+                </a:tc>
+                <a:tc>
+                  <a:txBody>
+                    <a:bodyPr/>
+                    <a:lstStyle/>
+                    <a:p>
+                      <a:pPr algn="ctr">
+                        <a:spcAft>
+                          <a:spcPts val="200"/>
+                        </a:spcAft>
+                      </a:pPr>
+                      <a:r>
+                        <a:rPr sz="800" b="1" i="0">
+                          <a:solidFill>
+                            <a:srgbClr val="FFFFFF"/>
+                          </a:solidFill>
+                          <a:latin typeface="Google Sans Flex"/>
+                          <a:ea typeface="Google Sans Flex"/>
+                          <a:cs typeface="Google Sans Flex"/>
+                          <a:sym typeface="Google Sans Flex"/>
+                        </a:rPr>
+                        <a:t>Assistant median</a:t>
+                      </a:r>
+                    </a:p>
+                  </a:txBody>
+                  <a:tcPr marL="45720" marR="45720" marT="18288" marB="18288" anchor="ctr">
+                    <a:solidFill>
+                      <a:srgbClr val="202124"/>
+                    </a:solidFill>
+                  </a:tcPr>
+                </a:tc>
+              </a:tr>
+              <a:tr h="274320">
+                <a:tc>
+                  <a:txBody>
+                    <a:bodyPr/>
+                    <a:lstStyle/>
+                    <a:p>
+                      <a:pPr>
+                        <a:spcAft>
+                          <a:spcPts val="200"/>
+                        </a:spcAft>
+                      </a:pPr>
+                      <a:r>
+                        <a:rPr sz="850" b="1" i="0">
+                          <a:solidFill>
+                            <a:srgbClr val="202124"/>
+                          </a:solidFill>
+                          <a:latin typeface="Google Sans Flex"/>
+                          <a:ea typeface="Google Sans Flex"/>
+                          <a:cs typeface="Google Sans Flex"/>
+                          <a:sym typeface="Google Sans Flex"/>
+                        </a:rPr>
+                        <a:t>gpt-5.4-mini (default)</a:t>
+                      </a:r>
+                    </a:p>
+                  </a:txBody>
+                  <a:tcPr marL="45720" marR="45720" marT="18288" marB="18288" anchor="ctr">
+                    <a:solidFill>
+                      <a:srgbClr val="E8F0FE"/>
+                    </a:solidFill>
+                  </a:tcPr>
+                </a:tc>
+                <a:tc>
+                  <a:txBody>
+                    <a:bodyPr/>
+                    <a:lstStyle/>
+                    <a:p>
+                      <a:pPr algn="ctr">
+                        <a:spcAft>
+                          <a:spcPts val="200"/>
+                        </a:spcAft>
+                      </a:pPr>
+                      <a:r>
+                        <a:rPr sz="850" b="0" i="0">
+                          <a:solidFill>
+                            <a:srgbClr val="202124"/>
+                          </a:solidFill>
+                          <a:latin typeface="Google Sans Flex"/>
+                          <a:ea typeface="Google Sans Flex"/>
+                          <a:cs typeface="Google Sans Flex"/>
+                          <a:sym typeface="Google Sans Flex"/>
+                        </a:rPr>
+                        <a:t>0.968</a:t>
+                      </a:r>
+                    </a:p>
+                  </a:txBody>
+                  <a:tcPr marL="45720" marR="45720" marT="18288" marB="18288" anchor="ctr">
+                    <a:solidFill>
+                      <a:srgbClr val="E8F0FE"/>
+                    </a:solidFill>
+                  </a:tcPr>
+                </a:tc>
+                <a:tc>
+                  <a:txBody>
+                    <a:bodyPr/>
+                    <a:lstStyle/>
+                    <a:p>
+                      <a:pPr algn="ctr">
+                        <a:spcAft>
+                          <a:spcPts val="200"/>
+                        </a:spcAft>
+                      </a:pPr>
+                      <a:r>
+                        <a:rPr sz="850" b="0" i="0">
+                          <a:solidFill>
+                            <a:srgbClr val="202124"/>
+                          </a:solidFill>
+                          <a:latin typeface="Google Sans Flex"/>
+                          <a:ea typeface="Google Sans Flex"/>
+                          <a:cs typeface="Google Sans Flex"/>
+                          <a:sym typeface="Google Sans Flex"/>
+                        </a:rPr>
+                        <a:t>95.0%</a:t>
+                      </a:r>
+                    </a:p>
+                  </a:txBody>
+                  <a:tcPr marL="45720" marR="45720" marT="18288" marB="18288" anchor="ctr">
+                    <a:solidFill>
+                      <a:srgbClr val="E8F0FE"/>
+                    </a:solidFill>
+                  </a:tcPr>
+                </a:tc>
+                <a:tc>
+                  <a:txBody>
+                    <a:bodyPr/>
+                    <a:lstStyle/>
+                    <a:p>
+                      <a:pPr algn="ctr">
+                        <a:spcAft>
+                          <a:spcPts val="200"/>
+                        </a:spcAft>
+                      </a:pPr>
+                      <a:r>
+                        <a:rPr sz="850" b="0" i="0">
+                          <a:solidFill>
+                            <a:srgbClr val="202124"/>
+                          </a:solidFill>
+                          <a:latin typeface="Google Sans Flex"/>
+                          <a:ea typeface="Google Sans Flex"/>
+                          <a:cs typeface="Google Sans Flex"/>
+                          <a:sym typeface="Google Sans Flex"/>
+                        </a:rPr>
+                        <a:t>100%</a:t>
+                      </a:r>
+                    </a:p>
+                  </a:txBody>
+                  <a:tcPr marL="45720" marR="45720" marT="18288" marB="18288" anchor="ctr">
+                    <a:solidFill>
+                      <a:srgbClr val="E8F0FE"/>
+                    </a:solidFill>
+                  </a:tcPr>
+                </a:tc>
+                <a:tc>
+                  <a:txBody>
+                    <a:bodyPr/>
+                    <a:lstStyle/>
+                    <a:p>
+                      <a:pPr algn="ctr">
+                        <a:spcAft>
+                          <a:spcPts val="200"/>
+                        </a:spcAft>
+                      </a:pPr>
+                      <a:r>
+                        <a:rPr sz="850" b="0" i="0">
+                          <a:solidFill>
+                            <a:srgbClr val="202124"/>
+                          </a:solidFill>
+                          <a:latin typeface="Google Sans Flex"/>
+                          <a:ea typeface="Google Sans Flex"/>
+                          <a:cs typeface="Google Sans Flex"/>
+                          <a:sym typeface="Google Sans Flex"/>
+                        </a:rPr>
+                        <a:t>21.5% (23.1%)</a:t>
+                      </a:r>
+                    </a:p>
+                  </a:txBody>
+                  <a:tcPr marL="45720" marR="45720" marT="18288" marB="18288" anchor="ctr">
+                    <a:solidFill>
+                      <a:srgbClr val="E8F0FE"/>
+                    </a:solidFill>
+                  </a:tcPr>
+                </a:tc>
+                <a:tc>
+                  <a:txBody>
+                    <a:bodyPr/>
+                    <a:lstStyle/>
+                    <a:p>
+                      <a:pPr algn="ctr">
+                        <a:spcAft>
+                          <a:spcPts val="200"/>
+                        </a:spcAft>
+                      </a:pPr>
+                      <a:r>
+                        <a:rPr sz="850" b="0" i="0">
+                          <a:solidFill>
+                            <a:srgbClr val="202124"/>
+                          </a:solidFill>
+                          <a:latin typeface="Google Sans Flex"/>
+                          <a:ea typeface="Google Sans Flex"/>
+                          <a:cs typeface="Google Sans Flex"/>
+                          <a:sym typeface="Google Sans Flex"/>
+                        </a:rPr>
+                        <a:t>21.9% (24.2%)</a:t>
+                      </a:r>
+                    </a:p>
+                  </a:txBody>
+                  <a:tcPr marL="45720" marR="45720" marT="18288" marB="18288" anchor="ctr">
+                    <a:solidFill>
+                      <a:srgbClr val="E8F0FE"/>
+                    </a:solidFill>
+                  </a:tcPr>
+                </a:tc>
+                <a:tc>
+                  <a:txBody>
+                    <a:bodyPr/>
+                    <a:lstStyle/>
+                    <a:p>
+                      <a:pPr algn="ctr">
+                        <a:spcAft>
+                          <a:spcPts val="200"/>
+                        </a:spcAft>
+                      </a:pPr>
+                      <a:r>
+                        <a:rPr sz="850" b="0" i="0">
+                          <a:solidFill>
+                            <a:srgbClr val="202124"/>
+                          </a:solidFill>
+                          <a:latin typeface="Google Sans Flex"/>
+                          <a:ea typeface="Google Sans Flex"/>
+                          <a:cs typeface="Google Sans Flex"/>
+                          <a:sym typeface="Google Sans Flex"/>
+                        </a:rPr>
+                        <a:t>6/6 (5)</a:t>
+                      </a:r>
+                    </a:p>
+                  </a:txBody>
+                  <a:tcPr marL="45720" marR="45720" marT="18288" marB="18288" anchor="ctr">
+                    <a:solidFill>
+                      <a:srgbClr val="E8F0FE"/>
+                    </a:solidFill>
+                  </a:tcPr>
+                </a:tc>
+                <a:tc>
+                  <a:txBody>
+                    <a:bodyPr/>
+                    <a:lstStyle/>
+                    <a:p>
+                      <a:pPr algn="ctr">
+                        <a:spcAft>
+                          <a:spcPts val="200"/>
+                        </a:spcAft>
+                      </a:pPr>
+                      <a:r>
+                        <a:rPr sz="850" b="0" i="0">
+                          <a:solidFill>
+                            <a:srgbClr val="202124"/>
+                          </a:solidFill>
+                          <a:latin typeface="Google Sans Flex"/>
+                          <a:ea typeface="Google Sans Flex"/>
+                          <a:cs typeface="Google Sans Flex"/>
+                          <a:sym typeface="Google Sans Flex"/>
+                        </a:rPr>
+                        <a:t>3.9 s</a:t>
+                      </a:r>
+                    </a:p>
+                  </a:txBody>
+                  <a:tcPr marL="45720" marR="45720" marT="18288" marB="18288" anchor="ctr">
+                    <a:solidFill>
+                      <a:srgbClr val="E8F0FE"/>
+                    </a:solidFill>
+                  </a:tcPr>
+                </a:tc>
+              </a:tr>
+              <a:tr h="274320">
+                <a:tc>
+                  <a:txBody>
+                    <a:bodyPr/>
+                    <a:lstStyle/>
+                    <a:p>
+                      <a:pPr>
+                        <a:spcAft>
+                          <a:spcPts val="200"/>
+                        </a:spcAft>
+                      </a:pPr>
+                      <a:r>
+                        <a:rPr sz="850" b="1" i="0">
+                          <a:solidFill>
+                            <a:srgbClr val="202124"/>
+                          </a:solidFill>
+                          <a:latin typeface="Google Sans Flex"/>
+                          <a:ea typeface="Google Sans Flex"/>
+                          <a:cs typeface="Google Sans Flex"/>
+                          <a:sym typeface="Google Sans Flex"/>
+                        </a:rPr>
+                        <a:t>claudesonnet4.5</a:t>
+                      </a:r>
+                    </a:p>
+                  </a:txBody>
+                  <a:tcPr marL="45720" marR="45720" marT="18288" marB="18288" anchor="ctr">
+                    <a:solidFill>
+                      <a:srgbClr val="F1F3F4"/>
+                    </a:solidFill>
+                  </a:tcPr>
+                </a:tc>
+                <a:tc>
+                  <a:txBody>
+                    <a:bodyPr/>
+                    <a:lstStyle/>
+                    <a:p>
+                      <a:pPr algn="ctr">
+                        <a:spcAft>
+                          <a:spcPts val="200"/>
+                        </a:spcAft>
+                      </a:pPr>
+                      <a:r>
+                        <a:rPr sz="850" b="0" i="0">
+                          <a:solidFill>
+                            <a:srgbClr val="202124"/>
+                          </a:solidFill>
+                          <a:latin typeface="Google Sans Flex"/>
+                          <a:ea typeface="Google Sans Flex"/>
+                          <a:cs typeface="Google Sans Flex"/>
+                          <a:sym typeface="Google Sans Flex"/>
+                        </a:rPr>
+                        <a:t>1.000</a:t>
+                      </a:r>
+                    </a:p>
+                  </a:txBody>
+                  <a:tcPr marL="45720" marR="45720" marT="18288" marB="18288" anchor="ctr">
+                    <a:solidFill>
+                      <a:srgbClr val="F1F3F4"/>
+                    </a:solidFill>
+                  </a:tcPr>
+                </a:tc>
+                <a:tc>
+                  <a:txBody>
+                    <a:bodyPr/>
+                    <a:lstStyle/>
+                    <a:p>
+                      <a:pPr algn="ctr">
+                        <a:spcAft>
+                          <a:spcPts val="200"/>
+                        </a:spcAft>
+                      </a:pPr>
+                      <a:r>
+                        <a:rPr sz="850" b="0" i="0">
+                          <a:solidFill>
+                            <a:srgbClr val="202124"/>
+                          </a:solidFill>
+                          <a:latin typeface="Google Sans Flex"/>
+                          <a:ea typeface="Google Sans Flex"/>
+                          <a:cs typeface="Google Sans Flex"/>
+                          <a:sym typeface="Google Sans Flex"/>
+                        </a:rPr>
+                        <a:t>100.0%</a:t>
+                      </a:r>
+                    </a:p>
+                  </a:txBody>
+                  <a:tcPr marL="45720" marR="45720" marT="18288" marB="18288" anchor="ctr">
+                    <a:solidFill>
+                      <a:srgbClr val="F1F3F4"/>
+                    </a:solidFill>
+                  </a:tcPr>
+                </a:tc>
+                <a:tc>
+                  <a:txBody>
+                    <a:bodyPr/>
+                    <a:lstStyle/>
+                    <a:p>
+                      <a:pPr algn="ctr">
+                        <a:spcAft>
+                          <a:spcPts val="200"/>
+                        </a:spcAft>
+                      </a:pPr>
+                      <a:r>
+                        <a:rPr sz="850" b="0" i="0">
+                          <a:solidFill>
+                            <a:srgbClr val="202124"/>
+                          </a:solidFill>
+                          <a:latin typeface="Google Sans Flex"/>
+                          <a:ea typeface="Google Sans Flex"/>
+                          <a:cs typeface="Google Sans Flex"/>
+                          <a:sym typeface="Google Sans Flex"/>
+                        </a:rPr>
+                        <a:t>100%</a:t>
+                      </a:r>
+                    </a:p>
+                  </a:txBody>
+                  <a:tcPr marL="45720" marR="45720" marT="18288" marB="18288" anchor="ctr">
+                    <a:solidFill>
+                      <a:srgbClr val="F1F3F4"/>
+                    </a:solidFill>
+                  </a:tcPr>
+                </a:tc>
+                <a:tc>
+                  <a:txBody>
+                    <a:bodyPr/>
+                    <a:lstStyle/>
+                    <a:p>
+                      <a:pPr algn="ctr">
+                        <a:spcAft>
+                          <a:spcPts val="200"/>
+                        </a:spcAft>
+                      </a:pPr>
+                      <a:r>
+                        <a:rPr sz="850" b="0" i="0">
+                          <a:solidFill>
+                            <a:srgbClr val="202124"/>
+                          </a:solidFill>
+                          <a:latin typeface="Google Sans Flex"/>
+                          <a:ea typeface="Google Sans Flex"/>
+                          <a:cs typeface="Google Sans Flex"/>
+                          <a:sym typeface="Google Sans Flex"/>
+                        </a:rPr>
+                        <a:t>20.9% (23.0%)</a:t>
+                      </a:r>
+                    </a:p>
+                  </a:txBody>
+                  <a:tcPr marL="45720" marR="45720" marT="18288" marB="18288" anchor="ctr">
+                    <a:solidFill>
+                      <a:srgbClr val="F1F3F4"/>
+                    </a:solidFill>
+                  </a:tcPr>
+                </a:tc>
+                <a:tc>
+                  <a:txBody>
+                    <a:bodyPr/>
+                    <a:lstStyle/>
+                    <a:p>
+                      <a:pPr algn="ctr">
+                        <a:spcAft>
+                          <a:spcPts val="200"/>
+                        </a:spcAft>
+                      </a:pPr>
+                      <a:r>
+                        <a:rPr sz="850" b="1" i="0">
+                          <a:solidFill>
+                            <a:srgbClr val="202124"/>
+                          </a:solidFill>
+                          <a:latin typeface="Google Sans Flex"/>
+                          <a:ea typeface="Google Sans Flex"/>
+                          <a:cs typeface="Google Sans Flex"/>
+                          <a:sym typeface="Google Sans Flex"/>
+                        </a:rPr>
+                        <a:t>19.0% (23.9%)</a:t>
+                      </a:r>
+                    </a:p>
+                  </a:txBody>
+                  <a:tcPr marL="45720" marR="45720" marT="18288" marB="18288" anchor="ctr">
+                    <a:solidFill>
+                      <a:srgbClr val="F1F3F4"/>
+                    </a:solidFill>
+                  </a:tcPr>
+                </a:tc>
+                <a:tc>
+                  <a:txBody>
+                    <a:bodyPr/>
+                    <a:lstStyle/>
+                    <a:p>
+                      <a:pPr algn="ctr">
+                        <a:spcAft>
+                          <a:spcPts val="200"/>
+                        </a:spcAft>
+                      </a:pPr>
+                      <a:r>
+                        <a:rPr sz="850" b="0" i="0">
+                          <a:solidFill>
+                            <a:srgbClr val="202124"/>
+                          </a:solidFill>
+                          <a:latin typeface="Google Sans Flex"/>
+                          <a:ea typeface="Google Sans Flex"/>
+                          <a:cs typeface="Google Sans Flex"/>
+                          <a:sym typeface="Google Sans Flex"/>
+                        </a:rPr>
+                        <a:t>5/6 (5)</a:t>
+                      </a:r>
+                    </a:p>
+                  </a:txBody>
+                  <a:tcPr marL="45720" marR="45720" marT="18288" marB="18288" anchor="ctr">
+                    <a:solidFill>
+                      <a:srgbClr val="F1F3F4"/>
+                    </a:solidFill>
+                  </a:tcPr>
+                </a:tc>
+                <a:tc>
+                  <a:txBody>
+                    <a:bodyPr/>
+                    <a:lstStyle/>
+                    <a:p>
+                      <a:pPr algn="ctr">
+                        <a:spcAft>
+                          <a:spcPts val="200"/>
+                        </a:spcAft>
+                      </a:pPr>
+                      <a:r>
+                        <a:rPr sz="850" b="0" i="0">
+                          <a:solidFill>
+                            <a:srgbClr val="202124"/>
+                          </a:solidFill>
+                          <a:latin typeface="Google Sans Flex"/>
+                          <a:ea typeface="Google Sans Flex"/>
+                          <a:cs typeface="Google Sans Flex"/>
+                          <a:sym typeface="Google Sans Flex"/>
+                        </a:rPr>
+                        <a:t>10.3 s</a:t>
+                      </a:r>
+                    </a:p>
+                  </a:txBody>
+                  <a:tcPr marL="45720" marR="45720" marT="18288" marB="18288" anchor="ctr">
+                    <a:solidFill>
+                      <a:srgbClr val="F1F3F4"/>
+                    </a:solidFill>
+                  </a:tcPr>
+                </a:tc>
+              </a:tr>
+              <a:tr h="274320">
+                <a:tc>
+                  <a:txBody>
+                    <a:bodyPr/>
+                    <a:lstStyle/>
+                    <a:p>
+                      <a:pPr>
+                        <a:spcAft>
+                          <a:spcPts val="200"/>
+                        </a:spcAft>
+                      </a:pPr>
+                      <a:r>
+                        <a:rPr sz="850" b="1" i="0">
+                          <a:solidFill>
+                            <a:srgbClr val="202124"/>
+                          </a:solidFill>
+                          <a:latin typeface="Google Sans Flex"/>
+                          <a:ea typeface="Google Sans Flex"/>
+                          <a:cs typeface="Google Sans Flex"/>
+                          <a:sym typeface="Google Sans Flex"/>
+                        </a:rPr>
+                        <a:t>gpt-5</a:t>
+                      </a:r>
+                    </a:p>
+                  </a:txBody>
+                  <a:tcPr marL="45720" marR="45720" marT="18288" marB="18288" anchor="ctr">
+                    <a:solidFill>
+                      <a:srgbClr val="FFFFFF"/>
+                    </a:solidFill>
+                  </a:tcPr>
+                </a:tc>
+                <a:tc>
+                  <a:txBody>
+                    <a:bodyPr/>
+                    <a:lstStyle/>
+                    <a:p>
+                      <a:pPr algn="ctr">
+                        <a:spcAft>
+                          <a:spcPts val="200"/>
+                        </a:spcAft>
+                      </a:pPr>
+                      <a:r>
+                        <a:rPr sz="850" b="0" i="0">
+                          <a:solidFill>
+                            <a:srgbClr val="202124"/>
+                          </a:solidFill>
+                          <a:latin typeface="Google Sans Flex"/>
+                          <a:ea typeface="Google Sans Flex"/>
+                          <a:cs typeface="Google Sans Flex"/>
+                          <a:sym typeface="Google Sans Flex"/>
+                        </a:rPr>
+                        <a:t>0.983</a:t>
+                      </a:r>
+                    </a:p>
+                  </a:txBody>
+                  <a:tcPr marL="45720" marR="45720" marT="18288" marB="18288" anchor="ctr">
+                    <a:solidFill>
+                      <a:srgbClr val="FFFFFF"/>
+                    </a:solidFill>
+                  </a:tcPr>
+                </a:tc>
+                <a:tc>
+                  <a:txBody>
+                    <a:bodyPr/>
+                    <a:lstStyle/>
+                    <a:p>
+                      <a:pPr algn="ctr">
+                        <a:spcAft>
+                          <a:spcPts val="200"/>
+                        </a:spcAft>
+                      </a:pPr>
+                      <a:r>
+                        <a:rPr sz="850" b="0" i="0">
+                          <a:solidFill>
+                            <a:srgbClr val="202124"/>
+                          </a:solidFill>
+                          <a:latin typeface="Google Sans Flex"/>
+                          <a:ea typeface="Google Sans Flex"/>
+                          <a:cs typeface="Google Sans Flex"/>
+                          <a:sym typeface="Google Sans Flex"/>
+                        </a:rPr>
+                        <a:t>97.5%</a:t>
+                      </a:r>
+                    </a:p>
+                  </a:txBody>
+                  <a:tcPr marL="45720" marR="45720" marT="18288" marB="18288" anchor="ctr">
+                    <a:solidFill>
+                      <a:srgbClr val="FFFFFF"/>
+                    </a:solidFill>
+                  </a:tcPr>
+                </a:tc>
+                <a:tc>
+                  <a:txBody>
+                    <a:bodyPr/>
+                    <a:lstStyle/>
+                    <a:p>
+                      <a:pPr algn="ctr">
+                        <a:spcAft>
+                          <a:spcPts val="200"/>
+                        </a:spcAft>
+                      </a:pPr>
+                      <a:r>
+                        <a:rPr sz="850" b="0" i="0">
+                          <a:solidFill>
+                            <a:srgbClr val="202124"/>
+                          </a:solidFill>
+                          <a:latin typeface="Google Sans Flex"/>
+                          <a:ea typeface="Google Sans Flex"/>
+                          <a:cs typeface="Google Sans Flex"/>
+                          <a:sym typeface="Google Sans Flex"/>
+                        </a:rPr>
+                        <a:t>100%</a:t>
+                      </a:r>
+                    </a:p>
+                  </a:txBody>
+                  <a:tcPr marL="45720" marR="45720" marT="18288" marB="18288" anchor="ctr">
+                    <a:solidFill>
+                      <a:srgbClr val="FFFFFF"/>
+                    </a:solidFill>
+                  </a:tcPr>
+                </a:tc>
+                <a:tc>
+                  <a:txBody>
+                    <a:bodyPr/>
+                    <a:lstStyle/>
+                    <a:p>
+                      <a:pPr algn="ctr">
+                        <a:spcAft>
+                          <a:spcPts val="200"/>
+                        </a:spcAft>
+                      </a:pPr>
+                      <a:r>
+                        <a:rPr sz="850" b="0" i="0">
+                          <a:solidFill>
+                            <a:srgbClr val="202124"/>
+                          </a:solidFill>
+                          <a:latin typeface="Google Sans Flex"/>
+                          <a:ea typeface="Google Sans Flex"/>
+                          <a:cs typeface="Google Sans Flex"/>
+                          <a:sym typeface="Google Sans Flex"/>
+                        </a:rPr>
+                        <a:t>21.0% (23.2%)</a:t>
+                      </a:r>
+                    </a:p>
+                  </a:txBody>
+                  <a:tcPr marL="45720" marR="45720" marT="18288" marB="18288" anchor="ctr">
+                    <a:solidFill>
+                      <a:srgbClr val="FFFFFF"/>
+                    </a:solidFill>
+                  </a:tcPr>
+                </a:tc>
+                <a:tc>
+                  <a:txBody>
+                    <a:bodyPr/>
+                    <a:lstStyle/>
+                    <a:p>
+                      <a:pPr algn="ctr">
+                        <a:spcAft>
+                          <a:spcPts val="200"/>
+                        </a:spcAft>
+                      </a:pPr>
+                      <a:r>
+                        <a:rPr sz="850" b="0" i="0">
+                          <a:solidFill>
+                            <a:srgbClr val="202124"/>
+                          </a:solidFill>
+                          <a:latin typeface="Google Sans Flex"/>
+                          <a:ea typeface="Google Sans Flex"/>
+                          <a:cs typeface="Google Sans Flex"/>
+                          <a:sym typeface="Google Sans Flex"/>
+                        </a:rPr>
+                        <a:t>19.2% (23.9%)</a:t>
+                      </a:r>
+                    </a:p>
+                  </a:txBody>
+                  <a:tcPr marL="45720" marR="45720" marT="18288" marB="18288" anchor="ctr">
+                    <a:solidFill>
+                      <a:srgbClr val="FFFFFF"/>
+                    </a:solidFill>
+                  </a:tcPr>
+                </a:tc>
+                <a:tc>
+                  <a:txBody>
+                    <a:bodyPr/>
+                    <a:lstStyle/>
+                    <a:p>
+                      <a:pPr algn="ctr">
+                        <a:spcAft>
+                          <a:spcPts val="200"/>
+                        </a:spcAft>
+                      </a:pPr>
+                      <a:r>
+                        <a:rPr sz="850" b="0" i="0">
+                          <a:solidFill>
+                            <a:srgbClr val="202124"/>
+                          </a:solidFill>
+                          <a:latin typeface="Google Sans Flex"/>
+                          <a:ea typeface="Google Sans Flex"/>
+                          <a:cs typeface="Google Sans Flex"/>
+                          <a:sym typeface="Google Sans Flex"/>
+                        </a:rPr>
+                        <a:t>6/6 (6)</a:t>
+                      </a:r>
+                    </a:p>
+                  </a:txBody>
+                  <a:tcPr marL="45720" marR="45720" marT="18288" marB="18288" anchor="ctr">
+                    <a:solidFill>
+                      <a:srgbClr val="FFFFFF"/>
+                    </a:solidFill>
+                  </a:tcPr>
+                </a:tc>
+                <a:tc>
+                  <a:txBody>
+                    <a:bodyPr/>
+                    <a:lstStyle/>
+                    <a:p>
+                      <a:pPr algn="ctr">
+                        <a:spcAft>
+                          <a:spcPts val="200"/>
+                        </a:spcAft>
+                      </a:pPr>
+                      <a:r>
+                        <a:rPr sz="850" b="0" i="0">
+                          <a:solidFill>
+                            <a:srgbClr val="202124"/>
+                          </a:solidFill>
+                          <a:latin typeface="Google Sans Flex"/>
+                          <a:ea typeface="Google Sans Flex"/>
+                          <a:cs typeface="Google Sans Flex"/>
+                          <a:sym typeface="Google Sans Flex"/>
+                        </a:rPr>
+                        <a:t>30.4 s</a:t>
+                      </a:r>
+                    </a:p>
+                  </a:txBody>
+                  <a:tcPr marL="45720" marR="45720" marT="18288" marB="18288" anchor="ctr">
+                    <a:solidFill>
+                      <a:srgbClr val="FFFFFF"/>
+                    </a:solidFill>
+                  </a:tcPr>
+                </a:tc>
+              </a:tr>
+              <a:tr h="274320">
+                <a:tc>
+                  <a:txBody>
+                    <a:bodyPr/>
+                    <a:lstStyle/>
+                    <a:p>
+                      <a:pPr>
+                        <a:spcAft>
+                          <a:spcPts val="200"/>
+                        </a:spcAft>
+                      </a:pPr>
+                      <a:r>
+                        <a:rPr sz="850" b="1" i="0">
+                          <a:solidFill>
+                            <a:srgbClr val="202124"/>
+                          </a:solidFill>
+                          <a:latin typeface="Google Sans Flex"/>
+                          <a:ea typeface="Google Sans Flex"/>
+                          <a:cs typeface="Google Sans Flex"/>
+                          <a:sym typeface="Google Sans Flex"/>
+                        </a:rPr>
+                        <a:t>gpt-5.1</a:t>
+                      </a:r>
+                    </a:p>
+                  </a:txBody>
+                  <a:tcPr marL="45720" marR="45720" marT="18288" marB="18288" anchor="ctr">
+                    <a:solidFill>
+                      <a:srgbClr val="F1F3F4"/>
+                    </a:solidFill>
+                  </a:tcPr>
+                </a:tc>
+                <a:tc>
+                  <a:txBody>
+                    <a:bodyPr/>
+                    <a:lstStyle/>
+                    <a:p>
+                      <a:pPr algn="ctr">
+                        <a:spcAft>
+                          <a:spcPts val="200"/>
+                        </a:spcAft>
+                      </a:pPr>
+                      <a:r>
+                        <a:rPr sz="850" b="0" i="0">
+                          <a:solidFill>
+                            <a:srgbClr val="202124"/>
+                          </a:solidFill>
+                          <a:latin typeface="Google Sans Flex"/>
+                          <a:ea typeface="Google Sans Flex"/>
+                          <a:cs typeface="Google Sans Flex"/>
+                          <a:sym typeface="Google Sans Flex"/>
+                        </a:rPr>
+                        <a:t>0.983</a:t>
+                      </a:r>
+                    </a:p>
+                  </a:txBody>
+                  <a:tcPr marL="45720" marR="45720" marT="18288" marB="18288" anchor="ctr">
+                    <a:solidFill>
+                      <a:srgbClr val="F1F3F4"/>
+                    </a:solidFill>
+                  </a:tcPr>
+                </a:tc>
+                <a:tc>
+                  <a:txBody>
+                    <a:bodyPr/>
+                    <a:lstStyle/>
+                    <a:p>
+                      <a:pPr algn="ctr">
+                        <a:spcAft>
+                          <a:spcPts val="200"/>
+                        </a:spcAft>
+                      </a:pPr>
+                      <a:r>
+                        <a:rPr sz="850" b="0" i="0">
+                          <a:solidFill>
+                            <a:srgbClr val="202124"/>
+                          </a:solidFill>
+                          <a:latin typeface="Google Sans Flex"/>
+                          <a:ea typeface="Google Sans Flex"/>
+                          <a:cs typeface="Google Sans Flex"/>
+                          <a:sym typeface="Google Sans Flex"/>
+                        </a:rPr>
+                        <a:t>97.5%</a:t>
+                      </a:r>
+                    </a:p>
+                  </a:txBody>
+                  <a:tcPr marL="45720" marR="45720" marT="18288" marB="18288" anchor="ctr">
+                    <a:solidFill>
+                      <a:srgbClr val="F1F3F4"/>
+                    </a:solidFill>
+                  </a:tcPr>
+                </a:tc>
+                <a:tc>
+                  <a:txBody>
+                    <a:bodyPr/>
+                    <a:lstStyle/>
+                    <a:p>
+                      <a:pPr algn="ctr">
+                        <a:spcAft>
+                          <a:spcPts val="200"/>
+                        </a:spcAft>
+                      </a:pPr>
+                      <a:r>
+                        <a:rPr sz="850" b="0" i="0">
+                          <a:solidFill>
+                            <a:srgbClr val="202124"/>
+                          </a:solidFill>
+                          <a:latin typeface="Google Sans Flex"/>
+                          <a:ea typeface="Google Sans Flex"/>
+                          <a:cs typeface="Google Sans Flex"/>
+                          <a:sym typeface="Google Sans Flex"/>
+                        </a:rPr>
+                        <a:t>100%</a:t>
+                      </a:r>
+                    </a:p>
+                  </a:txBody>
+                  <a:tcPr marL="45720" marR="45720" marT="18288" marB="18288" anchor="ctr">
+                    <a:solidFill>
+                      <a:srgbClr val="F1F3F4"/>
+                    </a:solidFill>
+                  </a:tcPr>
+                </a:tc>
+                <a:tc>
+                  <a:txBody>
+                    <a:bodyPr/>
+                    <a:lstStyle/>
+                    <a:p>
+                      <a:pPr algn="ctr">
+                        <a:spcAft>
+                          <a:spcPts val="200"/>
+                        </a:spcAft>
+                      </a:pPr>
+                      <a:r>
+                        <a:rPr sz="850" b="0" i="0">
+                          <a:solidFill>
+                            <a:srgbClr val="202124"/>
+                          </a:solidFill>
+                          <a:latin typeface="Google Sans Flex"/>
+                          <a:ea typeface="Google Sans Flex"/>
+                          <a:cs typeface="Google Sans Flex"/>
+                          <a:sym typeface="Google Sans Flex"/>
+                        </a:rPr>
+                        <a:t>20.9% (23.0%)</a:t>
+                      </a:r>
+                    </a:p>
+                  </a:txBody>
+                  <a:tcPr marL="45720" marR="45720" marT="18288" marB="18288" anchor="ctr">
+                    <a:solidFill>
+                      <a:srgbClr val="F1F3F4"/>
+                    </a:solidFill>
+                  </a:tcPr>
+                </a:tc>
+                <a:tc>
+                  <a:txBody>
+                    <a:bodyPr/>
+                    <a:lstStyle/>
+                    <a:p>
+                      <a:pPr algn="ctr">
+                        <a:spcAft>
+                          <a:spcPts val="200"/>
+                        </a:spcAft>
+                      </a:pPr>
+                      <a:r>
+                        <a:rPr sz="850" b="0" i="0">
+                          <a:solidFill>
+                            <a:srgbClr val="202124"/>
+                          </a:solidFill>
+                          <a:latin typeface="Google Sans Flex"/>
+                          <a:ea typeface="Google Sans Flex"/>
+                          <a:cs typeface="Google Sans Flex"/>
+                          <a:sym typeface="Google Sans Flex"/>
+                        </a:rPr>
+                        <a:t>19.6% (23.9%)</a:t>
+                      </a:r>
+                    </a:p>
+                  </a:txBody>
+                  <a:tcPr marL="45720" marR="45720" marT="18288" marB="18288" anchor="ctr">
+                    <a:solidFill>
+                      <a:srgbClr val="F1F3F4"/>
+                    </a:solidFill>
+                  </a:tcPr>
+                </a:tc>
+                <a:tc>
+                  <a:txBody>
+                    <a:bodyPr/>
+                    <a:lstStyle/>
+                    <a:p>
+                      <a:pPr algn="ctr">
+                        <a:spcAft>
+                          <a:spcPts val="200"/>
+                        </a:spcAft>
+                      </a:pPr>
+                      <a:r>
+                        <a:rPr sz="850" b="0" i="0">
+                          <a:solidFill>
+                            <a:srgbClr val="202124"/>
+                          </a:solidFill>
+                          <a:latin typeface="Google Sans Flex"/>
+                          <a:ea typeface="Google Sans Flex"/>
+                          <a:cs typeface="Google Sans Flex"/>
+                          <a:sym typeface="Google Sans Flex"/>
+                        </a:rPr>
+                        <a:t>6/6 (6)</a:t>
+                      </a:r>
+                    </a:p>
+                  </a:txBody>
+                  <a:tcPr marL="45720" marR="45720" marT="18288" marB="18288" anchor="ctr">
+                    <a:solidFill>
+                      <a:srgbClr val="F1F3F4"/>
+                    </a:solidFill>
+                  </a:tcPr>
+                </a:tc>
+                <a:tc>
+                  <a:txBody>
+                    <a:bodyPr/>
+                    <a:lstStyle/>
+                    <a:p>
+                      <a:pPr algn="ctr">
+                        <a:spcAft>
+                          <a:spcPts val="200"/>
+                        </a:spcAft>
+                      </a:pPr>
+                      <a:r>
+                        <a:rPr sz="850" b="0" i="0">
+                          <a:solidFill>
+                            <a:srgbClr val="202124"/>
+                          </a:solidFill>
+                          <a:latin typeface="Google Sans Flex"/>
+                          <a:ea typeface="Google Sans Flex"/>
+                          <a:cs typeface="Google Sans Flex"/>
+                          <a:sym typeface="Google Sans Flex"/>
+                        </a:rPr>
+                        <a:t>11.9 s</a:t>
+                      </a:r>
+                    </a:p>
+                  </a:txBody>
+                  <a:tcPr marL="45720" marR="45720" marT="18288" marB="18288" anchor="ctr">
+                    <a:solidFill>
+                      <a:srgbClr val="F1F3F4"/>
+                    </a:solidFill>
+                  </a:tcPr>
+                </a:tc>
+              </a:tr>
+              <a:tr h="274320">
+                <a:tc>
+                  <a:txBody>
+                    <a:bodyPr/>
+                    <a:lstStyle/>
+                    <a:p>
+                      <a:pPr>
+                        <a:spcAft>
+                          <a:spcPts val="200"/>
+                        </a:spcAft>
+                      </a:pPr>
+                      <a:r>
+                        <a:rPr sz="850" b="1" i="0">
+                          <a:solidFill>
+                            <a:srgbClr val="202124"/>
+                          </a:solidFill>
+                          <a:latin typeface="Google Sans Flex"/>
+                          <a:ea typeface="Google Sans Flex"/>
+                          <a:cs typeface="Google Sans Flex"/>
+                          <a:sym typeface="Google Sans Flex"/>
+                        </a:rPr>
+                        <a:t>claudesonnet4.6</a:t>
+                      </a:r>
+                    </a:p>
+                  </a:txBody>
+                  <a:tcPr marL="45720" marR="45720" marT="18288" marB="18288" anchor="ctr">
+                    <a:solidFill>
+                      <a:srgbClr val="FFFFFF"/>
+                    </a:solidFill>
+                  </a:tcPr>
+                </a:tc>
+                <a:tc>
+                  <a:txBody>
+                    <a:bodyPr/>
+                    <a:lstStyle/>
+                    <a:p>
+                      <a:pPr algn="ctr">
+                        <a:spcAft>
+                          <a:spcPts val="200"/>
+                        </a:spcAft>
+                      </a:pPr>
+                      <a:r>
+                        <a:rPr sz="850" b="0" i="0">
+                          <a:solidFill>
+                            <a:srgbClr val="202124"/>
+                          </a:solidFill>
+                          <a:latin typeface="Google Sans Flex"/>
+                          <a:ea typeface="Google Sans Flex"/>
+                          <a:cs typeface="Google Sans Flex"/>
+                          <a:sym typeface="Google Sans Flex"/>
+                        </a:rPr>
+                        <a:t>0.983</a:t>
+                      </a:r>
+                    </a:p>
+                  </a:txBody>
+                  <a:tcPr marL="45720" marR="45720" marT="18288" marB="18288" anchor="ctr">
+                    <a:solidFill>
+                      <a:srgbClr val="FFFFFF"/>
+                    </a:solidFill>
+                  </a:tcPr>
+                </a:tc>
+                <a:tc>
+                  <a:txBody>
+                    <a:bodyPr/>
+                    <a:lstStyle/>
+                    <a:p>
+                      <a:pPr algn="ctr">
+                        <a:spcAft>
+                          <a:spcPts val="200"/>
+                        </a:spcAft>
+                      </a:pPr>
+                      <a:r>
+                        <a:rPr sz="850" b="0" i="0">
+                          <a:solidFill>
+                            <a:srgbClr val="202124"/>
+                          </a:solidFill>
+                          <a:latin typeface="Google Sans Flex"/>
+                          <a:ea typeface="Google Sans Flex"/>
+                          <a:cs typeface="Google Sans Flex"/>
+                          <a:sym typeface="Google Sans Flex"/>
+                        </a:rPr>
+                        <a:t>97.5%</a:t>
+                      </a:r>
+                    </a:p>
+                  </a:txBody>
+                  <a:tcPr marL="45720" marR="45720" marT="18288" marB="18288" anchor="ctr">
+                    <a:solidFill>
+                      <a:srgbClr val="FFFFFF"/>
+                    </a:solidFill>
+                  </a:tcPr>
+                </a:tc>
+                <a:tc>
+                  <a:txBody>
+                    <a:bodyPr/>
+                    <a:lstStyle/>
+                    <a:p>
+                      <a:pPr algn="ctr">
+                        <a:spcAft>
+                          <a:spcPts val="200"/>
+                        </a:spcAft>
+                      </a:pPr>
+                      <a:r>
+                        <a:rPr sz="850" b="0" i="0">
+                          <a:solidFill>
+                            <a:srgbClr val="202124"/>
+                          </a:solidFill>
+                          <a:latin typeface="Google Sans Flex"/>
+                          <a:ea typeface="Google Sans Flex"/>
+                          <a:cs typeface="Google Sans Flex"/>
+                          <a:sym typeface="Google Sans Flex"/>
+                        </a:rPr>
+                        <a:t>100%</a:t>
+                      </a:r>
+                    </a:p>
+                  </a:txBody>
+                  <a:tcPr marL="45720" marR="45720" marT="18288" marB="18288" anchor="ctr">
+                    <a:solidFill>
+                      <a:srgbClr val="FFFFFF"/>
+                    </a:solidFill>
+                  </a:tcPr>
+                </a:tc>
+                <a:tc>
+                  <a:txBody>
+                    <a:bodyPr/>
+                    <a:lstStyle/>
+                    <a:p>
+                      <a:pPr algn="ctr">
+                        <a:spcAft>
+                          <a:spcPts val="200"/>
+                        </a:spcAft>
+                      </a:pPr>
+                      <a:r>
+                        <a:rPr sz="850" b="0" i="0">
+                          <a:solidFill>
+                            <a:srgbClr val="202124"/>
+                          </a:solidFill>
+                          <a:latin typeface="Google Sans Flex"/>
+                          <a:ea typeface="Google Sans Flex"/>
+                          <a:cs typeface="Google Sans Flex"/>
+                          <a:sym typeface="Google Sans Flex"/>
+                        </a:rPr>
+                        <a:t>21.6% (23.0%)</a:t>
+                      </a:r>
+                    </a:p>
+                  </a:txBody>
+                  <a:tcPr marL="45720" marR="45720" marT="18288" marB="18288" anchor="ctr">
+                    <a:solidFill>
+                      <a:srgbClr val="FFFFFF"/>
+                    </a:solidFill>
+                  </a:tcPr>
+                </a:tc>
+                <a:tc>
+                  <a:txBody>
+                    <a:bodyPr/>
+                    <a:lstStyle/>
+                    <a:p>
+                      <a:pPr algn="ctr">
+                        <a:spcAft>
+                          <a:spcPts val="200"/>
+                        </a:spcAft>
+                      </a:pPr>
+                      <a:r>
+                        <a:rPr sz="850" b="0" i="0">
+                          <a:solidFill>
+                            <a:srgbClr val="202124"/>
+                          </a:solidFill>
+                          <a:latin typeface="Google Sans Flex"/>
+                          <a:ea typeface="Google Sans Flex"/>
+                          <a:cs typeface="Google Sans Flex"/>
+                          <a:sym typeface="Google Sans Flex"/>
+                        </a:rPr>
+                        <a:t>20.1% (23.9%)</a:t>
+                      </a:r>
+                    </a:p>
+                  </a:txBody>
+                  <a:tcPr marL="45720" marR="45720" marT="18288" marB="18288" anchor="ctr">
+                    <a:solidFill>
+                      <a:srgbClr val="FFFFFF"/>
+                    </a:solidFill>
+                  </a:tcPr>
+                </a:tc>
+                <a:tc>
+                  <a:txBody>
+                    <a:bodyPr/>
+                    <a:lstStyle/>
+                    <a:p>
+                      <a:pPr algn="ctr">
+                        <a:spcAft>
+                          <a:spcPts val="200"/>
+                        </a:spcAft>
+                      </a:pPr>
+                      <a:r>
+                        <a:rPr sz="850" b="0" i="0">
+                          <a:solidFill>
+                            <a:srgbClr val="202124"/>
+                          </a:solidFill>
+                          <a:latin typeface="Google Sans Flex"/>
+                          <a:ea typeface="Google Sans Flex"/>
+                          <a:cs typeface="Google Sans Flex"/>
+                          <a:sym typeface="Google Sans Flex"/>
+                        </a:rPr>
+                        <a:t>6/6 (5)</a:t>
+                      </a:r>
+                    </a:p>
+                  </a:txBody>
+                  <a:tcPr marL="45720" marR="45720" marT="18288" marB="18288" anchor="ctr">
+                    <a:solidFill>
+                      <a:srgbClr val="FFFFFF"/>
+                    </a:solidFill>
+                  </a:tcPr>
+                </a:tc>
+                <a:tc>
+                  <a:txBody>
+                    <a:bodyPr/>
+                    <a:lstStyle/>
+                    <a:p>
+                      <a:pPr algn="ctr">
+                        <a:spcAft>
+                          <a:spcPts val="200"/>
+                        </a:spcAft>
+                      </a:pPr>
+                      <a:r>
+                        <a:rPr sz="850" b="0" i="0">
+                          <a:solidFill>
+                            <a:srgbClr val="202124"/>
+                          </a:solidFill>
+                          <a:latin typeface="Google Sans Flex"/>
+                          <a:ea typeface="Google Sans Flex"/>
+                          <a:cs typeface="Google Sans Flex"/>
+                          <a:sym typeface="Google Sans Flex"/>
+                        </a:rPr>
+                        <a:t>10.3 s</a:t>
+                      </a:r>
+                    </a:p>
+                  </a:txBody>
+                  <a:tcPr marL="45720" marR="45720" marT="18288" marB="18288" anchor="ctr">
+                    <a:solidFill>
+                      <a:srgbClr val="FFFFFF"/>
+                    </a:solidFill>
+                  </a:tcPr>
+                </a:tc>
+              </a:tr>
+              <a:tr h="274320">
+                <a:tc>
+                  <a:txBody>
+                    <a:bodyPr/>
+                    <a:lstStyle/>
+                    <a:p>
+                      <a:pPr>
+                        <a:spcAft>
+                          <a:spcPts val="200"/>
+                        </a:spcAft>
+                      </a:pPr>
+                      <a:r>
+                        <a:rPr sz="850" b="1" i="0">
+                          <a:solidFill>
+                            <a:srgbClr val="202124"/>
+                          </a:solidFill>
+                          <a:latin typeface="Google Sans Flex"/>
+                          <a:ea typeface="Google Sans Flex"/>
+                          <a:cs typeface="Google Sans Flex"/>
+                          <a:sym typeface="Google Sans Flex"/>
+                        </a:rPr>
+                        <a:t>qwen3.6-27b</a:t>
+                      </a:r>
+                    </a:p>
+                  </a:txBody>
+                  <a:tcPr marL="45720" marR="45720" marT="18288" marB="18288" anchor="ctr">
+                    <a:solidFill>
+                      <a:srgbClr val="F1F3F4"/>
+                    </a:solidFill>
+                  </a:tcPr>
+                </a:tc>
+                <a:tc>
+                  <a:txBody>
+                    <a:bodyPr/>
+                    <a:lstStyle/>
+                    <a:p>
+                      <a:pPr algn="ctr">
+                        <a:spcAft>
+                          <a:spcPts val="200"/>
+                        </a:spcAft>
+                      </a:pPr>
+                      <a:r>
+                        <a:rPr sz="850" b="0" i="0">
+                          <a:solidFill>
+                            <a:srgbClr val="202124"/>
+                          </a:solidFill>
+                          <a:latin typeface="Google Sans Flex"/>
+                          <a:ea typeface="Google Sans Flex"/>
+                          <a:cs typeface="Google Sans Flex"/>
+                          <a:sym typeface="Google Sans Flex"/>
+                        </a:rPr>
+                        <a:t>0.966</a:t>
+                      </a:r>
+                    </a:p>
+                  </a:txBody>
+                  <a:tcPr marL="45720" marR="45720" marT="18288" marB="18288" anchor="ctr">
+                    <a:solidFill>
+                      <a:srgbClr val="F1F3F4"/>
+                    </a:solidFill>
+                  </a:tcPr>
+                </a:tc>
+                <a:tc>
+                  <a:txBody>
+                    <a:bodyPr/>
+                    <a:lstStyle/>
+                    <a:p>
+                      <a:pPr algn="ctr">
+                        <a:spcAft>
+                          <a:spcPts val="200"/>
+                        </a:spcAft>
+                      </a:pPr>
+                      <a:r>
+                        <a:rPr sz="850" b="0" i="0">
+                          <a:solidFill>
+                            <a:srgbClr val="202124"/>
+                          </a:solidFill>
+                          <a:latin typeface="Google Sans Flex"/>
+                          <a:ea typeface="Google Sans Flex"/>
+                          <a:cs typeface="Google Sans Flex"/>
+                          <a:sym typeface="Google Sans Flex"/>
+                        </a:rPr>
+                        <a:t>95.0%</a:t>
+                      </a:r>
+                    </a:p>
+                  </a:txBody>
+                  <a:tcPr marL="45720" marR="45720" marT="18288" marB="18288" anchor="ctr">
+                    <a:solidFill>
+                      <a:srgbClr val="F1F3F4"/>
+                    </a:solidFill>
+                  </a:tcPr>
+                </a:tc>
+                <a:tc>
+                  <a:txBody>
+                    <a:bodyPr/>
+                    <a:lstStyle/>
+                    <a:p>
+                      <a:pPr algn="ctr">
+                        <a:spcAft>
+                          <a:spcPts val="200"/>
+                        </a:spcAft>
+                      </a:pPr>
+                      <a:r>
+                        <a:rPr sz="850" b="0" i="0">
+                          <a:solidFill>
+                            <a:srgbClr val="202124"/>
+                          </a:solidFill>
+                          <a:latin typeface="Google Sans Flex"/>
+                          <a:ea typeface="Google Sans Flex"/>
+                          <a:cs typeface="Google Sans Flex"/>
+                          <a:sym typeface="Google Sans Flex"/>
+                        </a:rPr>
+                        <a:t>100%</a:t>
+                      </a:r>
+                    </a:p>
+                  </a:txBody>
+                  <a:tcPr marL="45720" marR="45720" marT="18288" marB="18288" anchor="ctr">
+                    <a:solidFill>
+                      <a:srgbClr val="F1F3F4"/>
+                    </a:solidFill>
+                  </a:tcPr>
+                </a:tc>
+                <a:tc>
+                  <a:txBody>
+                    <a:bodyPr/>
+                    <a:lstStyle/>
+                    <a:p>
+                      <a:pPr algn="ctr">
+                        <a:spcAft>
+                          <a:spcPts val="200"/>
+                        </a:spcAft>
+                      </a:pPr>
+                      <a:r>
+                        <a:rPr sz="850" b="0" i="0">
+                          <a:solidFill>
+                            <a:srgbClr val="202124"/>
+                          </a:solidFill>
+                          <a:latin typeface="Google Sans Flex"/>
+                          <a:ea typeface="Google Sans Flex"/>
+                          <a:cs typeface="Google Sans Flex"/>
+                          <a:sym typeface="Google Sans Flex"/>
+                        </a:rPr>
+                        <a:t>21.0% (23.0%)</a:t>
+                      </a:r>
+                    </a:p>
+                  </a:txBody>
+                  <a:tcPr marL="45720" marR="45720" marT="18288" marB="18288" anchor="ctr">
+                    <a:solidFill>
+                      <a:srgbClr val="F1F3F4"/>
+                    </a:solidFill>
+                  </a:tcPr>
+                </a:tc>
+                <a:tc>
+                  <a:txBody>
+                    <a:bodyPr/>
+                    <a:lstStyle/>
+                    <a:p>
+                      <a:pPr algn="ctr">
+                        <a:spcAft>
+                          <a:spcPts val="200"/>
+                        </a:spcAft>
+                      </a:pPr>
+                      <a:r>
+                        <a:rPr sz="850" b="0" i="0">
+                          <a:solidFill>
+                            <a:srgbClr val="202124"/>
+                          </a:solidFill>
+                          <a:latin typeface="Google Sans Flex"/>
+                          <a:ea typeface="Google Sans Flex"/>
+                          <a:cs typeface="Google Sans Flex"/>
+                          <a:sym typeface="Google Sans Flex"/>
+                        </a:rPr>
+                        <a:t>20.2% (23.9%)</a:t>
+                      </a:r>
+                    </a:p>
+                  </a:txBody>
+                  <a:tcPr marL="45720" marR="45720" marT="18288" marB="18288" anchor="ctr">
+                    <a:solidFill>
+                      <a:srgbClr val="F1F3F4"/>
+                    </a:solidFill>
+                  </a:tcPr>
+                </a:tc>
+                <a:tc>
+                  <a:txBody>
+                    <a:bodyPr/>
+                    <a:lstStyle/>
+                    <a:p>
+                      <a:pPr algn="ctr">
+                        <a:spcAft>
+                          <a:spcPts val="200"/>
+                        </a:spcAft>
+                      </a:pPr>
+                      <a:r>
+                        <a:rPr sz="850" b="0" i="0">
+                          <a:solidFill>
+                            <a:srgbClr val="202124"/>
+                          </a:solidFill>
+                          <a:latin typeface="Google Sans Flex"/>
+                          <a:ea typeface="Google Sans Flex"/>
+                          <a:cs typeface="Google Sans Flex"/>
+                          <a:sym typeface="Google Sans Flex"/>
+                        </a:rPr>
+                        <a:t>6/6 (5)</a:t>
+                      </a:r>
+                    </a:p>
+                  </a:txBody>
+                  <a:tcPr marL="45720" marR="45720" marT="18288" marB="18288" anchor="ctr">
+                    <a:solidFill>
+                      <a:srgbClr val="F1F3F4"/>
+                    </a:solidFill>
+                  </a:tcPr>
+                </a:tc>
+                <a:tc>
+                  <a:txBody>
+                    <a:bodyPr/>
+                    <a:lstStyle/>
+                    <a:p>
+                      <a:pPr algn="ctr">
+                        <a:spcAft>
+                          <a:spcPts val="200"/>
+                        </a:spcAft>
+                      </a:pPr>
+                      <a:r>
+                        <a:rPr sz="850" b="0" i="0">
+                          <a:solidFill>
+                            <a:srgbClr val="202124"/>
+                          </a:solidFill>
+                          <a:latin typeface="Google Sans Flex"/>
+                          <a:ea typeface="Google Sans Flex"/>
+                          <a:cs typeface="Google Sans Flex"/>
+                          <a:sym typeface="Google Sans Flex"/>
+                        </a:rPr>
+                        <a:t>8.8 s</a:t>
+                      </a:r>
+                    </a:p>
+                  </a:txBody>
+                  <a:tcPr marL="45720" marR="45720" marT="18288" marB="18288" anchor="ctr">
+                    <a:solidFill>
+                      <a:srgbClr val="F1F3F4"/>
+                    </a:solidFill>
+                  </a:tcPr>
+                </a:tc>
+              </a:tr>
+              <a:tr h="274320">
+                <a:tc>
+                  <a:txBody>
+                    <a:bodyPr/>
+                    <a:lstStyle/>
+                    <a:p>
+                      <a:pPr>
+                        <a:spcAft>
+                          <a:spcPts val="200"/>
+                        </a:spcAft>
+                      </a:pPr>
+                      <a:r>
+                        <a:rPr sz="850" b="1" i="0">
+                          <a:solidFill>
+                            <a:srgbClr val="202124"/>
+                          </a:solidFill>
+                          <a:latin typeface="Google Sans Flex"/>
+                          <a:ea typeface="Google Sans Flex"/>
+                          <a:cs typeface="Google Sans Flex"/>
+                          <a:sym typeface="Google Sans Flex"/>
+                        </a:rPr>
+                        <a:t>claudeopus5</a:t>
+                      </a:r>
+                    </a:p>
+                  </a:txBody>
+                  <a:tcPr marL="45720" marR="45720" marT="18288" marB="18288" anchor="ctr">
+                    <a:solidFill>
+                      <a:srgbClr val="FFFFFF"/>
+                    </a:solidFill>
+                  </a:tcPr>
+                </a:tc>
+                <a:tc>
+                  <a:txBody>
+                    <a:bodyPr/>
+                    <a:lstStyle/>
+                    <a:p>
+                      <a:pPr algn="ctr">
+                        <a:spcAft>
+                          <a:spcPts val="200"/>
+                        </a:spcAft>
+                      </a:pPr>
+                      <a:r>
+                        <a:rPr sz="850" b="0" i="0">
+                          <a:solidFill>
+                            <a:srgbClr val="202124"/>
+                          </a:solidFill>
+                          <a:latin typeface="Google Sans Flex"/>
+                          <a:ea typeface="Google Sans Flex"/>
+                          <a:cs typeface="Google Sans Flex"/>
+                          <a:sym typeface="Google Sans Flex"/>
+                        </a:rPr>
+                        <a:t>0.983</a:t>
+                      </a:r>
+                    </a:p>
+                  </a:txBody>
+                  <a:tcPr marL="45720" marR="45720" marT="18288" marB="18288" anchor="ctr">
+                    <a:solidFill>
+                      <a:srgbClr val="FFFFFF"/>
+                    </a:solidFill>
+                  </a:tcPr>
+                </a:tc>
+                <a:tc>
+                  <a:txBody>
+                    <a:bodyPr/>
+                    <a:lstStyle/>
+                    <a:p>
+                      <a:pPr algn="ctr">
+                        <a:spcAft>
+                          <a:spcPts val="200"/>
+                        </a:spcAft>
+                      </a:pPr>
+                      <a:r>
+                        <a:rPr sz="850" b="0" i="0">
+                          <a:solidFill>
+                            <a:srgbClr val="202124"/>
+                          </a:solidFill>
+                          <a:latin typeface="Google Sans Flex"/>
+                          <a:ea typeface="Google Sans Flex"/>
+                          <a:cs typeface="Google Sans Flex"/>
+                          <a:sym typeface="Google Sans Flex"/>
+                        </a:rPr>
+                        <a:t>97.5%</a:t>
+                      </a:r>
+                    </a:p>
+                  </a:txBody>
+                  <a:tcPr marL="45720" marR="45720" marT="18288" marB="18288" anchor="ctr">
+                    <a:solidFill>
+                      <a:srgbClr val="FFFFFF"/>
+                    </a:solidFill>
+                  </a:tcPr>
+                </a:tc>
+                <a:tc>
+                  <a:txBody>
+                    <a:bodyPr/>
+                    <a:lstStyle/>
+                    <a:p>
+                      <a:pPr algn="ctr">
+                        <a:spcAft>
+                          <a:spcPts val="200"/>
+                        </a:spcAft>
+                      </a:pPr>
+                      <a:r>
+                        <a:rPr sz="850" b="0" i="0">
+                          <a:solidFill>
+                            <a:srgbClr val="202124"/>
+                          </a:solidFill>
+                          <a:latin typeface="Google Sans Flex"/>
+                          <a:ea typeface="Google Sans Flex"/>
+                          <a:cs typeface="Google Sans Flex"/>
+                          <a:sym typeface="Google Sans Flex"/>
+                        </a:rPr>
+                        <a:t>100%</a:t>
+                      </a:r>
+                    </a:p>
+                  </a:txBody>
+                  <a:tcPr marL="45720" marR="45720" marT="18288" marB="18288" anchor="ctr">
+                    <a:solidFill>
+                      <a:srgbClr val="FFFFFF"/>
+                    </a:solidFill>
+                  </a:tcPr>
+                </a:tc>
+                <a:tc>
+                  <a:txBody>
+                    <a:bodyPr/>
+                    <a:lstStyle/>
+                    <a:p>
+                      <a:pPr algn="ctr">
+                        <a:spcAft>
+                          <a:spcPts val="200"/>
+                        </a:spcAft>
+                      </a:pPr>
+                      <a:r>
+                        <a:rPr sz="850" b="0" i="0">
+                          <a:solidFill>
+                            <a:srgbClr val="202124"/>
+                          </a:solidFill>
+                          <a:latin typeface="Google Sans Flex"/>
+                          <a:ea typeface="Google Sans Flex"/>
+                          <a:cs typeface="Google Sans Flex"/>
+                          <a:sym typeface="Google Sans Flex"/>
+                        </a:rPr>
+                        <a:t>21.3% (23.0%)</a:t>
+                      </a:r>
+                    </a:p>
+                  </a:txBody>
+                  <a:tcPr marL="45720" marR="45720" marT="18288" marB="18288" anchor="ctr">
+                    <a:solidFill>
+                      <a:srgbClr val="FFFFFF"/>
+                    </a:solidFill>
+                  </a:tcPr>
+                </a:tc>
+                <a:tc>
+                  <a:txBody>
+                    <a:bodyPr/>
+                    <a:lstStyle/>
+                    <a:p>
+                      <a:pPr algn="ctr">
+                        <a:spcAft>
+                          <a:spcPts val="200"/>
+                        </a:spcAft>
+                      </a:pPr>
+                      <a:r>
+                        <a:rPr sz="850" b="0" i="0">
+                          <a:solidFill>
+                            <a:srgbClr val="202124"/>
+                          </a:solidFill>
+                          <a:latin typeface="Google Sans Flex"/>
+                          <a:ea typeface="Google Sans Flex"/>
+                          <a:cs typeface="Google Sans Flex"/>
+                          <a:sym typeface="Google Sans Flex"/>
+                        </a:rPr>
+                        <a:t>20.2% (23.9%)</a:t>
+                      </a:r>
+                    </a:p>
+                  </a:txBody>
+                  <a:tcPr marL="45720" marR="45720" marT="18288" marB="18288" anchor="ctr">
+                    <a:solidFill>
+                      <a:srgbClr val="FFFFFF"/>
+                    </a:solidFill>
+                  </a:tcPr>
+                </a:tc>
+                <a:tc>
+                  <a:txBody>
+                    <a:bodyPr/>
+                    <a:lstStyle/>
+                    <a:p>
+                      <a:pPr algn="ctr">
+                        <a:spcAft>
+                          <a:spcPts val="200"/>
+                        </a:spcAft>
+                      </a:pPr>
+                      <a:r>
+                        <a:rPr sz="850" b="0" i="0">
+                          <a:solidFill>
+                            <a:srgbClr val="202124"/>
+                          </a:solidFill>
+                          <a:latin typeface="Google Sans Flex"/>
+                          <a:ea typeface="Google Sans Flex"/>
+                          <a:cs typeface="Google Sans Flex"/>
+                          <a:sym typeface="Google Sans Flex"/>
+                        </a:rPr>
+                        <a:t>6/6 (4)</a:t>
+                      </a:r>
+                    </a:p>
+                  </a:txBody>
+                  <a:tcPr marL="45720" marR="45720" marT="18288" marB="18288" anchor="ctr">
+                    <a:solidFill>
+                      <a:srgbClr val="FFFFFF"/>
+                    </a:solidFill>
+                  </a:tcPr>
+                </a:tc>
+                <a:tc>
+                  <a:txBody>
+                    <a:bodyPr/>
+                    <a:lstStyle/>
+                    <a:p>
+                      <a:pPr algn="ctr">
+                        <a:spcAft>
+                          <a:spcPts val="200"/>
+                        </a:spcAft>
+                      </a:pPr>
+                      <a:r>
+                        <a:rPr sz="850" b="0" i="0">
+                          <a:solidFill>
+                            <a:srgbClr val="202124"/>
+                          </a:solidFill>
+                          <a:latin typeface="Google Sans Flex"/>
+                          <a:ea typeface="Google Sans Flex"/>
+                          <a:cs typeface="Google Sans Flex"/>
+                          <a:sym typeface="Google Sans Flex"/>
+                        </a:rPr>
+                        <a:t>12.3 s</a:t>
+                      </a:r>
+                    </a:p>
+                  </a:txBody>
+                  <a:tcPr marL="45720" marR="45720" marT="18288" marB="18288" anchor="ctr">
+                    <a:solidFill>
+                      <a:srgbClr val="FFFFFF"/>
+                    </a:solidFill>
+                  </a:tcPr>
+                </a:tc>
+              </a:tr>
+              <a:tr h="274320">
+                <a:tc>
+                  <a:txBody>
+                    <a:bodyPr/>
+                    <a:lstStyle/>
+                    <a:p>
+                      <a:pPr>
+                        <a:spcAft>
+                          <a:spcPts val="200"/>
+                        </a:spcAft>
+                      </a:pPr>
+                      <a:r>
+                        <a:rPr sz="850" b="1" i="0">
+                          <a:solidFill>
+                            <a:srgbClr val="202124"/>
+                          </a:solidFill>
+                          <a:latin typeface="Google Sans Flex"/>
+                          <a:ea typeface="Google Sans Flex"/>
+                          <a:cs typeface="Google Sans Flex"/>
+                          <a:sym typeface="Google Sans Flex"/>
+                        </a:rPr>
+                        <a:t>gpt-5.6-luna</a:t>
+                      </a:r>
+                    </a:p>
+                  </a:txBody>
+                  <a:tcPr marL="45720" marR="45720" marT="18288" marB="18288" anchor="ctr">
+                    <a:solidFill>
+                      <a:srgbClr val="F1F3F4"/>
+                    </a:solidFill>
+                  </a:tcPr>
+                </a:tc>
+                <a:tc>
+                  <a:txBody>
+                    <a:bodyPr/>
+                    <a:lstStyle/>
+                    <a:p>
+                      <a:pPr algn="ctr">
+                        <a:spcAft>
+                          <a:spcPts val="200"/>
+                        </a:spcAft>
+                      </a:pPr>
+                      <a:r>
+                        <a:rPr sz="850" b="0" i="0">
+                          <a:solidFill>
+                            <a:srgbClr val="202124"/>
+                          </a:solidFill>
+                          <a:latin typeface="Google Sans Flex"/>
+                          <a:ea typeface="Google Sans Flex"/>
+                          <a:cs typeface="Google Sans Flex"/>
+                          <a:sym typeface="Google Sans Flex"/>
+                        </a:rPr>
+                        <a:t>0.983</a:t>
+                      </a:r>
+                    </a:p>
+                  </a:txBody>
+                  <a:tcPr marL="45720" marR="45720" marT="18288" marB="18288" anchor="ctr">
+                    <a:solidFill>
+                      <a:srgbClr val="F1F3F4"/>
+                    </a:solidFill>
+                  </a:tcPr>
+                </a:tc>
+                <a:tc>
+                  <a:txBody>
+                    <a:bodyPr/>
+                    <a:lstStyle/>
+                    <a:p>
+                      <a:pPr algn="ctr">
+                        <a:spcAft>
+                          <a:spcPts val="200"/>
+                        </a:spcAft>
+                      </a:pPr>
+                      <a:r>
+                        <a:rPr sz="850" b="0" i="0">
+                          <a:solidFill>
+                            <a:srgbClr val="202124"/>
+                          </a:solidFill>
+                          <a:latin typeface="Google Sans Flex"/>
+                          <a:ea typeface="Google Sans Flex"/>
+                          <a:cs typeface="Google Sans Flex"/>
+                          <a:sym typeface="Google Sans Flex"/>
+                        </a:rPr>
+                        <a:t>97.5%</a:t>
+                      </a:r>
+                    </a:p>
+                  </a:txBody>
+                  <a:tcPr marL="45720" marR="45720" marT="18288" marB="18288" anchor="ctr">
+                    <a:solidFill>
+                      <a:srgbClr val="F1F3F4"/>
+                    </a:solidFill>
+                  </a:tcPr>
+                </a:tc>
+                <a:tc>
+                  <a:txBody>
+                    <a:bodyPr/>
+                    <a:lstStyle/>
+                    <a:p>
+                      <a:pPr algn="ctr">
+                        <a:spcAft>
+                          <a:spcPts val="200"/>
+                        </a:spcAft>
+                      </a:pPr>
+                      <a:r>
+                        <a:rPr sz="850" b="0" i="0">
+                          <a:solidFill>
+                            <a:srgbClr val="202124"/>
+                          </a:solidFill>
+                          <a:latin typeface="Google Sans Flex"/>
+                          <a:ea typeface="Google Sans Flex"/>
+                          <a:cs typeface="Google Sans Flex"/>
+                          <a:sym typeface="Google Sans Flex"/>
+                        </a:rPr>
+                        <a:t>100%</a:t>
+                      </a:r>
+                    </a:p>
+                  </a:txBody>
+                  <a:tcPr marL="45720" marR="45720" marT="18288" marB="18288" anchor="ctr">
+                    <a:solidFill>
+                      <a:srgbClr val="F1F3F4"/>
+                    </a:solidFill>
+                  </a:tcPr>
+                </a:tc>
+                <a:tc>
+                  <a:txBody>
+                    <a:bodyPr/>
+                    <a:lstStyle/>
+                    <a:p>
+                      <a:pPr algn="ctr">
+                        <a:spcAft>
+                          <a:spcPts val="200"/>
+                        </a:spcAft>
+                      </a:pPr>
+                      <a:r>
+                        <a:rPr sz="850" b="0" i="0">
+                          <a:solidFill>
+                            <a:srgbClr val="202124"/>
+                          </a:solidFill>
+                          <a:latin typeface="Google Sans Flex"/>
+                          <a:ea typeface="Google Sans Flex"/>
+                          <a:cs typeface="Google Sans Flex"/>
+                          <a:sym typeface="Google Sans Flex"/>
+                        </a:rPr>
+                        <a:t>21.2% (23.0%)</a:t>
+                      </a:r>
+                    </a:p>
+                  </a:txBody>
+                  <a:tcPr marL="45720" marR="45720" marT="18288" marB="18288" anchor="ctr">
+                    <a:solidFill>
+                      <a:srgbClr val="F1F3F4"/>
+                    </a:solidFill>
+                  </a:tcPr>
+                </a:tc>
+                <a:tc>
+                  <a:txBody>
+                    <a:bodyPr/>
+                    <a:lstStyle/>
+                    <a:p>
+                      <a:pPr algn="ctr">
+                        <a:spcAft>
+                          <a:spcPts val="200"/>
+                        </a:spcAft>
+                      </a:pPr>
+                      <a:r>
+                        <a:rPr sz="850" b="0" i="0">
+                          <a:solidFill>
+                            <a:srgbClr val="202124"/>
+                          </a:solidFill>
+                          <a:latin typeface="Google Sans Flex"/>
+                          <a:ea typeface="Google Sans Flex"/>
+                          <a:cs typeface="Google Sans Flex"/>
+                          <a:sym typeface="Google Sans Flex"/>
+                        </a:rPr>
+                        <a:t>20.3% (23.9%)</a:t>
+                      </a:r>
+                    </a:p>
+                  </a:txBody>
+                  <a:tcPr marL="45720" marR="45720" marT="18288" marB="18288" anchor="ctr">
+                    <a:solidFill>
+                      <a:srgbClr val="F1F3F4"/>
+                    </a:solidFill>
+                  </a:tcPr>
+                </a:tc>
+                <a:tc>
+                  <a:txBody>
+                    <a:bodyPr/>
+                    <a:lstStyle/>
+                    <a:p>
+                      <a:pPr algn="ctr">
+                        <a:spcAft>
+                          <a:spcPts val="200"/>
+                        </a:spcAft>
+                      </a:pPr>
+                      <a:r>
+                        <a:rPr sz="850" b="0" i="0">
+                          <a:solidFill>
+                            <a:srgbClr val="202124"/>
+                          </a:solidFill>
+                          <a:latin typeface="Google Sans Flex"/>
+                          <a:ea typeface="Google Sans Flex"/>
+                          <a:cs typeface="Google Sans Flex"/>
+                          <a:sym typeface="Google Sans Flex"/>
+                        </a:rPr>
+                        <a:t>6/6 (6)</a:t>
+                      </a:r>
+                    </a:p>
+                  </a:txBody>
+                  <a:tcPr marL="45720" marR="45720" marT="18288" marB="18288" anchor="ctr">
+                    <a:solidFill>
+                      <a:srgbClr val="F1F3F4"/>
+                    </a:solidFill>
+                  </a:tcPr>
+                </a:tc>
+                <a:tc>
+                  <a:txBody>
+                    <a:bodyPr/>
+                    <a:lstStyle/>
+                    <a:p>
+                      <a:pPr algn="ctr">
+                        <a:spcAft>
+                          <a:spcPts val="200"/>
+                        </a:spcAft>
+                      </a:pPr>
+                      <a:r>
+                        <a:rPr sz="850" b="0" i="0">
+                          <a:solidFill>
+                            <a:srgbClr val="202124"/>
+                          </a:solidFill>
+                          <a:latin typeface="Google Sans Flex"/>
+                          <a:ea typeface="Google Sans Flex"/>
+                          <a:cs typeface="Google Sans Flex"/>
+                          <a:sym typeface="Google Sans Flex"/>
+                        </a:rPr>
+                        <a:t>14.8 s</a:t>
+                      </a:r>
+                    </a:p>
+                  </a:txBody>
+                  <a:tcPr marL="45720" marR="45720" marT="18288" marB="18288" anchor="ctr">
+                    <a:solidFill>
+                      <a:srgbClr val="F1F3F4"/>
+                    </a:solidFill>
+                  </a:tcPr>
+                </a:tc>
+              </a:tr>
+              <a:tr h="274320">
+                <a:tc>
+                  <a:txBody>
+                    <a:bodyPr/>
+                    <a:lstStyle/>
+                    <a:p>
+                      <a:pPr>
+                        <a:spcAft>
+                          <a:spcPts val="200"/>
+                        </a:spcAft>
+                      </a:pPr>
+                      <a:r>
+                        <a:rPr sz="850" b="1" i="0">
+                          <a:solidFill>
+                            <a:srgbClr val="202124"/>
+                          </a:solidFill>
+                          <a:latin typeface="Google Sans Flex"/>
+                          <a:ea typeface="Google Sans Flex"/>
+                          <a:cs typeface="Google Sans Flex"/>
+                          <a:sym typeface="Google Sans Flex"/>
+                        </a:rPr>
+                        <a:t>gpt-5.2</a:t>
+                      </a:r>
+                    </a:p>
+                  </a:txBody>
+                  <a:tcPr marL="45720" marR="45720" marT="18288" marB="18288" anchor="ctr">
+                    <a:solidFill>
+                      <a:srgbClr val="FFFFFF"/>
+                    </a:solidFill>
+                  </a:tcPr>
+                </a:tc>
+                <a:tc>
+                  <a:txBody>
+                    <a:bodyPr/>
+                    <a:lstStyle/>
+                    <a:p>
+                      <a:pPr algn="ctr">
+                        <a:spcAft>
+                          <a:spcPts val="200"/>
+                        </a:spcAft>
+                      </a:pPr>
+                      <a:r>
+                        <a:rPr sz="850" b="0" i="0">
+                          <a:solidFill>
+                            <a:srgbClr val="202124"/>
+                          </a:solidFill>
+                          <a:latin typeface="Google Sans Flex"/>
+                          <a:ea typeface="Google Sans Flex"/>
+                          <a:cs typeface="Google Sans Flex"/>
+                          <a:sym typeface="Google Sans Flex"/>
+                        </a:rPr>
+                        <a:t>0.983</a:t>
+                      </a:r>
+                    </a:p>
+                  </a:txBody>
+                  <a:tcPr marL="45720" marR="45720" marT="18288" marB="18288" anchor="ctr">
+                    <a:solidFill>
+                      <a:srgbClr val="FFFFFF"/>
+                    </a:solidFill>
+                  </a:tcPr>
+                </a:tc>
+                <a:tc>
+                  <a:txBody>
+                    <a:bodyPr/>
+                    <a:lstStyle/>
+                    <a:p>
+                      <a:pPr algn="ctr">
+                        <a:spcAft>
+                          <a:spcPts val="200"/>
+                        </a:spcAft>
+                      </a:pPr>
+                      <a:r>
+                        <a:rPr sz="850" b="0" i="0">
+                          <a:solidFill>
+                            <a:srgbClr val="202124"/>
+                          </a:solidFill>
+                          <a:latin typeface="Google Sans Flex"/>
+                          <a:ea typeface="Google Sans Flex"/>
+                          <a:cs typeface="Google Sans Flex"/>
+                          <a:sym typeface="Google Sans Flex"/>
+                        </a:rPr>
+                        <a:t>97.5%</a:t>
+                      </a:r>
+                    </a:p>
+                  </a:txBody>
+                  <a:tcPr marL="45720" marR="45720" marT="18288" marB="18288" anchor="ctr">
+                    <a:solidFill>
+                      <a:srgbClr val="FFFFFF"/>
+                    </a:solidFill>
+                  </a:tcPr>
+                </a:tc>
+                <a:tc>
+                  <a:txBody>
+                    <a:bodyPr/>
+                    <a:lstStyle/>
+                    <a:p>
+                      <a:pPr algn="ctr">
+                        <a:spcAft>
+                          <a:spcPts val="200"/>
+                        </a:spcAft>
+                      </a:pPr>
+                      <a:r>
+                        <a:rPr sz="850" b="0" i="0">
+                          <a:solidFill>
+                            <a:srgbClr val="202124"/>
+                          </a:solidFill>
+                          <a:latin typeface="Google Sans Flex"/>
+                          <a:ea typeface="Google Sans Flex"/>
+                          <a:cs typeface="Google Sans Flex"/>
+                          <a:sym typeface="Google Sans Flex"/>
+                        </a:rPr>
+                        <a:t>100%</a:t>
+                      </a:r>
+                    </a:p>
+                  </a:txBody>
+                  <a:tcPr marL="45720" marR="45720" marT="18288" marB="18288" anchor="ctr">
+                    <a:solidFill>
+                      <a:srgbClr val="FFFFFF"/>
+                    </a:solidFill>
+                  </a:tcPr>
+                </a:tc>
+                <a:tc>
+                  <a:txBody>
+                    <a:bodyPr/>
+                    <a:lstStyle/>
+                    <a:p>
+                      <a:pPr algn="ctr">
+                        <a:spcAft>
+                          <a:spcPts val="200"/>
+                        </a:spcAft>
+                      </a:pPr>
+                      <a:r>
+                        <a:rPr sz="850" b="0" i="0">
+                          <a:solidFill>
+                            <a:srgbClr val="202124"/>
+                          </a:solidFill>
+                          <a:latin typeface="Google Sans Flex"/>
+                          <a:ea typeface="Google Sans Flex"/>
+                          <a:cs typeface="Google Sans Flex"/>
+                          <a:sym typeface="Google Sans Flex"/>
+                        </a:rPr>
+                        <a:t>21.3% (23.0%)</a:t>
+                      </a:r>
+                    </a:p>
+                  </a:txBody>
+                  <a:tcPr marL="45720" marR="45720" marT="18288" marB="18288" anchor="ctr">
+                    <a:solidFill>
+                      <a:srgbClr val="FFFFFF"/>
+                    </a:solidFill>
+                  </a:tcPr>
+                </a:tc>
+                <a:tc>
+                  <a:txBody>
+                    <a:bodyPr/>
+                    <a:lstStyle/>
+                    <a:p>
+                      <a:pPr algn="ctr">
+                        <a:spcAft>
+                          <a:spcPts val="200"/>
+                        </a:spcAft>
+                      </a:pPr>
+                      <a:r>
+                        <a:rPr sz="850" b="0" i="0">
+                          <a:solidFill>
+                            <a:srgbClr val="202124"/>
+                          </a:solidFill>
+                          <a:latin typeface="Google Sans Flex"/>
+                          <a:ea typeface="Google Sans Flex"/>
+                          <a:cs typeface="Google Sans Flex"/>
+                          <a:sym typeface="Google Sans Flex"/>
+                        </a:rPr>
+                        <a:t>21.2% (23.9%)</a:t>
+                      </a:r>
+                    </a:p>
+                  </a:txBody>
+                  <a:tcPr marL="45720" marR="45720" marT="18288" marB="18288" anchor="ctr">
+                    <a:solidFill>
+                      <a:srgbClr val="FFFFFF"/>
+                    </a:solidFill>
+                  </a:tcPr>
+                </a:tc>
+                <a:tc>
+                  <a:txBody>
+                    <a:bodyPr/>
+                    <a:lstStyle/>
+                    <a:p>
+                      <a:pPr algn="ctr">
+                        <a:spcAft>
+                          <a:spcPts val="200"/>
+                        </a:spcAft>
+                      </a:pPr>
+                      <a:r>
+                        <a:rPr sz="850" b="0" i="0">
+                          <a:solidFill>
+                            <a:srgbClr val="202124"/>
+                          </a:solidFill>
+                          <a:latin typeface="Google Sans Flex"/>
+                          <a:ea typeface="Google Sans Flex"/>
+                          <a:cs typeface="Google Sans Flex"/>
+                          <a:sym typeface="Google Sans Flex"/>
+                        </a:rPr>
+                        <a:t>6/6 (6)</a:t>
+                      </a:r>
+                    </a:p>
+                  </a:txBody>
+                  <a:tcPr marL="45720" marR="45720" marT="18288" marB="18288" anchor="ctr">
+                    <a:solidFill>
+                      <a:srgbClr val="FFFFFF"/>
+                    </a:solidFill>
+                  </a:tcPr>
+                </a:tc>
+                <a:tc>
+                  <a:txBody>
+                    <a:bodyPr/>
+                    <a:lstStyle/>
+                    <a:p>
+                      <a:pPr algn="ctr">
+                        <a:spcAft>
+                          <a:spcPts val="200"/>
+                        </a:spcAft>
+                      </a:pPr>
+                      <a:r>
+                        <a:rPr sz="850" b="0" i="0">
+                          <a:solidFill>
+                            <a:srgbClr val="202124"/>
+                          </a:solidFill>
+                          <a:latin typeface="Google Sans Flex"/>
+                          <a:ea typeface="Google Sans Flex"/>
+                          <a:cs typeface="Google Sans Flex"/>
+                          <a:sym typeface="Google Sans Flex"/>
+                        </a:rPr>
+                        <a:t>8.4 s</a:t>
+                      </a:r>
+                    </a:p>
+                  </a:txBody>
+                  <a:tcPr marL="45720" marR="45720" marT="18288" marB="18288" anchor="ctr">
+                    <a:solidFill>
+                      <a:srgbClr val="FFFFFF"/>
+                    </a:solidFill>
+                  </a:tcPr>
+                </a:tc>
+              </a:tr>
+              <a:tr h="274320">
+                <a:tc>
+                  <a:txBody>
+                    <a:bodyPr/>
+                    <a:lstStyle/>
+                    <a:p>
+                      <a:pPr>
+                        <a:spcAft>
+                          <a:spcPts val="200"/>
+                        </a:spcAft>
+                      </a:pPr>
+                      <a:r>
+                        <a:rPr sz="850" b="1" i="0">
+                          <a:solidFill>
+                            <a:srgbClr val="202124"/>
+                          </a:solidFill>
+                          <a:latin typeface="Google Sans Flex"/>
+                          <a:ea typeface="Google Sans Flex"/>
+                          <a:cs typeface="Google Sans Flex"/>
+                          <a:sym typeface="Google Sans Flex"/>
+                        </a:rPr>
+                        <a:t>gpt-5.3-chat</a:t>
+                      </a:r>
+                    </a:p>
+                  </a:txBody>
+                  <a:tcPr marL="45720" marR="45720" marT="18288" marB="18288" anchor="ctr">
+                    <a:solidFill>
+                      <a:srgbClr val="F1F3F4"/>
+                    </a:solidFill>
+                  </a:tcPr>
+                </a:tc>
+                <a:tc>
+                  <a:txBody>
+                    <a:bodyPr/>
+                    <a:lstStyle/>
+                    <a:p>
+                      <a:pPr algn="ctr">
+                        <a:spcAft>
+                          <a:spcPts val="200"/>
+                        </a:spcAft>
+                      </a:pPr>
+                      <a:r>
+                        <a:rPr sz="850" b="0" i="0">
+                          <a:solidFill>
+                            <a:srgbClr val="202124"/>
+                          </a:solidFill>
+                          <a:latin typeface="Google Sans Flex"/>
+                          <a:ea typeface="Google Sans Flex"/>
+                          <a:cs typeface="Google Sans Flex"/>
+                          <a:sym typeface="Google Sans Flex"/>
+                        </a:rPr>
+                        <a:t>0.983</a:t>
+                      </a:r>
+                    </a:p>
+                  </a:txBody>
+                  <a:tcPr marL="45720" marR="45720" marT="18288" marB="18288" anchor="ctr">
+                    <a:solidFill>
+                      <a:srgbClr val="F1F3F4"/>
+                    </a:solidFill>
+                  </a:tcPr>
+                </a:tc>
+                <a:tc>
+                  <a:txBody>
+                    <a:bodyPr/>
+                    <a:lstStyle/>
+                    <a:p>
+                      <a:pPr algn="ctr">
+                        <a:spcAft>
+                          <a:spcPts val="200"/>
+                        </a:spcAft>
+                      </a:pPr>
+                      <a:r>
+                        <a:rPr sz="850" b="0" i="0">
+                          <a:solidFill>
+                            <a:srgbClr val="202124"/>
+                          </a:solidFill>
+                          <a:latin typeface="Google Sans Flex"/>
+                          <a:ea typeface="Google Sans Flex"/>
+                          <a:cs typeface="Google Sans Flex"/>
+                          <a:sym typeface="Google Sans Flex"/>
+                        </a:rPr>
+                        <a:t>97.5%</a:t>
+                      </a:r>
+                    </a:p>
+                  </a:txBody>
+                  <a:tcPr marL="45720" marR="45720" marT="18288" marB="18288" anchor="ctr">
+                    <a:solidFill>
+                      <a:srgbClr val="F1F3F4"/>
+                    </a:solidFill>
+                  </a:tcPr>
+                </a:tc>
+                <a:tc>
+                  <a:txBody>
+                    <a:bodyPr/>
+                    <a:lstStyle/>
+                    <a:p>
+                      <a:pPr algn="ctr">
+                        <a:spcAft>
+                          <a:spcPts val="200"/>
+                        </a:spcAft>
+                      </a:pPr>
+                      <a:r>
+                        <a:rPr sz="850" b="0" i="0">
+                          <a:solidFill>
+                            <a:srgbClr val="202124"/>
+                          </a:solidFill>
+                          <a:latin typeface="Google Sans Flex"/>
+                          <a:ea typeface="Google Sans Flex"/>
+                          <a:cs typeface="Google Sans Flex"/>
+                          <a:sym typeface="Google Sans Flex"/>
+                        </a:rPr>
+                        <a:t>100%</a:t>
+                      </a:r>
+                    </a:p>
+                  </a:txBody>
+                  <a:tcPr marL="45720" marR="45720" marT="18288" marB="18288" anchor="ctr">
+                    <a:solidFill>
+                      <a:srgbClr val="F1F3F4"/>
+                    </a:solidFill>
+                  </a:tcPr>
+                </a:tc>
+                <a:tc>
+                  <a:txBody>
+                    <a:bodyPr/>
+                    <a:lstStyle/>
+                    <a:p>
+                      <a:pPr algn="ctr">
+                        <a:spcAft>
+                          <a:spcPts val="200"/>
+                        </a:spcAft>
+                      </a:pPr>
+                      <a:r>
+                        <a:rPr sz="850" b="0" i="0">
+                          <a:solidFill>
+                            <a:srgbClr val="202124"/>
+                          </a:solidFill>
+                          <a:latin typeface="Google Sans Flex"/>
+                          <a:ea typeface="Google Sans Flex"/>
+                          <a:cs typeface="Google Sans Flex"/>
+                          <a:sym typeface="Google Sans Flex"/>
+                        </a:rPr>
+                        <a:t>21.5% (23.0%)</a:t>
+                      </a:r>
+                    </a:p>
+                  </a:txBody>
+                  <a:tcPr marL="45720" marR="45720" marT="18288" marB="18288" anchor="ctr">
+                    <a:solidFill>
+                      <a:srgbClr val="F1F3F4"/>
+                    </a:solidFill>
+                  </a:tcPr>
+                </a:tc>
+                <a:tc>
+                  <a:txBody>
+                    <a:bodyPr/>
+                    <a:lstStyle/>
+                    <a:p>
+                      <a:pPr algn="ctr">
+                        <a:spcAft>
+                          <a:spcPts val="200"/>
+                        </a:spcAft>
+                      </a:pPr>
+                      <a:r>
+                        <a:rPr sz="850" b="0" i="0">
+                          <a:solidFill>
+                            <a:srgbClr val="202124"/>
+                          </a:solidFill>
+                          <a:latin typeface="Google Sans Flex"/>
+                          <a:ea typeface="Google Sans Flex"/>
+                          <a:cs typeface="Google Sans Flex"/>
+                          <a:sym typeface="Google Sans Flex"/>
+                        </a:rPr>
+                        <a:t>21.6% (23.9%)</a:t>
+                      </a:r>
+                    </a:p>
+                  </a:txBody>
+                  <a:tcPr marL="45720" marR="45720" marT="18288" marB="18288" anchor="ctr">
+                    <a:solidFill>
+                      <a:srgbClr val="F1F3F4"/>
+                    </a:solidFill>
+                  </a:tcPr>
+                </a:tc>
+                <a:tc>
+                  <a:txBody>
+                    <a:bodyPr/>
+                    <a:lstStyle/>
+                    <a:p>
+                      <a:pPr algn="ctr">
+                        <a:spcAft>
+                          <a:spcPts val="200"/>
+                        </a:spcAft>
+                      </a:pPr>
+                      <a:r>
+                        <a:rPr sz="850" b="0" i="0">
+                          <a:solidFill>
+                            <a:srgbClr val="202124"/>
+                          </a:solidFill>
+                          <a:latin typeface="Google Sans Flex"/>
+                          <a:ea typeface="Google Sans Flex"/>
+                          <a:cs typeface="Google Sans Flex"/>
+                          <a:sym typeface="Google Sans Flex"/>
+                        </a:rPr>
+                        <a:t>0/6 (0)</a:t>
+                      </a:r>
+                    </a:p>
+                  </a:txBody>
+                  <a:tcPr marL="45720" marR="45720" marT="18288" marB="18288" anchor="ctr">
+                    <a:solidFill>
+                      <a:srgbClr val="F1F3F4"/>
+                    </a:solidFill>
+                  </a:tcPr>
+                </a:tc>
+                <a:tc>
+                  <a:txBody>
+                    <a:bodyPr/>
+                    <a:lstStyle/>
+                    <a:p>
+                      <a:pPr algn="ctr">
+                        <a:spcAft>
+                          <a:spcPts val="200"/>
+                        </a:spcAft>
+                      </a:pPr>
+                      <a:r>
+                        <a:rPr sz="850" b="0" i="0">
+                          <a:solidFill>
+                            <a:srgbClr val="202124"/>
+                          </a:solidFill>
+                          <a:latin typeface="Google Sans Flex"/>
+                          <a:ea typeface="Google Sans Flex"/>
+                          <a:cs typeface="Google Sans Flex"/>
+                          <a:sym typeface="Google Sans Flex"/>
+                        </a:rPr>
+                        <a:t>–</a:t>
+                      </a:r>
+                    </a:p>
+                  </a:txBody>
+                  <a:tcPr marL="45720" marR="45720" marT="18288" marB="18288" anchor="ctr">
+                    <a:solidFill>
+                      <a:srgbClr val="F1F3F4"/>
+                    </a:solidFill>
+                  </a:tcPr>
+                </a:tc>
+              </a:tr>
+            </a:tbl>
+          </a:graphicData>
+        </a:graphic>
+      </p:graphicFrame>
+      <p:sp>
+        <p:nvSpPr>
+          <p:cNvPr id="168" name="TextBox 167"/>
+          <p:cNvSpPr txBox="1"/>
+          <p:nvPr/>
+        </p:nvSpPr>
+        <p:spPr>
+          <a:xfrm>
+            <a:off x="320040" y="4224528"/>
+            <a:ext cx="8503920" cy="685800"/>
+          </a:xfrm>
+          <a:prstGeom prst="rect">
+            <a:avLst/>
+          </a:prstGeom>
+          <a:noFill/>
+        </p:spPr>
+        <p:txBody>
+          <a:bodyPr wrap="square" anchor="t" lIns="36576" rIns="36576" tIns="36576" bIns="36576">
+            <a:spAutoFit/>
+          </a:bodyPr>
+          <a:lstStyle/>
+          <a:p>
+            <a:pPr>
+              <a:spcAft>
+                <a:spcPts val="300"/>
+              </a:spcAft>
+            </a:pPr>
+            <a:r>
+              <a:rPr sz="850" b="1" i="0">
+                <a:solidFill>
+                  <a:srgbClr val="5F6368"/>
+                </a:solidFill>
+                <a:latin typeface="Google Sans Flex"/>
+                <a:ea typeface="Google Sans Flex"/>
+                <a:cs typeface="Google Sans Flex"/>
+                <a:sym typeface="Google Sans Flex"/>
+              </a:rPr>
+              <a:t>Every model beats the statistical forecast</a:t>
+            </a:r>
+            <a:r>
+              <a:rPr sz="850" b="0" i="0">
+                <a:solidFill>
+                  <a:srgbClr val="5F6368"/>
+                </a:solidFill>
+                <a:latin typeface="Google Sans Flex"/>
+                <a:ea typeface="Google Sans Flex"/>
+                <a:cs typeface="Google Sans Flex"/>
+                <a:sym typeface="Google Sans Flex"/>
+              </a:rPr>
+              <a:t> (by 2.3–4.9 pp on text-only series); extraction is near saturated (38–40 of 40 messages). gpt-5.4-mini is the default because it is 2–8× faster; a stronger model could run the overnight forecast batch.</a:t>
+            </a:r>
+          </a:p>
+          <a:p>
+            <a:pPr>
+              <a:spcAft>
+                <a:spcPts val="0"/>
+              </a:spcAft>
+            </a:pPr>
+            <a:r>
+              <a:rPr sz="850" b="0" i="0">
+                <a:solidFill>
+                  <a:srgbClr val="5F6368"/>
+                </a:solidFill>
+                <a:latin typeface="Google Sans Flex"/>
+                <a:ea typeface="Google Sans Flex"/>
+                <a:cs typeface="Google Sans Flex"/>
+                <a:sym typeface="Google Sans Flex"/>
+              </a:rPr>
+              <a:t>Signal value kept: share of the gold-signal plan gain kept by plans built from the model's signals (found and fixed an end-date bug: −17% → 100%). gpt-5.3-chat's gateway rejects tool calls. Gemini on Vertex AI is next; it is not on our test gateway.</a:t>
             </a:r>
           </a:p>
         </p:txBody>
@@ -11912,7 +14871,7 @@
                 <a:cs typeface="Google Sans Flex"/>
                 <a:sym typeface="Google Sans Flex"/>
               </a:rPr>
-              <a:t>“With ₹50,000 available today, what should I buy, expedite, discount or defer, and why?”</a:t>
+              <a:t>“With ₹10 lakh available this month, what should we buy, expedite, discount or defer, and when?”</a:t>
             </a:r>
           </a:p>
         </p:txBody>
@@ -12071,7 +15030,7 @@
                 <a:cs typeface="Google Sans Flex"/>
                 <a:sym typeface="Google Sans Flex"/>
               </a:rPr>
-              <a:t>Small D2C food &amp; nutrition brands (30–300 SKUs, one warehouse) plan on spreadsheets, email and WhatsApp.</a:t>
+              <a:t>Mid-size and large D2C / FMCG brands (₹50 crore+ a year) still plan rescues on spreadsheets, email and WhatsApp.</a:t>
             </a:r>
           </a:p>
           <a:p>
@@ -12276,7 +15235,7 @@
                 <a:cs typeface="Google Sans Flex"/>
                 <a:sym typeface="Google Sans Flex"/>
               </a:rPr>
-              <a:t>An AI agent that reads those messages, re-forecasts the affected SKUs and builds a cash-constrained recovery plan.</a:t>
+              <a:t>Generative AI reads the messages (English, Hindi, Hinglish), turns text-only news into forecast adjustments and answers “why / what if” questions with planner tools.</a:t>
             </a:r>
           </a:p>
           <a:p>
@@ -12299,7 +15258,7 @@
                 <a:cs typeface="Google Sans Flex"/>
                 <a:sym typeface="Google Sans Flex"/>
               </a:rPr>
-              <a:t>The LLM handles language and forecasting; a deterministic simulator and optimiser decide quantities.</a:t>
+              <a:t>A deterministic simulator and optimiser decide quantities and money; every LLM output is validated.</a:t>
             </a:r>
           </a:p>
           <a:p>
@@ -12322,7 +15281,7 @@
                 <a:cs typeface="Google Sans Flex"/>
                 <a:sym typeface="Google Sans Flex"/>
               </a:rPr>
-              <a:t>The operator confirms signals, reviews cited reasons and exports POs and markdowns.</a:t>
+              <a:t>The operator confirms signals, picks when to spend and exports POs.</a:t>
             </a:r>
           </a:p>
         </p:txBody>
@@ -12481,7 +15440,7 @@
                 <a:cs typeface="Google Sans Flex"/>
                 <a:sym typeface="Google Sans Flex"/>
               </a:rPr>
-              <a:t>One ranked action list within budget: buy, expedite, mark down or defer.</a:t>
+              <a:t>One ranked action list within budget, plus four ways to time the spend (commit now, staggered, reserve, lean).</a:t>
             </a:r>
           </a:p>
           <a:p>
@@ -12504,21 +15463,10 @@
                 <a:cs typeface="Google Sans Flex"/>
                 <a:sym typeface="Google Sans Flex"/>
               </a:rPr>
-              <a:t>Each action shows cash, loss avoided and the records behind it.</a:t>
-            </a:r>
-          </a:p>
-          <a:p>
-            <a:pPr marL="155448" indent="-137160">
-              <a:spcAft>
-                <a:spcPts val="300"/>
-              </a:spcAft>
-              <a:buClr>
-                <a:srgbClr val="1E8E3E"/>
-              </a:buClr>
-              <a:buChar char="•"/>
-            </a:pPr>
-            <a:r>
-              <a:rPr sz="1100" b="0" i="0">
+              <a:t>Demo brand (₹4.3 crore revenue a month): </a:t>
+            </a:r>
+            <a:r>
+              <a:rPr sz="1100" b="1" i="0">
                 <a:solidFill>
                   <a:srgbClr val="202124"/>
                 </a:solidFill>
@@ -12527,10 +15475,10 @@
                 <a:cs typeface="Google Sans Flex"/>
                 <a:sym typeface="Google Sans Flex"/>
               </a:rPr>
-              <a:t>Demo data: </a:t>
-            </a:r>
-            <a:r>
-              <a:rPr sz="1100" b="1" i="0">
+              <a:t>₹3.9 lakh / month</a:t>
+            </a:r>
+            <a:r>
+              <a:rPr sz="1100" b="0" i="0">
                 <a:solidFill>
                   <a:srgbClr val="202124"/>
                 </a:solidFill>
@@ -12539,10 +15487,10 @@
                 <a:cs typeface="Google Sans Flex"/>
                 <a:sym typeface="Google Sans Flex"/>
               </a:rPr>
-              <a:t>23% lower</a:t>
-            </a:r>
-            <a:r>
-              <a:rPr sz="1100" b="0" i="0">
+              <a:t> lower simulated loss than a static reorder rule and </a:t>
+            </a:r>
+            <a:r>
+              <a:rPr sz="1100" b="1" i="0">
                 <a:solidFill>
                   <a:srgbClr val="202124"/>
                 </a:solidFill>
@@ -12551,10 +15499,10 @@
                 <a:cs typeface="Google Sans Flex"/>
                 <a:sym typeface="Google Sans Flex"/>
               </a:rPr>
-              <a:t> simulated 30-day loss than a rule-based reorder baseline at ₹50k; expiry write-off </a:t>
-            </a:r>
-            <a:r>
-              <a:rPr sz="1100" b="1" i="0">
+              <a:t>₹1.9 lakh</a:t>
+            </a:r>
+            <a:r>
+              <a:rPr sz="1100" b="0" i="0">
                 <a:solidFill>
                   <a:srgbClr val="202124"/>
                 </a:solidFill>
@@ -12563,10 +15511,10 @@
                 <a:cs typeface="Google Sans Flex"/>
                 <a:sym typeface="Google Sans Flex"/>
               </a:rPr>
-              <a:t>−78%</a:t>
-            </a:r>
-            <a:r>
-              <a:rPr sz="1100" b="0" i="0">
+              <a:t> than a tuned one, better in </a:t>
+            </a:r>
+            <a:r>
+              <a:rPr sz="1100" b="1" i="0">
                 <a:solidFill>
                   <a:srgbClr val="202124"/>
                 </a:solidFill>
@@ -12575,49 +15523,108 @@
                 <a:cs typeface="Google Sans Flex"/>
                 <a:sym typeface="Google Sans Flex"/>
               </a:rPr>
-              <a:t>.</a:t>
-            </a:r>
-          </a:p>
-        </p:txBody>
-      </p:sp>
-      <p:sp>
-        <p:nvSpPr>
-          <p:cNvPr id="82" name="TextBox 81"/>
-          <p:cNvSpPr txBox="1"/>
-          <p:nvPr/>
-        </p:nvSpPr>
-        <p:spPr>
-          <a:xfrm>
-            <a:off x="320040" y="4572000"/>
-            <a:ext cx="8503920" cy="365760"/>
-          </a:xfrm>
-          <a:prstGeom prst="rect">
-            <a:avLst/>
-          </a:prstGeom>
-          <a:noFill/>
-        </p:spPr>
-        <p:txBody>
-          <a:bodyPr wrap="square" anchor="t" lIns="36576" rIns="36576" tIns="36576" bIns="36576">
-            <a:spAutoFit/>
-          </a:bodyPr>
-          <a:lstStyle/>
-          <a:p>
-            <a:pPr>
-              <a:spcAft>
-                <a:spcPts val="200"/>
-              </a:spcAft>
-            </a:pPr>
-            <a:r>
-              <a:rPr sz="900" b="0" i="0">
-                <a:solidFill>
-                  <a:srgbClr val="5F6368"/>
+              <a:t>120 of 120</a:t>
+            </a:r>
+            <a:r>
+              <a:rPr sz="1100" b="0" i="0">
+                <a:solidFill>
+                  <a:srgbClr val="202124"/>
                 </a:solidFill>
                 <a:latin typeface="Google Sans Flex"/>
                 <a:ea typeface="Google Sans Flex"/>
                 <a:cs typeface="Google Sans Flex"/>
                 <a:sym typeface="Google Sans Flex"/>
               </a:rPr>
-              <a:t>Target users: founders and operations managers of small FMCG / D2C brands across JAPAC.  All values are simulated on seeded data and will be validated in pilots.</a:t>
+              <a:t> simulated futures.</a:t>
+            </a:r>
+          </a:p>
+          <a:p>
+            <a:pPr marL="155448" indent="-137160">
+              <a:spcAft>
+                <a:spcPts val="300"/>
+              </a:spcAft>
+              <a:buClr>
+                <a:srgbClr val="1E8E3E"/>
+              </a:buClr>
+              <a:buChar char="•"/>
+            </a:pPr>
+            <a:r>
+              <a:rPr sz="1100" b="0" i="0">
+                <a:solidFill>
+                  <a:srgbClr val="202124"/>
+                </a:solidFill>
+                <a:latin typeface="Google Sans Flex"/>
+                <a:ea typeface="Google Sans Flex"/>
+                <a:cs typeface="Google Sans Flex"/>
+                <a:sym typeface="Google Sans Flex"/>
+              </a:rPr>
+              <a:t>Keeping 30% in reserve for weekly reviews: a further </a:t>
+            </a:r>
+            <a:r>
+              <a:rPr sz="1100" b="1" i="0">
+                <a:solidFill>
+                  <a:srgbClr val="202124"/>
+                </a:solidFill>
+                <a:latin typeface="Google Sans Flex"/>
+                <a:ea typeface="Google Sans Flex"/>
+                <a:cs typeface="Google Sans Flex"/>
+                <a:sym typeface="Google Sans Flex"/>
+              </a:rPr>
+              <a:t>₹0.8–1.0 lakh</a:t>
+            </a:r>
+            <a:r>
+              <a:rPr sz="1100" b="0" i="0">
+                <a:solidFill>
+                  <a:srgbClr val="202124"/>
+                </a:solidFill>
+                <a:latin typeface="Google Sans Flex"/>
+                <a:ea typeface="Google Sans Flex"/>
+                <a:cs typeface="Google Sans Flex"/>
+                <a:sym typeface="Google Sans Flex"/>
+              </a:rPr>
+              <a:t> in 9–10 of 10 futures.</a:t>
+            </a:r>
+          </a:p>
+        </p:txBody>
+      </p:sp>
+      <p:sp>
+        <p:nvSpPr>
+          <p:cNvPr id="82" name="TextBox 81"/>
+          <p:cNvSpPr txBox="1"/>
+          <p:nvPr/>
+        </p:nvSpPr>
+        <p:spPr>
+          <a:xfrm>
+            <a:off x="320040" y="4572000"/>
+            <a:ext cx="8503920" cy="365760"/>
+          </a:xfrm>
+          <a:prstGeom prst="rect">
+            <a:avLst/>
+          </a:prstGeom>
+          <a:noFill/>
+        </p:spPr>
+        <p:txBody>
+          <a:bodyPr wrap="square" anchor="t" lIns="36576" rIns="36576" tIns="36576" bIns="36576">
+            <a:spAutoFit/>
+          </a:bodyPr>
+          <a:lstStyle/>
+          <a:p>
+            <a:pPr>
+              <a:spcAft>
+                <a:spcPts val="200"/>
+              </a:spcAft>
+            </a:pPr>
+            <a:r>
+              <a:rPr sz="900" b="0" i="0">
+                <a:solidFill>
+                  <a:srgbClr val="5F6368"/>
+                </a:solidFill>
+                <a:latin typeface="Google Sans Flex"/>
+                <a:ea typeface="Google Sans Flex"/>
+                <a:cs typeface="Google Sans Flex"/>
+                <a:sym typeface="Google Sans Flex"/>
+              </a:rPr>
+              <a:t>Target users: supply-chain and operations teams of mid-size to large FMCG / D2C brands across JAPAC.  All values are simulated on seeded data and will be validated in pilots.</a:t>
             </a:r>
           </a:p>
         </p:txBody>
@@ -12998,7 +16005,7 @@
                 <a:cs typeface="Google Sans Flex"/>
                 <a:sym typeface="Google Sans Flex"/>
               </a:rPr>
-              <a:t> are powerful but costly and data-hungry for a 30-SKU brand.</a:t>
+              <a:t> forecast well but take months to roll out and still ignore the inbox; the rescue decisions happen in spreadsheets.</a:t>
             </a:r>
           </a:p>
           <a:p>
@@ -13250,7 +16257,7 @@
                 <a:cs typeface="Google Sans Flex"/>
                 <a:sym typeface="Google Sans Flex"/>
               </a:rPr>
-              <a:t>Event-aware p10/p50/p90 forecasts, checked against a seasonal-naive benchmark.</a:t>
+              <a:t>Hybrid forecasts: a statistical base, with the LLM tuning event effects that only exist as text.</a:t>
             </a:r>
           </a:p>
           <a:p>
@@ -13273,7 +16280,7 @@
                 <a:cs typeface="Google Sans Flex"/>
                 <a:sym typeface="Google Sans Flex"/>
               </a:rPr>
-              <a:t>Supplier reliability (on-time rate, P80 delay) sets effective lead times and safety stock.</a:t>
+              <a:t>Supplier delay history gives early / typical / late arrival cases.</a:t>
             </a:r>
           </a:p>
           <a:p>
@@ -13296,7 +16303,7 @@
                 <a:cs typeface="Google Sans Flex"/>
                 <a:sym typeface="Google Sans Flex"/>
               </a:rPr>
-              <a:t>Simulates 30 days per SKU and picks the best action mix under one cash budget, then explains and exports it.</a:t>
+              <a:t>Picks the best action mix under one cash budget, tests it on 120 simulated futures and shows when to spend.</a:t>
             </a:r>
           </a:p>
         </p:txBody>
@@ -13467,7 +16474,7 @@
                 <a:cs typeface="Google Sans Flex"/>
                 <a:sym typeface="Google Sans Flex"/>
               </a:rPr>
-              <a:t> across buy, expedite, markdown and defer.</a:t>
+              <a:t> across buy, expedite, markdown and defer, and over time (staggered buys).</a:t>
             </a:r>
           </a:p>
           <a:p>
@@ -13502,7 +16509,7 @@
                 <a:cs typeface="Google Sans Flex"/>
                 <a:sym typeface="Google Sans Flex"/>
               </a:rPr>
-              <a:t> the LLM proposes, code validates; no invented numbers; fallbacks are labelled.</a:t>
+              <a:t> the LLM proposes, code validates; every number in an answer is checked.</a:t>
             </a:r>
           </a:p>
           <a:p>
@@ -13525,7 +16532,7 @@
                 <a:cs typeface="Google Sans Flex"/>
                 <a:sym typeface="Google Sans Flex"/>
               </a:rPr>
-              <a:t>Proof built in:</a:t>
+              <a:t>Measured, not claimed:</a:t>
             </a:r>
             <a:r>
               <a:rPr sz="1050" b="0" i="0">
@@ -13537,7 +16544,7 @@
                 <a:cs typeface="Google Sans Flex"/>
                 <a:sym typeface="Google Sans Flex"/>
               </a:rPr>
-              <a:t> scorecard vs baseline, sensitivity, what-if scenarios and backtest.</a:t>
+              <a:t> extraction gold set, forecast backtest, Monte Carlo, 10-model comparison.</a:t>
             </a:r>
           </a:p>
           <a:p>
@@ -13560,7 +16567,7 @@
                 <a:cs typeface="Google Sans Flex"/>
                 <a:sym typeface="Google Sans Flex"/>
               </a:rPr>
-              <a:t>Cloud-ready:</a:t>
+              <a:t>Built for Google Cloud:</a:t>
             </a:r>
             <a:r>
               <a:rPr sz="1050" b="0" i="0">
@@ -13572,7 +16579,7 @@
                 <a:cs typeface="Google Sans Flex"/>
                 <a:sym typeface="Google Sans Flex"/>
               </a:rPr>
-              <a:t> adapters map 1:1 to Vertex AI, Cloud SQL, BigQuery and Cloud Storage.</a:t>
+              <a:t> Gemini on Vertex AI, Cloud Run, Cloud SQL, Cloud Storage.</a:t>
             </a:r>
           </a:p>
         </p:txBody>
@@ -13646,7 +16653,7 @@
                 <a:cs typeface="Google Sans Flex"/>
                 <a:sym typeface="Google Sans Flex"/>
               </a:rPr>
-              <a:t> LLMs can finally read messy supplier and campaign messages well enough, when wrapped in validation, to feed real planning maths that small brands could never afford before.</a:t>
+              <a:t> LLMs can finally read messy supplier and campaign messages well enough, when wrapped in validation, to feed real planning maths, and run it on pay-per-use cloud for a fraction of what it saves.</a:t>
             </a:r>
           </a:p>
         </p:txBody>
@@ -13835,7 +16842,7 @@
         <p:spPr>
           <a:xfrm>
             <a:off x="320040" y="1188720"/>
-            <a:ext cx="2057400" cy="1691640"/>
+            <a:ext cx="1627632" cy="1691640"/>
           </a:xfrm>
           <a:prstGeom prst="roundRect">
             <a:avLst>
@@ -13883,7 +16890,7 @@
         <p:spPr>
           <a:xfrm>
             <a:off x="320040" y="1188720"/>
-            <a:ext cx="2057400" cy="64008"/>
+            <a:ext cx="1627632" cy="64008"/>
           </a:xfrm>
           <a:prstGeom prst="roundRect">
             <a:avLst>
@@ -13928,8 +16935,8 @@
         </p:nvSpPr>
         <p:spPr>
           <a:xfrm>
-            <a:off x="429768" y="1371600"/>
-            <a:ext cx="310896" cy="310896"/>
+            <a:off x="411479" y="1371600"/>
+            <a:ext cx="274320" cy="274320"/>
           </a:xfrm>
           <a:prstGeom prst="ellipse">
             <a:avLst/>
@@ -13966,7 +16973,7 @@
               </a:spcAft>
             </a:pPr>
             <a:r>
-              <a:rPr sz="1100" b="1" i="0">
+              <a:rPr sz="1000" b="1" i="0">
                 <a:solidFill>
                   <a:srgbClr val="FFFFFF"/>
                 </a:solidFill>
@@ -13988,8 +16995,8 @@
         </p:nvSpPr>
         <p:spPr>
           <a:xfrm>
-            <a:off x="795528" y="1344168"/>
-            <a:ext cx="1536192" cy="384048"/>
+            <a:off x="731520" y="1325880"/>
+            <a:ext cx="1170432" cy="384048"/>
           </a:xfrm>
           <a:prstGeom prst="rect">
             <a:avLst/>
@@ -14008,7 +17015,7 @@
               </a:spcAft>
             </a:pPr>
             <a:r>
-              <a:rPr sz="1100" b="1" i="0">
+              <a:rPr sz="1000" b="1" i="0">
                 <a:solidFill>
                   <a:srgbClr val="202124"/>
                 </a:solidFill>
@@ -14030,8 +17037,8 @@
         </p:nvSpPr>
         <p:spPr>
           <a:xfrm>
-            <a:off x="411479" y="1792224"/>
-            <a:ext cx="1892807" cy="1051560"/>
+            <a:off x="393192" y="1755648"/>
+            <a:ext cx="1499616" cy="1097280"/>
           </a:xfrm>
           <a:prstGeom prst="rect">
             <a:avLst/>
@@ -14050,7 +17057,7 @@
               </a:spcAft>
             </a:pPr>
             <a:r>
-              <a:rPr sz="950" b="0" i="0">
+              <a:rPr sz="850" b="0" i="0">
                 <a:solidFill>
                   <a:srgbClr val="5F6368"/>
                 </a:solidFill>
@@ -14059,7 +17066,7 @@
                 <a:cs typeface="Google Sans Flex"/>
                 <a:sym typeface="Google Sans Flex"/>
               </a:rPr>
-              <a:t>Paste or upload supplier/campaign messages. The LLM extracts delays, spikes, drops and expiry risk with verbatim quotes; confirm or reject.</a:t>
+              <a:t>Emails, WhatsApp notes, Hindi/Hinglish → typed delay, spike, drop and expiry events with verbatim quotes. A human confirms each one.</a:t>
             </a:r>
           </a:p>
         </p:txBody>
@@ -14072,8 +17079,8 @@
         </p:nvSpPr>
         <p:spPr>
           <a:xfrm>
-            <a:off x="2468880" y="1188720"/>
-            <a:ext cx="2057400" cy="1691640"/>
+            <a:off x="2039112" y="1188720"/>
+            <a:ext cx="1627632" cy="1691640"/>
           </a:xfrm>
           <a:prstGeom prst="roundRect">
             <a:avLst>
@@ -14120,8 +17127,8 @@
         </p:nvSpPr>
         <p:spPr>
           <a:xfrm>
-            <a:off x="2468880" y="1188720"/>
-            <a:ext cx="2057400" cy="64008"/>
+            <a:off x="2039112" y="1188720"/>
+            <a:ext cx="1627632" cy="64008"/>
           </a:xfrm>
           <a:prstGeom prst="roundRect">
             <a:avLst>
@@ -14166,8 +17173,8 @@
         </p:nvSpPr>
         <p:spPr>
           <a:xfrm>
-            <a:off x="2578608" y="1371600"/>
-            <a:ext cx="310896" cy="310896"/>
+            <a:off x="2130552" y="1371600"/>
+            <a:ext cx="274320" cy="274320"/>
           </a:xfrm>
           <a:prstGeom prst="ellipse">
             <a:avLst/>
@@ -14204,7 +17211,7 @@
               </a:spcAft>
             </a:pPr>
             <a:r>
-              <a:rPr sz="1100" b="1" i="0">
+              <a:rPr sz="1000" b="1" i="0">
                 <a:solidFill>
                   <a:srgbClr val="FFFFFF"/>
                 </a:solidFill>
@@ -14226,8 +17233,8 @@
         </p:nvSpPr>
         <p:spPr>
           <a:xfrm>
-            <a:off x="2944368" y="1344168"/>
-            <a:ext cx="1536192" cy="384048"/>
+            <a:off x="2450592" y="1325880"/>
+            <a:ext cx="1170432" cy="384048"/>
           </a:xfrm>
           <a:prstGeom prst="rect">
             <a:avLst/>
@@ -14246,7 +17253,7 @@
               </a:spcAft>
             </a:pPr>
             <a:r>
-              <a:rPr sz="1100" b="1" i="0">
+              <a:rPr sz="1000" b="1" i="0">
                 <a:solidFill>
                   <a:srgbClr val="202124"/>
                 </a:solidFill>
@@ -14255,7 +17262,7 @@
                 <a:cs typeface="Google Sans Flex"/>
                 <a:sym typeface="Google Sans Flex"/>
               </a:rPr>
-              <a:t>Event-aware forecasts</a:t>
+              <a:t>Hybrid forecasts</a:t>
             </a:r>
           </a:p>
         </p:txBody>
@@ -14268,8 +17275,8 @@
         </p:nvSpPr>
         <p:spPr>
           <a:xfrm>
-            <a:off x="2560320" y="1792224"/>
-            <a:ext cx="1892807" cy="1051560"/>
+            <a:off x="2112264" y="1755648"/>
+            <a:ext cx="1499616" cy="1097280"/>
           </a:xfrm>
           <a:prstGeom prst="rect">
             <a:avLst/>
@@ -14288,7 +17295,7 @@
               </a:spcAft>
             </a:pPr>
             <a:r>
-              <a:rPr sz="950" b="0" i="0">
+              <a:rPr sz="850" b="0" i="0">
                 <a:solidFill>
                   <a:srgbClr val="5F6368"/>
                 </a:solidFill>
@@ -14297,7 +17304,7 @@
                 <a:cs typeface="Google Sans Flex"/>
                 <a:sym typeface="Google Sans Flex"/>
               </a:rPr>
-              <a:t>30-day p10/p50/p90 per SKU with drivers, validated against seasonal-naive and confirmed events; labelled fallback.</a:t>
+              <a:t>Statistical base (Holt-Winters / Croston). The LLM tunes event effects within bounds, including news that exists only as text.</a:t>
             </a:r>
           </a:p>
         </p:txBody>
@@ -14310,8 +17317,8 @@
         </p:nvSpPr>
         <p:spPr>
           <a:xfrm>
-            <a:off x="4617720" y="1188720"/>
-            <a:ext cx="2057400" cy="1691640"/>
+            <a:off x="3758184" y="1188720"/>
+            <a:ext cx="1627632" cy="1691640"/>
           </a:xfrm>
           <a:prstGeom prst="roundRect">
             <a:avLst>
@@ -14358,8 +17365,8 @@
         </p:nvSpPr>
         <p:spPr>
           <a:xfrm>
-            <a:off x="4617720" y="1188720"/>
-            <a:ext cx="2057400" cy="64008"/>
+            <a:off x="3758184" y="1188720"/>
+            <a:ext cx="1627632" cy="64008"/>
           </a:xfrm>
           <a:prstGeom prst="roundRect">
             <a:avLst>
@@ -14367,7 +17374,7 @@
             </a:avLst>
           </a:prstGeom>
           <a:solidFill>
-            <a:srgbClr val="1E8E3E"/>
+            <a:srgbClr val="1A73E8"/>
           </a:solidFill>
           <a:ln>
             <a:noFill/>
@@ -14404,14 +17411,14 @@
         </p:nvSpPr>
         <p:spPr>
           <a:xfrm>
-            <a:off x="4727448" y="1371600"/>
-            <a:ext cx="310896" cy="310896"/>
+            <a:off x="3849624" y="1371600"/>
+            <a:ext cx="274320" cy="274320"/>
           </a:xfrm>
           <a:prstGeom prst="ellipse">
             <a:avLst/>
           </a:prstGeom>
           <a:solidFill>
-            <a:srgbClr val="1E8E3E"/>
+            <a:srgbClr val="1A73E8"/>
           </a:solidFill>
           <a:ln>
             <a:noFill/>
@@ -14442,7 +17449,7 @@
               </a:spcAft>
             </a:pPr>
             <a:r>
-              <a:rPr sz="1100" b="1" i="0">
+              <a:rPr sz="1000" b="1" i="0">
                 <a:solidFill>
                   <a:srgbClr val="FFFFFF"/>
                 </a:solidFill>
@@ -14464,8 +17471,8 @@
         </p:nvSpPr>
         <p:spPr>
           <a:xfrm>
-            <a:off x="5093208" y="1344168"/>
-            <a:ext cx="1536192" cy="384048"/>
+            <a:off x="4169664" y="1325880"/>
+            <a:ext cx="1170432" cy="384048"/>
           </a:xfrm>
           <a:prstGeom prst="rect">
             <a:avLst/>
@@ -14484,7 +17491,7 @@
               </a:spcAft>
             </a:pPr>
             <a:r>
-              <a:rPr sz="1100" b="1" i="0">
+              <a:rPr sz="1000" b="1" i="0">
                 <a:solidFill>
                   <a:srgbClr val="202124"/>
                 </a:solidFill>
@@ -14493,7 +17500,7 @@
                 <a:cs typeface="Google Sans Flex"/>
                 <a:sym typeface="Google Sans Flex"/>
               </a:rPr>
-              <a:t>Supplier intelligence</a:t>
+              <a:t>Planning assistant</a:t>
             </a:r>
           </a:p>
         </p:txBody>
@@ -14506,8 +17513,8 @@
         </p:nvSpPr>
         <p:spPr>
           <a:xfrm>
-            <a:off x="4709159" y="1792224"/>
-            <a:ext cx="1892807" cy="1051560"/>
+            <a:off x="3831336" y="1755648"/>
+            <a:ext cx="1499616" cy="1097280"/>
           </a:xfrm>
           <a:prstGeom prst="rect">
             <a:avLst/>
@@ -14526,7 +17533,7 @@
               </a:spcAft>
             </a:pPr>
             <a:r>
-              <a:rPr sz="950" b="0" i="0">
+              <a:rPr sz="850" b="0" i="0">
                 <a:solidFill>
                   <a:srgbClr val="5F6368"/>
                 </a:solidFill>
@@ -14535,7 +17542,7 @@
                 <a:cs typeface="Google Sans Flex"/>
                 <a:sym typeface="Google Sans Flex"/>
               </a:rPr>
-              <a:t>On-time rate, fill rate and P80 delay from receipts give effective lead time and dynamic safety stock.</a:t>
+              <a:t>Ask “why” or “what if” in plain language. The model calls 10 read-only planner tools; every number is checked.</a:t>
             </a:r>
           </a:p>
         </p:txBody>
@@ -14548,8 +17555,8 @@
         </p:nvSpPr>
         <p:spPr>
           <a:xfrm>
-            <a:off x="6766560" y="1188720"/>
-            <a:ext cx="2057400" cy="1691640"/>
+            <a:off x="5477256" y="1188720"/>
+            <a:ext cx="1627632" cy="1691640"/>
           </a:xfrm>
           <a:prstGeom prst="roundRect">
             <a:avLst>
@@ -14596,8 +17603,8 @@
         </p:nvSpPr>
         <p:spPr>
           <a:xfrm>
-            <a:off x="6766560" y="1188720"/>
-            <a:ext cx="2057400" cy="64008"/>
+            <a:off x="5477256" y="1188720"/>
+            <a:ext cx="1627632" cy="64008"/>
           </a:xfrm>
           <a:prstGeom prst="roundRect">
             <a:avLst>
@@ -14605,7 +17612,7 @@
             </a:avLst>
           </a:prstGeom>
           <a:solidFill>
-            <a:srgbClr val="1E8E3E"/>
+            <a:srgbClr val="1A73E8"/>
           </a:solidFill>
           <a:ln>
             <a:noFill/>
@@ -14642,14 +17649,14 @@
         </p:nvSpPr>
         <p:spPr>
           <a:xfrm>
-            <a:off x="6876288" y="1371600"/>
-            <a:ext cx="310896" cy="310896"/>
+            <a:off x="5568696" y="1371600"/>
+            <a:ext cx="274320" cy="274320"/>
           </a:xfrm>
           <a:prstGeom prst="ellipse">
             <a:avLst/>
           </a:prstGeom>
           <a:solidFill>
-            <a:srgbClr val="1E8E3E"/>
+            <a:srgbClr val="1A73E8"/>
           </a:solidFill>
           <a:ln>
             <a:noFill/>
@@ -14680,7 +17687,7 @@
               </a:spcAft>
             </a:pPr>
             <a:r>
-              <a:rPr sz="1100" b="1" i="0">
+              <a:rPr sz="1000" b="1" i="0">
                 <a:solidFill>
                   <a:srgbClr val="FFFFFF"/>
                 </a:solidFill>
@@ -14702,8 +17709,8 @@
         </p:nvSpPr>
         <p:spPr>
           <a:xfrm>
-            <a:off x="7242048" y="1344168"/>
-            <a:ext cx="1536192" cy="384048"/>
+            <a:off x="5888736" y="1325880"/>
+            <a:ext cx="1170432" cy="384048"/>
           </a:xfrm>
           <a:prstGeom prst="rect">
             <a:avLst/>
@@ -14722,7 +17729,7 @@
               </a:spcAft>
             </a:pPr>
             <a:r>
-              <a:rPr sz="1100" b="1" i="0">
+              <a:rPr sz="1000" b="1" i="0">
                 <a:solidFill>
                   <a:srgbClr val="202124"/>
                 </a:solidFill>
@@ -14731,7 +17738,7 @@
                 <a:cs typeface="Google Sans Flex"/>
                 <a:sym typeface="Google Sans Flex"/>
               </a:rPr>
-              <a:t>Budgeted recovery planner</a:t>
+              <a:t>Grounded explanations</a:t>
             </a:r>
           </a:p>
         </p:txBody>
@@ -14744,8 +17751,8 @@
         </p:nvSpPr>
         <p:spPr>
           <a:xfrm>
-            <a:off x="6858000" y="1792224"/>
-            <a:ext cx="1892807" cy="1051560"/>
+            <a:off x="5550408" y="1755648"/>
+            <a:ext cx="1499616" cy="1097280"/>
           </a:xfrm>
           <a:prstGeom prst="rect">
             <a:avLst/>
@@ -14764,7 +17771,7 @@
               </a:spcAft>
             </a:pPr>
             <a:r>
-              <a:rPr sz="950" b="0" i="0">
+              <a:rPr sz="850" b="0" i="0">
                 <a:solidFill>
                   <a:srgbClr val="5F6368"/>
                 </a:solidFill>
@@ -14773,7 +17780,7 @@
                 <a:cs typeface="Google Sans Flex"/>
                 <a:sym typeface="Google Sans Flex"/>
               </a:rPr>
-              <a:t>Buy / expedite / markdown / defer candidates per SKU; exact knapsack picks the best set under the cash budget.</a:t>
+              <a:t>Plan narrative and what-if parsing that may only use numbers and IDs from the plan; else a labelled template.</a:t>
             </a:r>
           </a:p>
         </p:txBody>
@@ -14786,8 +17793,8 @@
         </p:nvSpPr>
         <p:spPr>
           <a:xfrm>
-            <a:off x="320040" y="2971800"/>
-            <a:ext cx="2057400" cy="1691640"/>
+            <a:off x="7196328" y="1188720"/>
+            <a:ext cx="1627632" cy="1691640"/>
           </a:xfrm>
           <a:prstGeom prst="roundRect">
             <a:avLst>
@@ -14834,8 +17841,8 @@
         </p:nvSpPr>
         <p:spPr>
           <a:xfrm>
-            <a:off x="320040" y="2971800"/>
-            <a:ext cx="2057400" cy="64008"/>
+            <a:off x="7196328" y="1188720"/>
+            <a:ext cx="1627632" cy="64008"/>
           </a:xfrm>
           <a:prstGeom prst="roundRect">
             <a:avLst>
@@ -14880,8 +17887,8 @@
         </p:nvSpPr>
         <p:spPr>
           <a:xfrm>
-            <a:off x="429768" y="3154680"/>
-            <a:ext cx="310896" cy="310896"/>
+            <a:off x="7287768" y="1371600"/>
+            <a:ext cx="274320" cy="274320"/>
           </a:xfrm>
           <a:prstGeom prst="ellipse">
             <a:avLst/>
@@ -14918,7 +17925,7 @@
               </a:spcAft>
             </a:pPr>
             <a:r>
-              <a:rPr sz="1100" b="1" i="0">
+              <a:rPr sz="1000" b="1" i="0">
                 <a:solidFill>
                   <a:srgbClr val="FFFFFF"/>
                 </a:solidFill>
@@ -14940,8 +17947,8 @@
         </p:nvSpPr>
         <p:spPr>
           <a:xfrm>
-            <a:off x="795528" y="3127248"/>
-            <a:ext cx="1536192" cy="384048"/>
+            <a:off x="7607808" y="1325880"/>
+            <a:ext cx="1170432" cy="384048"/>
           </a:xfrm>
           <a:prstGeom prst="rect">
             <a:avLst/>
@@ -14960,7 +17967,7 @@
               </a:spcAft>
             </a:pPr>
             <a:r>
-              <a:rPr sz="1100" b="1" i="0">
+              <a:rPr sz="1000" b="1" i="0">
                 <a:solidFill>
                   <a:srgbClr val="202124"/>
                 </a:solidFill>
@@ -14969,7 +17976,7 @@
                 <a:cs typeface="Google Sans Flex"/>
                 <a:sym typeface="Google Sans Flex"/>
               </a:rPr>
-              <a:t>Value scorecard</a:t>
+              <a:t>Supply &amp; service level</a:t>
             </a:r>
           </a:p>
         </p:txBody>
@@ -14982,8 +17989,8 @@
         </p:nvSpPr>
         <p:spPr>
           <a:xfrm>
-            <a:off x="411479" y="3575304"/>
-            <a:ext cx="1892807" cy="1051560"/>
+            <a:off x="7269480" y="1755648"/>
+            <a:ext cx="1499616" cy="1097280"/>
           </a:xfrm>
           <a:prstGeom prst="rect">
             <a:avLst/>
@@ -15002,7 +18009,7 @@
               </a:spcAft>
             </a:pPr>
             <a:r>
-              <a:rPr sz="950" b="0" i="0">
+              <a:rPr sz="850" b="0" i="0">
                 <a:solidFill>
                   <a:srgbClr val="5F6368"/>
                 </a:solidFill>
@@ -15011,7 +18018,7 @@
                 <a:cs typeface="Google Sans Flex"/>
                 <a:sym typeface="Google Sans Flex"/>
               </a:rPr>
-              <a:t>Plan vs rule-based baseline on the same demand path: lost margin, expiry, markdown, expedite, cash.</a:t>
+              <a:t>Supplier delay cases (early / typical / late); hero SKUs carry a goodwill penalty per unit short.</a:t>
             </a:r>
           </a:p>
         </p:txBody>
@@ -15024,8 +18031,8 @@
         </p:nvSpPr>
         <p:spPr>
           <a:xfrm>
-            <a:off x="2468880" y="2971800"/>
-            <a:ext cx="2057400" cy="1691640"/>
+            <a:off x="320040" y="2971800"/>
+            <a:ext cx="1627632" cy="1691640"/>
           </a:xfrm>
           <a:prstGeom prst="roundRect">
             <a:avLst>
@@ -15072,8 +18079,8 @@
         </p:nvSpPr>
         <p:spPr>
           <a:xfrm>
-            <a:off x="2468880" y="2971800"/>
-            <a:ext cx="2057400" cy="64008"/>
+            <a:off x="320040" y="2971800"/>
+            <a:ext cx="1627632" cy="64008"/>
           </a:xfrm>
           <a:prstGeom prst="roundRect">
             <a:avLst>
@@ -15081,7 +18088,7 @@
             </a:avLst>
           </a:prstGeom>
           <a:solidFill>
-            <a:srgbClr val="1A73E8"/>
+            <a:srgbClr val="1E8E3E"/>
           </a:solidFill>
           <a:ln>
             <a:noFill/>
@@ -15118,14 +18125,14 @@
         </p:nvSpPr>
         <p:spPr>
           <a:xfrm>
-            <a:off x="2578608" y="3154680"/>
-            <a:ext cx="310896" cy="310896"/>
+            <a:off x="411479" y="3154680"/>
+            <a:ext cx="274320" cy="274320"/>
           </a:xfrm>
           <a:prstGeom prst="ellipse">
             <a:avLst/>
           </a:prstGeom>
           <a:solidFill>
-            <a:srgbClr val="1A73E8"/>
+            <a:srgbClr val="1E8E3E"/>
           </a:solidFill>
           <a:ln>
             <a:noFill/>
@@ -15156,7 +18163,7 @@
               </a:spcAft>
             </a:pPr>
             <a:r>
-              <a:rPr sz="1100" b="1" i="0">
+              <a:rPr sz="1000" b="1" i="0">
                 <a:solidFill>
                   <a:srgbClr val="FFFFFF"/>
                 </a:solidFill>
@@ -15178,8 +18185,8 @@
         </p:nvSpPr>
         <p:spPr>
           <a:xfrm>
-            <a:off x="2944368" y="3127248"/>
-            <a:ext cx="1536192" cy="384048"/>
+            <a:off x="731520" y="3108960"/>
+            <a:ext cx="1170432" cy="384048"/>
           </a:xfrm>
           <a:prstGeom prst="rect">
             <a:avLst/>
@@ -15198,7 +18205,7 @@
               </a:spcAft>
             </a:pPr>
             <a:r>
-              <a:rPr sz="1100" b="1" i="0">
+              <a:rPr sz="1000" b="1" i="0">
                 <a:solidFill>
                   <a:srgbClr val="202124"/>
                 </a:solidFill>
@@ -15207,7 +18214,7 @@
                 <a:cs typeface="Google Sans Flex"/>
                 <a:sym typeface="Google Sans Flex"/>
               </a:rPr>
-              <a:t>Grounded explanations</a:t>
+              <a:t>Budgeted planner</a:t>
             </a:r>
           </a:p>
         </p:txBody>
@@ -15220,8 +18227,8 @@
         </p:nvSpPr>
         <p:spPr>
           <a:xfrm>
-            <a:off x="2560320" y="3575304"/>
-            <a:ext cx="1892807" cy="1051560"/>
+            <a:off x="393192" y="3538728"/>
+            <a:ext cx="1499616" cy="1097280"/>
           </a:xfrm>
           <a:prstGeom prst="rect">
             <a:avLst/>
@@ -15240,7 +18247,7 @@
               </a:spcAft>
             </a:pPr>
             <a:r>
-              <a:rPr sz="950" b="0" i="0">
+              <a:rPr sz="850" b="0" i="0">
                 <a:solidFill>
                   <a:srgbClr val="5F6368"/>
                 </a:solidFill>
@@ -15249,7 +18256,7 @@
                 <a:cs typeface="Google Sans Flex"/>
                 <a:sym typeface="Google Sans Flex"/>
               </a:rPr>
-              <a:t>Narrative may only cite numbers and record IDs present in the plan; one repair retry, then a template.</a:t>
+              <a:t>Buy, expedite, markdown (with cannibalisation) or defer; an exact knapsack picks the best set under the cash budget.</a:t>
             </a:r>
           </a:p>
         </p:txBody>
@@ -15262,8 +18269,8 @@
         </p:nvSpPr>
         <p:spPr>
           <a:xfrm>
-            <a:off x="4617720" y="2971800"/>
-            <a:ext cx="2057400" cy="1691640"/>
+            <a:off x="2039112" y="2971800"/>
+            <a:ext cx="1627632" cy="1691640"/>
           </a:xfrm>
           <a:prstGeom prst="roundRect">
             <a:avLst>
@@ -15310,8 +18317,8 @@
         </p:nvSpPr>
         <p:spPr>
           <a:xfrm>
-            <a:off x="4617720" y="2971800"/>
-            <a:ext cx="2057400" cy="64008"/>
+            <a:off x="2039112" y="2971800"/>
+            <a:ext cx="1627632" cy="64008"/>
           </a:xfrm>
           <a:prstGeom prst="roundRect">
             <a:avLst>
@@ -15319,7 +18326,7 @@
             </a:avLst>
           </a:prstGeom>
           <a:solidFill>
-            <a:srgbClr val="E37400"/>
+            <a:srgbClr val="1E8E3E"/>
           </a:solidFill>
           <a:ln>
             <a:noFill/>
@@ -15356,14 +18363,14 @@
         </p:nvSpPr>
         <p:spPr>
           <a:xfrm>
-            <a:off x="4727448" y="3154680"/>
-            <a:ext cx="310896" cy="310896"/>
+            <a:off x="2130552" y="3154680"/>
+            <a:ext cx="274320" cy="274320"/>
           </a:xfrm>
           <a:prstGeom prst="ellipse">
             <a:avLst/>
           </a:prstGeom>
           <a:solidFill>
-            <a:srgbClr val="E37400"/>
+            <a:srgbClr val="1E8E3E"/>
           </a:solidFill>
           <a:ln>
             <a:noFill/>
@@ -15394,7 +18401,7 @@
               </a:spcAft>
             </a:pPr>
             <a:r>
-              <a:rPr sz="1100" b="1" i="0">
+              <a:rPr sz="1000" b="1" i="0">
                 <a:solidFill>
                   <a:srgbClr val="FFFFFF"/>
                 </a:solidFill>
@@ -15416,8 +18423,8 @@
         </p:nvSpPr>
         <p:spPr>
           <a:xfrm>
-            <a:off x="5093208" y="3127248"/>
-            <a:ext cx="1536192" cy="384048"/>
+            <a:off x="2450592" y="3108960"/>
+            <a:ext cx="1170432" cy="384048"/>
           </a:xfrm>
           <a:prstGeom prst="rect">
             <a:avLst/>
@@ -15436,7 +18443,7 @@
               </a:spcAft>
             </a:pPr>
             <a:r>
-              <a:rPr sz="1100" b="1" i="0">
+              <a:rPr sz="1000" b="1" i="0">
                 <a:solidFill>
                   <a:srgbClr val="202124"/>
                 </a:solidFill>
@@ -15445,7 +18452,7 @@
                 <a:cs typeface="Google Sans Flex"/>
                 <a:sym typeface="Google Sans Flex"/>
               </a:rPr>
-              <a:t>What-if &amp; backtest</a:t>
+              <a:t>Plan options</a:t>
             </a:r>
           </a:p>
         </p:txBody>
@@ -15458,8 +18465,8 @@
         </p:nvSpPr>
         <p:spPr>
           <a:xfrm>
-            <a:off x="4709159" y="3575304"/>
-            <a:ext cx="1892807" cy="1051560"/>
+            <a:off x="2112264" y="3538728"/>
+            <a:ext cx="1499616" cy="1097280"/>
           </a:xfrm>
           <a:prstGeom prst="rect">
             <a:avLst/>
@@ -15478,7 +18485,7 @@
               </a:spcAft>
             </a:pPr>
             <a:r>
-              <a:rPr sz="950" b="0" i="0">
+              <a:rPr sz="850" b="0" i="0">
                 <a:solidFill>
                   <a:srgbClr val="5F6368"/>
                 </a:solidFill>
@@ -15487,7 +18494,7 @@
                 <a:cs typeface="Google Sans Flex"/>
                 <a:sym typeface="Google Sans Flex"/>
               </a:rPr>
-              <a:t>Plain-English scenarios become a typed spec and an adapted plan; sensitivity tests and 14-day forecast backtest.</a:t>
+              <a:t>Commit now, staggered buys, keep a reserve or lean, compared with weekly re-planning in calm and shocked futures.</a:t>
             </a:r>
           </a:p>
         </p:txBody>
@@ -15500,8 +18507,8 @@
         </p:nvSpPr>
         <p:spPr>
           <a:xfrm>
-            <a:off x="6766560" y="2971800"/>
-            <a:ext cx="2057400" cy="1691640"/>
+            <a:off x="3758184" y="2971800"/>
+            <a:ext cx="1627632" cy="1691640"/>
           </a:xfrm>
           <a:prstGeom prst="roundRect">
             <a:avLst>
@@ -15548,8 +18555,246 @@
         </p:nvSpPr>
         <p:spPr>
           <a:xfrm>
-            <a:off x="6766560" y="2971800"/>
-            <a:ext cx="2057400" cy="64008"/>
+            <a:off x="3758184" y="2971800"/>
+            <a:ext cx="1627632" cy="64008"/>
+          </a:xfrm>
+          <a:prstGeom prst="roundRect">
+            <a:avLst>
+              <a:gd name="adj" fmla="val 50000"/>
+            </a:avLst>
+          </a:prstGeom>
+          <a:solidFill>
+            <a:srgbClr val="1E8E3E"/>
+          </a:solidFill>
+          <a:ln>
+            <a:noFill/>
+          </a:ln>
+          <a:effectLst/>
+        </p:spPr>
+        <p:style>
+          <a:lnRef idx="1">
+            <a:schemeClr val="accent1"/>
+          </a:lnRef>
+          <a:fillRef idx="3">
+            <a:schemeClr val="accent1"/>
+          </a:fillRef>
+          <a:effectRef idx="2">
+            <a:schemeClr val="accent1"/>
+          </a:effectRef>
+          <a:fontRef idx="minor">
+            <a:schemeClr val="lt1"/>
+          </a:fontRef>
+        </p:style>
+        <p:txBody>
+          <a:bodyPr rtlCol="0" anchor="t" wrap="square" lIns="73152" rIns="73152" tIns="73152" bIns="73152"/>
+          <a:lstStyle/>
+          <a:p>
+            <a:pPr algn="ctr"/>
+          </a:p>
+        </p:txBody>
+      </p:sp>
+      <p:sp>
+        <p:nvSpPr>
+          <p:cNvPr id="125" name="Oval 124"/>
+          <p:cNvSpPr/>
+          <p:nvPr/>
+        </p:nvSpPr>
+        <p:spPr>
+          <a:xfrm>
+            <a:off x="3849624" y="3154680"/>
+            <a:ext cx="274320" cy="274320"/>
+          </a:xfrm>
+          <a:prstGeom prst="ellipse">
+            <a:avLst/>
+          </a:prstGeom>
+          <a:solidFill>
+            <a:srgbClr val="1E8E3E"/>
+          </a:solidFill>
+          <a:ln>
+            <a:noFill/>
+          </a:ln>
+          <a:effectLst/>
+        </p:spPr>
+        <p:style>
+          <a:lnRef idx="1">
+            <a:schemeClr val="accent1"/>
+          </a:lnRef>
+          <a:fillRef idx="3">
+            <a:schemeClr val="accent1"/>
+          </a:fillRef>
+          <a:effectRef idx="2">
+            <a:schemeClr val="accent1"/>
+          </a:effectRef>
+          <a:fontRef idx="minor">
+            <a:schemeClr val="lt1"/>
+          </a:fontRef>
+        </p:style>
+        <p:txBody>
+          <a:bodyPr rtlCol="0" anchor="ctr" wrap="square" lIns="0" rIns="0" tIns="0" bIns="0"/>
+          <a:lstStyle/>
+          <a:p>
+            <a:pPr algn="ctr">
+              <a:spcAft>
+                <a:spcPts val="200"/>
+              </a:spcAft>
+            </a:pPr>
+            <a:r>
+              <a:rPr sz="1000" b="1" i="0">
+                <a:solidFill>
+                  <a:srgbClr val="FFFFFF"/>
+                </a:solidFill>
+                <a:latin typeface="Google Sans Flex"/>
+                <a:ea typeface="Google Sans Flex"/>
+                <a:cs typeface="Google Sans Flex"/>
+                <a:sym typeface="Google Sans Flex"/>
+              </a:rPr>
+              <a:t>8</a:t>
+            </a:r>
+          </a:p>
+        </p:txBody>
+      </p:sp>
+      <p:sp>
+        <p:nvSpPr>
+          <p:cNvPr id="126" name="TextBox 125"/>
+          <p:cNvSpPr txBox="1"/>
+          <p:nvPr/>
+        </p:nvSpPr>
+        <p:spPr>
+          <a:xfrm>
+            <a:off x="4169664" y="3108960"/>
+            <a:ext cx="1170432" cy="384048"/>
+          </a:xfrm>
+          <a:prstGeom prst="rect">
+            <a:avLst/>
+          </a:prstGeom>
+          <a:noFill/>
+        </p:spPr>
+        <p:txBody>
+          <a:bodyPr wrap="square" anchor="ctr" lIns="36576" rIns="36576" tIns="36576" bIns="36576">
+            <a:spAutoFit/>
+          </a:bodyPr>
+          <a:lstStyle/>
+          <a:p>
+            <a:pPr>
+              <a:spcAft>
+                <a:spcPts val="200"/>
+              </a:spcAft>
+            </a:pPr>
+            <a:r>
+              <a:rPr sz="1000" b="1" i="0">
+                <a:solidFill>
+                  <a:srgbClr val="202124"/>
+                </a:solidFill>
+                <a:latin typeface="Google Sans Flex"/>
+                <a:ea typeface="Google Sans Flex"/>
+                <a:cs typeface="Google Sans Flex"/>
+                <a:sym typeface="Google Sans Flex"/>
+              </a:rPr>
+              <a:t>Robustness &amp; proof</a:t>
+            </a:r>
+          </a:p>
+        </p:txBody>
+      </p:sp>
+      <p:sp>
+        <p:nvSpPr>
+          <p:cNvPr id="127" name="TextBox 126"/>
+          <p:cNvSpPr txBox="1"/>
+          <p:nvPr/>
+        </p:nvSpPr>
+        <p:spPr>
+          <a:xfrm>
+            <a:off x="3831336" y="3538728"/>
+            <a:ext cx="1499616" cy="1097280"/>
+          </a:xfrm>
+          <a:prstGeom prst="rect">
+            <a:avLst/>
+          </a:prstGeom>
+          <a:noFill/>
+        </p:spPr>
+        <p:txBody>
+          <a:bodyPr wrap="square" anchor="t" lIns="36576" rIns="36576" tIns="36576" bIns="36576">
+            <a:spAutoFit/>
+          </a:bodyPr>
+          <a:lstStyle/>
+          <a:p>
+            <a:pPr>
+              <a:spcAft>
+                <a:spcPts val="200"/>
+              </a:spcAft>
+            </a:pPr>
+            <a:r>
+              <a:rPr sz="850" b="0" i="0">
+                <a:solidFill>
+                  <a:srgbClr val="5F6368"/>
+                </a:solidFill>
+                <a:latin typeface="Google Sans Flex"/>
+                <a:ea typeface="Google Sans Flex"/>
+                <a:cs typeface="Google Sans Flex"/>
+                <a:sym typeface="Google Sans Flex"/>
+              </a:rPr>
+              <a:t>120 Monte Carlo futures vs static and tuned reorder rules; budget frontier; forecast backtest.</a:t>
+            </a:r>
+          </a:p>
+        </p:txBody>
+      </p:sp>
+      <p:sp>
+        <p:nvSpPr>
+          <p:cNvPr id="128" name="Rounded Rectangle 127"/>
+          <p:cNvSpPr/>
+          <p:nvPr/>
+        </p:nvSpPr>
+        <p:spPr>
+          <a:xfrm>
+            <a:off x="5477256" y="2971800"/>
+            <a:ext cx="1627632" cy="1691640"/>
+          </a:xfrm>
+          <a:prstGeom prst="roundRect">
+            <a:avLst>
+              <a:gd name="adj" fmla="val 4000"/>
+            </a:avLst>
+          </a:prstGeom>
+          <a:solidFill>
+            <a:srgbClr val="FFFFFF"/>
+          </a:solidFill>
+          <a:ln w="9525">
+            <a:solidFill>
+              <a:srgbClr val="DADCE0"/>
+            </a:solidFill>
+          </a:ln>
+          <a:effectLst/>
+        </p:spPr>
+        <p:style>
+          <a:lnRef idx="1">
+            <a:schemeClr val="accent1"/>
+          </a:lnRef>
+          <a:fillRef idx="3">
+            <a:schemeClr val="accent1"/>
+          </a:fillRef>
+          <a:effectRef idx="2">
+            <a:schemeClr val="accent1"/>
+          </a:effectRef>
+          <a:fontRef idx="minor">
+            <a:schemeClr val="lt1"/>
+          </a:fontRef>
+        </p:style>
+        <p:txBody>
+          <a:bodyPr rtlCol="0" anchor="t" wrap="square" lIns="73152" rIns="73152" tIns="73152" bIns="73152"/>
+          <a:lstStyle/>
+          <a:p>
+            <a:pPr algn="ctr"/>
+          </a:p>
+        </p:txBody>
+      </p:sp>
+      <p:sp>
+        <p:nvSpPr>
+          <p:cNvPr id="129" name="Rounded Rectangle 128"/>
+          <p:cNvSpPr/>
+          <p:nvPr/>
+        </p:nvSpPr>
+        <p:spPr>
+          <a:xfrm>
+            <a:off x="5477256" y="2971800"/>
+            <a:ext cx="1627632" cy="64008"/>
           </a:xfrm>
           <a:prstGeom prst="roundRect">
             <a:avLst>
@@ -15588,14 +18833,14 @@
       </p:sp>
       <p:sp>
         <p:nvSpPr>
-          <p:cNvPr id="125" name="Oval 124"/>
+          <p:cNvPr id="130" name="Oval 129"/>
           <p:cNvSpPr/>
           <p:nvPr/>
         </p:nvSpPr>
         <p:spPr>
           <a:xfrm>
-            <a:off x="6876288" y="3154680"/>
-            <a:ext cx="310896" cy="310896"/>
+            <a:off x="5568696" y="3154680"/>
+            <a:ext cx="274320" cy="274320"/>
           </a:xfrm>
           <a:prstGeom prst="ellipse">
             <a:avLst/>
@@ -15632,7 +18877,7 @@
               </a:spcAft>
             </a:pPr>
             <a:r>
-              <a:rPr sz="1100" b="1" i="0">
+              <a:rPr sz="1000" b="1" i="0">
                 <a:solidFill>
                   <a:srgbClr val="FFFFFF"/>
                 </a:solidFill>
@@ -15641,21 +18886,21 @@
                 <a:cs typeface="Google Sans Flex"/>
                 <a:sym typeface="Google Sans Flex"/>
               </a:rPr>
-              <a:t>8</a:t>
-            </a:r>
-          </a:p>
-        </p:txBody>
-      </p:sp>
-      <p:sp>
-        <p:nvSpPr>
-          <p:cNvPr id="126" name="TextBox 125"/>
+              <a:t>9</a:t>
+            </a:r>
+          </a:p>
+        </p:txBody>
+      </p:sp>
+      <p:sp>
+        <p:nvSpPr>
+          <p:cNvPr id="131" name="TextBox 130"/>
           <p:cNvSpPr txBox="1"/>
           <p:nvPr/>
         </p:nvSpPr>
         <p:spPr>
           <a:xfrm>
-            <a:off x="7242048" y="3127248"/>
-            <a:ext cx="1536192" cy="384048"/>
+            <a:off x="5888736" y="3108960"/>
+            <a:ext cx="1170432" cy="384048"/>
           </a:xfrm>
           <a:prstGeom prst="rect">
             <a:avLst/>
@@ -15674,7 +18919,7 @@
               </a:spcAft>
             </a:pPr>
             <a:r>
-              <a:rPr sz="1100" b="1" i="0">
+              <a:rPr sz="1000" b="1" i="0">
                 <a:solidFill>
                   <a:srgbClr val="202124"/>
                 </a:solidFill>
@@ -15683,21 +18928,21 @@
                 <a:cs typeface="Google Sans Flex"/>
                 <a:sym typeface="Google Sans Flex"/>
               </a:rPr>
-              <a:t>Alerts, approve &amp; export</a:t>
-            </a:r>
-          </a:p>
-        </p:txBody>
-      </p:sp>
-      <p:sp>
-        <p:nvSpPr>
-          <p:cNvPr id="127" name="TextBox 126"/>
+              <a:t>Overrides &amp; plan diff</a:t>
+            </a:r>
+          </a:p>
+        </p:txBody>
+      </p:sp>
+      <p:sp>
+        <p:nvSpPr>
+          <p:cNvPr id="132" name="TextBox 131"/>
           <p:cNvSpPr txBox="1"/>
           <p:nvPr/>
         </p:nvSpPr>
         <p:spPr>
           <a:xfrm>
-            <a:off x="6858000" y="3575304"/>
-            <a:ext cx="1892807" cy="1051560"/>
+            <a:off x="5550408" y="3538728"/>
+            <a:ext cx="1499616" cy="1097280"/>
           </a:xfrm>
           <a:prstGeom prst="rect">
             <a:avLst/>
@@ -15716,7 +18961,7 @@
               </a:spcAft>
             </a:pPr>
             <a:r>
-              <a:rPr sz="950" b="0" i="0">
+              <a:rPr sz="850" b="0" i="0">
                 <a:solidFill>
                   <a:srgbClr val="5F6368"/>
                 </a:solidFill>
@@ -15725,14 +18970,252 @@
                 <a:cs typeface="Google Sans Flex"/>
                 <a:sym typeface="Google Sans Flex"/>
               </a:rPr>
-              <a:t>Stockout, expiry, overstock and supplier alerts; approve a plan to export PO and markdown CSVs.</a:t>
-            </a:r>
-          </a:p>
-        </p:txBody>
-      </p:sp>
-      <p:sp>
-        <p:nvSpPr>
-          <p:cNvPr id="128" name="TextBox 127"/>
+              <a:t>Edit quantities or skip lines; the plan is re-scored within budget and each re-plan lists what changed.</a:t>
+            </a:r>
+          </a:p>
+        </p:txBody>
+      </p:sp>
+      <p:sp>
+        <p:nvSpPr>
+          <p:cNvPr id="133" name="Rounded Rectangle 132"/>
+          <p:cNvSpPr/>
+          <p:nvPr/>
+        </p:nvSpPr>
+        <p:spPr>
+          <a:xfrm>
+            <a:off x="7196328" y="2971800"/>
+            <a:ext cx="1627632" cy="1691640"/>
+          </a:xfrm>
+          <a:prstGeom prst="roundRect">
+            <a:avLst>
+              <a:gd name="adj" fmla="val 4000"/>
+            </a:avLst>
+          </a:prstGeom>
+          <a:solidFill>
+            <a:srgbClr val="FFFFFF"/>
+          </a:solidFill>
+          <a:ln w="9525">
+            <a:solidFill>
+              <a:srgbClr val="DADCE0"/>
+            </a:solidFill>
+          </a:ln>
+          <a:effectLst/>
+        </p:spPr>
+        <p:style>
+          <a:lnRef idx="1">
+            <a:schemeClr val="accent1"/>
+          </a:lnRef>
+          <a:fillRef idx="3">
+            <a:schemeClr val="accent1"/>
+          </a:fillRef>
+          <a:effectRef idx="2">
+            <a:schemeClr val="accent1"/>
+          </a:effectRef>
+          <a:fontRef idx="minor">
+            <a:schemeClr val="lt1"/>
+          </a:fontRef>
+        </p:style>
+        <p:txBody>
+          <a:bodyPr rtlCol="0" anchor="t" wrap="square" lIns="73152" rIns="73152" tIns="73152" bIns="73152"/>
+          <a:lstStyle/>
+          <a:p>
+            <a:pPr algn="ctr"/>
+          </a:p>
+        </p:txBody>
+      </p:sp>
+      <p:sp>
+        <p:nvSpPr>
+          <p:cNvPr id="134" name="Rounded Rectangle 133"/>
+          <p:cNvSpPr/>
+          <p:nvPr/>
+        </p:nvSpPr>
+        <p:spPr>
+          <a:xfrm>
+            <a:off x="7196328" y="2971800"/>
+            <a:ext cx="1627632" cy="64008"/>
+          </a:xfrm>
+          <a:prstGeom prst="roundRect">
+            <a:avLst>
+              <a:gd name="adj" fmla="val 50000"/>
+            </a:avLst>
+          </a:prstGeom>
+          <a:solidFill>
+            <a:srgbClr val="E37400"/>
+          </a:solidFill>
+          <a:ln>
+            <a:noFill/>
+          </a:ln>
+          <a:effectLst/>
+        </p:spPr>
+        <p:style>
+          <a:lnRef idx="1">
+            <a:schemeClr val="accent1"/>
+          </a:lnRef>
+          <a:fillRef idx="3">
+            <a:schemeClr val="accent1"/>
+          </a:fillRef>
+          <a:effectRef idx="2">
+            <a:schemeClr val="accent1"/>
+          </a:effectRef>
+          <a:fontRef idx="minor">
+            <a:schemeClr val="lt1"/>
+          </a:fontRef>
+        </p:style>
+        <p:txBody>
+          <a:bodyPr rtlCol="0" anchor="t" wrap="square" lIns="73152" rIns="73152" tIns="73152" bIns="73152"/>
+          <a:lstStyle/>
+          <a:p>
+            <a:pPr algn="ctr"/>
+          </a:p>
+        </p:txBody>
+      </p:sp>
+      <p:sp>
+        <p:nvSpPr>
+          <p:cNvPr id="135" name="Oval 134"/>
+          <p:cNvSpPr/>
+          <p:nvPr/>
+        </p:nvSpPr>
+        <p:spPr>
+          <a:xfrm>
+            <a:off x="7287768" y="3154680"/>
+            <a:ext cx="274320" cy="274320"/>
+          </a:xfrm>
+          <a:prstGeom prst="ellipse">
+            <a:avLst/>
+          </a:prstGeom>
+          <a:solidFill>
+            <a:srgbClr val="E37400"/>
+          </a:solidFill>
+          <a:ln>
+            <a:noFill/>
+          </a:ln>
+          <a:effectLst/>
+        </p:spPr>
+        <p:style>
+          <a:lnRef idx="1">
+            <a:schemeClr val="accent1"/>
+          </a:lnRef>
+          <a:fillRef idx="3">
+            <a:schemeClr val="accent1"/>
+          </a:fillRef>
+          <a:effectRef idx="2">
+            <a:schemeClr val="accent1"/>
+          </a:effectRef>
+          <a:fontRef idx="minor">
+            <a:schemeClr val="lt1"/>
+          </a:fontRef>
+        </p:style>
+        <p:txBody>
+          <a:bodyPr rtlCol="0" anchor="ctr" wrap="square" lIns="0" rIns="0" tIns="0" bIns="0"/>
+          <a:lstStyle/>
+          <a:p>
+            <a:pPr algn="ctr">
+              <a:spcAft>
+                <a:spcPts val="200"/>
+              </a:spcAft>
+            </a:pPr>
+            <a:r>
+              <a:rPr sz="1000" b="1" i="0">
+                <a:solidFill>
+                  <a:srgbClr val="FFFFFF"/>
+                </a:solidFill>
+                <a:latin typeface="Google Sans Flex"/>
+                <a:ea typeface="Google Sans Flex"/>
+                <a:cs typeface="Google Sans Flex"/>
+                <a:sym typeface="Google Sans Flex"/>
+              </a:rPr>
+              <a:t>10</a:t>
+            </a:r>
+          </a:p>
+        </p:txBody>
+      </p:sp>
+      <p:sp>
+        <p:nvSpPr>
+          <p:cNvPr id="136" name="TextBox 135"/>
+          <p:cNvSpPr txBox="1"/>
+          <p:nvPr/>
+        </p:nvSpPr>
+        <p:spPr>
+          <a:xfrm>
+            <a:off x="7607808" y="3108960"/>
+            <a:ext cx="1170432" cy="384048"/>
+          </a:xfrm>
+          <a:prstGeom prst="rect">
+            <a:avLst/>
+          </a:prstGeom>
+          <a:noFill/>
+        </p:spPr>
+        <p:txBody>
+          <a:bodyPr wrap="square" anchor="ctr" lIns="36576" rIns="36576" tIns="36576" bIns="36576">
+            <a:spAutoFit/>
+          </a:bodyPr>
+          <a:lstStyle/>
+          <a:p>
+            <a:pPr>
+              <a:spcAft>
+                <a:spcPts val="200"/>
+              </a:spcAft>
+            </a:pPr>
+            <a:r>
+              <a:rPr sz="1000" b="1" i="0">
+                <a:solidFill>
+                  <a:srgbClr val="202124"/>
+                </a:solidFill>
+                <a:latin typeface="Google Sans Flex"/>
+                <a:ea typeface="Google Sans Flex"/>
+                <a:cs typeface="Google Sans Flex"/>
+                <a:sym typeface="Google Sans Flex"/>
+              </a:rPr>
+              <a:t>Approve &amp; export</a:t>
+            </a:r>
+          </a:p>
+        </p:txBody>
+      </p:sp>
+      <p:sp>
+        <p:nvSpPr>
+          <p:cNvPr id="137" name="TextBox 136"/>
+          <p:cNvSpPr txBox="1"/>
+          <p:nvPr/>
+        </p:nvSpPr>
+        <p:spPr>
+          <a:xfrm>
+            <a:off x="7269480" y="3538728"/>
+            <a:ext cx="1499616" cy="1097280"/>
+          </a:xfrm>
+          <a:prstGeom prst="rect">
+            <a:avLst/>
+          </a:prstGeom>
+          <a:noFill/>
+        </p:spPr>
+        <p:txBody>
+          <a:bodyPr wrap="square" anchor="t" lIns="36576" rIns="36576" tIns="36576" bIns="36576">
+            <a:spAutoFit/>
+          </a:bodyPr>
+          <a:lstStyle/>
+          <a:p>
+            <a:pPr>
+              <a:spcAft>
+                <a:spcPts val="200"/>
+              </a:spcAft>
+            </a:pPr>
+            <a:r>
+              <a:rPr sz="850" b="0" i="0">
+                <a:solidFill>
+                  <a:srgbClr val="5F6368"/>
+                </a:solidFill>
+                <a:latin typeface="Google Sans Flex"/>
+                <a:ea typeface="Google Sans Flex"/>
+                <a:cs typeface="Google Sans Flex"/>
+                <a:sym typeface="Google Sans Flex"/>
+              </a:rPr>
+              <a:t>Alerts for stockout, expiry, overstock and suppliers; approve to export PO and markdown CSVs.</a:t>
+            </a:r>
+          </a:p>
+        </p:txBody>
+      </p:sp>
+      <p:sp>
+        <p:nvSpPr>
+          <p:cNvPr id="138" name="TextBox 137"/>
           <p:cNvSpPr txBox="1"/>
           <p:nvPr/>
         </p:nvSpPr>
@@ -16608,7 +20091,7 @@
                 <a:cs typeface="Google Sans Flex"/>
                 <a:sym typeface="Google Sans Flex"/>
               </a:rPr>
-              <a:t>LLM: p10/p50/p90 × 30 days per SKU</a:t>
+              <a:t>Statistical base; LLM tunes event effects</a:t>
             </a:r>
           </a:p>
         </p:txBody>
@@ -16650,7 +20133,7 @@
                 <a:cs typeface="Google Sans Flex"/>
                 <a:sym typeface="Google Sans Flex"/>
               </a:rPr>
-              <a:t>✓ Bounds vs history and event reflection; else seasonal-naive</a:t>
+              <a:t>✓ Bounded multipliers with stated drivers; else statistical</a:t>
             </a:r>
           </a:p>
         </p:txBody>
@@ -16796,7 +20279,7 @@
                 <a:cs typeface="Google Sans Flex"/>
                 <a:sym typeface="Google Sans Flex"/>
               </a:rPr>
-              <a:t>Candidate actions → knapsack under budget</a:t>
+              <a:t>Knapsack under budget; 4 timing options</a:t>
             </a:r>
           </a:p>
         </p:txBody>
@@ -16965,7 +20448,7 @@
                 <a:cs typeface="Google Sans Flex"/>
                 <a:sym typeface="Google Sans Flex"/>
               </a:rPr>
-              <a:t>Explain &amp; score</a:t>
+              <a:t>Explain &amp; stress-test</a:t>
             </a:r>
           </a:p>
           <a:p>
@@ -16984,7 +20467,7 @@
                 <a:cs typeface="Google Sans Flex"/>
                 <a:sym typeface="Google Sans Flex"/>
               </a:rPr>
-              <a:t>Cited narrative; scorecard vs baseline</a:t>
+              <a:t>Cited narrative; 120 simulated futures</a:t>
             </a:r>
           </a:p>
         </p:txBody>
@@ -17636,7 +21119,7 @@
                 <a:cs typeface="Google Sans Flex"/>
                 <a:sym typeface="Google Sans Flex"/>
               </a:rPr>
-              <a:t>↻  Continuous sensing:</a:t>
+              <a:t>↻  Weekly reviews (days 0 / 7 / 14 / 21):</a:t>
             </a:r>
             <a:r>
               <a:rPr sz="1000" b="0" i="0">
@@ -17648,7 +21131,7 @@
                 <a:cs typeface="Google Sans Flex"/>
                 <a:sym typeface="Google Sans Flex"/>
               </a:rPr>
-              <a:t>  a new message or sales CSV → alerts recomputed → affected SKUs re-forecast in the background → forecast freshness shown → re-plan</a:t>
+              <a:t>  realised sales re-forecast → remaining and scheduled cash re-planned → staggered tranches re-confirmed, resized or redirected</a:t>
             </a:r>
           </a:p>
         </p:txBody>
@@ -17710,7 +21193,7 @@
                 <a:cs typeface="Google Sans Flex"/>
                 <a:sym typeface="Google Sans Flex"/>
               </a:rPr>
-              <a:t>What-if branch:</a:t>
+              <a:t>Ask the assistant:</a:t>
             </a:r>
             <a:r>
               <a:rPr sz="1000" b="0" i="0">
@@ -17722,7 +21205,7 @@
                 <a:cs typeface="Google Sans Flex"/>
                 <a:sym typeface="Google Sans Flex"/>
               </a:rPr>
-              <a:t>  “SUP-04 delays 7 more days” → LLM parses to a typed ScenarioSpec (bounds checked) → current plan vs adapted plan, both scored in the scenario world against the baseline</a:t>
+              <a:t>  “What if SUP-04 slips another week?” → the model calls read-only planner and simulator tools → answer with a tool trace; every number checked against tool results</a:t>
             </a:r>
           </a:p>
         </p:txBody>
@@ -18049,7 +21532,7 @@
                 <a:cs typeface="Google Sans Flex"/>
                 <a:sym typeface="Google Sans Flex"/>
               </a:rPr>
-              <a:t>Budget ₹ [50,000]</a:t>
+              <a:t>Budget ₹ [10,00,000]</a:t>
             </a:r>
           </a:p>
         </p:txBody>
@@ -22542,7 +26025,7 @@
             </a:r>
           </a:p>
           <a:p>
-            <a:pPr marL="155448" indent="-137160">
+            <a:pPr marL="155448" indent="-137160" algn="l">
               <a:spcAft>
                 <a:spcPts val="300"/>
               </a:spcAft>
@@ -22562,7 +26045,7 @@
             </a:r>
           </a:p>
           <a:p>
-            <a:pPr marL="155448" indent="-137160">
+            <a:pPr marL="155448" indent="-137160" algn="l">
               <a:spcAft>
                 <a:spcPts val="300"/>
               </a:spcAft>
@@ -22582,7 +26065,7 @@
             </a:r>
           </a:p>
           <a:p>
-            <a:pPr marL="155448" indent="-137160">
+            <a:pPr marL="155448" indent="-137160" algn="l">
               <a:spcAft>
                 <a:spcPts val="300"/>
               </a:spcAft>
@@ -22602,7 +26085,7 @@
             </a:r>
           </a:p>
           <a:p>
-            <a:pPr marL="155448" indent="-137160">
+            <a:pPr marL="155448" indent="-137160" algn="l">
               <a:spcAft>
                 <a:spcPts val="300"/>
               </a:spcAft>
@@ -22622,6 +26105,26 @@
             </a:r>
           </a:p>
           <a:p>
+            <a:pPr marL="155448" indent="-137160" algn="l">
+              <a:spcAft>
+                <a:spcPts val="300"/>
+              </a:spcAft>
+              <a:buChar char="•"/>
+            </a:pPr>
+            <a:r>
+              <a:rPr sz="850" b="0" i="0">
+                <a:solidFill>
+                  <a:srgbClr val="202124"/>
+                </a:solidFill>
+                <a:latin typeface="Google Sans Flex"/>
+                <a:ea typeface="Google Sans Flex"/>
+                <a:cs typeface="Google Sans Flex"/>
+                <a:sym typeface="Google Sans Flex"/>
+              </a:rPr>
+              <a:t>Assistant</a:t>
+            </a:r>
+          </a:p>
+          <a:p>
             <a:pPr>
               <a:spcAft>
                 <a:spcPts val="200"/>
@@ -22656,7 +26159,7 @@
                 <a:cs typeface="Google Sans Flex"/>
                 <a:sym typeface="Google Sans Flex"/>
               </a:rPr>
-              <a:t>GCP: Cloud Run / Firebase Hosting</a:t>
+              <a:t>GCP: served by the same Cloud Run service</a:t>
             </a:r>
           </a:p>
         </p:txBody>
@@ -23014,7 +26517,7 @@
                 <a:cs typeface="Google Sans Flex"/>
                 <a:sym typeface="Google Sans Flex"/>
               </a:rPr>
-              <a:t>Supply metrics &amp; safety stock</a:t>
+              <a:t>Hybrid forecasts (Holt-Winters / Croston)</a:t>
             </a:r>
           </a:p>
         </p:txBody>
@@ -23078,7 +26581,7 @@
                 <a:cs typeface="Google Sans Flex"/>
                 <a:sym typeface="Google Sans Flex"/>
               </a:rPr>
-              <a:t>Simulator (30 days, FEFO lots)</a:t>
+              <a:t>Simulator (FEFO lots, delay cases)</a:t>
             </a:r>
           </a:p>
         </p:txBody>
@@ -23206,7 +26709,7 @@
                 <a:cs typeface="Google Sans Flex"/>
                 <a:sym typeface="Google Sans Flex"/>
               </a:rPr>
-              <a:t>Value scorecard &amp; baseline</a:t>
+              <a:t>Plan options &amp; weekly re-plan</a:t>
             </a:r>
           </a:p>
         </p:txBody>
@@ -23270,7 +26773,7 @@
                 <a:cs typeface="Google Sans Flex"/>
                 <a:sym typeface="Google Sans Flex"/>
               </a:rPr>
-              <a:t>Scenarios &amp; sensitivity</a:t>
+              <a:t>Monte Carlo robustness &amp; baselines</a:t>
             </a:r>
           </a:p>
         </p:txBody>
@@ -23334,7 +26837,7 @@
                 <a:cs typeface="Google Sans Flex"/>
                 <a:sym typeface="Google Sans Flex"/>
               </a:rPr>
-              <a:t>Backtest (WAPE)</a:t>
+              <a:t>Scenarios, frontier &amp; backtest</a:t>
             </a:r>
           </a:p>
         </p:txBody>
@@ -23424,7 +26927,7 @@
                 <a:cs typeface="Google Sans Flex"/>
                 <a:sym typeface="Google Sans Flex"/>
               </a:rPr>
-              <a:t>Generative AI layer: LLM gateway</a:t>
+              <a:t>Generative AI layer: Gemini on Vertex AI (or any OpenAI-compatible model)</a:t>
             </a:r>
           </a:p>
           <a:p>
@@ -23443,7 +26946,7 @@
                 <a:cs typeface="Google Sans Flex"/>
                 <a:sym typeface="Google Sans Flex"/>
               </a:rPr>
-              <a:t>JSON task runner: schema validation · repair retry · input-hash cache · concurrency limit · untrusted text delimited</a:t>
+              <a:t>JSON tasks with schema validation and one repair retry · tool-calling agent · cache · call log</a:t>
             </a:r>
           </a:p>
         </p:txBody>
@@ -23590,7 +27093,7 @@
                 <a:cs typeface="Google Sans Flex"/>
                 <a:sym typeface="Google Sans Flex"/>
               </a:rPr>
-              <a:t>Demand forecast</a:t>
+              <a:t>Forecast event tuning</a:t>
             </a:r>
           </a:p>
           <a:p>
@@ -23609,7 +27112,7 @@
                 <a:cs typeface="Google Sans Flex"/>
                 <a:sym typeface="Google Sans Flex"/>
               </a:rPr>
-              <a:t>vs seasonal-naive</a:t>
+              <a:t>bounded multipliers</a:t>
             </a:r>
           </a:p>
         </p:txBody>
@@ -23673,7 +27176,7 @@
                 <a:cs typeface="Google Sans Flex"/>
                 <a:sym typeface="Google Sans Flex"/>
               </a:rPr>
-              <a:t>Scenario parsing</a:t>
+              <a:t>Planning assistant</a:t>
             </a:r>
           </a:p>
           <a:p>
@@ -23692,7 +27195,7 @@
                 <a:cs typeface="Google Sans Flex"/>
                 <a:sym typeface="Google Sans Flex"/>
               </a:rPr>
-              <a:t>typed spec, bounds</a:t>
+              <a:t>10 tools, numbers checked</a:t>
             </a:r>
           </a:p>
         </p:txBody>
@@ -23756,7 +27259,7 @@
                 <a:cs typeface="Google Sans Flex"/>
                 <a:sym typeface="Google Sans Flex"/>
               </a:rPr>
-              <a:t>Plan explanation</a:t>
+              <a:t>Explanation &amp; what-if</a:t>
             </a:r>
           </a:p>
           <a:p>
@@ -23956,7 +27459,7 @@
                 <a:cs typeface="Google Sans Flex"/>
                 <a:sym typeface="Google Sans Flex"/>
               </a:rPr>
-              <a:t>LiteLLM · gpt-5.4-mini  ➜  </a:t>
+              <a:t>OpenAI-compatible gateway  ➜  </a:t>
             </a:r>
             <a:r>
               <a:rPr sz="750" b="1" i="0">
@@ -24127,7 +27630,7 @@
                 <a:cs typeface="Google Sans Flex"/>
                 <a:sym typeface="Google Sans Flex"/>
               </a:rPr>
-              <a:t>Files &amp; exports</a:t>
+              <a:t>Files, uploads &amp; exports</a:t>
             </a:r>
           </a:p>
           <a:p>
@@ -24222,7 +27725,7 @@
                 <a:cs typeface="Google Sans Flex"/>
                 <a:sym typeface="Google Sans Flex"/>
               </a:rPr>
-              <a:t>Product / supplier search</a:t>
+              <a:t>Hosting &amp; secrets</a:t>
             </a:r>
           </a:p>
           <a:p>
@@ -24241,7 +27744,7 @@
                 <a:cs typeface="Google Sans Flex"/>
                 <a:sym typeface="Google Sans Flex"/>
               </a:rPr>
-              <a:t>pg_trgm full-text  ➜  </a:t>
+              <a:t>uvicorn + Vite, .env  ➜  </a:t>
             </a:r>
             <a:r>
               <a:rPr sz="750" b="1" i="0">
@@ -24253,7 +27756,7 @@
                 <a:cs typeface="Google Sans Flex"/>
                 <a:sym typeface="Google Sans Flex"/>
               </a:rPr>
-              <a:t>Vertex AI Search</a:t>
+              <a:t>Cloud Run + Secret Manager</a:t>
             </a:r>
           </a:p>
         </p:txBody>
@@ -24317,7 +27820,7 @@
                 <a:cs typeface="Google Sans Flex"/>
                 <a:sym typeface="Google Sans Flex"/>
               </a:rPr>
-              <a:t>Analytics &amp; insights</a:t>
+              <a:t>Build &amp; deploy</a:t>
             </a:r>
           </a:p>
           <a:p>
@@ -24336,7 +27839,7 @@
                 <a:cs typeface="Google Sans Flex"/>
                 <a:sym typeface="Google Sans Flex"/>
               </a:rPr>
-              <a:t>CSV export, in-app scorecard  ➜  </a:t>
+              <a:t>Docker, deploy script  ➜  </a:t>
             </a:r>
             <a:r>
               <a:rPr sz="750" b="1" i="0">
@@ -24348,7 +27851,7 @@
                 <a:cs typeface="Google Sans Flex"/>
                 <a:sym typeface="Google Sans Flex"/>
               </a:rPr>
-              <a:t>BigQuery + Looker</a:t>
+              <a:t>Cloud Build + Artifact Registry</a:t>
             </a:r>
           </a:p>
         </p:txBody>
@@ -24724,7 +28227,7 @@
                           <a:cs typeface="Google Sans Flex"/>
                           <a:sym typeface="Google Sans Flex"/>
                         </a:rPr>
-                        <a:t>Cloud Run (static) / Firebase Hosting</a:t>
+                        <a:t>Built into the API image, served by Cloud Run</a:t>
                       </a:r>
                     </a:p>
                   </a:txBody>
@@ -24878,7 +28381,7 @@
                           <a:cs typeface="Google Sans Flex"/>
                           <a:sym typeface="Google Sans Flex"/>
                         </a:rPr>
-                        <a:t>LiteLLM via OpenAI SDK (gpt-5.4-mini); schema-validated JSON tasks</a:t>
+                        <a:t>google-genai (Gemini) or OpenAI SDK; validated JSON tasks; tool-calling assistant</a:t>
                       </a:r>
                     </a:p>
                   </a:txBody>
@@ -24908,7 +28411,7 @@
                           <a:cs typeface="Google Sans Flex"/>
                           <a:sym typeface="Google Sans Flex"/>
                         </a:rPr>
-                        <a:t>Gemini on Vertex AI</a:t>
+                        <a:t>Gemini 2.5 Flash on Vertex AI</a:t>
                       </a:r>
                     </a:p>
                   </a:txBody>
@@ -24970,7 +28473,7 @@
                           <a:cs typeface="Google Sans Flex"/>
                           <a:sym typeface="Google Sans Flex"/>
                         </a:rPr>
-                        <a:t>NumPy stochastic simulator (FEFO lots); exact multiple-choice knapsack</a:t>
+                        <a:t>Holt-Winters and Croston/SBA in NumPy; stochastic simulator; exact knapsack</a:t>
                       </a:r>
                     </a:p>
                   </a:txBody>
@@ -25000,7 +28503,7 @@
                           <a:cs typeface="Google Sans Flex"/>
                           <a:sym typeface="Google Sans Flex"/>
                         </a:rPr>
-                        <a:t>Same code; Cloud Run jobs for backtests</a:t>
+                        <a:t>Same code in Cloud Run (CPU always allocated)</a:t>
                       </a:r>
                     </a:p>
                   </a:txBody>
@@ -25032,7 +28535,7 @@
                           <a:cs typeface="Google Sans Flex"/>
                           <a:sym typeface="Google Sans Flex"/>
                         </a:rPr>
-                        <a:t>Data &amp; search</a:t>
+                        <a:t>Data &amp; files</a:t>
                       </a:r>
                     </a:p>
                   </a:txBody>
@@ -25062,7 +28565,7 @@
                           <a:cs typeface="Google Sans Flex"/>
                           <a:sym typeface="Google Sans Flex"/>
                         </a:rPr>
-                        <a:t>PostgreSQL 16 in Docker, pg_trgm product/supplier search</a:t>
+                        <a:t>PostgreSQL 16 in Docker; local folder for uploads, exports, forecast cache</a:t>
                       </a:r>
                     </a:p>
                   </a:txBody>
@@ -25092,7 +28595,7 @@
                           <a:cs typeface="Google Sans Flex"/>
                           <a:sym typeface="Google Sans Flex"/>
                         </a:rPr>
-                        <a:t>Cloud SQL for PostgreSQL, Vertex AI Search</a:t>
+                        <a:t>Cloud SQL for PostgreSQL, Cloud Storage</a:t>
                       </a:r>
                     </a:p>
                   </a:txBody>
@@ -25124,7 +28627,7 @@
                           <a:cs typeface="Google Sans Flex"/>
                           <a:sym typeface="Google Sans Flex"/>
                         </a:rPr>
-                        <a:t>Analytics</a:t>
+                        <a:t>Evaluation</a:t>
                       </a:r>
                     </a:p>
                   </a:txBody>
@@ -25154,7 +28657,7 @@
                           <a:cs typeface="Google Sans Flex"/>
                           <a:sym typeface="Google Sans Flex"/>
                         </a:rPr>
-                        <a:t>In-app value scorecard, sensitivity, backtest; CSV export</a:t>
+                        <a:t>Extraction gold set, rolling backtest, Monte Carlo, 10-model comparison</a:t>
                       </a:r>
                     </a:p>
                   </a:txBody>
@@ -25184,7 +28687,7 @@
                           <a:cs typeface="Google Sans Flex"/>
                           <a:sym typeface="Google Sans Flex"/>
                         </a:rPr>
-                        <a:t>BigQuery (+ BigQuery ML forecast benchmark), Looker</a:t>
+                        <a:t>Same jobs; CSV exports ready for BigQuery</a:t>
                       </a:r>
                     </a:p>
                   </a:txBody>
@@ -25216,7 +28719,7 @@
                           <a:cs typeface="Google Sans Flex"/>
                           <a:sym typeface="Google Sans Flex"/>
                         </a:rPr>
-                        <a:t>Quality</a:t>
+                        <a:t>Quality &amp; delivery</a:t>
                       </a:r>
                     </a:p>
                   </a:txBody>
@@ -25246,7 +28749,7 @@
                           <a:cs typeface="Google Sans Flex"/>
                           <a:sym typeface="Google Sans Flex"/>
                         </a:rPr>
-                        <a:t>pytest (80 tests), oxlint, strict TypeScript, LLM call audit log</a:t>
+                        <a:t>pytest (151 tests), oxlint, strict TypeScript, LLM call log</a:t>
                       </a:r>
                     </a:p>
                   </a:txBody>
@@ -25276,7 +28779,7 @@
                           <a:cs typeface="Google Sans Flex"/>
                           <a:sym typeface="Google Sans Flex"/>
                         </a:rPr>
-                        <a:t>Cloud Build CI, Cloud Logging</a:t>
+                        <a:t>Cloud Build → Artifact Registry → Cloud Run</a:t>
                       </a:r>
                     </a:p>
                   </a:txBody>

--- a/docs/Inventory_Rescue_AI_Builder_Cup.pptx
+++ b/docs/Inventory_Rescue_AI_Builder_Cup.pptx
@@ -445,10 +445,10 @@
                 <c:formatCode>General</c:formatCode>
                 <c:ptCount val="2"/>
                 <c:pt idx="0">
-                  <c:v>26.44</c:v>
+                  <c:v>26.59</c:v>
                 </c:pt>
                 <c:pt idx="1">
-                  <c:v>28.03</c:v>
+                  <c:v>28.13</c:v>
                 </c:pt>
               </c:numCache>
             </c:numRef>
@@ -7865,7 +7865,7 @@
                           <a:cs typeface="Google Sans Flex"/>
                           <a:sym typeface="Google Sans Flex"/>
                         </a:rPr>
-                        <a:t>Gemini 2.5 Flash on Vertex AI: ~10M input + 1M output tokens</a:t>
+                        <a:t>Gemini 3.5 Flash-Lite (Gemini API): ~10M input + 1M output tokens</a:t>
                       </a:r>
                     </a:p>
                   </a:txBody>
@@ -8520,7 +8520,7 @@
                 <a:cs typeface="Google Sans Flex"/>
                 <a:sym typeface="Google Sans Flex"/>
               </a:rPr>
-              <a:t>Simulated loss avoided for the demo brand (₹4.3 crore revenue a month): ₹1.7–4.1 lakh a month.</a:t>
+              <a:t>Simulated loss avoided for the demo brand (₹4.3 crore revenue a month): ₹1.6–4.0 lakh a month.</a:t>
             </a:r>
           </a:p>
           <a:p>
@@ -8543,7 +8543,7 @@
                 <a:cs typeface="Google Sans Flex"/>
                 <a:sym typeface="Google Sans Flex"/>
               </a:rPr>
-              <a:t>≈ 12–40× the running cost. At a twentieth of this size (≈ ₹2.6 crore a year) a dedicated instance only breaks even, so small brands should share one.</a:t>
+              <a:t>≈ 11–38× the running cost. At a twentieth of this size (≈ ₹2.6 crore a year) a dedicated instance only breaks even, so small brands should share one.</a:t>
             </a:r>
           </a:p>
         </p:txBody>
@@ -9237,7 +9237,7 @@
                 <a:cs typeface="Google Sans Flex"/>
                 <a:sym typeface="Google Sans Flex"/>
               </a:rPr>
-              <a:t>Every policy starts from the same stock and budget and faces the same simulated demand and supplier delays. Fill rate 90.2% vs 88.6–88.8% for the rules; hero-SKU fill 80.3% vs 75.2%.</a:t>
+              <a:t>Every policy starts from the same stock and budget and faces the same simulated demand and supplier delays. Fill rate 89.7% vs 88.6–88.8% for the rules; hero-SKU fill 80.3% vs 75.2%.</a:t>
             </a:r>
           </a:p>
           <a:p>
@@ -9268,7 +9268,7 @@
                 <a:cs typeface="Google Sans Flex"/>
                 <a:sym typeface="Google Sans Flex"/>
               </a:rPr>
-              <a:t> 151 automated tests pass · 30 / 30 seed forecasts passed LLM validation · every LLM call logged with its status.</a:t>
+              <a:t> 154 automated tests pass · 30 / 30 seed forecasts passed LLM validation · every LLM call logged with its status.</a:t>
             </a:r>
           </a:p>
         </p:txBody>
@@ -9404,7 +9404,7 @@
                 <a:cs typeface="Google Sans Flex"/>
                 <a:sym typeface="Google Sans Flex"/>
               </a:rPr>
-              <a:t>₹3.9 lakh / ₹1.9 lakh a month lower loss</a:t>
+              <a:t>₹3.8 lakh / ₹1.8 lakh a month lower loss</a:t>
             </a:r>
           </a:p>
           <a:p>
@@ -9559,7 +9559,7 @@
                 <a:cs typeface="Google Sans Flex"/>
                 <a:sym typeface="Google Sans Flex"/>
               </a:rPr>
-              <a:t>30% reserve: ₹0.8–1.0 lakh further gain</a:t>
+              <a:t>30% reserve: ₹0.9–1.1 lakh further gain</a:t>
             </a:r>
           </a:p>
           <a:p>
@@ -9888,7 +9888,7 @@
                 <a:cs typeface="Google Sans Flex"/>
                 <a:sym typeface="Google Sans Flex"/>
               </a:rPr>
-              <a:t>Hybrid vs statistical, 1,050 points (21.9% vs 24.2% on 15 text-only series)</a:t>
+              <a:t>Hybrid vs statistical, 1,050 points (22.2% vs 23.9% on 16 text-only series)</a:t>
             </a:r>
           </a:p>
         </p:txBody>
@@ -10043,7 +10043,7 @@
                 <a:cs typeface="Google Sans Flex"/>
                 <a:sym typeface="Google Sans Flex"/>
               </a:rPr>
-              <a:t>5 on the first try, 1 after one repair; 4–8 s each (gpt-5.4-mini)</a:t>
+              <a:t>5 on the first try, 1 after one repair; 3–10 s each (gemini-3.5-flash-lite)</a:t>
             </a:r>
           </a:p>
         </p:txBody>
@@ -10651,7 +10651,7 @@
                 <a:cs typeface="Google Sans Flex"/>
                 <a:sym typeface="Google Sans Flex"/>
               </a:rPr>
-              <a:t>Run the same evaluations on Gemini; route each task to its best model.</a:t>
+              <a:t>Benchmark larger Gemini models on a paid key; route each task to its best model.</a:t>
             </a:r>
           </a:p>
           <a:p>
@@ -11808,7 +11808,7 @@
                 <a:cs typeface="Google Sans Flex Medium"/>
                 <a:sym typeface="Google Sans Flex Medium"/>
               </a:rPr>
-              <a:t>Which LLM? The same evaluations on 10 models</a:t>
+              <a:t>Which LLM? The same evaluations on 11 models</a:t>
             </a:r>
             <a:endParaRPr sz="1600">
               <a:latin typeface="Google Sans Flex Medium"/>
@@ -11847,7 +11847,7 @@
                 <a:gridCol w="1143000"/>
                 <a:gridCol w="960120"/>
               </a:tblGrid>
-              <a:tr h="274320">
+              <a:tr h="251460">
                 <a:tc>
                   <a:txBody>
                     <a:bodyPr/>
@@ -12089,7 +12089,7 @@
                   </a:tcPr>
                 </a:tc>
               </a:tr>
-              <a:tr h="274320">
+              <a:tr h="251460">
                 <a:tc>
                   <a:txBody>
                     <a:bodyPr/>
@@ -12110,7 +12110,7 @@
                           <a:cs typeface="Google Sans Flex"/>
                           <a:sym typeface="Google Sans Flex"/>
                         </a:rPr>
-                        <a:t>gpt-5.4-mini (default)</a:t>
+                        <a:t>gemini-3.5-flash-lite (default)</a:t>
                       </a:r>
                     </a:p>
                   </a:txBody>
@@ -12140,7 +12140,7 @@
                           <a:cs typeface="Google Sans Flex"/>
                           <a:sym typeface="Google Sans Flex"/>
                         </a:rPr>
-                        <a:t>0.968</a:t>
+                        <a:t>0.966</a:t>
                       </a:r>
                     </a:p>
                   </a:txBody>
@@ -12230,7 +12230,7 @@
                           <a:cs typeface="Google Sans Flex"/>
                           <a:sym typeface="Google Sans Flex"/>
                         </a:rPr>
-                        <a:t>21.5% (23.1%)</a:t>
+                        <a:t>21.5% (23.0%)</a:t>
                       </a:r>
                     </a:p>
                   </a:txBody>
@@ -12260,7 +12260,7 @@
                           <a:cs typeface="Google Sans Flex"/>
                           <a:sym typeface="Google Sans Flex"/>
                         </a:rPr>
-                        <a:t>21.9% (24.2%)</a:t>
+                        <a:t>22.2% (23.9%)</a:t>
                       </a:r>
                     </a:p>
                   </a:txBody>
@@ -12320,7 +12320,7 @@
                           <a:cs typeface="Google Sans Flex"/>
                           <a:sym typeface="Google Sans Flex"/>
                         </a:rPr>
-                        <a:t>3.9 s</a:t>
+                        <a:t>4.0 s</a:t>
                       </a:r>
                     </a:p>
                   </a:txBody>
@@ -12331,7 +12331,7 @@
                   </a:tcPr>
                 </a:tc>
               </a:tr>
-              <a:tr h="274320">
+              <a:tr h="251460">
                 <a:tc>
                   <a:txBody>
                     <a:bodyPr/>
@@ -12573,7 +12573,7 @@
                   </a:tcPr>
                 </a:tc>
               </a:tr>
-              <a:tr h="274320">
+              <a:tr h="251460">
                 <a:tc>
                   <a:txBody>
                     <a:bodyPr/>
@@ -12815,7 +12815,7 @@
                   </a:tcPr>
                 </a:tc>
               </a:tr>
-              <a:tr h="274320">
+              <a:tr h="251460">
                 <a:tc>
                   <a:txBody>
                     <a:bodyPr/>
@@ -13057,7 +13057,7 @@
                   </a:tcPr>
                 </a:tc>
               </a:tr>
-              <a:tr h="274320">
+              <a:tr h="251460">
                 <a:tc>
                   <a:txBody>
                     <a:bodyPr/>
@@ -13299,7 +13299,7 @@
                   </a:tcPr>
                 </a:tc>
               </a:tr>
-              <a:tr h="274320">
+              <a:tr h="251460">
                 <a:tc>
                   <a:txBody>
                     <a:bodyPr/>
@@ -13541,7 +13541,7 @@
                   </a:tcPr>
                 </a:tc>
               </a:tr>
-              <a:tr h="274320">
+              <a:tr h="251460">
                 <a:tc>
                   <a:txBody>
                     <a:bodyPr/>
@@ -13783,7 +13783,7 @@
                   </a:tcPr>
                 </a:tc>
               </a:tr>
-              <a:tr h="274320">
+              <a:tr h="251460">
                 <a:tc>
                   <a:txBody>
                     <a:bodyPr/>
@@ -14025,7 +14025,7 @@
                   </a:tcPr>
                 </a:tc>
               </a:tr>
-              <a:tr h="274320">
+              <a:tr h="251460">
                 <a:tc>
                   <a:txBody>
                     <a:bodyPr/>
@@ -14267,7 +14267,7 @@
                   </a:tcPr>
                 </a:tc>
               </a:tr>
-              <a:tr h="274320">
+              <a:tr h="251460">
                 <a:tc>
                   <a:txBody>
                     <a:bodyPr/>
@@ -14509,6 +14509,248 @@
                   </a:tcPr>
                 </a:tc>
               </a:tr>
+              <a:tr h="251460">
+                <a:tc>
+                  <a:txBody>
+                    <a:bodyPr/>
+                    <a:lstStyle/>
+                    <a:p>
+                      <a:pPr>
+                        <a:spcAft>
+                          <a:spcPts val="200"/>
+                        </a:spcAft>
+                      </a:pPr>
+                      <a:r>
+                        <a:rPr sz="850" b="1" i="0">
+                          <a:solidFill>
+                            <a:srgbClr val="202124"/>
+                          </a:solidFill>
+                          <a:latin typeface="Google Sans Flex"/>
+                          <a:ea typeface="Google Sans Flex"/>
+                          <a:cs typeface="Google Sans Flex"/>
+                          <a:sym typeface="Google Sans Flex"/>
+                        </a:rPr>
+                        <a:t>gpt-5.4-mini</a:t>
+                      </a:r>
+                    </a:p>
+                  </a:txBody>
+                  <a:tcPr marL="45720" marR="45720" marT="18288" marB="18288" anchor="ctr">
+                    <a:solidFill>
+                      <a:srgbClr val="FFFFFF"/>
+                    </a:solidFill>
+                  </a:tcPr>
+                </a:tc>
+                <a:tc>
+                  <a:txBody>
+                    <a:bodyPr/>
+                    <a:lstStyle/>
+                    <a:p>
+                      <a:pPr algn="ctr">
+                        <a:spcAft>
+                          <a:spcPts val="200"/>
+                        </a:spcAft>
+                      </a:pPr>
+                      <a:r>
+                        <a:rPr sz="850" b="0" i="0">
+                          <a:solidFill>
+                            <a:srgbClr val="202124"/>
+                          </a:solidFill>
+                          <a:latin typeface="Google Sans Flex"/>
+                          <a:ea typeface="Google Sans Flex"/>
+                          <a:cs typeface="Google Sans Flex"/>
+                          <a:sym typeface="Google Sans Flex"/>
+                        </a:rPr>
+                        <a:t>0.968</a:t>
+                      </a:r>
+                    </a:p>
+                  </a:txBody>
+                  <a:tcPr marL="45720" marR="45720" marT="18288" marB="18288" anchor="ctr">
+                    <a:solidFill>
+                      <a:srgbClr val="FFFFFF"/>
+                    </a:solidFill>
+                  </a:tcPr>
+                </a:tc>
+                <a:tc>
+                  <a:txBody>
+                    <a:bodyPr/>
+                    <a:lstStyle/>
+                    <a:p>
+                      <a:pPr algn="ctr">
+                        <a:spcAft>
+                          <a:spcPts val="200"/>
+                        </a:spcAft>
+                      </a:pPr>
+                      <a:r>
+                        <a:rPr sz="850" b="0" i="0">
+                          <a:solidFill>
+                            <a:srgbClr val="202124"/>
+                          </a:solidFill>
+                          <a:latin typeface="Google Sans Flex"/>
+                          <a:ea typeface="Google Sans Flex"/>
+                          <a:cs typeface="Google Sans Flex"/>
+                          <a:sym typeface="Google Sans Flex"/>
+                        </a:rPr>
+                        <a:t>95.0%</a:t>
+                      </a:r>
+                    </a:p>
+                  </a:txBody>
+                  <a:tcPr marL="45720" marR="45720" marT="18288" marB="18288" anchor="ctr">
+                    <a:solidFill>
+                      <a:srgbClr val="FFFFFF"/>
+                    </a:solidFill>
+                  </a:tcPr>
+                </a:tc>
+                <a:tc>
+                  <a:txBody>
+                    <a:bodyPr/>
+                    <a:lstStyle/>
+                    <a:p>
+                      <a:pPr algn="ctr">
+                        <a:spcAft>
+                          <a:spcPts val="200"/>
+                        </a:spcAft>
+                      </a:pPr>
+                      <a:r>
+                        <a:rPr sz="850" b="0" i="0">
+                          <a:solidFill>
+                            <a:srgbClr val="202124"/>
+                          </a:solidFill>
+                          <a:latin typeface="Google Sans Flex"/>
+                          <a:ea typeface="Google Sans Flex"/>
+                          <a:cs typeface="Google Sans Flex"/>
+                          <a:sym typeface="Google Sans Flex"/>
+                        </a:rPr>
+                        <a:t>100%</a:t>
+                      </a:r>
+                    </a:p>
+                  </a:txBody>
+                  <a:tcPr marL="45720" marR="45720" marT="18288" marB="18288" anchor="ctr">
+                    <a:solidFill>
+                      <a:srgbClr val="FFFFFF"/>
+                    </a:solidFill>
+                  </a:tcPr>
+                </a:tc>
+                <a:tc>
+                  <a:txBody>
+                    <a:bodyPr/>
+                    <a:lstStyle/>
+                    <a:p>
+                      <a:pPr algn="ctr">
+                        <a:spcAft>
+                          <a:spcPts val="200"/>
+                        </a:spcAft>
+                      </a:pPr>
+                      <a:r>
+                        <a:rPr sz="850" b="0" i="0">
+                          <a:solidFill>
+                            <a:srgbClr val="202124"/>
+                          </a:solidFill>
+                          <a:latin typeface="Google Sans Flex"/>
+                          <a:ea typeface="Google Sans Flex"/>
+                          <a:cs typeface="Google Sans Flex"/>
+                          <a:sym typeface="Google Sans Flex"/>
+                        </a:rPr>
+                        <a:t>21.5% (23.1%)</a:t>
+                      </a:r>
+                    </a:p>
+                  </a:txBody>
+                  <a:tcPr marL="45720" marR="45720" marT="18288" marB="18288" anchor="ctr">
+                    <a:solidFill>
+                      <a:srgbClr val="FFFFFF"/>
+                    </a:solidFill>
+                  </a:tcPr>
+                </a:tc>
+                <a:tc>
+                  <a:txBody>
+                    <a:bodyPr/>
+                    <a:lstStyle/>
+                    <a:p>
+                      <a:pPr algn="ctr">
+                        <a:spcAft>
+                          <a:spcPts val="200"/>
+                        </a:spcAft>
+                      </a:pPr>
+                      <a:r>
+                        <a:rPr sz="850" b="0" i="0">
+                          <a:solidFill>
+                            <a:srgbClr val="202124"/>
+                          </a:solidFill>
+                          <a:latin typeface="Google Sans Flex"/>
+                          <a:ea typeface="Google Sans Flex"/>
+                          <a:cs typeface="Google Sans Flex"/>
+                          <a:sym typeface="Google Sans Flex"/>
+                        </a:rPr>
+                        <a:t>21.9% (24.2%)</a:t>
+                      </a:r>
+                    </a:p>
+                  </a:txBody>
+                  <a:tcPr marL="45720" marR="45720" marT="18288" marB="18288" anchor="ctr">
+                    <a:solidFill>
+                      <a:srgbClr val="FFFFFF"/>
+                    </a:solidFill>
+                  </a:tcPr>
+                </a:tc>
+                <a:tc>
+                  <a:txBody>
+                    <a:bodyPr/>
+                    <a:lstStyle/>
+                    <a:p>
+                      <a:pPr algn="ctr">
+                        <a:spcAft>
+                          <a:spcPts val="200"/>
+                        </a:spcAft>
+                      </a:pPr>
+                      <a:r>
+                        <a:rPr sz="850" b="0" i="0">
+                          <a:solidFill>
+                            <a:srgbClr val="202124"/>
+                          </a:solidFill>
+                          <a:latin typeface="Google Sans Flex"/>
+                          <a:ea typeface="Google Sans Flex"/>
+                          <a:cs typeface="Google Sans Flex"/>
+                          <a:sym typeface="Google Sans Flex"/>
+                        </a:rPr>
+                        <a:t>6/6 (5)</a:t>
+                      </a:r>
+                    </a:p>
+                  </a:txBody>
+                  <a:tcPr marL="45720" marR="45720" marT="18288" marB="18288" anchor="ctr">
+                    <a:solidFill>
+                      <a:srgbClr val="FFFFFF"/>
+                    </a:solidFill>
+                  </a:tcPr>
+                </a:tc>
+                <a:tc>
+                  <a:txBody>
+                    <a:bodyPr/>
+                    <a:lstStyle/>
+                    <a:p>
+                      <a:pPr algn="ctr">
+                        <a:spcAft>
+                          <a:spcPts val="200"/>
+                        </a:spcAft>
+                      </a:pPr>
+                      <a:r>
+                        <a:rPr sz="850" b="0" i="0">
+                          <a:solidFill>
+                            <a:srgbClr val="202124"/>
+                          </a:solidFill>
+                          <a:latin typeface="Google Sans Flex"/>
+                          <a:ea typeface="Google Sans Flex"/>
+                          <a:cs typeface="Google Sans Flex"/>
+                          <a:sym typeface="Google Sans Flex"/>
+                        </a:rPr>
+                        <a:t>3.9 s</a:t>
+                      </a:r>
+                    </a:p>
+                  </a:txBody>
+                  <a:tcPr marL="45720" marR="45720" marT="18288" marB="18288" anchor="ctr">
+                    <a:solidFill>
+                      <a:srgbClr val="FFFFFF"/>
+                    </a:solidFill>
+                  </a:tcPr>
+                </a:tc>
+              </a:tr>
             </a:tbl>
           </a:graphicData>
         </a:graphic>
@@ -14562,7 +14804,7 @@
                 <a:cs typeface="Google Sans Flex"/>
                 <a:sym typeface="Google Sans Flex"/>
               </a:rPr>
-              <a:t> (by 2.3–4.9 pp on text-only series); extraction is near saturated (38–40 of 40 messages). gpt-5.4-mini is the default because it is 2–8× faster; a stronger model could run the overnight forecast batch.</a:t>
+              <a:t> (by 1.7–4.9 pp on text-only series); extraction is near saturated (38–40 of 40 messages). gemini-3.5-flash-lite (Gemini API) is the default: as fast as the quickest model and 6 / 6 assistant answers checked; a stronger model could run the overnight forecasts.</a:t>
             </a:r>
           </a:p>
           <a:p>
@@ -14581,7 +14823,7 @@
                 <a:cs typeface="Google Sans Flex"/>
                 <a:sym typeface="Google Sans Flex"/>
               </a:rPr>
-              <a:t>Signal value kept: share of the gold-signal plan gain kept by plans built from the model's signals (found and fixed an end-date bug: −17% → 100%). gpt-5.3-chat's gateway rejects tool calls. Gemini on Vertex AI is next; it is not on our test gateway.</a:t>
+              <a:t>Signal value kept: share of the gold-signal plan gain kept by plans built from the model's signals (found and fixed an end-date bug: −17% → 100%). gpt-5.3-chat's gateway rejects tool calls. Larger Gemini models need a paid key (free tier: 20 requests a day).</a:t>
             </a:r>
           </a:p>
         </p:txBody>
@@ -15475,7 +15717,7 @@
                 <a:cs typeface="Google Sans Flex"/>
                 <a:sym typeface="Google Sans Flex"/>
               </a:rPr>
-              <a:t>₹3.9 lakh / month</a:t>
+              <a:t>₹3.8 lakh / month</a:t>
             </a:r>
             <a:r>
               <a:rPr sz="1100" b="0" i="0">
@@ -15499,7 +15741,7 @@
                 <a:cs typeface="Google Sans Flex"/>
                 <a:sym typeface="Google Sans Flex"/>
               </a:rPr>
-              <a:t>₹1.9 lakh</a:t>
+              <a:t>₹1.8 lakh</a:t>
             </a:r>
             <a:r>
               <a:rPr sz="1100" b="0" i="0">
@@ -15570,7 +15812,7 @@
                 <a:cs typeface="Google Sans Flex"/>
                 <a:sym typeface="Google Sans Flex"/>
               </a:rPr>
-              <a:t>₹0.8–1.0 lakh</a:t>
+              <a:t>₹0.9–1.1 lakh</a:t>
             </a:r>
             <a:r>
               <a:rPr sz="1100" b="0" i="0">
@@ -16544,7 +16786,7 @@
                 <a:cs typeface="Google Sans Flex"/>
                 <a:sym typeface="Google Sans Flex"/>
               </a:rPr>
-              <a:t> extraction gold set, forecast backtest, Monte Carlo, 10-model comparison.</a:t>
+              <a:t> extraction gold set, forecast backtest, Monte Carlo, 11-model comparison.</a:t>
             </a:r>
           </a:p>
           <a:p>
@@ -16579,7 +16821,7 @@
                 <a:cs typeface="Google Sans Flex"/>
                 <a:sym typeface="Google Sans Flex"/>
               </a:rPr>
-              <a:t> Gemini on Vertex AI, Cloud Run, Cloud SQL, Cloud Storage.</a:t>
+              <a:t> Gemini API, Cloud Run, Cloud SQL, Cloud Storage.</a:t>
             </a:r>
           </a:p>
         </p:txBody>
@@ -26927,7 +27169,7 @@
                 <a:cs typeface="Google Sans Flex"/>
                 <a:sym typeface="Google Sans Flex"/>
               </a:rPr>
-              <a:t>Generative AI layer: Gemini on Vertex AI (or any OpenAI-compatible model)</a:t>
+              <a:t>Generative AI layer: Gemini API (AI Studio key) or Gemini on Vertex AI</a:t>
             </a:r>
           </a:p>
           <a:p>
@@ -27459,7 +27701,7 @@
                 <a:cs typeface="Google Sans Flex"/>
                 <a:sym typeface="Google Sans Flex"/>
               </a:rPr>
-              <a:t>OpenAI-compatible gateway  ➜  </a:t>
+              <a:t>Gemini API (AI Studio key)  ➜  </a:t>
             </a:r>
             <a:r>
               <a:rPr sz="750" b="1" i="0">
@@ -27471,7 +27713,7 @@
                 <a:cs typeface="Google Sans Flex"/>
                 <a:sym typeface="Google Sans Flex"/>
               </a:rPr>
-              <a:t>Gemini on Vertex AI</a:t>
+              <a:t>Secret Manager key / Vertex AI</a:t>
             </a:r>
           </a:p>
         </p:txBody>
@@ -27554,7 +27796,7 @@
                 <a:cs typeface="Google Sans Flex"/>
                 <a:sym typeface="Google Sans Flex"/>
               </a:rPr>
-              <a:t>PostgreSQL 16 (Docker)  ➜  </a:t>
+              <a:t>SQLite file (no server)  ➜  </a:t>
             </a:r>
             <a:r>
               <a:rPr sz="750" b="1" i="0">
@@ -27839,7 +28081,7 @@
                 <a:cs typeface="Google Sans Flex"/>
                 <a:sym typeface="Google Sans Flex"/>
               </a:rPr>
-              <a:t>Docker, deploy script  ➜  </a:t>
+              <a:t>deploy.sh (no local Docker)  ➜  </a:t>
             </a:r>
             <a:r>
               <a:rPr sz="750" b="1" i="0">
@@ -28381,7 +28623,7 @@
                           <a:cs typeface="Google Sans Flex"/>
                           <a:sym typeface="Google Sans Flex"/>
                         </a:rPr>
-                        <a:t>google-genai (Gemini) or OpenAI SDK; validated JSON tasks; tool-calling assistant</a:t>
+                        <a:t>google-genai, gemini-3.5-flash-lite via the Gemini API; validated JSON tasks; tool-calling assistant</a:t>
                       </a:r>
                     </a:p>
                   </a:txBody>
@@ -28411,7 +28653,7 @@
                           <a:cs typeface="Google Sans Flex"/>
                           <a:sym typeface="Google Sans Flex"/>
                         </a:rPr>
-                        <a:t>Gemini 2.5 Flash on Vertex AI</a:t>
+                        <a:t>Gemini API (key in Secret Manager) or Gemini on Vertex AI</a:t>
                       </a:r>
                     </a:p>
                   </a:txBody>
@@ -28565,7 +28807,7 @@
                           <a:cs typeface="Google Sans Flex"/>
                           <a:sym typeface="Google Sans Flex"/>
                         </a:rPr>
-                        <a:t>PostgreSQL 16 in Docker; local folder for uploads, exports, forecast cache</a:t>
+                        <a:t>SQLite (no database server); local folder for uploads, exports, forecast cache</a:t>
                       </a:r>
                     </a:p>
                   </a:txBody>
@@ -28657,7 +28899,7 @@
                           <a:cs typeface="Google Sans Flex"/>
                           <a:sym typeface="Google Sans Flex"/>
                         </a:rPr>
-                        <a:t>Extraction gold set, rolling backtest, Monte Carlo, 10-model comparison</a:t>
+                        <a:t>Extraction gold set, rolling backtest, Monte Carlo, 11-model comparison</a:t>
                       </a:r>
                     </a:p>
                   </a:txBody>
@@ -28749,7 +28991,7 @@
                           <a:cs typeface="Google Sans Flex"/>
                           <a:sym typeface="Google Sans Flex"/>
                         </a:rPr>
-                        <a:t>pytest (151 tests), oxlint, strict TypeScript, LLM call log</a:t>
+                        <a:t>pytest (154 tests), oxlint, strict TypeScript, LLM call log</a:t>
                       </a:r>
                     </a:p>
                   </a:txBody>

--- a/docs/Inventory_Rescue_AI_Builder_Cup.pptx
+++ b/docs/Inventory_Rescue_AI_Builder_Cup.pptx
@@ -8867,7 +8867,7 @@
       </p:sp>
       <p:pic>
         <p:nvPicPr>
-          <p:cNvPr id="140" name="Picture 139" descr="crop_2_signals.png"/>
+          <p:cNvPr id="140" name="Picture 139" descr="crop_2_simple.png"/>
           <p:cNvPicPr>
             <a:picLocks noChangeAspect="1"/>
           </p:cNvPicPr>
@@ -8881,8 +8881,8 @@
         </p:blipFill>
         <p:spPr>
           <a:xfrm>
-            <a:off x="320040" y="3516483"/>
-            <a:ext cx="4160520" cy="830873"/>
+            <a:off x="320040" y="3207866"/>
+            <a:ext cx="4160520" cy="1448106"/>
           </a:xfrm>
           <a:prstGeom prst="rect">
             <a:avLst/>
@@ -8931,7 +8931,7 @@
                 <a:cs typeface="Google Sans Flex"/>
                 <a:sym typeface="Google Sans Flex"/>
               </a:rPr>
-              <a:t>Signal Inbox: extracted events with verbatim evidence, confirmed by the operator</a:t>
+              <a:t>Simple view (default): three big buttons, the plan in plain words</a:t>
             </a:r>
           </a:p>
         </p:txBody>
@@ -9268,7 +9268,7 @@
                 <a:cs typeface="Google Sans Flex"/>
                 <a:sym typeface="Google Sans Flex"/>
               </a:rPr>
-              <a:t> 154 automated tests pass · 30 / 30 seed forecasts passed LLM validation · every LLM call logged with its status.</a:t>
+              <a:t> 158 automated tests pass · 30 / 30 seed forecasts passed LLM validation · every LLM call logged with its status.</a:t>
             </a:r>
           </a:p>
         </p:txBody>
@@ -28991,7 +28991,7 @@
                           <a:cs typeface="Google Sans Flex"/>
                           <a:sym typeface="Google Sans Flex"/>
                         </a:rPr>
-                        <a:t>pytest (154 tests), oxlint, strict TypeScript, LLM call log</a:t>
+                        <a:t>pytest (158 tests), oxlint, strict TypeScript, LLM call log</a:t>
                       </a:r>
                     </a:p>
                   </a:txBody>

--- a/docs/Inventory_Rescue_AI_Builder_Cup.pptx
+++ b/docs/Inventory_Rescue_AI_Builder_Cup.pptx
@@ -8881,8 +8881,8 @@
         </p:blipFill>
         <p:spPr>
           <a:xfrm>
-            <a:off x="320040" y="3207866"/>
-            <a:ext cx="4160520" cy="1448106"/>
+            <a:off x="320040" y="3157038"/>
+            <a:ext cx="4160520" cy="1549763"/>
           </a:xfrm>
           <a:prstGeom prst="rect">
             <a:avLst/>
@@ -8931,7 +8931,7 @@
                 <a:cs typeface="Google Sans Flex"/>
                 <a:sym typeface="Google Sans Flex"/>
               </a:rPr>
-              <a:t>Simple view (default): three big buttons, the plan in plain words</a:t>
+              <a:t>Simple view (default): three big buttons; budget, then how to buy</a:t>
             </a:r>
           </a:p>
         </p:txBody>

--- a/docs/Inventory_Rescue_AI_Builder_Cup.pptx
+++ b/docs/Inventory_Rescue_AI_Builder_Cup.pptx
@@ -9268,7 +9268,7 @@
                 <a:cs typeface="Google Sans Flex"/>
                 <a:sym typeface="Google Sans Flex"/>
               </a:rPr>
-              <a:t> 158 automated tests pass · 30 / 30 seed forecasts passed LLM validation · every LLM call logged with its status.</a:t>
+              <a:t> 159 automated tests pass · 30 / 30 seed forecasts passed LLM validation · every LLM call logged with its status.</a:t>
             </a:r>
           </a:p>
         </p:txBody>
@@ -28991,7 +28991,7 @@
                           <a:cs typeface="Google Sans Flex"/>
                           <a:sym typeface="Google Sans Flex"/>
                         </a:rPr>
-                        <a:t>pytest (158 tests), oxlint, strict TypeScript, LLM call log</a:t>
+                        <a:t>pytest (159 tests), oxlint, strict TypeScript, LLM call log</a:t>
                       </a:r>
                     </a:p>
                   </a:txBody>

--- a/docs/Inventory_Rescue_AI_Builder_Cup.pptx
+++ b/docs/Inventory_Rescue_AI_Builder_Cup.pptx
@@ -9268,7 +9268,7 @@
                 <a:cs typeface="Google Sans Flex"/>
                 <a:sym typeface="Google Sans Flex"/>
               </a:rPr>
-              <a:t> 159 automated tests pass · 30 / 30 seed forecasts passed LLM validation · every LLM call logged with its status.</a:t>
+              <a:t> 160 automated tests pass · 30 / 30 seed forecasts passed LLM validation · every LLM call logged with its status.</a:t>
             </a:r>
           </a:p>
         </p:txBody>
@@ -28991,7 +28991,7 @@
                           <a:cs typeface="Google Sans Flex"/>
                           <a:sym typeface="Google Sans Flex"/>
                         </a:rPr>
-                        <a:t>pytest (159 tests), oxlint, strict TypeScript, LLM call log</a:t>
+                        <a:t>pytest (160 tests), oxlint, strict TypeScript, LLM call log</a:t>
                       </a:r>
                     </a:p>
                   </a:txBody>

--- a/docs/Inventory_Rescue_AI_Builder_Cup.pptx
+++ b/docs/Inventory_Rescue_AI_Builder_Cup.pptx
@@ -9268,7 +9268,7 @@
                 <a:cs typeface="Google Sans Flex"/>
                 <a:sym typeface="Google Sans Flex"/>
               </a:rPr>
-              <a:t> 160 automated tests pass · 30 / 30 seed forecasts passed LLM validation · every LLM call logged with its status.</a:t>
+              <a:t> 157 automated tests pass · 30 / 30 seed forecasts passed LLM validation · every LLM call logged with its status.</a:t>
             </a:r>
           </a:p>
         </p:txBody>
@@ -11808,7 +11808,7 @@
                 <a:cs typeface="Google Sans Flex Medium"/>
                 <a:sym typeface="Google Sans Flex Medium"/>
               </a:rPr>
-              <a:t>Which LLM? The same evaluations on 11 models</a:t>
+              <a:t>Gemini in the loop: what gemini-3.5-flash-lite adds</a:t>
             </a:r>
             <a:endParaRPr sz="1600">
               <a:latin typeface="Google Sans Flex Medium"/>
@@ -11829,7 +11829,7 @@
         </p:nvGraphicFramePr>
         <p:xfrm>
           <a:off x="320040" y="1143000"/>
-          <a:ext cx="8503920" cy="3017520"/>
+          <a:ext cx="8503920" cy="2926080"/>
         </p:xfrm>
         <a:graphic>
           <a:graphicData uri="http://schemas.openxmlformats.org/drawingml/2006/table">
@@ -11838,16 +11838,12 @@
                 <a:tableStyleId>{5C22544A-7EE6-4342-B048-85BDC9FD1C3A}</a:tableStyleId>
               </a:tblPr>
               <a:tblGrid>
-                <a:gridCol w="1325880"/>
-                <a:gridCol w="868680"/>
-                <a:gridCol w="868680"/>
-                <a:gridCol w="868680"/>
-                <a:gridCol w="1234440"/>
-                <a:gridCol w="1234440"/>
-                <a:gridCol w="1143000"/>
-                <a:gridCol w="960120"/>
+                <a:gridCol w="2240280"/>
+                <a:gridCol w="2331720"/>
+                <a:gridCol w="1828800"/>
+                <a:gridCol w="2103120"/>
               </a:tblGrid>
-              <a:tr h="251460">
+              <a:tr h="487680">
                 <a:tc>
                   <a:txBody>
                     <a:bodyPr/>
@@ -11859,7 +11855,7 @@
                         </a:spcAft>
                       </a:pPr>
                       <a:r>
-                        <a:rPr sz="800" b="1" i="0">
+                        <a:rPr sz="900" b="1" i="0">
                           <a:solidFill>
                             <a:srgbClr val="FFFFFF"/>
                           </a:solidFill>
@@ -11868,11 +11864,11 @@
                           <a:cs typeface="Google Sans Flex"/>
                           <a:sym typeface="Google Sans Flex"/>
                         </a:rPr>
-                        <a:t>Model</a:t>
+                        <a:t>Task</a:t>
                       </a:r>
                     </a:p>
                   </a:txBody>
-                  <a:tcPr marL="45720" marR="45720" marT="18288" marB="18288" anchor="ctr">
+                  <a:tcPr marL="64008" marR="64008" marT="27432" marB="27432" anchor="ctr">
                     <a:solidFill>
                       <a:srgbClr val="202124"/>
                     </a:solidFill>
@@ -11883,13 +11879,13 @@
                     <a:bodyPr/>
                     <a:lstStyle/>
                     <a:p>
-                      <a:pPr algn="ctr">
+                      <a:pPr>
                         <a:spcAft>
                           <a:spcPts val="200"/>
                         </a:spcAft>
                       </a:pPr>
                       <a:r>
-                        <a:rPr sz="800" b="1" i="0">
+                        <a:rPr sz="900" b="1" i="0">
                           <a:solidFill>
                             <a:srgbClr val="FFFFFF"/>
                           </a:solidFill>
@@ -11898,11 +11894,11 @@
                           <a:cs typeface="Google Sans Flex"/>
                           <a:sym typeface="Google Sans Flex"/>
                         </a:rPr>
-                        <a:t>Extraction F1</a:t>
+                        <a:t>With Gemini</a:t>
                       </a:r>
                     </a:p>
                   </a:txBody>
-                  <a:tcPr marL="45720" marR="45720" marT="18288" marB="18288" anchor="ctr">
+                  <a:tcPr marL="64008" marR="64008" marT="27432" marB="27432" anchor="ctr">
                     <a:solidFill>
                       <a:srgbClr val="202124"/>
                     </a:solidFill>
@@ -11913,13 +11909,13 @@
                     <a:bodyPr/>
                     <a:lstStyle/>
                     <a:p>
-                      <a:pPr algn="ctr">
+                      <a:pPr>
                         <a:spcAft>
                           <a:spcPts val="200"/>
                         </a:spcAft>
                       </a:pPr>
                       <a:r>
-                        <a:rPr sz="800" b="1" i="0">
+                        <a:rPr sz="900" b="1" i="0">
                           <a:solidFill>
                             <a:srgbClr val="FFFFFF"/>
                           </a:solidFill>
@@ -11928,11 +11924,11 @@
                           <a:cs typeface="Google Sans Flex"/>
                           <a:sym typeface="Google Sans Flex"/>
                         </a:rPr>
-                        <a:t>Messages correct</a:t>
+                        <a:t>Without the LLM</a:t>
                       </a:r>
                     </a:p>
                   </a:txBody>
-                  <a:tcPr marL="45720" marR="45720" marT="18288" marB="18288" anchor="ctr">
+                  <a:tcPr marL="64008" marR="64008" marT="27432" marB="27432" anchor="ctr">
                     <a:solidFill>
                       <a:srgbClr val="202124"/>
                     </a:solidFill>
@@ -11943,13 +11939,13 @@
                     <a:bodyPr/>
                     <a:lstStyle/>
                     <a:p>
-                      <a:pPr algn="ctr">
+                      <a:pPr>
                         <a:spcAft>
                           <a:spcPts val="200"/>
                         </a:spcAft>
                       </a:pPr>
                       <a:r>
-                        <a:rPr sz="800" b="1" i="0">
+                        <a:rPr sz="900" b="1" i="0">
                           <a:solidFill>
                             <a:srgbClr val="FFFFFF"/>
                           </a:solidFill>
@@ -11958,138 +11954,18 @@
                           <a:cs typeface="Google Sans Flex"/>
                           <a:sym typeface="Google Sans Flex"/>
                         </a:rPr>
-                        <a:t>Signal value kept</a:t>
+                        <a:t>Guardrail</a:t>
                       </a:r>
                     </a:p>
                   </a:txBody>
-                  <a:tcPr marL="45720" marR="45720" marT="18288" marB="18288" anchor="ctr">
-                    <a:solidFill>
-                      <a:srgbClr val="202124"/>
-                    </a:solidFill>
-                  </a:tcPr>
-                </a:tc>
-                <a:tc>
-                  <a:txBody>
-                    <a:bodyPr/>
-                    <a:lstStyle/>
-                    <a:p>
-                      <a:pPr algn="ctr">
-                        <a:spcAft>
-                          <a:spcPts val="200"/>
-                        </a:spcAft>
-                      </a:pPr>
-                      <a:r>
-                        <a:rPr sz="800" b="1" i="0">
-                          <a:solidFill>
-                            <a:srgbClr val="FFFFFF"/>
-                          </a:solidFill>
-                          <a:latin typeface="Google Sans Flex"/>
-                          <a:ea typeface="Google Sans Flex"/>
-                          <a:cs typeface="Google Sans Flex"/>
-                          <a:sym typeface="Google Sans Flex"/>
-                        </a:rPr>
-                        <a:t>Forecast WAPE (statistical)</a:t>
-                      </a:r>
-                    </a:p>
-                  </a:txBody>
-                  <a:tcPr marL="45720" marR="45720" marT="18288" marB="18288" anchor="ctr">
-                    <a:solidFill>
-                      <a:srgbClr val="202124"/>
-                    </a:solidFill>
-                  </a:tcPr>
-                </a:tc>
-                <a:tc>
-                  <a:txBody>
-                    <a:bodyPr/>
-                    <a:lstStyle/>
-                    <a:p>
-                      <a:pPr algn="ctr">
-                        <a:spcAft>
-                          <a:spcPts val="200"/>
-                        </a:spcAft>
-                      </a:pPr>
-                      <a:r>
-                        <a:rPr sz="800" b="1" i="0">
-                          <a:solidFill>
-                            <a:srgbClr val="FFFFFF"/>
-                          </a:solidFill>
-                          <a:latin typeface="Google Sans Flex"/>
-                          <a:ea typeface="Google Sans Flex"/>
-                          <a:cs typeface="Google Sans Flex"/>
-                          <a:sym typeface="Google Sans Flex"/>
-                        </a:rPr>
-                        <a:t>Text-only WAPE (statistical)</a:t>
-                      </a:r>
-                    </a:p>
-                  </a:txBody>
-                  <a:tcPr marL="45720" marR="45720" marT="18288" marB="18288" anchor="ctr">
-                    <a:solidFill>
-                      <a:srgbClr val="202124"/>
-                    </a:solidFill>
-                  </a:tcPr>
-                </a:tc>
-                <a:tc>
-                  <a:txBody>
-                    <a:bodyPr/>
-                    <a:lstStyle/>
-                    <a:p>
-                      <a:pPr algn="ctr">
-                        <a:spcAft>
-                          <a:spcPts val="200"/>
-                        </a:spcAft>
-                      </a:pPr>
-                      <a:r>
-                        <a:rPr sz="800" b="1" i="0">
-                          <a:solidFill>
-                            <a:srgbClr val="FFFFFF"/>
-                          </a:solidFill>
-                          <a:latin typeface="Google Sans Flex"/>
-                          <a:ea typeface="Google Sans Flex"/>
-                          <a:cs typeface="Google Sans Flex"/>
-                          <a:sym typeface="Google Sans Flex"/>
-                        </a:rPr>
-                        <a:t>Assistant checked (first try)</a:t>
-                      </a:r>
-                    </a:p>
-                  </a:txBody>
-                  <a:tcPr marL="45720" marR="45720" marT="18288" marB="18288" anchor="ctr">
-                    <a:solidFill>
-                      <a:srgbClr val="202124"/>
-                    </a:solidFill>
-                  </a:tcPr>
-                </a:tc>
-                <a:tc>
-                  <a:txBody>
-                    <a:bodyPr/>
-                    <a:lstStyle/>
-                    <a:p>
-                      <a:pPr algn="ctr">
-                        <a:spcAft>
-                          <a:spcPts val="200"/>
-                        </a:spcAft>
-                      </a:pPr>
-                      <a:r>
-                        <a:rPr sz="800" b="1" i="0">
-                          <a:solidFill>
-                            <a:srgbClr val="FFFFFF"/>
-                          </a:solidFill>
-                          <a:latin typeface="Google Sans Flex"/>
-                          <a:ea typeface="Google Sans Flex"/>
-                          <a:cs typeface="Google Sans Flex"/>
-                          <a:sym typeface="Google Sans Flex"/>
-                        </a:rPr>
-                        <a:t>Assistant median</a:t>
-                      </a:r>
-                    </a:p>
-                  </a:txBody>
-                  <a:tcPr marL="45720" marR="45720" marT="18288" marB="18288" anchor="ctr">
+                  <a:tcPr marL="64008" marR="64008" marT="27432" marB="27432" anchor="ctr">
                     <a:solidFill>
                       <a:srgbClr val="202124"/>
                     </a:solidFill>
                   </a:tcPr>
                 </a:tc>
               </a:tr>
-              <a:tr h="251460">
+              <a:tr h="487680">
                 <a:tc>
                   <a:txBody>
                     <a:bodyPr/>
@@ -12110,11 +11986,41 @@
                           <a:cs typeface="Google Sans Flex"/>
                           <a:sym typeface="Google Sans Flex"/>
                         </a:rPr>
-                        <a:t>gemini-3.5-flash-lite (default)</a:t>
+                        <a:t>Read inbox messages into signals (40 labelled: email, WhatsApp, Hindi)</a:t>
                       </a:r>
                     </a:p>
                   </a:txBody>
-                  <a:tcPr marL="45720" marR="45720" marT="18288" marB="18288" anchor="ctr">
+                  <a:tcPr marL="64008" marR="64008" marT="27432" marB="27432" anchor="ctr">
+                    <a:solidFill>
+                      <a:srgbClr val="FFFFFF"/>
+                    </a:solidFill>
+                  </a:tcPr>
+                </a:tc>
+                <a:tc>
+                  <a:txBody>
+                    <a:bodyPr/>
+                    <a:lstStyle/>
+                    <a:p>
+                      <a:pPr>
+                        <a:spcAft>
+                          <a:spcPts val="200"/>
+                        </a:spcAft>
+                      </a:pPr>
+                      <a:r>
+                        <a:rPr sz="850" b="1" i="0">
+                          <a:solidFill>
+                            <a:srgbClr val="1A73E8"/>
+                          </a:solidFill>
+                          <a:latin typeface="Google Sans Flex"/>
+                          <a:ea typeface="Google Sans Flex"/>
+                          <a:cs typeface="Google Sans Flex"/>
+                          <a:sym typeface="Google Sans Flex"/>
+                        </a:rPr>
+                        <a:t>F1 0.97; 95% of messages fully correct; 0 invented events</a:t>
+                      </a:r>
+                    </a:p>
+                  </a:txBody>
+                  <a:tcPr marL="64008" marR="64008" marT="27432" marB="27432" anchor="ctr">
                     <a:solidFill>
                       <a:srgbClr val="E8F0FE"/>
                     </a:solidFill>
@@ -12125,7 +12031,7 @@
                     <a:bodyPr/>
                     <a:lstStyle/>
                     <a:p>
-                      <a:pPr algn="ctr">
+                      <a:pPr>
                         <a:spcAft>
                           <a:spcPts val="200"/>
                         </a:spcAft>
@@ -12140,13 +12046,13 @@
                           <a:cs typeface="Google Sans Flex"/>
                           <a:sym typeface="Google Sans Flex"/>
                         </a:rPr>
-                        <a:t>0.966</a:t>
+                        <a:t>Keyword rules: F1 0.65; 57.5% correct</a:t>
                       </a:r>
                     </a:p>
                   </a:txBody>
-                  <a:tcPr marL="45720" marR="45720" marT="18288" marB="18288" anchor="ctr">
+                  <a:tcPr marL="64008" marR="64008" marT="27432" marB="27432" anchor="ctr">
                     <a:solidFill>
-                      <a:srgbClr val="E8F0FE"/>
+                      <a:srgbClr val="FFFFFF"/>
                     </a:solidFill>
                   </a:tcPr>
                 </a:tc>
@@ -12155,7 +12061,7 @@
                     <a:bodyPr/>
                     <a:lstStyle/>
                     <a:p>
-                      <a:pPr algn="ctr">
+                      <a:pPr>
                         <a:spcAft>
                           <a:spcPts val="200"/>
                         </a:spcAft>
@@ -12170,168 +12076,18 @@
                           <a:cs typeface="Google Sans Flex"/>
                           <a:sym typeface="Google Sans Flex"/>
                         </a:rPr>
-                        <a:t>95.0%</a:t>
+                        <a:t>Evidence quote must appear verbatim; SKU, date and quantity checked</a:t>
                       </a:r>
                     </a:p>
                   </a:txBody>
-                  <a:tcPr marL="45720" marR="45720" marT="18288" marB="18288" anchor="ctr">
+                  <a:tcPr marL="64008" marR="64008" marT="27432" marB="27432" anchor="ctr">
                     <a:solidFill>
-                      <a:srgbClr val="E8F0FE"/>
-                    </a:solidFill>
-                  </a:tcPr>
-                </a:tc>
-                <a:tc>
-                  <a:txBody>
-                    <a:bodyPr/>
-                    <a:lstStyle/>
-                    <a:p>
-                      <a:pPr algn="ctr">
-                        <a:spcAft>
-                          <a:spcPts val="200"/>
-                        </a:spcAft>
-                      </a:pPr>
-                      <a:r>
-                        <a:rPr sz="850" b="0" i="0">
-                          <a:solidFill>
-                            <a:srgbClr val="202124"/>
-                          </a:solidFill>
-                          <a:latin typeface="Google Sans Flex"/>
-                          <a:ea typeface="Google Sans Flex"/>
-                          <a:cs typeface="Google Sans Flex"/>
-                          <a:sym typeface="Google Sans Flex"/>
-                        </a:rPr>
-                        <a:t>100%</a:t>
-                      </a:r>
-                    </a:p>
-                  </a:txBody>
-                  <a:tcPr marL="45720" marR="45720" marT="18288" marB="18288" anchor="ctr">
-                    <a:solidFill>
-                      <a:srgbClr val="E8F0FE"/>
-                    </a:solidFill>
-                  </a:tcPr>
-                </a:tc>
-                <a:tc>
-                  <a:txBody>
-                    <a:bodyPr/>
-                    <a:lstStyle/>
-                    <a:p>
-                      <a:pPr algn="ctr">
-                        <a:spcAft>
-                          <a:spcPts val="200"/>
-                        </a:spcAft>
-                      </a:pPr>
-                      <a:r>
-                        <a:rPr sz="850" b="0" i="0">
-                          <a:solidFill>
-                            <a:srgbClr val="202124"/>
-                          </a:solidFill>
-                          <a:latin typeface="Google Sans Flex"/>
-                          <a:ea typeface="Google Sans Flex"/>
-                          <a:cs typeface="Google Sans Flex"/>
-                          <a:sym typeface="Google Sans Flex"/>
-                        </a:rPr>
-                        <a:t>21.5% (23.0%)</a:t>
-                      </a:r>
-                    </a:p>
-                  </a:txBody>
-                  <a:tcPr marL="45720" marR="45720" marT="18288" marB="18288" anchor="ctr">
-                    <a:solidFill>
-                      <a:srgbClr val="E8F0FE"/>
-                    </a:solidFill>
-                  </a:tcPr>
-                </a:tc>
-                <a:tc>
-                  <a:txBody>
-                    <a:bodyPr/>
-                    <a:lstStyle/>
-                    <a:p>
-                      <a:pPr algn="ctr">
-                        <a:spcAft>
-                          <a:spcPts val="200"/>
-                        </a:spcAft>
-                      </a:pPr>
-                      <a:r>
-                        <a:rPr sz="850" b="0" i="0">
-                          <a:solidFill>
-                            <a:srgbClr val="202124"/>
-                          </a:solidFill>
-                          <a:latin typeface="Google Sans Flex"/>
-                          <a:ea typeface="Google Sans Flex"/>
-                          <a:cs typeface="Google Sans Flex"/>
-                          <a:sym typeface="Google Sans Flex"/>
-                        </a:rPr>
-                        <a:t>22.2% (23.9%)</a:t>
-                      </a:r>
-                    </a:p>
-                  </a:txBody>
-                  <a:tcPr marL="45720" marR="45720" marT="18288" marB="18288" anchor="ctr">
-                    <a:solidFill>
-                      <a:srgbClr val="E8F0FE"/>
-                    </a:solidFill>
-                  </a:tcPr>
-                </a:tc>
-                <a:tc>
-                  <a:txBody>
-                    <a:bodyPr/>
-                    <a:lstStyle/>
-                    <a:p>
-                      <a:pPr algn="ctr">
-                        <a:spcAft>
-                          <a:spcPts val="200"/>
-                        </a:spcAft>
-                      </a:pPr>
-                      <a:r>
-                        <a:rPr sz="850" b="0" i="0">
-                          <a:solidFill>
-                            <a:srgbClr val="202124"/>
-                          </a:solidFill>
-                          <a:latin typeface="Google Sans Flex"/>
-                          <a:ea typeface="Google Sans Flex"/>
-                          <a:cs typeface="Google Sans Flex"/>
-                          <a:sym typeface="Google Sans Flex"/>
-                        </a:rPr>
-                        <a:t>6/6 (5)</a:t>
-                      </a:r>
-                    </a:p>
-                  </a:txBody>
-                  <a:tcPr marL="45720" marR="45720" marT="18288" marB="18288" anchor="ctr">
-                    <a:solidFill>
-                      <a:srgbClr val="E8F0FE"/>
-                    </a:solidFill>
-                  </a:tcPr>
-                </a:tc>
-                <a:tc>
-                  <a:txBody>
-                    <a:bodyPr/>
-                    <a:lstStyle/>
-                    <a:p>
-                      <a:pPr algn="ctr">
-                        <a:spcAft>
-                          <a:spcPts val="200"/>
-                        </a:spcAft>
-                      </a:pPr>
-                      <a:r>
-                        <a:rPr sz="850" b="0" i="0">
-                          <a:solidFill>
-                            <a:srgbClr val="202124"/>
-                          </a:solidFill>
-                          <a:latin typeface="Google Sans Flex"/>
-                          <a:ea typeface="Google Sans Flex"/>
-                          <a:cs typeface="Google Sans Flex"/>
-                          <a:sym typeface="Google Sans Flex"/>
-                        </a:rPr>
-                        <a:t>4.0 s</a:t>
-                      </a:r>
-                    </a:p>
-                  </a:txBody>
-                  <a:tcPr marL="45720" marR="45720" marT="18288" marB="18288" anchor="ctr">
-                    <a:solidFill>
-                      <a:srgbClr val="E8F0FE"/>
+                      <a:srgbClr val="FFFFFF"/>
                     </a:solidFill>
                   </a:tcPr>
                 </a:tc>
               </a:tr>
-              <a:tr h="251460">
+              <a:tr h="487680">
                 <a:tc>
                   <a:txBody>
                     <a:bodyPr/>
@@ -12352,11 +12108,11 @@
                           <a:cs typeface="Google Sans Flex"/>
                           <a:sym typeface="Google Sans Flex"/>
                         </a:rPr>
-                        <a:t>claudesonnet4.5</a:t>
+                        <a:t>Use those signals in a ₹10 lakh plan</a:t>
                       </a:r>
                     </a:p>
                   </a:txBody>
-                  <a:tcPr marL="45720" marR="45720" marT="18288" marB="18288" anchor="ctr">
+                  <a:tcPr marL="64008" marR="64008" marT="27432" marB="27432" anchor="ctr">
                     <a:solidFill>
                       <a:srgbClr val="F1F3F4"/>
                     </a:solidFill>
@@ -12367,7 +12123,37 @@
                     <a:bodyPr/>
                     <a:lstStyle/>
                     <a:p>
-                      <a:pPr algn="ctr">
+                      <a:pPr>
+                        <a:spcAft>
+                          <a:spcPts val="200"/>
+                        </a:spcAft>
+                      </a:pPr>
+                      <a:r>
+                        <a:rPr sz="850" b="1" i="0">
+                          <a:solidFill>
+                            <a:srgbClr val="1A73E8"/>
+                          </a:solidFill>
+                          <a:latin typeface="Google Sans Flex"/>
+                          <a:ea typeface="Google Sans Flex"/>
+                          <a:cs typeface="Google Sans Flex"/>
+                          <a:sym typeface="Google Sans Flex"/>
+                        </a:rPr>
+                        <a:t>100% of the perfect-information gain (actual month and 40 worlds)</a:t>
+                      </a:r>
+                    </a:p>
+                  </a:txBody>
+                  <a:tcPr marL="64008" marR="64008" marT="27432" marB="27432" anchor="ctr">
+                    <a:solidFill>
+                      <a:srgbClr val="E8F0FE"/>
+                    </a:solidFill>
+                  </a:tcPr>
+                </a:tc>
+                <a:tc>
+                  <a:txBody>
+                    <a:bodyPr/>
+                    <a:lstStyle/>
+                    <a:p>
+                      <a:pPr>
                         <a:spcAft>
                           <a:spcPts val="200"/>
                         </a:spcAft>
@@ -12382,11 +12168,11 @@
                           <a:cs typeface="Google Sans Flex"/>
                           <a:sym typeface="Google Sans Flex"/>
                         </a:rPr>
-                        <a:t>1.000</a:t>
+                        <a:t>Hand-labelled signals = 100%</a:t>
                       </a:r>
                     </a:p>
                   </a:txBody>
-                  <a:tcPr marL="45720" marR="45720" marT="18288" marB="18288" anchor="ctr">
+                  <a:tcPr marL="64008" marR="64008" marT="27432" marB="27432" anchor="ctr">
                     <a:solidFill>
                       <a:srgbClr val="F1F3F4"/>
                     </a:solidFill>
@@ -12397,7 +12183,7 @@
                     <a:bodyPr/>
                     <a:lstStyle/>
                     <a:p>
-                      <a:pPr algn="ctr">
+                      <a:pPr>
                         <a:spcAft>
                           <a:spcPts val="200"/>
                         </a:spcAft>
@@ -12412,168 +12198,18 @@
                           <a:cs typeface="Google Sans Flex"/>
                           <a:sym typeface="Google Sans Flex"/>
                         </a:rPr>
-                        <a:t>100.0%</a:t>
+                        <a:t>A person confirms each signal before it is used</a:t>
                       </a:r>
                     </a:p>
                   </a:txBody>
-                  <a:tcPr marL="45720" marR="45720" marT="18288" marB="18288" anchor="ctr">
-                    <a:solidFill>
-                      <a:srgbClr val="F1F3F4"/>
-                    </a:solidFill>
-                  </a:tcPr>
-                </a:tc>
-                <a:tc>
-                  <a:txBody>
-                    <a:bodyPr/>
-                    <a:lstStyle/>
-                    <a:p>
-                      <a:pPr algn="ctr">
-                        <a:spcAft>
-                          <a:spcPts val="200"/>
-                        </a:spcAft>
-                      </a:pPr>
-                      <a:r>
-                        <a:rPr sz="850" b="0" i="0">
-                          <a:solidFill>
-                            <a:srgbClr val="202124"/>
-                          </a:solidFill>
-                          <a:latin typeface="Google Sans Flex"/>
-                          <a:ea typeface="Google Sans Flex"/>
-                          <a:cs typeface="Google Sans Flex"/>
-                          <a:sym typeface="Google Sans Flex"/>
-                        </a:rPr>
-                        <a:t>100%</a:t>
-                      </a:r>
-                    </a:p>
-                  </a:txBody>
-                  <a:tcPr marL="45720" marR="45720" marT="18288" marB="18288" anchor="ctr">
-                    <a:solidFill>
-                      <a:srgbClr val="F1F3F4"/>
-                    </a:solidFill>
-                  </a:tcPr>
-                </a:tc>
-                <a:tc>
-                  <a:txBody>
-                    <a:bodyPr/>
-                    <a:lstStyle/>
-                    <a:p>
-                      <a:pPr algn="ctr">
-                        <a:spcAft>
-                          <a:spcPts val="200"/>
-                        </a:spcAft>
-                      </a:pPr>
-                      <a:r>
-                        <a:rPr sz="850" b="0" i="0">
-                          <a:solidFill>
-                            <a:srgbClr val="202124"/>
-                          </a:solidFill>
-                          <a:latin typeface="Google Sans Flex"/>
-                          <a:ea typeface="Google Sans Flex"/>
-                          <a:cs typeface="Google Sans Flex"/>
-                          <a:sym typeface="Google Sans Flex"/>
-                        </a:rPr>
-                        <a:t>20.9% (23.0%)</a:t>
-                      </a:r>
-                    </a:p>
-                  </a:txBody>
-                  <a:tcPr marL="45720" marR="45720" marT="18288" marB="18288" anchor="ctr">
-                    <a:solidFill>
-                      <a:srgbClr val="F1F3F4"/>
-                    </a:solidFill>
-                  </a:tcPr>
-                </a:tc>
-                <a:tc>
-                  <a:txBody>
-                    <a:bodyPr/>
-                    <a:lstStyle/>
-                    <a:p>
-                      <a:pPr algn="ctr">
-                        <a:spcAft>
-                          <a:spcPts val="200"/>
-                        </a:spcAft>
-                      </a:pPr>
-                      <a:r>
-                        <a:rPr sz="850" b="1" i="0">
-                          <a:solidFill>
-                            <a:srgbClr val="202124"/>
-                          </a:solidFill>
-                          <a:latin typeface="Google Sans Flex"/>
-                          <a:ea typeface="Google Sans Flex"/>
-                          <a:cs typeface="Google Sans Flex"/>
-                          <a:sym typeface="Google Sans Flex"/>
-                        </a:rPr>
-                        <a:t>19.0% (23.9%)</a:t>
-                      </a:r>
-                    </a:p>
-                  </a:txBody>
-                  <a:tcPr marL="45720" marR="45720" marT="18288" marB="18288" anchor="ctr">
-                    <a:solidFill>
-                      <a:srgbClr val="F1F3F4"/>
-                    </a:solidFill>
-                  </a:tcPr>
-                </a:tc>
-                <a:tc>
-                  <a:txBody>
-                    <a:bodyPr/>
-                    <a:lstStyle/>
-                    <a:p>
-                      <a:pPr algn="ctr">
-                        <a:spcAft>
-                          <a:spcPts val="200"/>
-                        </a:spcAft>
-                      </a:pPr>
-                      <a:r>
-                        <a:rPr sz="850" b="0" i="0">
-                          <a:solidFill>
-                            <a:srgbClr val="202124"/>
-                          </a:solidFill>
-                          <a:latin typeface="Google Sans Flex"/>
-                          <a:ea typeface="Google Sans Flex"/>
-                          <a:cs typeface="Google Sans Flex"/>
-                          <a:sym typeface="Google Sans Flex"/>
-                        </a:rPr>
-                        <a:t>5/6 (5)</a:t>
-                      </a:r>
-                    </a:p>
-                  </a:txBody>
-                  <a:tcPr marL="45720" marR="45720" marT="18288" marB="18288" anchor="ctr">
-                    <a:solidFill>
-                      <a:srgbClr val="F1F3F4"/>
-                    </a:solidFill>
-                  </a:tcPr>
-                </a:tc>
-                <a:tc>
-                  <a:txBody>
-                    <a:bodyPr/>
-                    <a:lstStyle/>
-                    <a:p>
-                      <a:pPr algn="ctr">
-                        <a:spcAft>
-                          <a:spcPts val="200"/>
-                        </a:spcAft>
-                      </a:pPr>
-                      <a:r>
-                        <a:rPr sz="850" b="0" i="0">
-                          <a:solidFill>
-                            <a:srgbClr val="202124"/>
-                          </a:solidFill>
-                          <a:latin typeface="Google Sans Flex"/>
-                          <a:ea typeface="Google Sans Flex"/>
-                          <a:cs typeface="Google Sans Flex"/>
-                          <a:sym typeface="Google Sans Flex"/>
-                        </a:rPr>
-                        <a:t>10.3 s</a:t>
-                      </a:r>
-                    </a:p>
-                  </a:txBody>
-                  <a:tcPr marL="45720" marR="45720" marT="18288" marB="18288" anchor="ctr">
+                  <a:tcPr marL="64008" marR="64008" marT="27432" marB="27432" anchor="ctr">
                     <a:solidFill>
                       <a:srgbClr val="F1F3F4"/>
                     </a:solidFill>
                   </a:tcPr>
                 </a:tc>
               </a:tr>
-              <a:tr h="251460">
+              <a:tr h="487680">
                 <a:tc>
                   <a:txBody>
                     <a:bodyPr/>
@@ -12594,11 +12230,11 @@
                           <a:cs typeface="Google Sans Flex"/>
                           <a:sym typeface="Google Sans Flex"/>
                         </a:rPr>
-                        <a:t>gpt-5</a:t>
+                        <a:t>Tune event effects in the forecast (25 SKUs, 1,050 points)</a:t>
                       </a:r>
                     </a:p>
                   </a:txBody>
-                  <a:tcPr marL="45720" marR="45720" marT="18288" marB="18288" anchor="ctr">
+                  <a:tcPr marL="64008" marR="64008" marT="27432" marB="27432" anchor="ctr">
                     <a:solidFill>
                       <a:srgbClr val="FFFFFF"/>
                     </a:solidFill>
@@ -12609,7 +12245,37 @@
                     <a:bodyPr/>
                     <a:lstStyle/>
                     <a:p>
-                      <a:pPr algn="ctr">
+                      <a:pPr>
+                        <a:spcAft>
+                          <a:spcPts val="200"/>
+                        </a:spcAft>
+                      </a:pPr>
+                      <a:r>
+                        <a:rPr sz="850" b="1" i="0">
+                          <a:solidFill>
+                            <a:srgbClr val="1A73E8"/>
+                          </a:solidFill>
+                          <a:latin typeface="Google Sans Flex"/>
+                          <a:ea typeface="Google Sans Flex"/>
+                          <a:cs typeface="Google Sans Flex"/>
+                          <a:sym typeface="Google Sans Flex"/>
+                        </a:rPr>
+                        <a:t>WAPE 21.5%; P10–P90 coverage 76%</a:t>
+                      </a:r>
+                    </a:p>
+                  </a:txBody>
+                  <a:tcPr marL="64008" marR="64008" marT="27432" marB="27432" anchor="ctr">
+                    <a:solidFill>
+                      <a:srgbClr val="E8F0FE"/>
+                    </a:solidFill>
+                  </a:tcPr>
+                </a:tc>
+                <a:tc>
+                  <a:txBody>
+                    <a:bodyPr/>
+                    <a:lstStyle/>
+                    <a:p>
+                      <a:pPr>
                         <a:spcAft>
                           <a:spcPts val="200"/>
                         </a:spcAft>
@@ -12624,11 +12290,11 @@
                           <a:cs typeface="Google Sans Flex"/>
                           <a:sym typeface="Google Sans Flex"/>
                         </a:rPr>
-                        <a:t>0.983</a:t>
+                        <a:t>Statistical 23.0% / 75%; seasonal naive 24.1%</a:t>
                       </a:r>
                     </a:p>
                   </a:txBody>
-                  <a:tcPr marL="45720" marR="45720" marT="18288" marB="18288" anchor="ctr">
+                  <a:tcPr marL="64008" marR="64008" marT="27432" marB="27432" anchor="ctr">
                     <a:solidFill>
                       <a:srgbClr val="FFFFFF"/>
                     </a:solidFill>
@@ -12639,7 +12305,7 @@
                     <a:bodyPr/>
                     <a:lstStyle/>
                     <a:p>
-                      <a:pPr algn="ctr">
+                      <a:pPr>
                         <a:spcAft>
                           <a:spcPts val="200"/>
                         </a:spcAft>
@@ -12654,168 +12320,18 @@
                           <a:cs typeface="Google Sans Flex"/>
                           <a:sym typeface="Google Sans Flex"/>
                         </a:rPr>
-                        <a:t>97.5%</a:t>
+                        <a:t>75/75 outputs passed validation; else statistical</a:t>
                       </a:r>
                     </a:p>
                   </a:txBody>
-                  <a:tcPr marL="45720" marR="45720" marT="18288" marB="18288" anchor="ctr">
-                    <a:solidFill>
-                      <a:srgbClr val="FFFFFF"/>
-                    </a:solidFill>
-                  </a:tcPr>
-                </a:tc>
-                <a:tc>
-                  <a:txBody>
-                    <a:bodyPr/>
-                    <a:lstStyle/>
-                    <a:p>
-                      <a:pPr algn="ctr">
-                        <a:spcAft>
-                          <a:spcPts val="200"/>
-                        </a:spcAft>
-                      </a:pPr>
-                      <a:r>
-                        <a:rPr sz="850" b="0" i="0">
-                          <a:solidFill>
-                            <a:srgbClr val="202124"/>
-                          </a:solidFill>
-                          <a:latin typeface="Google Sans Flex"/>
-                          <a:ea typeface="Google Sans Flex"/>
-                          <a:cs typeface="Google Sans Flex"/>
-                          <a:sym typeface="Google Sans Flex"/>
-                        </a:rPr>
-                        <a:t>100%</a:t>
-                      </a:r>
-                    </a:p>
-                  </a:txBody>
-                  <a:tcPr marL="45720" marR="45720" marT="18288" marB="18288" anchor="ctr">
-                    <a:solidFill>
-                      <a:srgbClr val="FFFFFF"/>
-                    </a:solidFill>
-                  </a:tcPr>
-                </a:tc>
-                <a:tc>
-                  <a:txBody>
-                    <a:bodyPr/>
-                    <a:lstStyle/>
-                    <a:p>
-                      <a:pPr algn="ctr">
-                        <a:spcAft>
-                          <a:spcPts val="200"/>
-                        </a:spcAft>
-                      </a:pPr>
-                      <a:r>
-                        <a:rPr sz="850" b="0" i="0">
-                          <a:solidFill>
-                            <a:srgbClr val="202124"/>
-                          </a:solidFill>
-                          <a:latin typeface="Google Sans Flex"/>
-                          <a:ea typeface="Google Sans Flex"/>
-                          <a:cs typeface="Google Sans Flex"/>
-                          <a:sym typeface="Google Sans Flex"/>
-                        </a:rPr>
-                        <a:t>21.0% (23.2%)</a:t>
-                      </a:r>
-                    </a:p>
-                  </a:txBody>
-                  <a:tcPr marL="45720" marR="45720" marT="18288" marB="18288" anchor="ctr">
-                    <a:solidFill>
-                      <a:srgbClr val="FFFFFF"/>
-                    </a:solidFill>
-                  </a:tcPr>
-                </a:tc>
-                <a:tc>
-                  <a:txBody>
-                    <a:bodyPr/>
-                    <a:lstStyle/>
-                    <a:p>
-                      <a:pPr algn="ctr">
-                        <a:spcAft>
-                          <a:spcPts val="200"/>
-                        </a:spcAft>
-                      </a:pPr>
-                      <a:r>
-                        <a:rPr sz="850" b="0" i="0">
-                          <a:solidFill>
-                            <a:srgbClr val="202124"/>
-                          </a:solidFill>
-                          <a:latin typeface="Google Sans Flex"/>
-                          <a:ea typeface="Google Sans Flex"/>
-                          <a:cs typeface="Google Sans Flex"/>
-                          <a:sym typeface="Google Sans Flex"/>
-                        </a:rPr>
-                        <a:t>19.2% (23.9%)</a:t>
-                      </a:r>
-                    </a:p>
-                  </a:txBody>
-                  <a:tcPr marL="45720" marR="45720" marT="18288" marB="18288" anchor="ctr">
-                    <a:solidFill>
-                      <a:srgbClr val="FFFFFF"/>
-                    </a:solidFill>
-                  </a:tcPr>
-                </a:tc>
-                <a:tc>
-                  <a:txBody>
-                    <a:bodyPr/>
-                    <a:lstStyle/>
-                    <a:p>
-                      <a:pPr algn="ctr">
-                        <a:spcAft>
-                          <a:spcPts val="200"/>
-                        </a:spcAft>
-                      </a:pPr>
-                      <a:r>
-                        <a:rPr sz="850" b="0" i="0">
-                          <a:solidFill>
-                            <a:srgbClr val="202124"/>
-                          </a:solidFill>
-                          <a:latin typeface="Google Sans Flex"/>
-                          <a:ea typeface="Google Sans Flex"/>
-                          <a:cs typeface="Google Sans Flex"/>
-                          <a:sym typeface="Google Sans Flex"/>
-                        </a:rPr>
-                        <a:t>6/6 (6)</a:t>
-                      </a:r>
-                    </a:p>
-                  </a:txBody>
-                  <a:tcPr marL="45720" marR="45720" marT="18288" marB="18288" anchor="ctr">
-                    <a:solidFill>
-                      <a:srgbClr val="FFFFFF"/>
-                    </a:solidFill>
-                  </a:tcPr>
-                </a:tc>
-                <a:tc>
-                  <a:txBody>
-                    <a:bodyPr/>
-                    <a:lstStyle/>
-                    <a:p>
-                      <a:pPr algn="ctr">
-                        <a:spcAft>
-                          <a:spcPts val="200"/>
-                        </a:spcAft>
-                      </a:pPr>
-                      <a:r>
-                        <a:rPr sz="850" b="0" i="0">
-                          <a:solidFill>
-                            <a:srgbClr val="202124"/>
-                          </a:solidFill>
-                          <a:latin typeface="Google Sans Flex"/>
-                          <a:ea typeface="Google Sans Flex"/>
-                          <a:cs typeface="Google Sans Flex"/>
-                          <a:sym typeface="Google Sans Flex"/>
-                        </a:rPr>
-                        <a:t>30.4 s</a:t>
-                      </a:r>
-                    </a:p>
-                  </a:txBody>
-                  <a:tcPr marL="45720" marR="45720" marT="18288" marB="18288" anchor="ctr">
+                  <a:tcPr marL="64008" marR="64008" marT="27432" marB="27432" anchor="ctr">
                     <a:solidFill>
                       <a:srgbClr val="FFFFFF"/>
                     </a:solidFill>
                   </a:tcPr>
                 </a:tc>
               </a:tr>
-              <a:tr h="251460">
+              <a:tr h="487680">
                 <a:tc>
                   <a:txBody>
                     <a:bodyPr/>
@@ -12836,11 +12352,11 @@
                           <a:cs typeface="Google Sans Flex"/>
                           <a:sym typeface="Google Sans Flex"/>
                         </a:rPr>
-                        <a:t>gpt-5.1</a:t>
+                        <a:t>Events known only from text (16 series)</a:t>
                       </a:r>
                     </a:p>
                   </a:txBody>
-                  <a:tcPr marL="45720" marR="45720" marT="18288" marB="18288" anchor="ctr">
+                  <a:tcPr marL="64008" marR="64008" marT="27432" marB="27432" anchor="ctr">
                     <a:solidFill>
                       <a:srgbClr val="F1F3F4"/>
                     </a:solidFill>
@@ -12851,7 +12367,37 @@
                     <a:bodyPr/>
                     <a:lstStyle/>
                     <a:p>
-                      <a:pPr algn="ctr">
+                      <a:pPr>
+                        <a:spcAft>
+                          <a:spcPts val="200"/>
+                        </a:spcAft>
+                      </a:pPr>
+                      <a:r>
+                        <a:rPr sz="850" b="1" i="0">
+                          <a:solidFill>
+                            <a:srgbClr val="1A73E8"/>
+                          </a:solidFill>
+                          <a:latin typeface="Google Sans Flex"/>
+                          <a:ea typeface="Google Sans Flex"/>
+                          <a:cs typeface="Google Sans Flex"/>
+                          <a:sym typeface="Google Sans Flex"/>
+                        </a:rPr>
+                        <a:t>WAPE 22.2%</a:t>
+                      </a:r>
+                    </a:p>
+                  </a:txBody>
+                  <a:tcPr marL="64008" marR="64008" marT="27432" marB="27432" anchor="ctr">
+                    <a:solidFill>
+                      <a:srgbClr val="E8F0FE"/>
+                    </a:solidFill>
+                  </a:tcPr>
+                </a:tc>
+                <a:tc>
+                  <a:txBody>
+                    <a:bodyPr/>
+                    <a:lstStyle/>
+                    <a:p>
+                      <a:pPr>
                         <a:spcAft>
                           <a:spcPts val="200"/>
                         </a:spcAft>
@@ -12866,11 +12412,11 @@
                           <a:cs typeface="Google Sans Flex"/>
                           <a:sym typeface="Google Sans Flex"/>
                         </a:rPr>
-                        <a:t>0.983</a:t>
+                        <a:t>Statistical 23.9%</a:t>
                       </a:r>
                     </a:p>
                   </a:txBody>
-                  <a:tcPr marL="45720" marR="45720" marT="18288" marB="18288" anchor="ctr">
+                  <a:tcPr marL="64008" marR="64008" marT="27432" marB="27432" anchor="ctr">
                     <a:solidFill>
                       <a:srgbClr val="F1F3F4"/>
                     </a:solidFill>
@@ -12881,7 +12427,7 @@
                     <a:bodyPr/>
                     <a:lstStyle/>
                     <a:p>
-                      <a:pPr algn="ctr">
+                      <a:pPr>
                         <a:spcAft>
                           <a:spcPts val="200"/>
                         </a:spcAft>
@@ -12896,168 +12442,18 @@
                           <a:cs typeface="Google Sans Flex"/>
                           <a:sym typeface="Google Sans Flex"/>
                         </a:rPr>
-                        <a:t>97.5%</a:t>
+                        <a:t>Same validators</a:t>
                       </a:r>
                     </a:p>
                   </a:txBody>
-                  <a:tcPr marL="45720" marR="45720" marT="18288" marB="18288" anchor="ctr">
-                    <a:solidFill>
-                      <a:srgbClr val="F1F3F4"/>
-                    </a:solidFill>
-                  </a:tcPr>
-                </a:tc>
-                <a:tc>
-                  <a:txBody>
-                    <a:bodyPr/>
-                    <a:lstStyle/>
-                    <a:p>
-                      <a:pPr algn="ctr">
-                        <a:spcAft>
-                          <a:spcPts val="200"/>
-                        </a:spcAft>
-                      </a:pPr>
-                      <a:r>
-                        <a:rPr sz="850" b="0" i="0">
-                          <a:solidFill>
-                            <a:srgbClr val="202124"/>
-                          </a:solidFill>
-                          <a:latin typeface="Google Sans Flex"/>
-                          <a:ea typeface="Google Sans Flex"/>
-                          <a:cs typeface="Google Sans Flex"/>
-                          <a:sym typeface="Google Sans Flex"/>
-                        </a:rPr>
-                        <a:t>100%</a:t>
-                      </a:r>
-                    </a:p>
-                  </a:txBody>
-                  <a:tcPr marL="45720" marR="45720" marT="18288" marB="18288" anchor="ctr">
-                    <a:solidFill>
-                      <a:srgbClr val="F1F3F4"/>
-                    </a:solidFill>
-                  </a:tcPr>
-                </a:tc>
-                <a:tc>
-                  <a:txBody>
-                    <a:bodyPr/>
-                    <a:lstStyle/>
-                    <a:p>
-                      <a:pPr algn="ctr">
-                        <a:spcAft>
-                          <a:spcPts val="200"/>
-                        </a:spcAft>
-                      </a:pPr>
-                      <a:r>
-                        <a:rPr sz="850" b="0" i="0">
-                          <a:solidFill>
-                            <a:srgbClr val="202124"/>
-                          </a:solidFill>
-                          <a:latin typeface="Google Sans Flex"/>
-                          <a:ea typeface="Google Sans Flex"/>
-                          <a:cs typeface="Google Sans Flex"/>
-                          <a:sym typeface="Google Sans Flex"/>
-                        </a:rPr>
-                        <a:t>20.9% (23.0%)</a:t>
-                      </a:r>
-                    </a:p>
-                  </a:txBody>
-                  <a:tcPr marL="45720" marR="45720" marT="18288" marB="18288" anchor="ctr">
-                    <a:solidFill>
-                      <a:srgbClr val="F1F3F4"/>
-                    </a:solidFill>
-                  </a:tcPr>
-                </a:tc>
-                <a:tc>
-                  <a:txBody>
-                    <a:bodyPr/>
-                    <a:lstStyle/>
-                    <a:p>
-                      <a:pPr algn="ctr">
-                        <a:spcAft>
-                          <a:spcPts val="200"/>
-                        </a:spcAft>
-                      </a:pPr>
-                      <a:r>
-                        <a:rPr sz="850" b="0" i="0">
-                          <a:solidFill>
-                            <a:srgbClr val="202124"/>
-                          </a:solidFill>
-                          <a:latin typeface="Google Sans Flex"/>
-                          <a:ea typeface="Google Sans Flex"/>
-                          <a:cs typeface="Google Sans Flex"/>
-                          <a:sym typeface="Google Sans Flex"/>
-                        </a:rPr>
-                        <a:t>19.6% (23.9%)</a:t>
-                      </a:r>
-                    </a:p>
-                  </a:txBody>
-                  <a:tcPr marL="45720" marR="45720" marT="18288" marB="18288" anchor="ctr">
-                    <a:solidFill>
-                      <a:srgbClr val="F1F3F4"/>
-                    </a:solidFill>
-                  </a:tcPr>
-                </a:tc>
-                <a:tc>
-                  <a:txBody>
-                    <a:bodyPr/>
-                    <a:lstStyle/>
-                    <a:p>
-                      <a:pPr algn="ctr">
-                        <a:spcAft>
-                          <a:spcPts val="200"/>
-                        </a:spcAft>
-                      </a:pPr>
-                      <a:r>
-                        <a:rPr sz="850" b="0" i="0">
-                          <a:solidFill>
-                            <a:srgbClr val="202124"/>
-                          </a:solidFill>
-                          <a:latin typeface="Google Sans Flex"/>
-                          <a:ea typeface="Google Sans Flex"/>
-                          <a:cs typeface="Google Sans Flex"/>
-                          <a:sym typeface="Google Sans Flex"/>
-                        </a:rPr>
-                        <a:t>6/6 (6)</a:t>
-                      </a:r>
-                    </a:p>
-                  </a:txBody>
-                  <a:tcPr marL="45720" marR="45720" marT="18288" marB="18288" anchor="ctr">
-                    <a:solidFill>
-                      <a:srgbClr val="F1F3F4"/>
-                    </a:solidFill>
-                  </a:tcPr>
-                </a:tc>
-                <a:tc>
-                  <a:txBody>
-                    <a:bodyPr/>
-                    <a:lstStyle/>
-                    <a:p>
-                      <a:pPr algn="ctr">
-                        <a:spcAft>
-                          <a:spcPts val="200"/>
-                        </a:spcAft>
-                      </a:pPr>
-                      <a:r>
-                        <a:rPr sz="850" b="0" i="0">
-                          <a:solidFill>
-                            <a:srgbClr val="202124"/>
-                          </a:solidFill>
-                          <a:latin typeface="Google Sans Flex"/>
-                          <a:ea typeface="Google Sans Flex"/>
-                          <a:cs typeface="Google Sans Flex"/>
-                          <a:sym typeface="Google Sans Flex"/>
-                        </a:rPr>
-                        <a:t>11.9 s</a:t>
-                      </a:r>
-                    </a:p>
-                  </a:txBody>
-                  <a:tcPr marL="45720" marR="45720" marT="18288" marB="18288" anchor="ctr">
+                  <a:tcPr marL="64008" marR="64008" marT="27432" marB="27432" anchor="ctr">
                     <a:solidFill>
                       <a:srgbClr val="F1F3F4"/>
                     </a:solidFill>
                   </a:tcPr>
                 </a:tc>
               </a:tr>
-              <a:tr h="251460">
+              <a:tr h="487680">
                 <a:tc>
                   <a:txBody>
                     <a:bodyPr/>
@@ -13078,11 +12474,11 @@
                           <a:cs typeface="Google Sans Flex"/>
                           <a:sym typeface="Google Sans Flex"/>
                         </a:rPr>
-                        <a:t>claudesonnet4.6</a:t>
+                        <a:t>Planning assistant with tool calls (6 questions)</a:t>
                       </a:r>
                     </a:p>
                   </a:txBody>
-                  <a:tcPr marL="45720" marR="45720" marT="18288" marB="18288" anchor="ctr">
+                  <a:tcPr marL="64008" marR="64008" marT="27432" marB="27432" anchor="ctr">
                     <a:solidFill>
                       <a:srgbClr val="FFFFFF"/>
                     </a:solidFill>
@@ -13093,7 +12489,37 @@
                     <a:bodyPr/>
                     <a:lstStyle/>
                     <a:p>
-                      <a:pPr algn="ctr">
+                      <a:pPr>
+                        <a:spcAft>
+                          <a:spcPts val="200"/>
+                        </a:spcAft>
+                      </a:pPr>
+                      <a:r>
+                        <a:rPr sz="850" b="1" i="0">
+                          <a:solidFill>
+                            <a:srgbClr val="1A73E8"/>
+                          </a:solidFill>
+                          <a:latin typeface="Google Sans Flex"/>
+                          <a:ea typeface="Google Sans Flex"/>
+                          <a:cs typeface="Google Sans Flex"/>
+                          <a:sym typeface="Google Sans Flex"/>
+                        </a:rPr>
+                        <a:t>6/6 answers number-checked (5 first try); median 4.0 s</a:t>
+                      </a:r>
+                    </a:p>
+                  </a:txBody>
+                  <a:tcPr marL="64008" marR="64008" marT="27432" marB="27432" anchor="ctr">
+                    <a:solidFill>
+                      <a:srgbClr val="E8F0FE"/>
+                    </a:solidFill>
+                  </a:tcPr>
+                </a:tc>
+                <a:tc>
+                  <a:txBody>
+                    <a:bodyPr/>
+                    <a:lstStyle/>
+                    <a:p>
+                      <a:pPr>
                         <a:spcAft>
                           <a:spcPts val="200"/>
                         </a:spcAft>
@@ -13108,11 +12534,11 @@
                           <a:cs typeface="Google Sans Flex"/>
                           <a:sym typeface="Google Sans Flex"/>
                         </a:rPr>
-                        <a:t>0.983</a:t>
+                        <a:t>Labelled summary of the tool results</a:t>
                       </a:r>
                     </a:p>
                   </a:txBody>
-                  <a:tcPr marL="45720" marR="45720" marT="18288" marB="18288" anchor="ctr">
+                  <a:tcPr marL="64008" marR="64008" marT="27432" marB="27432" anchor="ctr">
                     <a:solidFill>
                       <a:srgbClr val="FFFFFF"/>
                     </a:solidFill>
@@ -13123,7 +12549,7 @@
                     <a:bodyPr/>
                     <a:lstStyle/>
                     <a:p>
-                      <a:pPr algn="ctr">
+                      <a:pPr>
                         <a:spcAft>
                           <a:spcPts val="200"/>
                         </a:spcAft>
@@ -13138,1613 +12564,11 @@
                           <a:cs typeface="Google Sans Flex"/>
                           <a:sym typeface="Google Sans Flex"/>
                         </a:rPr>
-                        <a:t>97.5%</a:t>
+                        <a:t>Every number must come from a tool result</a:t>
                       </a:r>
                     </a:p>
                   </a:txBody>
-                  <a:tcPr marL="45720" marR="45720" marT="18288" marB="18288" anchor="ctr">
-                    <a:solidFill>
-                      <a:srgbClr val="FFFFFF"/>
-                    </a:solidFill>
-                  </a:tcPr>
-                </a:tc>
-                <a:tc>
-                  <a:txBody>
-                    <a:bodyPr/>
-                    <a:lstStyle/>
-                    <a:p>
-                      <a:pPr algn="ctr">
-                        <a:spcAft>
-                          <a:spcPts val="200"/>
-                        </a:spcAft>
-                      </a:pPr>
-                      <a:r>
-                        <a:rPr sz="850" b="0" i="0">
-                          <a:solidFill>
-                            <a:srgbClr val="202124"/>
-                          </a:solidFill>
-                          <a:latin typeface="Google Sans Flex"/>
-                          <a:ea typeface="Google Sans Flex"/>
-                          <a:cs typeface="Google Sans Flex"/>
-                          <a:sym typeface="Google Sans Flex"/>
-                        </a:rPr>
-                        <a:t>100%</a:t>
-                      </a:r>
-                    </a:p>
-                  </a:txBody>
-                  <a:tcPr marL="45720" marR="45720" marT="18288" marB="18288" anchor="ctr">
-                    <a:solidFill>
-                      <a:srgbClr val="FFFFFF"/>
-                    </a:solidFill>
-                  </a:tcPr>
-                </a:tc>
-                <a:tc>
-                  <a:txBody>
-                    <a:bodyPr/>
-                    <a:lstStyle/>
-                    <a:p>
-                      <a:pPr algn="ctr">
-                        <a:spcAft>
-                          <a:spcPts val="200"/>
-                        </a:spcAft>
-                      </a:pPr>
-                      <a:r>
-                        <a:rPr sz="850" b="0" i="0">
-                          <a:solidFill>
-                            <a:srgbClr val="202124"/>
-                          </a:solidFill>
-                          <a:latin typeface="Google Sans Flex"/>
-                          <a:ea typeface="Google Sans Flex"/>
-                          <a:cs typeface="Google Sans Flex"/>
-                          <a:sym typeface="Google Sans Flex"/>
-                        </a:rPr>
-                        <a:t>21.6% (23.0%)</a:t>
-                      </a:r>
-                    </a:p>
-                  </a:txBody>
-                  <a:tcPr marL="45720" marR="45720" marT="18288" marB="18288" anchor="ctr">
-                    <a:solidFill>
-                      <a:srgbClr val="FFFFFF"/>
-                    </a:solidFill>
-                  </a:tcPr>
-                </a:tc>
-                <a:tc>
-                  <a:txBody>
-                    <a:bodyPr/>
-                    <a:lstStyle/>
-                    <a:p>
-                      <a:pPr algn="ctr">
-                        <a:spcAft>
-                          <a:spcPts val="200"/>
-                        </a:spcAft>
-                      </a:pPr>
-                      <a:r>
-                        <a:rPr sz="850" b="0" i="0">
-                          <a:solidFill>
-                            <a:srgbClr val="202124"/>
-                          </a:solidFill>
-                          <a:latin typeface="Google Sans Flex"/>
-                          <a:ea typeface="Google Sans Flex"/>
-                          <a:cs typeface="Google Sans Flex"/>
-                          <a:sym typeface="Google Sans Flex"/>
-                        </a:rPr>
-                        <a:t>20.1% (23.9%)</a:t>
-                      </a:r>
-                    </a:p>
-                  </a:txBody>
-                  <a:tcPr marL="45720" marR="45720" marT="18288" marB="18288" anchor="ctr">
-                    <a:solidFill>
-                      <a:srgbClr val="FFFFFF"/>
-                    </a:solidFill>
-                  </a:tcPr>
-                </a:tc>
-                <a:tc>
-                  <a:txBody>
-                    <a:bodyPr/>
-                    <a:lstStyle/>
-                    <a:p>
-                      <a:pPr algn="ctr">
-                        <a:spcAft>
-                          <a:spcPts val="200"/>
-                        </a:spcAft>
-                      </a:pPr>
-                      <a:r>
-                        <a:rPr sz="850" b="0" i="0">
-                          <a:solidFill>
-                            <a:srgbClr val="202124"/>
-                          </a:solidFill>
-                          <a:latin typeface="Google Sans Flex"/>
-                          <a:ea typeface="Google Sans Flex"/>
-                          <a:cs typeface="Google Sans Flex"/>
-                          <a:sym typeface="Google Sans Flex"/>
-                        </a:rPr>
-                        <a:t>6/6 (5)</a:t>
-                      </a:r>
-                    </a:p>
-                  </a:txBody>
-                  <a:tcPr marL="45720" marR="45720" marT="18288" marB="18288" anchor="ctr">
-                    <a:solidFill>
-                      <a:srgbClr val="FFFFFF"/>
-                    </a:solidFill>
-                  </a:tcPr>
-                </a:tc>
-                <a:tc>
-                  <a:txBody>
-                    <a:bodyPr/>
-                    <a:lstStyle/>
-                    <a:p>
-                      <a:pPr algn="ctr">
-                        <a:spcAft>
-                          <a:spcPts val="200"/>
-                        </a:spcAft>
-                      </a:pPr>
-                      <a:r>
-                        <a:rPr sz="850" b="0" i="0">
-                          <a:solidFill>
-                            <a:srgbClr val="202124"/>
-                          </a:solidFill>
-                          <a:latin typeface="Google Sans Flex"/>
-                          <a:ea typeface="Google Sans Flex"/>
-                          <a:cs typeface="Google Sans Flex"/>
-                          <a:sym typeface="Google Sans Flex"/>
-                        </a:rPr>
-                        <a:t>10.3 s</a:t>
-                      </a:r>
-                    </a:p>
-                  </a:txBody>
-                  <a:tcPr marL="45720" marR="45720" marT="18288" marB="18288" anchor="ctr">
-                    <a:solidFill>
-                      <a:srgbClr val="FFFFFF"/>
-                    </a:solidFill>
-                  </a:tcPr>
-                </a:tc>
-              </a:tr>
-              <a:tr h="251460">
-                <a:tc>
-                  <a:txBody>
-                    <a:bodyPr/>
-                    <a:lstStyle/>
-                    <a:p>
-                      <a:pPr>
-                        <a:spcAft>
-                          <a:spcPts val="200"/>
-                        </a:spcAft>
-                      </a:pPr>
-                      <a:r>
-                        <a:rPr sz="850" b="1" i="0">
-                          <a:solidFill>
-                            <a:srgbClr val="202124"/>
-                          </a:solidFill>
-                          <a:latin typeface="Google Sans Flex"/>
-                          <a:ea typeface="Google Sans Flex"/>
-                          <a:cs typeface="Google Sans Flex"/>
-                          <a:sym typeface="Google Sans Flex"/>
-                        </a:rPr>
-                        <a:t>qwen3.6-27b</a:t>
-                      </a:r>
-                    </a:p>
-                  </a:txBody>
-                  <a:tcPr marL="45720" marR="45720" marT="18288" marB="18288" anchor="ctr">
-                    <a:solidFill>
-                      <a:srgbClr val="F1F3F4"/>
-                    </a:solidFill>
-                  </a:tcPr>
-                </a:tc>
-                <a:tc>
-                  <a:txBody>
-                    <a:bodyPr/>
-                    <a:lstStyle/>
-                    <a:p>
-                      <a:pPr algn="ctr">
-                        <a:spcAft>
-                          <a:spcPts val="200"/>
-                        </a:spcAft>
-                      </a:pPr>
-                      <a:r>
-                        <a:rPr sz="850" b="0" i="0">
-                          <a:solidFill>
-                            <a:srgbClr val="202124"/>
-                          </a:solidFill>
-                          <a:latin typeface="Google Sans Flex"/>
-                          <a:ea typeface="Google Sans Flex"/>
-                          <a:cs typeface="Google Sans Flex"/>
-                          <a:sym typeface="Google Sans Flex"/>
-                        </a:rPr>
-                        <a:t>0.966</a:t>
-                      </a:r>
-                    </a:p>
-                  </a:txBody>
-                  <a:tcPr marL="45720" marR="45720" marT="18288" marB="18288" anchor="ctr">
-                    <a:solidFill>
-                      <a:srgbClr val="F1F3F4"/>
-                    </a:solidFill>
-                  </a:tcPr>
-                </a:tc>
-                <a:tc>
-                  <a:txBody>
-                    <a:bodyPr/>
-                    <a:lstStyle/>
-                    <a:p>
-                      <a:pPr algn="ctr">
-                        <a:spcAft>
-                          <a:spcPts val="200"/>
-                        </a:spcAft>
-                      </a:pPr>
-                      <a:r>
-                        <a:rPr sz="850" b="0" i="0">
-                          <a:solidFill>
-                            <a:srgbClr val="202124"/>
-                          </a:solidFill>
-                          <a:latin typeface="Google Sans Flex"/>
-                          <a:ea typeface="Google Sans Flex"/>
-                          <a:cs typeface="Google Sans Flex"/>
-                          <a:sym typeface="Google Sans Flex"/>
-                        </a:rPr>
-                        <a:t>95.0%</a:t>
-                      </a:r>
-                    </a:p>
-                  </a:txBody>
-                  <a:tcPr marL="45720" marR="45720" marT="18288" marB="18288" anchor="ctr">
-                    <a:solidFill>
-                      <a:srgbClr val="F1F3F4"/>
-                    </a:solidFill>
-                  </a:tcPr>
-                </a:tc>
-                <a:tc>
-                  <a:txBody>
-                    <a:bodyPr/>
-                    <a:lstStyle/>
-                    <a:p>
-                      <a:pPr algn="ctr">
-                        <a:spcAft>
-                          <a:spcPts val="200"/>
-                        </a:spcAft>
-                      </a:pPr>
-                      <a:r>
-                        <a:rPr sz="850" b="0" i="0">
-                          <a:solidFill>
-                            <a:srgbClr val="202124"/>
-                          </a:solidFill>
-                          <a:latin typeface="Google Sans Flex"/>
-                          <a:ea typeface="Google Sans Flex"/>
-                          <a:cs typeface="Google Sans Flex"/>
-                          <a:sym typeface="Google Sans Flex"/>
-                        </a:rPr>
-                        <a:t>100%</a:t>
-                      </a:r>
-                    </a:p>
-                  </a:txBody>
-                  <a:tcPr marL="45720" marR="45720" marT="18288" marB="18288" anchor="ctr">
-                    <a:solidFill>
-                      <a:srgbClr val="F1F3F4"/>
-                    </a:solidFill>
-                  </a:tcPr>
-                </a:tc>
-                <a:tc>
-                  <a:txBody>
-                    <a:bodyPr/>
-                    <a:lstStyle/>
-                    <a:p>
-                      <a:pPr algn="ctr">
-                        <a:spcAft>
-                          <a:spcPts val="200"/>
-                        </a:spcAft>
-                      </a:pPr>
-                      <a:r>
-                        <a:rPr sz="850" b="0" i="0">
-                          <a:solidFill>
-                            <a:srgbClr val="202124"/>
-                          </a:solidFill>
-                          <a:latin typeface="Google Sans Flex"/>
-                          <a:ea typeface="Google Sans Flex"/>
-                          <a:cs typeface="Google Sans Flex"/>
-                          <a:sym typeface="Google Sans Flex"/>
-                        </a:rPr>
-                        <a:t>21.0% (23.0%)</a:t>
-                      </a:r>
-                    </a:p>
-                  </a:txBody>
-                  <a:tcPr marL="45720" marR="45720" marT="18288" marB="18288" anchor="ctr">
-                    <a:solidFill>
-                      <a:srgbClr val="F1F3F4"/>
-                    </a:solidFill>
-                  </a:tcPr>
-                </a:tc>
-                <a:tc>
-                  <a:txBody>
-                    <a:bodyPr/>
-                    <a:lstStyle/>
-                    <a:p>
-                      <a:pPr algn="ctr">
-                        <a:spcAft>
-                          <a:spcPts val="200"/>
-                        </a:spcAft>
-                      </a:pPr>
-                      <a:r>
-                        <a:rPr sz="850" b="0" i="0">
-                          <a:solidFill>
-                            <a:srgbClr val="202124"/>
-                          </a:solidFill>
-                          <a:latin typeface="Google Sans Flex"/>
-                          <a:ea typeface="Google Sans Flex"/>
-                          <a:cs typeface="Google Sans Flex"/>
-                          <a:sym typeface="Google Sans Flex"/>
-                        </a:rPr>
-                        <a:t>20.2% (23.9%)</a:t>
-                      </a:r>
-                    </a:p>
-                  </a:txBody>
-                  <a:tcPr marL="45720" marR="45720" marT="18288" marB="18288" anchor="ctr">
-                    <a:solidFill>
-                      <a:srgbClr val="F1F3F4"/>
-                    </a:solidFill>
-                  </a:tcPr>
-                </a:tc>
-                <a:tc>
-                  <a:txBody>
-                    <a:bodyPr/>
-                    <a:lstStyle/>
-                    <a:p>
-                      <a:pPr algn="ctr">
-                        <a:spcAft>
-                          <a:spcPts val="200"/>
-                        </a:spcAft>
-                      </a:pPr>
-                      <a:r>
-                        <a:rPr sz="850" b="0" i="0">
-                          <a:solidFill>
-                            <a:srgbClr val="202124"/>
-                          </a:solidFill>
-                          <a:latin typeface="Google Sans Flex"/>
-                          <a:ea typeface="Google Sans Flex"/>
-                          <a:cs typeface="Google Sans Flex"/>
-                          <a:sym typeface="Google Sans Flex"/>
-                        </a:rPr>
-                        <a:t>6/6 (5)</a:t>
-                      </a:r>
-                    </a:p>
-                  </a:txBody>
-                  <a:tcPr marL="45720" marR="45720" marT="18288" marB="18288" anchor="ctr">
-                    <a:solidFill>
-                      <a:srgbClr val="F1F3F4"/>
-                    </a:solidFill>
-                  </a:tcPr>
-                </a:tc>
-                <a:tc>
-                  <a:txBody>
-                    <a:bodyPr/>
-                    <a:lstStyle/>
-                    <a:p>
-                      <a:pPr algn="ctr">
-                        <a:spcAft>
-                          <a:spcPts val="200"/>
-                        </a:spcAft>
-                      </a:pPr>
-                      <a:r>
-                        <a:rPr sz="850" b="0" i="0">
-                          <a:solidFill>
-                            <a:srgbClr val="202124"/>
-                          </a:solidFill>
-                          <a:latin typeface="Google Sans Flex"/>
-                          <a:ea typeface="Google Sans Flex"/>
-                          <a:cs typeface="Google Sans Flex"/>
-                          <a:sym typeface="Google Sans Flex"/>
-                        </a:rPr>
-                        <a:t>8.8 s</a:t>
-                      </a:r>
-                    </a:p>
-                  </a:txBody>
-                  <a:tcPr marL="45720" marR="45720" marT="18288" marB="18288" anchor="ctr">
-                    <a:solidFill>
-                      <a:srgbClr val="F1F3F4"/>
-                    </a:solidFill>
-                  </a:tcPr>
-                </a:tc>
-              </a:tr>
-              <a:tr h="251460">
-                <a:tc>
-                  <a:txBody>
-                    <a:bodyPr/>
-                    <a:lstStyle/>
-                    <a:p>
-                      <a:pPr>
-                        <a:spcAft>
-                          <a:spcPts val="200"/>
-                        </a:spcAft>
-                      </a:pPr>
-                      <a:r>
-                        <a:rPr sz="850" b="1" i="0">
-                          <a:solidFill>
-                            <a:srgbClr val="202124"/>
-                          </a:solidFill>
-                          <a:latin typeface="Google Sans Flex"/>
-                          <a:ea typeface="Google Sans Flex"/>
-                          <a:cs typeface="Google Sans Flex"/>
-                          <a:sym typeface="Google Sans Flex"/>
-                        </a:rPr>
-                        <a:t>claudeopus5</a:t>
-                      </a:r>
-                    </a:p>
-                  </a:txBody>
-                  <a:tcPr marL="45720" marR="45720" marT="18288" marB="18288" anchor="ctr">
-                    <a:solidFill>
-                      <a:srgbClr val="FFFFFF"/>
-                    </a:solidFill>
-                  </a:tcPr>
-                </a:tc>
-                <a:tc>
-                  <a:txBody>
-                    <a:bodyPr/>
-                    <a:lstStyle/>
-                    <a:p>
-                      <a:pPr algn="ctr">
-                        <a:spcAft>
-                          <a:spcPts val="200"/>
-                        </a:spcAft>
-                      </a:pPr>
-                      <a:r>
-                        <a:rPr sz="850" b="0" i="0">
-                          <a:solidFill>
-                            <a:srgbClr val="202124"/>
-                          </a:solidFill>
-                          <a:latin typeface="Google Sans Flex"/>
-                          <a:ea typeface="Google Sans Flex"/>
-                          <a:cs typeface="Google Sans Flex"/>
-                          <a:sym typeface="Google Sans Flex"/>
-                        </a:rPr>
-                        <a:t>0.983</a:t>
-                      </a:r>
-                    </a:p>
-                  </a:txBody>
-                  <a:tcPr marL="45720" marR="45720" marT="18288" marB="18288" anchor="ctr">
-                    <a:solidFill>
-                      <a:srgbClr val="FFFFFF"/>
-                    </a:solidFill>
-                  </a:tcPr>
-                </a:tc>
-                <a:tc>
-                  <a:txBody>
-                    <a:bodyPr/>
-                    <a:lstStyle/>
-                    <a:p>
-                      <a:pPr algn="ctr">
-                        <a:spcAft>
-                          <a:spcPts val="200"/>
-                        </a:spcAft>
-                      </a:pPr>
-                      <a:r>
-                        <a:rPr sz="850" b="0" i="0">
-                          <a:solidFill>
-                            <a:srgbClr val="202124"/>
-                          </a:solidFill>
-                          <a:latin typeface="Google Sans Flex"/>
-                          <a:ea typeface="Google Sans Flex"/>
-                          <a:cs typeface="Google Sans Flex"/>
-                          <a:sym typeface="Google Sans Flex"/>
-                        </a:rPr>
-                        <a:t>97.5%</a:t>
-                      </a:r>
-                    </a:p>
-                  </a:txBody>
-                  <a:tcPr marL="45720" marR="45720" marT="18288" marB="18288" anchor="ctr">
-                    <a:solidFill>
-                      <a:srgbClr val="FFFFFF"/>
-                    </a:solidFill>
-                  </a:tcPr>
-                </a:tc>
-                <a:tc>
-                  <a:txBody>
-                    <a:bodyPr/>
-                    <a:lstStyle/>
-                    <a:p>
-                      <a:pPr algn="ctr">
-                        <a:spcAft>
-                          <a:spcPts val="200"/>
-                        </a:spcAft>
-                      </a:pPr>
-                      <a:r>
-                        <a:rPr sz="850" b="0" i="0">
-                          <a:solidFill>
-                            <a:srgbClr val="202124"/>
-                          </a:solidFill>
-                          <a:latin typeface="Google Sans Flex"/>
-                          <a:ea typeface="Google Sans Flex"/>
-                          <a:cs typeface="Google Sans Flex"/>
-                          <a:sym typeface="Google Sans Flex"/>
-                        </a:rPr>
-                        <a:t>100%</a:t>
-                      </a:r>
-                    </a:p>
-                  </a:txBody>
-                  <a:tcPr marL="45720" marR="45720" marT="18288" marB="18288" anchor="ctr">
-                    <a:solidFill>
-                      <a:srgbClr val="FFFFFF"/>
-                    </a:solidFill>
-                  </a:tcPr>
-                </a:tc>
-                <a:tc>
-                  <a:txBody>
-                    <a:bodyPr/>
-                    <a:lstStyle/>
-                    <a:p>
-                      <a:pPr algn="ctr">
-                        <a:spcAft>
-                          <a:spcPts val="200"/>
-                        </a:spcAft>
-                      </a:pPr>
-                      <a:r>
-                        <a:rPr sz="850" b="0" i="0">
-                          <a:solidFill>
-                            <a:srgbClr val="202124"/>
-                          </a:solidFill>
-                          <a:latin typeface="Google Sans Flex"/>
-                          <a:ea typeface="Google Sans Flex"/>
-                          <a:cs typeface="Google Sans Flex"/>
-                          <a:sym typeface="Google Sans Flex"/>
-                        </a:rPr>
-                        <a:t>21.3% (23.0%)</a:t>
-                      </a:r>
-                    </a:p>
-                  </a:txBody>
-                  <a:tcPr marL="45720" marR="45720" marT="18288" marB="18288" anchor="ctr">
-                    <a:solidFill>
-                      <a:srgbClr val="FFFFFF"/>
-                    </a:solidFill>
-                  </a:tcPr>
-                </a:tc>
-                <a:tc>
-                  <a:txBody>
-                    <a:bodyPr/>
-                    <a:lstStyle/>
-                    <a:p>
-                      <a:pPr algn="ctr">
-                        <a:spcAft>
-                          <a:spcPts val="200"/>
-                        </a:spcAft>
-                      </a:pPr>
-                      <a:r>
-                        <a:rPr sz="850" b="0" i="0">
-                          <a:solidFill>
-                            <a:srgbClr val="202124"/>
-                          </a:solidFill>
-                          <a:latin typeface="Google Sans Flex"/>
-                          <a:ea typeface="Google Sans Flex"/>
-                          <a:cs typeface="Google Sans Flex"/>
-                          <a:sym typeface="Google Sans Flex"/>
-                        </a:rPr>
-                        <a:t>20.2% (23.9%)</a:t>
-                      </a:r>
-                    </a:p>
-                  </a:txBody>
-                  <a:tcPr marL="45720" marR="45720" marT="18288" marB="18288" anchor="ctr">
-                    <a:solidFill>
-                      <a:srgbClr val="FFFFFF"/>
-                    </a:solidFill>
-                  </a:tcPr>
-                </a:tc>
-                <a:tc>
-                  <a:txBody>
-                    <a:bodyPr/>
-                    <a:lstStyle/>
-                    <a:p>
-                      <a:pPr algn="ctr">
-                        <a:spcAft>
-                          <a:spcPts val="200"/>
-                        </a:spcAft>
-                      </a:pPr>
-                      <a:r>
-                        <a:rPr sz="850" b="0" i="0">
-                          <a:solidFill>
-                            <a:srgbClr val="202124"/>
-                          </a:solidFill>
-                          <a:latin typeface="Google Sans Flex"/>
-                          <a:ea typeface="Google Sans Flex"/>
-                          <a:cs typeface="Google Sans Flex"/>
-                          <a:sym typeface="Google Sans Flex"/>
-                        </a:rPr>
-                        <a:t>6/6 (4)</a:t>
-                      </a:r>
-                    </a:p>
-                  </a:txBody>
-                  <a:tcPr marL="45720" marR="45720" marT="18288" marB="18288" anchor="ctr">
-                    <a:solidFill>
-                      <a:srgbClr val="FFFFFF"/>
-                    </a:solidFill>
-                  </a:tcPr>
-                </a:tc>
-                <a:tc>
-                  <a:txBody>
-                    <a:bodyPr/>
-                    <a:lstStyle/>
-                    <a:p>
-                      <a:pPr algn="ctr">
-                        <a:spcAft>
-                          <a:spcPts val="200"/>
-                        </a:spcAft>
-                      </a:pPr>
-                      <a:r>
-                        <a:rPr sz="850" b="0" i="0">
-                          <a:solidFill>
-                            <a:srgbClr val="202124"/>
-                          </a:solidFill>
-                          <a:latin typeface="Google Sans Flex"/>
-                          <a:ea typeface="Google Sans Flex"/>
-                          <a:cs typeface="Google Sans Flex"/>
-                          <a:sym typeface="Google Sans Flex"/>
-                        </a:rPr>
-                        <a:t>12.3 s</a:t>
-                      </a:r>
-                    </a:p>
-                  </a:txBody>
-                  <a:tcPr marL="45720" marR="45720" marT="18288" marB="18288" anchor="ctr">
-                    <a:solidFill>
-                      <a:srgbClr val="FFFFFF"/>
-                    </a:solidFill>
-                  </a:tcPr>
-                </a:tc>
-              </a:tr>
-              <a:tr h="251460">
-                <a:tc>
-                  <a:txBody>
-                    <a:bodyPr/>
-                    <a:lstStyle/>
-                    <a:p>
-                      <a:pPr>
-                        <a:spcAft>
-                          <a:spcPts val="200"/>
-                        </a:spcAft>
-                      </a:pPr>
-                      <a:r>
-                        <a:rPr sz="850" b="1" i="0">
-                          <a:solidFill>
-                            <a:srgbClr val="202124"/>
-                          </a:solidFill>
-                          <a:latin typeface="Google Sans Flex"/>
-                          <a:ea typeface="Google Sans Flex"/>
-                          <a:cs typeface="Google Sans Flex"/>
-                          <a:sym typeface="Google Sans Flex"/>
-                        </a:rPr>
-                        <a:t>gpt-5.6-luna</a:t>
-                      </a:r>
-                    </a:p>
-                  </a:txBody>
-                  <a:tcPr marL="45720" marR="45720" marT="18288" marB="18288" anchor="ctr">
-                    <a:solidFill>
-                      <a:srgbClr val="F1F3F4"/>
-                    </a:solidFill>
-                  </a:tcPr>
-                </a:tc>
-                <a:tc>
-                  <a:txBody>
-                    <a:bodyPr/>
-                    <a:lstStyle/>
-                    <a:p>
-                      <a:pPr algn="ctr">
-                        <a:spcAft>
-                          <a:spcPts val="200"/>
-                        </a:spcAft>
-                      </a:pPr>
-                      <a:r>
-                        <a:rPr sz="850" b="0" i="0">
-                          <a:solidFill>
-                            <a:srgbClr val="202124"/>
-                          </a:solidFill>
-                          <a:latin typeface="Google Sans Flex"/>
-                          <a:ea typeface="Google Sans Flex"/>
-                          <a:cs typeface="Google Sans Flex"/>
-                          <a:sym typeface="Google Sans Flex"/>
-                        </a:rPr>
-                        <a:t>0.983</a:t>
-                      </a:r>
-                    </a:p>
-                  </a:txBody>
-                  <a:tcPr marL="45720" marR="45720" marT="18288" marB="18288" anchor="ctr">
-                    <a:solidFill>
-                      <a:srgbClr val="F1F3F4"/>
-                    </a:solidFill>
-                  </a:tcPr>
-                </a:tc>
-                <a:tc>
-                  <a:txBody>
-                    <a:bodyPr/>
-                    <a:lstStyle/>
-                    <a:p>
-                      <a:pPr algn="ctr">
-                        <a:spcAft>
-                          <a:spcPts val="200"/>
-                        </a:spcAft>
-                      </a:pPr>
-                      <a:r>
-                        <a:rPr sz="850" b="0" i="0">
-                          <a:solidFill>
-                            <a:srgbClr val="202124"/>
-                          </a:solidFill>
-                          <a:latin typeface="Google Sans Flex"/>
-                          <a:ea typeface="Google Sans Flex"/>
-                          <a:cs typeface="Google Sans Flex"/>
-                          <a:sym typeface="Google Sans Flex"/>
-                        </a:rPr>
-                        <a:t>97.5%</a:t>
-                      </a:r>
-                    </a:p>
-                  </a:txBody>
-                  <a:tcPr marL="45720" marR="45720" marT="18288" marB="18288" anchor="ctr">
-                    <a:solidFill>
-                      <a:srgbClr val="F1F3F4"/>
-                    </a:solidFill>
-                  </a:tcPr>
-                </a:tc>
-                <a:tc>
-                  <a:txBody>
-                    <a:bodyPr/>
-                    <a:lstStyle/>
-                    <a:p>
-                      <a:pPr algn="ctr">
-                        <a:spcAft>
-                          <a:spcPts val="200"/>
-                        </a:spcAft>
-                      </a:pPr>
-                      <a:r>
-                        <a:rPr sz="850" b="0" i="0">
-                          <a:solidFill>
-                            <a:srgbClr val="202124"/>
-                          </a:solidFill>
-                          <a:latin typeface="Google Sans Flex"/>
-                          <a:ea typeface="Google Sans Flex"/>
-                          <a:cs typeface="Google Sans Flex"/>
-                          <a:sym typeface="Google Sans Flex"/>
-                        </a:rPr>
-                        <a:t>100%</a:t>
-                      </a:r>
-                    </a:p>
-                  </a:txBody>
-                  <a:tcPr marL="45720" marR="45720" marT="18288" marB="18288" anchor="ctr">
-                    <a:solidFill>
-                      <a:srgbClr val="F1F3F4"/>
-                    </a:solidFill>
-                  </a:tcPr>
-                </a:tc>
-                <a:tc>
-                  <a:txBody>
-                    <a:bodyPr/>
-                    <a:lstStyle/>
-                    <a:p>
-                      <a:pPr algn="ctr">
-                        <a:spcAft>
-                          <a:spcPts val="200"/>
-                        </a:spcAft>
-                      </a:pPr>
-                      <a:r>
-                        <a:rPr sz="850" b="0" i="0">
-                          <a:solidFill>
-                            <a:srgbClr val="202124"/>
-                          </a:solidFill>
-                          <a:latin typeface="Google Sans Flex"/>
-                          <a:ea typeface="Google Sans Flex"/>
-                          <a:cs typeface="Google Sans Flex"/>
-                          <a:sym typeface="Google Sans Flex"/>
-                        </a:rPr>
-                        <a:t>21.2% (23.0%)</a:t>
-                      </a:r>
-                    </a:p>
-                  </a:txBody>
-                  <a:tcPr marL="45720" marR="45720" marT="18288" marB="18288" anchor="ctr">
-                    <a:solidFill>
-                      <a:srgbClr val="F1F3F4"/>
-                    </a:solidFill>
-                  </a:tcPr>
-                </a:tc>
-                <a:tc>
-                  <a:txBody>
-                    <a:bodyPr/>
-                    <a:lstStyle/>
-                    <a:p>
-                      <a:pPr algn="ctr">
-                        <a:spcAft>
-                          <a:spcPts val="200"/>
-                        </a:spcAft>
-                      </a:pPr>
-                      <a:r>
-                        <a:rPr sz="850" b="0" i="0">
-                          <a:solidFill>
-                            <a:srgbClr val="202124"/>
-                          </a:solidFill>
-                          <a:latin typeface="Google Sans Flex"/>
-                          <a:ea typeface="Google Sans Flex"/>
-                          <a:cs typeface="Google Sans Flex"/>
-                          <a:sym typeface="Google Sans Flex"/>
-                        </a:rPr>
-                        <a:t>20.3% (23.9%)</a:t>
-                      </a:r>
-                    </a:p>
-                  </a:txBody>
-                  <a:tcPr marL="45720" marR="45720" marT="18288" marB="18288" anchor="ctr">
-                    <a:solidFill>
-                      <a:srgbClr val="F1F3F4"/>
-                    </a:solidFill>
-                  </a:tcPr>
-                </a:tc>
-                <a:tc>
-                  <a:txBody>
-                    <a:bodyPr/>
-                    <a:lstStyle/>
-                    <a:p>
-                      <a:pPr algn="ctr">
-                        <a:spcAft>
-                          <a:spcPts val="200"/>
-                        </a:spcAft>
-                      </a:pPr>
-                      <a:r>
-                        <a:rPr sz="850" b="0" i="0">
-                          <a:solidFill>
-                            <a:srgbClr val="202124"/>
-                          </a:solidFill>
-                          <a:latin typeface="Google Sans Flex"/>
-                          <a:ea typeface="Google Sans Flex"/>
-                          <a:cs typeface="Google Sans Flex"/>
-                          <a:sym typeface="Google Sans Flex"/>
-                        </a:rPr>
-                        <a:t>6/6 (6)</a:t>
-                      </a:r>
-                    </a:p>
-                  </a:txBody>
-                  <a:tcPr marL="45720" marR="45720" marT="18288" marB="18288" anchor="ctr">
-                    <a:solidFill>
-                      <a:srgbClr val="F1F3F4"/>
-                    </a:solidFill>
-                  </a:tcPr>
-                </a:tc>
-                <a:tc>
-                  <a:txBody>
-                    <a:bodyPr/>
-                    <a:lstStyle/>
-                    <a:p>
-                      <a:pPr algn="ctr">
-                        <a:spcAft>
-                          <a:spcPts val="200"/>
-                        </a:spcAft>
-                      </a:pPr>
-                      <a:r>
-                        <a:rPr sz="850" b="0" i="0">
-                          <a:solidFill>
-                            <a:srgbClr val="202124"/>
-                          </a:solidFill>
-                          <a:latin typeface="Google Sans Flex"/>
-                          <a:ea typeface="Google Sans Flex"/>
-                          <a:cs typeface="Google Sans Flex"/>
-                          <a:sym typeface="Google Sans Flex"/>
-                        </a:rPr>
-                        <a:t>14.8 s</a:t>
-                      </a:r>
-                    </a:p>
-                  </a:txBody>
-                  <a:tcPr marL="45720" marR="45720" marT="18288" marB="18288" anchor="ctr">
-                    <a:solidFill>
-                      <a:srgbClr val="F1F3F4"/>
-                    </a:solidFill>
-                  </a:tcPr>
-                </a:tc>
-              </a:tr>
-              <a:tr h="251460">
-                <a:tc>
-                  <a:txBody>
-                    <a:bodyPr/>
-                    <a:lstStyle/>
-                    <a:p>
-                      <a:pPr>
-                        <a:spcAft>
-                          <a:spcPts val="200"/>
-                        </a:spcAft>
-                      </a:pPr>
-                      <a:r>
-                        <a:rPr sz="850" b="1" i="0">
-                          <a:solidFill>
-                            <a:srgbClr val="202124"/>
-                          </a:solidFill>
-                          <a:latin typeface="Google Sans Flex"/>
-                          <a:ea typeface="Google Sans Flex"/>
-                          <a:cs typeface="Google Sans Flex"/>
-                          <a:sym typeface="Google Sans Flex"/>
-                        </a:rPr>
-                        <a:t>gpt-5.2</a:t>
-                      </a:r>
-                    </a:p>
-                  </a:txBody>
-                  <a:tcPr marL="45720" marR="45720" marT="18288" marB="18288" anchor="ctr">
-                    <a:solidFill>
-                      <a:srgbClr val="FFFFFF"/>
-                    </a:solidFill>
-                  </a:tcPr>
-                </a:tc>
-                <a:tc>
-                  <a:txBody>
-                    <a:bodyPr/>
-                    <a:lstStyle/>
-                    <a:p>
-                      <a:pPr algn="ctr">
-                        <a:spcAft>
-                          <a:spcPts val="200"/>
-                        </a:spcAft>
-                      </a:pPr>
-                      <a:r>
-                        <a:rPr sz="850" b="0" i="0">
-                          <a:solidFill>
-                            <a:srgbClr val="202124"/>
-                          </a:solidFill>
-                          <a:latin typeface="Google Sans Flex"/>
-                          <a:ea typeface="Google Sans Flex"/>
-                          <a:cs typeface="Google Sans Flex"/>
-                          <a:sym typeface="Google Sans Flex"/>
-                        </a:rPr>
-                        <a:t>0.983</a:t>
-                      </a:r>
-                    </a:p>
-                  </a:txBody>
-                  <a:tcPr marL="45720" marR="45720" marT="18288" marB="18288" anchor="ctr">
-                    <a:solidFill>
-                      <a:srgbClr val="FFFFFF"/>
-                    </a:solidFill>
-                  </a:tcPr>
-                </a:tc>
-                <a:tc>
-                  <a:txBody>
-                    <a:bodyPr/>
-                    <a:lstStyle/>
-                    <a:p>
-                      <a:pPr algn="ctr">
-                        <a:spcAft>
-                          <a:spcPts val="200"/>
-                        </a:spcAft>
-                      </a:pPr>
-                      <a:r>
-                        <a:rPr sz="850" b="0" i="0">
-                          <a:solidFill>
-                            <a:srgbClr val="202124"/>
-                          </a:solidFill>
-                          <a:latin typeface="Google Sans Flex"/>
-                          <a:ea typeface="Google Sans Flex"/>
-                          <a:cs typeface="Google Sans Flex"/>
-                          <a:sym typeface="Google Sans Flex"/>
-                        </a:rPr>
-                        <a:t>97.5%</a:t>
-                      </a:r>
-                    </a:p>
-                  </a:txBody>
-                  <a:tcPr marL="45720" marR="45720" marT="18288" marB="18288" anchor="ctr">
-                    <a:solidFill>
-                      <a:srgbClr val="FFFFFF"/>
-                    </a:solidFill>
-                  </a:tcPr>
-                </a:tc>
-                <a:tc>
-                  <a:txBody>
-                    <a:bodyPr/>
-                    <a:lstStyle/>
-                    <a:p>
-                      <a:pPr algn="ctr">
-                        <a:spcAft>
-                          <a:spcPts val="200"/>
-                        </a:spcAft>
-                      </a:pPr>
-                      <a:r>
-                        <a:rPr sz="850" b="0" i="0">
-                          <a:solidFill>
-                            <a:srgbClr val="202124"/>
-                          </a:solidFill>
-                          <a:latin typeface="Google Sans Flex"/>
-                          <a:ea typeface="Google Sans Flex"/>
-                          <a:cs typeface="Google Sans Flex"/>
-                          <a:sym typeface="Google Sans Flex"/>
-                        </a:rPr>
-                        <a:t>100%</a:t>
-                      </a:r>
-                    </a:p>
-                  </a:txBody>
-                  <a:tcPr marL="45720" marR="45720" marT="18288" marB="18288" anchor="ctr">
-                    <a:solidFill>
-                      <a:srgbClr val="FFFFFF"/>
-                    </a:solidFill>
-                  </a:tcPr>
-                </a:tc>
-                <a:tc>
-                  <a:txBody>
-                    <a:bodyPr/>
-                    <a:lstStyle/>
-                    <a:p>
-                      <a:pPr algn="ctr">
-                        <a:spcAft>
-                          <a:spcPts val="200"/>
-                        </a:spcAft>
-                      </a:pPr>
-                      <a:r>
-                        <a:rPr sz="850" b="0" i="0">
-                          <a:solidFill>
-                            <a:srgbClr val="202124"/>
-                          </a:solidFill>
-                          <a:latin typeface="Google Sans Flex"/>
-                          <a:ea typeface="Google Sans Flex"/>
-                          <a:cs typeface="Google Sans Flex"/>
-                          <a:sym typeface="Google Sans Flex"/>
-                        </a:rPr>
-                        <a:t>21.3% (23.0%)</a:t>
-                      </a:r>
-                    </a:p>
-                  </a:txBody>
-                  <a:tcPr marL="45720" marR="45720" marT="18288" marB="18288" anchor="ctr">
-                    <a:solidFill>
-                      <a:srgbClr val="FFFFFF"/>
-                    </a:solidFill>
-                  </a:tcPr>
-                </a:tc>
-                <a:tc>
-                  <a:txBody>
-                    <a:bodyPr/>
-                    <a:lstStyle/>
-                    <a:p>
-                      <a:pPr algn="ctr">
-                        <a:spcAft>
-                          <a:spcPts val="200"/>
-                        </a:spcAft>
-                      </a:pPr>
-                      <a:r>
-                        <a:rPr sz="850" b="0" i="0">
-                          <a:solidFill>
-                            <a:srgbClr val="202124"/>
-                          </a:solidFill>
-                          <a:latin typeface="Google Sans Flex"/>
-                          <a:ea typeface="Google Sans Flex"/>
-                          <a:cs typeface="Google Sans Flex"/>
-                          <a:sym typeface="Google Sans Flex"/>
-                        </a:rPr>
-                        <a:t>21.2% (23.9%)</a:t>
-                      </a:r>
-                    </a:p>
-                  </a:txBody>
-                  <a:tcPr marL="45720" marR="45720" marT="18288" marB="18288" anchor="ctr">
-                    <a:solidFill>
-                      <a:srgbClr val="FFFFFF"/>
-                    </a:solidFill>
-                  </a:tcPr>
-                </a:tc>
-                <a:tc>
-                  <a:txBody>
-                    <a:bodyPr/>
-                    <a:lstStyle/>
-                    <a:p>
-                      <a:pPr algn="ctr">
-                        <a:spcAft>
-                          <a:spcPts val="200"/>
-                        </a:spcAft>
-                      </a:pPr>
-                      <a:r>
-                        <a:rPr sz="850" b="0" i="0">
-                          <a:solidFill>
-                            <a:srgbClr val="202124"/>
-                          </a:solidFill>
-                          <a:latin typeface="Google Sans Flex"/>
-                          <a:ea typeface="Google Sans Flex"/>
-                          <a:cs typeface="Google Sans Flex"/>
-                          <a:sym typeface="Google Sans Flex"/>
-                        </a:rPr>
-                        <a:t>6/6 (6)</a:t>
-                      </a:r>
-                    </a:p>
-                  </a:txBody>
-                  <a:tcPr marL="45720" marR="45720" marT="18288" marB="18288" anchor="ctr">
-                    <a:solidFill>
-                      <a:srgbClr val="FFFFFF"/>
-                    </a:solidFill>
-                  </a:tcPr>
-                </a:tc>
-                <a:tc>
-                  <a:txBody>
-                    <a:bodyPr/>
-                    <a:lstStyle/>
-                    <a:p>
-                      <a:pPr algn="ctr">
-                        <a:spcAft>
-                          <a:spcPts val="200"/>
-                        </a:spcAft>
-                      </a:pPr>
-                      <a:r>
-                        <a:rPr sz="850" b="0" i="0">
-                          <a:solidFill>
-                            <a:srgbClr val="202124"/>
-                          </a:solidFill>
-                          <a:latin typeface="Google Sans Flex"/>
-                          <a:ea typeface="Google Sans Flex"/>
-                          <a:cs typeface="Google Sans Flex"/>
-                          <a:sym typeface="Google Sans Flex"/>
-                        </a:rPr>
-                        <a:t>8.4 s</a:t>
-                      </a:r>
-                    </a:p>
-                  </a:txBody>
-                  <a:tcPr marL="45720" marR="45720" marT="18288" marB="18288" anchor="ctr">
-                    <a:solidFill>
-                      <a:srgbClr val="FFFFFF"/>
-                    </a:solidFill>
-                  </a:tcPr>
-                </a:tc>
-              </a:tr>
-              <a:tr h="251460">
-                <a:tc>
-                  <a:txBody>
-                    <a:bodyPr/>
-                    <a:lstStyle/>
-                    <a:p>
-                      <a:pPr>
-                        <a:spcAft>
-                          <a:spcPts val="200"/>
-                        </a:spcAft>
-                      </a:pPr>
-                      <a:r>
-                        <a:rPr sz="850" b="1" i="0">
-                          <a:solidFill>
-                            <a:srgbClr val="202124"/>
-                          </a:solidFill>
-                          <a:latin typeface="Google Sans Flex"/>
-                          <a:ea typeface="Google Sans Flex"/>
-                          <a:cs typeface="Google Sans Flex"/>
-                          <a:sym typeface="Google Sans Flex"/>
-                        </a:rPr>
-                        <a:t>gpt-5.3-chat</a:t>
-                      </a:r>
-                    </a:p>
-                  </a:txBody>
-                  <a:tcPr marL="45720" marR="45720" marT="18288" marB="18288" anchor="ctr">
-                    <a:solidFill>
-                      <a:srgbClr val="F1F3F4"/>
-                    </a:solidFill>
-                  </a:tcPr>
-                </a:tc>
-                <a:tc>
-                  <a:txBody>
-                    <a:bodyPr/>
-                    <a:lstStyle/>
-                    <a:p>
-                      <a:pPr algn="ctr">
-                        <a:spcAft>
-                          <a:spcPts val="200"/>
-                        </a:spcAft>
-                      </a:pPr>
-                      <a:r>
-                        <a:rPr sz="850" b="0" i="0">
-                          <a:solidFill>
-                            <a:srgbClr val="202124"/>
-                          </a:solidFill>
-                          <a:latin typeface="Google Sans Flex"/>
-                          <a:ea typeface="Google Sans Flex"/>
-                          <a:cs typeface="Google Sans Flex"/>
-                          <a:sym typeface="Google Sans Flex"/>
-                        </a:rPr>
-                        <a:t>0.983</a:t>
-                      </a:r>
-                    </a:p>
-                  </a:txBody>
-                  <a:tcPr marL="45720" marR="45720" marT="18288" marB="18288" anchor="ctr">
-                    <a:solidFill>
-                      <a:srgbClr val="F1F3F4"/>
-                    </a:solidFill>
-                  </a:tcPr>
-                </a:tc>
-                <a:tc>
-                  <a:txBody>
-                    <a:bodyPr/>
-                    <a:lstStyle/>
-                    <a:p>
-                      <a:pPr algn="ctr">
-                        <a:spcAft>
-                          <a:spcPts val="200"/>
-                        </a:spcAft>
-                      </a:pPr>
-                      <a:r>
-                        <a:rPr sz="850" b="0" i="0">
-                          <a:solidFill>
-                            <a:srgbClr val="202124"/>
-                          </a:solidFill>
-                          <a:latin typeface="Google Sans Flex"/>
-                          <a:ea typeface="Google Sans Flex"/>
-                          <a:cs typeface="Google Sans Flex"/>
-                          <a:sym typeface="Google Sans Flex"/>
-                        </a:rPr>
-                        <a:t>97.5%</a:t>
-                      </a:r>
-                    </a:p>
-                  </a:txBody>
-                  <a:tcPr marL="45720" marR="45720" marT="18288" marB="18288" anchor="ctr">
-                    <a:solidFill>
-                      <a:srgbClr val="F1F3F4"/>
-                    </a:solidFill>
-                  </a:tcPr>
-                </a:tc>
-                <a:tc>
-                  <a:txBody>
-                    <a:bodyPr/>
-                    <a:lstStyle/>
-                    <a:p>
-                      <a:pPr algn="ctr">
-                        <a:spcAft>
-                          <a:spcPts val="200"/>
-                        </a:spcAft>
-                      </a:pPr>
-                      <a:r>
-                        <a:rPr sz="850" b="0" i="0">
-                          <a:solidFill>
-                            <a:srgbClr val="202124"/>
-                          </a:solidFill>
-                          <a:latin typeface="Google Sans Flex"/>
-                          <a:ea typeface="Google Sans Flex"/>
-                          <a:cs typeface="Google Sans Flex"/>
-                          <a:sym typeface="Google Sans Flex"/>
-                        </a:rPr>
-                        <a:t>100%</a:t>
-                      </a:r>
-                    </a:p>
-                  </a:txBody>
-                  <a:tcPr marL="45720" marR="45720" marT="18288" marB="18288" anchor="ctr">
-                    <a:solidFill>
-                      <a:srgbClr val="F1F3F4"/>
-                    </a:solidFill>
-                  </a:tcPr>
-                </a:tc>
-                <a:tc>
-                  <a:txBody>
-                    <a:bodyPr/>
-                    <a:lstStyle/>
-                    <a:p>
-                      <a:pPr algn="ctr">
-                        <a:spcAft>
-                          <a:spcPts val="200"/>
-                        </a:spcAft>
-                      </a:pPr>
-                      <a:r>
-                        <a:rPr sz="850" b="0" i="0">
-                          <a:solidFill>
-                            <a:srgbClr val="202124"/>
-                          </a:solidFill>
-                          <a:latin typeface="Google Sans Flex"/>
-                          <a:ea typeface="Google Sans Flex"/>
-                          <a:cs typeface="Google Sans Flex"/>
-                          <a:sym typeface="Google Sans Flex"/>
-                        </a:rPr>
-                        <a:t>21.5% (23.0%)</a:t>
-                      </a:r>
-                    </a:p>
-                  </a:txBody>
-                  <a:tcPr marL="45720" marR="45720" marT="18288" marB="18288" anchor="ctr">
-                    <a:solidFill>
-                      <a:srgbClr val="F1F3F4"/>
-                    </a:solidFill>
-                  </a:tcPr>
-                </a:tc>
-                <a:tc>
-                  <a:txBody>
-                    <a:bodyPr/>
-                    <a:lstStyle/>
-                    <a:p>
-                      <a:pPr algn="ctr">
-                        <a:spcAft>
-                          <a:spcPts val="200"/>
-                        </a:spcAft>
-                      </a:pPr>
-                      <a:r>
-                        <a:rPr sz="850" b="0" i="0">
-                          <a:solidFill>
-                            <a:srgbClr val="202124"/>
-                          </a:solidFill>
-                          <a:latin typeface="Google Sans Flex"/>
-                          <a:ea typeface="Google Sans Flex"/>
-                          <a:cs typeface="Google Sans Flex"/>
-                          <a:sym typeface="Google Sans Flex"/>
-                        </a:rPr>
-                        <a:t>21.6% (23.9%)</a:t>
-                      </a:r>
-                    </a:p>
-                  </a:txBody>
-                  <a:tcPr marL="45720" marR="45720" marT="18288" marB="18288" anchor="ctr">
-                    <a:solidFill>
-                      <a:srgbClr val="F1F3F4"/>
-                    </a:solidFill>
-                  </a:tcPr>
-                </a:tc>
-                <a:tc>
-                  <a:txBody>
-                    <a:bodyPr/>
-                    <a:lstStyle/>
-                    <a:p>
-                      <a:pPr algn="ctr">
-                        <a:spcAft>
-                          <a:spcPts val="200"/>
-                        </a:spcAft>
-                      </a:pPr>
-                      <a:r>
-                        <a:rPr sz="850" b="0" i="0">
-                          <a:solidFill>
-                            <a:srgbClr val="202124"/>
-                          </a:solidFill>
-                          <a:latin typeface="Google Sans Flex"/>
-                          <a:ea typeface="Google Sans Flex"/>
-                          <a:cs typeface="Google Sans Flex"/>
-                          <a:sym typeface="Google Sans Flex"/>
-                        </a:rPr>
-                        <a:t>0/6 (0)</a:t>
-                      </a:r>
-                    </a:p>
-                  </a:txBody>
-                  <a:tcPr marL="45720" marR="45720" marT="18288" marB="18288" anchor="ctr">
-                    <a:solidFill>
-                      <a:srgbClr val="F1F3F4"/>
-                    </a:solidFill>
-                  </a:tcPr>
-                </a:tc>
-                <a:tc>
-                  <a:txBody>
-                    <a:bodyPr/>
-                    <a:lstStyle/>
-                    <a:p>
-                      <a:pPr algn="ctr">
-                        <a:spcAft>
-                          <a:spcPts val="200"/>
-                        </a:spcAft>
-                      </a:pPr>
-                      <a:r>
-                        <a:rPr sz="850" b="0" i="0">
-                          <a:solidFill>
-                            <a:srgbClr val="202124"/>
-                          </a:solidFill>
-                          <a:latin typeface="Google Sans Flex"/>
-                          <a:ea typeface="Google Sans Flex"/>
-                          <a:cs typeface="Google Sans Flex"/>
-                          <a:sym typeface="Google Sans Flex"/>
-                        </a:rPr>
-                        <a:t>–</a:t>
-                      </a:r>
-                    </a:p>
-                  </a:txBody>
-                  <a:tcPr marL="45720" marR="45720" marT="18288" marB="18288" anchor="ctr">
-                    <a:solidFill>
-                      <a:srgbClr val="F1F3F4"/>
-                    </a:solidFill>
-                  </a:tcPr>
-                </a:tc>
-              </a:tr>
-              <a:tr h="251460">
-                <a:tc>
-                  <a:txBody>
-                    <a:bodyPr/>
-                    <a:lstStyle/>
-                    <a:p>
-                      <a:pPr>
-                        <a:spcAft>
-                          <a:spcPts val="200"/>
-                        </a:spcAft>
-                      </a:pPr>
-                      <a:r>
-                        <a:rPr sz="850" b="1" i="0">
-                          <a:solidFill>
-                            <a:srgbClr val="202124"/>
-                          </a:solidFill>
-                          <a:latin typeface="Google Sans Flex"/>
-                          <a:ea typeface="Google Sans Flex"/>
-                          <a:cs typeface="Google Sans Flex"/>
-                          <a:sym typeface="Google Sans Flex"/>
-                        </a:rPr>
-                        <a:t>gpt-5.4-mini</a:t>
-                      </a:r>
-                    </a:p>
-                  </a:txBody>
-                  <a:tcPr marL="45720" marR="45720" marT="18288" marB="18288" anchor="ctr">
-                    <a:solidFill>
-                      <a:srgbClr val="FFFFFF"/>
-                    </a:solidFill>
-                  </a:tcPr>
-                </a:tc>
-                <a:tc>
-                  <a:txBody>
-                    <a:bodyPr/>
-                    <a:lstStyle/>
-                    <a:p>
-                      <a:pPr algn="ctr">
-                        <a:spcAft>
-                          <a:spcPts val="200"/>
-                        </a:spcAft>
-                      </a:pPr>
-                      <a:r>
-                        <a:rPr sz="850" b="0" i="0">
-                          <a:solidFill>
-                            <a:srgbClr val="202124"/>
-                          </a:solidFill>
-                          <a:latin typeface="Google Sans Flex"/>
-                          <a:ea typeface="Google Sans Flex"/>
-                          <a:cs typeface="Google Sans Flex"/>
-                          <a:sym typeface="Google Sans Flex"/>
-                        </a:rPr>
-                        <a:t>0.968</a:t>
-                      </a:r>
-                    </a:p>
-                  </a:txBody>
-                  <a:tcPr marL="45720" marR="45720" marT="18288" marB="18288" anchor="ctr">
-                    <a:solidFill>
-                      <a:srgbClr val="FFFFFF"/>
-                    </a:solidFill>
-                  </a:tcPr>
-                </a:tc>
-                <a:tc>
-                  <a:txBody>
-                    <a:bodyPr/>
-                    <a:lstStyle/>
-                    <a:p>
-                      <a:pPr algn="ctr">
-                        <a:spcAft>
-                          <a:spcPts val="200"/>
-                        </a:spcAft>
-                      </a:pPr>
-                      <a:r>
-                        <a:rPr sz="850" b="0" i="0">
-                          <a:solidFill>
-                            <a:srgbClr val="202124"/>
-                          </a:solidFill>
-                          <a:latin typeface="Google Sans Flex"/>
-                          <a:ea typeface="Google Sans Flex"/>
-                          <a:cs typeface="Google Sans Flex"/>
-                          <a:sym typeface="Google Sans Flex"/>
-                        </a:rPr>
-                        <a:t>95.0%</a:t>
-                      </a:r>
-                    </a:p>
-                  </a:txBody>
-                  <a:tcPr marL="45720" marR="45720" marT="18288" marB="18288" anchor="ctr">
-                    <a:solidFill>
-                      <a:srgbClr val="FFFFFF"/>
-                    </a:solidFill>
-                  </a:tcPr>
-                </a:tc>
-                <a:tc>
-                  <a:txBody>
-                    <a:bodyPr/>
-                    <a:lstStyle/>
-                    <a:p>
-                      <a:pPr algn="ctr">
-                        <a:spcAft>
-                          <a:spcPts val="200"/>
-                        </a:spcAft>
-                      </a:pPr>
-                      <a:r>
-                        <a:rPr sz="850" b="0" i="0">
-                          <a:solidFill>
-                            <a:srgbClr val="202124"/>
-                          </a:solidFill>
-                          <a:latin typeface="Google Sans Flex"/>
-                          <a:ea typeface="Google Sans Flex"/>
-                          <a:cs typeface="Google Sans Flex"/>
-                          <a:sym typeface="Google Sans Flex"/>
-                        </a:rPr>
-                        <a:t>100%</a:t>
-                      </a:r>
-                    </a:p>
-                  </a:txBody>
-                  <a:tcPr marL="45720" marR="45720" marT="18288" marB="18288" anchor="ctr">
-                    <a:solidFill>
-                      <a:srgbClr val="FFFFFF"/>
-                    </a:solidFill>
-                  </a:tcPr>
-                </a:tc>
-                <a:tc>
-                  <a:txBody>
-                    <a:bodyPr/>
-                    <a:lstStyle/>
-                    <a:p>
-                      <a:pPr algn="ctr">
-                        <a:spcAft>
-                          <a:spcPts val="200"/>
-                        </a:spcAft>
-                      </a:pPr>
-                      <a:r>
-                        <a:rPr sz="850" b="0" i="0">
-                          <a:solidFill>
-                            <a:srgbClr val="202124"/>
-                          </a:solidFill>
-                          <a:latin typeface="Google Sans Flex"/>
-                          <a:ea typeface="Google Sans Flex"/>
-                          <a:cs typeface="Google Sans Flex"/>
-                          <a:sym typeface="Google Sans Flex"/>
-                        </a:rPr>
-                        <a:t>21.5% (23.1%)</a:t>
-                      </a:r>
-                    </a:p>
-                  </a:txBody>
-                  <a:tcPr marL="45720" marR="45720" marT="18288" marB="18288" anchor="ctr">
-                    <a:solidFill>
-                      <a:srgbClr val="FFFFFF"/>
-                    </a:solidFill>
-                  </a:tcPr>
-                </a:tc>
-                <a:tc>
-                  <a:txBody>
-                    <a:bodyPr/>
-                    <a:lstStyle/>
-                    <a:p>
-                      <a:pPr algn="ctr">
-                        <a:spcAft>
-                          <a:spcPts val="200"/>
-                        </a:spcAft>
-                      </a:pPr>
-                      <a:r>
-                        <a:rPr sz="850" b="0" i="0">
-                          <a:solidFill>
-                            <a:srgbClr val="202124"/>
-                          </a:solidFill>
-                          <a:latin typeface="Google Sans Flex"/>
-                          <a:ea typeface="Google Sans Flex"/>
-                          <a:cs typeface="Google Sans Flex"/>
-                          <a:sym typeface="Google Sans Flex"/>
-                        </a:rPr>
-                        <a:t>21.9% (24.2%)</a:t>
-                      </a:r>
-                    </a:p>
-                  </a:txBody>
-                  <a:tcPr marL="45720" marR="45720" marT="18288" marB="18288" anchor="ctr">
-                    <a:solidFill>
-                      <a:srgbClr val="FFFFFF"/>
-                    </a:solidFill>
-                  </a:tcPr>
-                </a:tc>
-                <a:tc>
-                  <a:txBody>
-                    <a:bodyPr/>
-                    <a:lstStyle/>
-                    <a:p>
-                      <a:pPr algn="ctr">
-                        <a:spcAft>
-                          <a:spcPts val="200"/>
-                        </a:spcAft>
-                      </a:pPr>
-                      <a:r>
-                        <a:rPr sz="850" b="0" i="0">
-                          <a:solidFill>
-                            <a:srgbClr val="202124"/>
-                          </a:solidFill>
-                          <a:latin typeface="Google Sans Flex"/>
-                          <a:ea typeface="Google Sans Flex"/>
-                          <a:cs typeface="Google Sans Flex"/>
-                          <a:sym typeface="Google Sans Flex"/>
-                        </a:rPr>
-                        <a:t>6/6 (5)</a:t>
-                      </a:r>
-                    </a:p>
-                  </a:txBody>
-                  <a:tcPr marL="45720" marR="45720" marT="18288" marB="18288" anchor="ctr">
-                    <a:solidFill>
-                      <a:srgbClr val="FFFFFF"/>
-                    </a:solidFill>
-                  </a:tcPr>
-                </a:tc>
-                <a:tc>
-                  <a:txBody>
-                    <a:bodyPr/>
-                    <a:lstStyle/>
-                    <a:p>
-                      <a:pPr algn="ctr">
-                        <a:spcAft>
-                          <a:spcPts val="200"/>
-                        </a:spcAft>
-                      </a:pPr>
-                      <a:r>
-                        <a:rPr sz="850" b="0" i="0">
-                          <a:solidFill>
-                            <a:srgbClr val="202124"/>
-                          </a:solidFill>
-                          <a:latin typeface="Google Sans Flex"/>
-                          <a:ea typeface="Google Sans Flex"/>
-                          <a:cs typeface="Google Sans Flex"/>
-                          <a:sym typeface="Google Sans Flex"/>
-                        </a:rPr>
-                        <a:t>3.9 s</a:t>
-                      </a:r>
-                    </a:p>
-                  </a:txBody>
-                  <a:tcPr marL="45720" marR="45720" marT="18288" marB="18288" anchor="ctr">
+                  <a:tcPr marL="64008" marR="64008" marT="27432" marB="27432" anchor="ctr">
                     <a:solidFill>
                       <a:srgbClr val="FFFFFF"/>
                     </a:solidFill>
@@ -14763,8 +12587,8 @@
         </p:nvSpPr>
         <p:spPr>
           <a:xfrm>
-            <a:off x="320040" y="4224528"/>
-            <a:ext cx="8503920" cy="685800"/>
+            <a:off x="320040" y="4160520"/>
+            <a:ext cx="8503920" cy="731520"/>
           </a:xfrm>
           <a:prstGeom prst="rect">
             <a:avLst/>
@@ -14792,7 +12616,7 @@
                 <a:cs typeface="Google Sans Flex"/>
                 <a:sym typeface="Google Sans Flex"/>
               </a:rPr>
-              <a:t>Every model beats the statistical forecast</a:t>
+              <a:t>Why gemini-3.5-flash-lite:</a:t>
             </a:r>
             <a:r>
               <a:rPr sz="850" b="0" i="0">
@@ -14804,7 +12628,7 @@
                 <a:cs typeface="Google Sans Flex"/>
                 <a:sym typeface="Google Sans Flex"/>
               </a:rPr>
-              <a:t> (by 1.7–4.9 pp on text-only series); extraction is near saturated (38–40 of 40 messages). gemini-3.5-flash-lite (Gemini API) is the default: as fast as the quickest model and 6 / 6 assistant answers checked; a stronger model could run the overnight forecasts.</a:t>
+              <a:t> fast (median assistant answer 4.0 s, tool calls included), every output passes the validators, and it fits the AI Studio free tier (15 requests a minute). Every call is logged with its status; a failed check falls back to a labelled non-LLM result.</a:t>
             </a:r>
           </a:p>
           <a:p>
@@ -14814,7 +12638,7 @@
               </a:spcAft>
             </a:pPr>
             <a:r>
-              <a:rPr sz="850" b="0" i="0">
+              <a:rPr sz="850" b="1" i="0">
                 <a:solidFill>
                   <a:srgbClr val="5F6368"/>
                 </a:solidFill>
@@ -14823,7 +12647,19 @@
                 <a:cs typeface="Google Sans Flex"/>
                 <a:sym typeface="Google Sans Flex"/>
               </a:rPr>
-              <a:t>Signal value kept: share of the gold-signal plan gain kept by plans built from the model's signals (found and fixed an end-date bug: −17% → 100%). gpt-5.3-chat's gateway rejects tool calls. Larger Gemini models need a paid key (free tier: 20 requests a day).</a:t>
+              <a:t>Next:</a:t>
+            </a:r>
+            <a:r>
+              <a:rPr sz="850" b="0" i="0">
+                <a:solidFill>
+                  <a:srgbClr val="5F6368"/>
+                </a:solidFill>
+                <a:latin typeface="Google Sans Flex"/>
+                <a:ea typeface="Google Sans Flex"/>
+                <a:cs typeface="Google Sans Flex"/>
+                <a:sym typeface="Google Sans Flex"/>
+              </a:rPr>
+              <a:t> larger Gemini models (gemini-3.8-flash) on a billing-enabled key; the free tier allows 20 requests a day and one evaluation run needs about 130. Small sets: 40 messages, 75 forecasts, 6 questions, so gaps under about 0.5 pp WAPE are noise.</a:t>
             </a:r>
           </a:p>
         </p:txBody>
@@ -28081,7 +25917,7 @@
                 <a:cs typeface="Google Sans Flex"/>
                 <a:sym typeface="Google Sans Flex"/>
               </a:rPr>
-              <a:t>deploy.sh (no local Docker)  ➜  </a:t>
+              <a:t>deploy.sh (gcloud CLI)  ➜  </a:t>
             </a:r>
             <a:r>
               <a:rPr sz="750" b="1" i="0">
@@ -28991,7 +26827,7 @@
                           <a:cs typeface="Google Sans Flex"/>
                           <a:sym typeface="Google Sans Flex"/>
                         </a:rPr>
-                        <a:t>pytest (160 tests), oxlint, strict TypeScript, LLM call log</a:t>
+                        <a:t>pytest (157 tests), oxlint, strict TypeScript, LLM call log</a:t>
                       </a:r>
                     </a:p>
                   </a:txBody>

--- a/docs/Inventory_Rescue_AI_Builder_Cup.pptx
+++ b/docs/Inventory_Rescue_AI_Builder_Cup.pptx
@@ -8712,7 +8712,7 @@
                 <a:cs typeface="Google Sans Flex Medium"/>
                 <a:sym typeface="Google Sans Flex Medium"/>
               </a:rPr>
-              <a:t>Snapshots of the prototype</a:t>
+              <a:t>Snapshots of the prototype: the Simple view</a:t>
             </a:r>
             <a:endParaRPr sz="1600">
               <a:latin typeface="Google Sans Flex Medium"/>
@@ -8725,7 +8725,7 @@
       </p:sp>
       <p:pic>
         <p:nvPicPr>
-          <p:cNvPr id="136" name="Picture 135" descr="crop_0_plan.png"/>
+          <p:cNvPr id="136" name="Picture 135" descr="crop_0_s_home.png"/>
           <p:cNvPicPr>
             <a:picLocks noChangeAspect="1"/>
           </p:cNvPicPr>
@@ -8739,8 +8739,8 @@
         </p:blipFill>
         <p:spPr>
           <a:xfrm>
-            <a:off x="320040" y="1291414"/>
-            <a:ext cx="4160520" cy="1477107"/>
+            <a:off x="428693" y="1115568"/>
+            <a:ext cx="1771512" cy="3063240"/>
           </a:xfrm>
           <a:prstGeom prst="rect">
             <a:avLst/>
@@ -8760,8 +8760,8 @@
         </p:nvSpPr>
         <p:spPr>
           <a:xfrm>
-            <a:off x="320040" y="2907791"/>
-            <a:ext cx="4160520" cy="201168"/>
+            <a:off x="320040" y="4233672"/>
+            <a:ext cx="1988820" cy="365760"/>
           </a:xfrm>
           <a:prstGeom prst="rect">
             <a:avLst/>
@@ -8774,13 +8774,13 @@
           </a:bodyPr>
           <a:lstStyle/>
           <a:p>
-            <a:pPr>
+            <a:pPr algn="ctr">
               <a:spcAft>
                 <a:spcPts val="200"/>
               </a:spcAft>
             </a:pPr>
             <a:r>
-              <a:rPr sz="800" b="0" i="0">
+              <a:rPr sz="850" b="0" i="0">
                 <a:solidFill>
                   <a:srgbClr val="5F6368"/>
                 </a:solidFill>
@@ -8789,14 +8789,58 @@
                 <a:cs typeface="Google Sans Flex"/>
                 <a:sym typeface="Google Sans Flex"/>
               </a:rPr>
-              <a:t>Plan options: the same ₹10 lakh four ways, tested in calm and shocked futures</a:t>
-            </a:r>
+              <a:t>1. Three big buttons. Nothing else to learn.</a:t>
+            </a:r>
+          </a:p>
+        </p:txBody>
+      </p:sp>
+      <p:sp>
+        <p:nvSpPr>
+          <p:cNvPr id="138" name="Right Arrow 137"/>
+          <p:cNvSpPr/>
+          <p:nvPr/>
+        </p:nvSpPr>
+        <p:spPr>
+          <a:xfrm>
+            <a:off x="2336292" y="2574036"/>
+            <a:ext cx="128016" cy="146304"/>
+          </a:xfrm>
+          <a:prstGeom prst="rightArrow">
+            <a:avLst/>
+          </a:prstGeom>
+          <a:solidFill>
+            <a:srgbClr val="9AA0A6"/>
+          </a:solidFill>
+          <a:ln>
+            <a:noFill/>
+          </a:ln>
+          <a:effectLst/>
+        </p:spPr>
+        <p:style>
+          <a:lnRef idx="1">
+            <a:schemeClr val="accent1"/>
+          </a:lnRef>
+          <a:fillRef idx="3">
+            <a:schemeClr val="accent1"/>
+          </a:fillRef>
+          <a:effectRef idx="2">
+            <a:schemeClr val="accent1"/>
+          </a:effectRef>
+          <a:fontRef idx="minor">
+            <a:schemeClr val="lt1"/>
+          </a:fontRef>
+        </p:style>
+        <p:txBody>
+          <a:bodyPr rtlCol="0" anchor="t" wrap="square" lIns="73152" rIns="73152" tIns="73152" bIns="73152"/>
+          <a:lstStyle/>
+          <a:p>
+            <a:pPr algn="ctr"/>
           </a:p>
         </p:txBody>
       </p:sp>
       <p:pic>
         <p:nvPicPr>
-          <p:cNvPr id="138" name="Picture 137" descr="crop_1_assistant.png"/>
+          <p:cNvPr id="139" name="Picture 138" descr="crop_1_s_plan.png"/>
           <p:cNvPicPr>
             <a:picLocks noChangeAspect="1"/>
           </p:cNvPicPr>
@@ -8810,8 +8854,8 @@
         </p:blipFill>
         <p:spPr>
           <a:xfrm>
-            <a:off x="4663440" y="1193875"/>
-            <a:ext cx="4160520" cy="1672185"/>
+            <a:off x="2600393" y="1115568"/>
+            <a:ext cx="1771512" cy="3063240"/>
           </a:xfrm>
           <a:prstGeom prst="rect">
             <a:avLst/>
@@ -8825,14 +8869,14 @@
       </p:pic>
       <p:sp>
         <p:nvSpPr>
-          <p:cNvPr id="139" name="TextBox 138"/>
+          <p:cNvPr id="140" name="TextBox 139"/>
           <p:cNvSpPr txBox="1"/>
           <p:nvPr/>
         </p:nvSpPr>
         <p:spPr>
           <a:xfrm>
-            <a:off x="4663440" y="2907791"/>
-            <a:ext cx="4160520" cy="201168"/>
+            <a:off x="2491740" y="4233672"/>
+            <a:ext cx="1988820" cy="365760"/>
           </a:xfrm>
           <a:prstGeom prst="rect">
             <a:avLst/>
@@ -8845,13 +8889,13 @@
           </a:bodyPr>
           <a:lstStyle/>
           <a:p>
-            <a:pPr>
+            <a:pPr algn="ctr">
               <a:spcAft>
                 <a:spcPts val="200"/>
               </a:spcAft>
             </a:pPr>
             <a:r>
-              <a:rPr sz="800" b="0" i="0">
+              <a:rPr sz="850" b="0" i="0">
                 <a:solidFill>
                   <a:srgbClr val="5F6368"/>
                 </a:solidFill>
@@ -8860,14 +8904,58 @@
                 <a:cs typeface="Google Sans Flex"/>
                 <a:sym typeface="Google Sans Flex"/>
               </a:rPr>
-              <a:t>Planning assistant: “10 lakh vs 15 lakh?” answered from a planner tool; 34 values checked</a:t>
-            </a:r>
+              <a:t>2. Type a budget; choose how to buy and how much to keep aside.</a:t>
+            </a:r>
+          </a:p>
+        </p:txBody>
+      </p:sp>
+      <p:sp>
+        <p:nvSpPr>
+          <p:cNvPr id="141" name="Right Arrow 140"/>
+          <p:cNvSpPr/>
+          <p:nvPr/>
+        </p:nvSpPr>
+        <p:spPr>
+          <a:xfrm>
+            <a:off x="4507992" y="2574036"/>
+            <a:ext cx="128016" cy="146304"/>
+          </a:xfrm>
+          <a:prstGeom prst="rightArrow">
+            <a:avLst/>
+          </a:prstGeom>
+          <a:solidFill>
+            <a:srgbClr val="9AA0A6"/>
+          </a:solidFill>
+          <a:ln>
+            <a:noFill/>
+          </a:ln>
+          <a:effectLst/>
+        </p:spPr>
+        <p:style>
+          <a:lnRef idx="1">
+            <a:schemeClr val="accent1"/>
+          </a:lnRef>
+          <a:fillRef idx="3">
+            <a:schemeClr val="accent1"/>
+          </a:fillRef>
+          <a:effectRef idx="2">
+            <a:schemeClr val="accent1"/>
+          </a:effectRef>
+          <a:fontRef idx="minor">
+            <a:schemeClr val="lt1"/>
+          </a:fontRef>
+        </p:style>
+        <p:txBody>
+          <a:bodyPr rtlCol="0" anchor="t" wrap="square" lIns="73152" rIns="73152" tIns="73152" bIns="73152"/>
+          <a:lstStyle/>
+          <a:p>
+            <a:pPr algn="ctr"/>
           </a:p>
         </p:txBody>
       </p:sp>
       <p:pic>
         <p:nvPicPr>
-          <p:cNvPr id="140" name="Picture 139" descr="crop_2_simple.png"/>
+          <p:cNvPr id="142" name="Picture 141" descr="crop_2_s_plan.png"/>
           <p:cNvPicPr>
             <a:picLocks noChangeAspect="1"/>
           </p:cNvPicPr>
@@ -8881,8 +8969,8 @@
         </p:blipFill>
         <p:spPr>
           <a:xfrm>
-            <a:off x="320040" y="3157038"/>
-            <a:ext cx="4160520" cy="1549763"/>
+            <a:off x="4772093" y="1115568"/>
+            <a:ext cx="1771512" cy="3063240"/>
           </a:xfrm>
           <a:prstGeom prst="rect">
             <a:avLst/>
@@ -8896,14 +8984,14 @@
       </p:pic>
       <p:sp>
         <p:nvSpPr>
-          <p:cNvPr id="141" name="TextBox 140"/>
+          <p:cNvPr id="143" name="TextBox 142"/>
           <p:cNvSpPr txBox="1"/>
           <p:nvPr/>
         </p:nvSpPr>
         <p:spPr>
           <a:xfrm>
-            <a:off x="320040" y="4809744"/>
-            <a:ext cx="4160520" cy="201168"/>
+            <a:off x="4663440" y="4233672"/>
+            <a:ext cx="1988820" cy="365760"/>
           </a:xfrm>
           <a:prstGeom prst="rect">
             <a:avLst/>
@@ -8916,13 +9004,13 @@
           </a:bodyPr>
           <a:lstStyle/>
           <a:p>
-            <a:pPr>
+            <a:pPr algn="ctr">
               <a:spcAft>
                 <a:spcPts val="200"/>
               </a:spcAft>
             </a:pPr>
             <a:r>
-              <a:rPr sz="800" b="0" i="0">
+              <a:rPr sz="850" b="0" i="0">
                 <a:solidFill>
                   <a:srgbClr val="5F6368"/>
                 </a:solidFill>
@@ -8931,14 +9019,58 @@
                 <a:cs typeface="Google Sans Flex"/>
                 <a:sym typeface="Google Sans Flex"/>
               </a:rPr>
-              <a:t>Simple view (default): three big buttons; budget, then how to buy</a:t>
-            </a:r>
+              <a:t>3. A plain to-do list: what to buy, by when, and why.</a:t>
+            </a:r>
+          </a:p>
+        </p:txBody>
+      </p:sp>
+      <p:sp>
+        <p:nvSpPr>
+          <p:cNvPr id="144" name="Right Arrow 143"/>
+          <p:cNvSpPr/>
+          <p:nvPr/>
+        </p:nvSpPr>
+        <p:spPr>
+          <a:xfrm>
+            <a:off x="6679692" y="2574036"/>
+            <a:ext cx="128016" cy="146304"/>
+          </a:xfrm>
+          <a:prstGeom prst="rightArrow">
+            <a:avLst/>
+          </a:prstGeom>
+          <a:solidFill>
+            <a:srgbClr val="9AA0A6"/>
+          </a:solidFill>
+          <a:ln>
+            <a:noFill/>
+          </a:ln>
+          <a:effectLst/>
+        </p:spPr>
+        <p:style>
+          <a:lnRef idx="1">
+            <a:schemeClr val="accent1"/>
+          </a:lnRef>
+          <a:fillRef idx="3">
+            <a:schemeClr val="accent1"/>
+          </a:fillRef>
+          <a:effectRef idx="2">
+            <a:schemeClr val="accent1"/>
+          </a:effectRef>
+          <a:fontRef idx="minor">
+            <a:schemeClr val="lt1"/>
+          </a:fontRef>
+        </p:style>
+        <p:txBody>
+          <a:bodyPr rtlCol="0" anchor="t" wrap="square" lIns="73152" rIns="73152" tIns="73152" bIns="73152"/>
+          <a:lstStyle/>
+          <a:p>
+            <a:pPr algn="ctr"/>
           </a:p>
         </p:txBody>
       </p:sp>
       <p:pic>
         <p:nvPicPr>
-          <p:cNvPr id="142" name="Picture 141" descr="crop_3_plan.png"/>
+          <p:cNvPr id="145" name="Picture 144" descr="crop_3_s_ask.png"/>
           <p:cNvPicPr>
             <a:picLocks noChangeAspect="1"/>
           </p:cNvPicPr>
@@ -8952,8 +9084,8 @@
         </p:blipFill>
         <p:spPr>
           <a:xfrm>
-            <a:off x="4663440" y="3531870"/>
-            <a:ext cx="4160520" cy="800099"/>
+            <a:off x="6943793" y="1115568"/>
+            <a:ext cx="1771512" cy="3063240"/>
           </a:xfrm>
           <a:prstGeom prst="rect">
             <a:avLst/>
@@ -8967,14 +9099,14 @@
       </p:pic>
       <p:sp>
         <p:nvSpPr>
-          <p:cNvPr id="143" name="TextBox 142"/>
+          <p:cNvPr id="146" name="TextBox 145"/>
           <p:cNvSpPr txBox="1"/>
           <p:nvPr/>
         </p:nvSpPr>
         <p:spPr>
           <a:xfrm>
-            <a:off x="4663440" y="4809744"/>
-            <a:ext cx="4160520" cy="201168"/>
+            <a:off x="6835140" y="4233672"/>
+            <a:ext cx="1988820" cy="365760"/>
           </a:xfrm>
           <a:prstGeom prst="rect">
             <a:avLst/>
@@ -8987,13 +9119,13 @@
           </a:bodyPr>
           <a:lstStyle/>
           <a:p>
-            <a:pPr>
+            <a:pPr algn="ctr">
               <a:spcAft>
                 <a:spcPts val="200"/>
               </a:spcAft>
             </a:pPr>
             <a:r>
-              <a:rPr sz="800" b="0" i="0">
+              <a:rPr sz="850" b="0" i="0">
                 <a:solidFill>
                   <a:srgbClr val="5F6368"/>
                 </a:solidFill>
@@ -9002,7 +9134,49 @@
                 <a:cs typeface="Google Sans Flex"/>
                 <a:sym typeface="Google Sans Flex"/>
               </a:rPr>
-              <a:t>Robustness: 120 simulated futures vs reorder rules; weekly re-planning</a:t>
+              <a:t>4. Ask in your own words; Gemini answers from checked numbers.</a:t>
+            </a:r>
+          </a:p>
+        </p:txBody>
+      </p:sp>
+      <p:sp>
+        <p:nvSpPr>
+          <p:cNvPr id="147" name="TextBox 146"/>
+          <p:cNvSpPr txBox="1"/>
+          <p:nvPr/>
+        </p:nvSpPr>
+        <p:spPr>
+          <a:xfrm>
+            <a:off x="320040" y="4681728"/>
+            <a:ext cx="8503920" cy="228600"/>
+          </a:xfrm>
+          <a:prstGeom prst="rect">
+            <a:avLst/>
+          </a:prstGeom>
+          <a:noFill/>
+        </p:spPr>
+        <p:txBody>
+          <a:bodyPr wrap="square" anchor="t" lIns="0" rIns="0" tIns="0" bIns="0">
+            <a:spAutoFit/>
+          </a:bodyPr>
+          <a:lstStyle/>
+          <a:p>
+            <a:pPr algn="ctr">
+              <a:spcAft>
+                <a:spcPts val="200"/>
+              </a:spcAft>
+            </a:pPr>
+            <a:r>
+              <a:rPr sz="800" b="0" i="0">
+                <a:solidFill>
+                  <a:srgbClr val="5F6368"/>
+                </a:solidFill>
+                <a:latin typeface="Google Sans Flex"/>
+                <a:ea typeface="Google Sans Flex"/>
+                <a:cs typeface="Google Sans Flex"/>
+                <a:sym typeface="Google Sans Flex"/>
+              </a:rPr>
+              <a:t>Default screen for first-time users. Charts, robustness tests and every number behind the plan stay one click away in the Advanced view.</a:t>
             </a:r>
           </a:p>
         </p:txBody>

--- a/docs/Inventory_Rescue_AI_Builder_Cup.pptx
+++ b/docs/Inventory_Rescue_AI_Builder_Cup.pptx
@@ -9442,7 +9442,7 @@
                 <a:cs typeface="Google Sans Flex"/>
                 <a:sym typeface="Google Sans Flex"/>
               </a:rPr>
-              <a:t> 157 automated tests pass · 30 / 30 seed forecasts passed LLM validation · every LLM call logged with its status.</a:t>
+              <a:t> 158 automated tests pass · 30 / 30 seed forecasts passed LLM validation · every LLM call logged with its status.</a:t>
             </a:r>
           </a:p>
         </p:txBody>
@@ -25447,7 +25447,7 @@
                 <a:cs typeface="Google Sans Flex"/>
                 <a:sym typeface="Google Sans Flex"/>
               </a:rPr>
-              <a:t>10 tools, numbers checked</a:t>
+              <a:t>11 tools, numbers checked</a:t>
             </a:r>
           </a:p>
         </p:txBody>
@@ -27001,7 +27001,7 @@
                           <a:cs typeface="Google Sans Flex"/>
                           <a:sym typeface="Google Sans Flex"/>
                         </a:rPr>
-                        <a:t>pytest (157 tests), oxlint, strict TypeScript, LLM call log</a:t>
+                        <a:t>pytest (158 tests), oxlint, strict TypeScript, LLM call log</a:t>
                       </a:r>
                     </a:p>
                   </a:txBody>
